--- a/docs/AI_指導老師討論簡報_2026-10-07.pptx
+++ b/docs/AI_指導老師討論簡報_2026-10-07.pptx
@@ -46,6 +46,8 @@
     <p:sldId id="294" r:id="rId45"/>
     <p:sldId id="295" r:id="rId46"/>
     <p:sldId id="296" r:id="rId47"/>
+    <p:sldId id="297" r:id="rId48"/>
+    <p:sldId id="298" r:id="rId49"/>
   </p:sldIdLst>
   <p:sldSz cx="12191695" cy="6858000" type="screen4x3"/>
   <p:notesSz cx="6858000" cy="9144000"/>
@@ -3454,7 +3456,7 @@
                 </a:solidFill>
                 <a:latin typeface="Microsoft JhengHei"/>
               </a:rPr>
-              <a:t>招生資料 Agent：每年更新，但不自動發布</a:t>
+              <a:t>AI Agent：系統的兩個 AI 角色</a:t>
             </a:r>
           </a:p>
         </p:txBody>
@@ -3531,7 +3533,7 @@
       </p:sp>
       <p:pic>
         <p:nvPicPr>
-          <p:cNvPr id="6" name="Picture 5" descr="D-13-admission-rule-update-flow.png"/>
+          <p:cNvPr id="6" name="Picture 5" descr="D-08-ai-agent-flow.png"/>
           <p:cNvPicPr>
             <a:picLocks noChangeAspect="1"/>
           </p:cNvPicPr>
@@ -3545,8 +3547,8 @@
         </p:blipFill>
         <p:spPr>
           <a:xfrm>
-            <a:off x="2776995" y="1051560"/>
-            <a:ext cx="1669769" cy="5257800"/>
+            <a:off x="2290572" y="1078992"/>
+            <a:ext cx="2002536" cy="5074920"/>
           </a:xfrm>
           <a:prstGeom prst="rect">
             <a:avLst/>
@@ -3555,132 +3557,14 @@
       </p:pic>
       <p:sp>
         <p:nvSpPr>
-          <p:cNvPr id="7" name="TextBox 6"/>
-          <p:cNvSpPr txBox="1"/>
-          <p:nvPr/>
-        </p:nvSpPr>
-        <p:spPr>
-          <a:xfrm>
-            <a:off x="7040880" y="1417320"/>
-            <a:ext cx="4480560" cy="3200400"/>
-          </a:xfrm>
-          <a:prstGeom prst="rect">
-            <a:avLst/>
-          </a:prstGeom>
-          <a:noFill/>
-        </p:spPr>
-        <p:txBody>
-          <a:bodyPr wrap="square" lIns="73152" rIns="73152" tIns="54864">
-            <a:spAutoFit/>
-          </a:bodyPr>
-          <a:lstStyle/>
-          <a:p>
-            <a:pPr>
-              <a:lnSpc>
-                <a:spcPct val="110000"/>
-              </a:lnSpc>
-              <a:spcAft>
-                <a:spcPts val="800"/>
-              </a:spcAft>
-              <a:defRPr sz="1800">
-                <a:solidFill>
-                  <a:srgbClr val="232C36"/>
-                </a:solidFill>
-                <a:latin typeface="Microsoft JhengHei"/>
-              </a:defRPr>
-            </a:pPr>
-            <a:r>
-              <a:t>1. 管理者提供官方來源</a:t>
-            </a:r>
-          </a:p>
-          <a:p>
-            <a:pPr>
-              <a:lnSpc>
-                <a:spcPct val="110000"/>
-              </a:lnSpc>
-              <a:spcAft>
-                <a:spcPts val="800"/>
-              </a:spcAft>
-              <a:defRPr sz="1800">
-                <a:solidFill>
-                  <a:srgbClr val="232C36"/>
-                </a:solidFill>
-                <a:latin typeface="Microsoft JhengHei"/>
-              </a:defRPr>
-            </a:pPr>
-            <a:r>
-              <a:t>2. Agent 偵測變更並擷取校系要求</a:t>
-            </a:r>
-          </a:p>
-          <a:p>
-            <a:pPr>
-              <a:lnSpc>
-                <a:spcPct val="110000"/>
-              </a:lnSpc>
-              <a:spcAft>
-                <a:spcPts val="800"/>
-              </a:spcAft>
-              <a:defRPr sz="1800">
-                <a:solidFill>
-                  <a:srgbClr val="232C36"/>
-                </a:solidFill>
-                <a:latin typeface="Microsoft JhengHei"/>
-              </a:defRPr>
-            </a:pPr>
-            <a:r>
-              <a:t>3. 系統標記為 candidate</a:t>
-            </a:r>
-          </a:p>
-          <a:p>
-            <a:pPr>
-              <a:lnSpc>
-                <a:spcPct val="110000"/>
-              </a:lnSpc>
-              <a:spcAft>
-                <a:spcPts val="800"/>
-              </a:spcAft>
-              <a:defRPr sz="1800">
-                <a:solidFill>
-                  <a:srgbClr val="232C36"/>
-                </a:solidFill>
-                <a:latin typeface="Microsoft JhengHei"/>
-              </a:defRPr>
-            </a:pPr>
-            <a:r>
-              <a:t>4. 管理者核對後才發布 published</a:t>
-            </a:r>
-          </a:p>
-          <a:p>
-            <a:pPr>
-              <a:lnSpc>
-                <a:spcPct val="110000"/>
-              </a:lnSpc>
-              <a:spcAft>
-                <a:spcPts val="800"/>
-              </a:spcAft>
-              <a:defRPr sz="1800">
-                <a:solidFill>
-                  <a:srgbClr val="232C36"/>
-                </a:solidFill>
-                <a:latin typeface="Microsoft JhengHei"/>
-              </a:defRPr>
-            </a:pPr>
-            <a:r>
-              <a:t>5. 學生只看到已發布版本</a:t>
-            </a:r>
-          </a:p>
-        </p:txBody>
-      </p:sp>
-      <p:sp>
-        <p:nvSpPr>
-          <p:cNvPr id="8" name="Rounded Rectangle 7"/>
+          <p:cNvPr id="7" name="Rounded Rectangle 6"/>
           <p:cNvSpPr/>
           <p:nvPr/>
         </p:nvSpPr>
         <p:spPr>
           <a:xfrm>
-            <a:off x="7040880" y="4892040"/>
-            <a:ext cx="4480560" cy="914400"/>
+            <a:off x="6400800" y="1234440"/>
+            <a:ext cx="4892040" cy="2148840"/>
           </a:xfrm>
           <a:prstGeom prst="roundRect">
             <a:avLst/>
@@ -3690,7 +3574,7 @@
           </a:solidFill>
           <a:ln w="15240">
             <a:solidFill>
-              <a:srgbClr val="B13F3F"/>
+              <a:srgbClr val="208985"/>
             </a:solidFill>
           </a:ln>
         </p:spPr>
@@ -3718,14 +3602,49 @@
       </p:sp>
       <p:sp>
         <p:nvSpPr>
+          <p:cNvPr id="8" name="TextBox 7"/>
+          <p:cNvSpPr txBox="1"/>
+          <p:nvPr/>
+        </p:nvSpPr>
+        <p:spPr>
+          <a:xfrm>
+            <a:off x="6565392" y="1344168"/>
+            <a:ext cx="4572000" cy="256032"/>
+          </a:xfrm>
+          <a:prstGeom prst="rect">
+            <a:avLst/>
+          </a:prstGeom>
+          <a:noFill/>
+        </p:spPr>
+        <p:txBody>
+          <a:bodyPr wrap="square" lIns="54864" rIns="54864" tIns="27432" bIns="27432" anchor="t">
+            <a:spAutoFit/>
+          </a:bodyPr>
+          <a:lstStyle/>
+          <a:p>
+            <a:pPr algn="l"/>
+            <a:r>
+              <a:rPr sz="1300" b="1">
+                <a:solidFill>
+                  <a:srgbClr val="208985"/>
+                </a:solidFill>
+                <a:latin typeface="Microsoft JhengHei"/>
+              </a:rPr>
+              <a:t>資管科小助手</a:t>
+            </a:r>
+          </a:p>
+        </p:txBody>
+      </p:sp>
+      <p:sp>
+        <p:nvSpPr>
           <p:cNvPr id="9" name="TextBox 8"/>
           <p:cNvSpPr txBox="1"/>
           <p:nvPr/>
         </p:nvSpPr>
         <p:spPr>
           <a:xfrm>
-            <a:off x="7205472" y="5001768"/>
-            <a:ext cx="4160520" cy="256032"/>
+            <a:off x="6565392" y="1673352"/>
+            <a:ext cx="4572000" cy="1618488"/>
           </a:xfrm>
           <a:prstGeom prst="rect">
             <a:avLst/>
@@ -3740,27 +3659,110 @@
           <a:p>
             <a:pPr algn="l"/>
             <a:r>
+              <a:rPr sz="1600" b="0">
+                <a:solidFill>
+                  <a:srgbClr val="232C36"/>
+                </a:solidFill>
+                <a:latin typeface="Microsoft JhengHei"/>
+              </a:rPr>
+              <a:t>查詢科上規則
+查看自己的進度與缺件
+回答下一步問題
+檢查自傳內容一致性</a:t>
+            </a:r>
+          </a:p>
+        </p:txBody>
+      </p:sp>
+      <p:sp>
+        <p:nvSpPr>
+          <p:cNvPr id="10" name="Rounded Rectangle 9"/>
+          <p:cNvSpPr/>
+          <p:nvPr/>
+        </p:nvSpPr>
+        <p:spPr>
+          <a:xfrm>
+            <a:off x="6400800" y="3657600"/>
+            <a:ext cx="4892040" cy="2148840"/>
+          </a:xfrm>
+          <a:prstGeom prst="roundRect">
+            <a:avLst/>
+          </a:prstGeom>
+          <a:solidFill>
+            <a:srgbClr val="F2F6F9"/>
+          </a:solidFill>
+          <a:ln w="15240">
+            <a:solidFill>
+              <a:srgbClr val="DD812F"/>
+            </a:solidFill>
+          </a:ln>
+        </p:spPr>
+        <p:style>
+          <a:lnRef idx="1">
+            <a:schemeClr val="accent1"/>
+          </a:lnRef>
+          <a:fillRef idx="3">
+            <a:schemeClr val="accent1"/>
+          </a:fillRef>
+          <a:effectRef idx="2">
+            <a:schemeClr val="accent1"/>
+          </a:effectRef>
+          <a:fontRef idx="minor">
+            <a:schemeClr val="lt1"/>
+          </a:fontRef>
+        </p:style>
+        <p:txBody>
+          <a:bodyPr rtlCol="0" anchor="ctr"/>
+          <a:lstStyle/>
+          <a:p>
+            <a:pPr algn="ctr"/>
+          </a:p>
+        </p:txBody>
+      </p:sp>
+      <p:sp>
+        <p:nvSpPr>
+          <p:cNvPr id="11" name="TextBox 10"/>
+          <p:cNvSpPr txBox="1"/>
+          <p:nvPr/>
+        </p:nvSpPr>
+        <p:spPr>
+          <a:xfrm>
+            <a:off x="6565392" y="3767328"/>
+            <a:ext cx="4572000" cy="256032"/>
+          </a:xfrm>
+          <a:prstGeom prst="rect">
+            <a:avLst/>
+          </a:prstGeom>
+          <a:noFill/>
+        </p:spPr>
+        <p:txBody>
+          <a:bodyPr wrap="square" lIns="54864" rIns="54864" tIns="27432" bIns="27432" anchor="t">
+            <a:spAutoFit/>
+          </a:bodyPr>
+          <a:lstStyle/>
+          <a:p>
+            <a:pPr algn="l"/>
+            <a:r>
               <a:rPr sz="1300" b="1">
                 <a:solidFill>
-                  <a:srgbClr val="B13F3F"/>
-                </a:solidFill>
-                <a:latin typeface="Microsoft JhengHei"/>
-              </a:rPr>
-              <a:t>要請老師確認</a:t>
-            </a:r>
-          </a:p>
-        </p:txBody>
-      </p:sp>
-      <p:sp>
-        <p:nvSpPr>
-          <p:cNvPr id="10" name="TextBox 9"/>
-          <p:cNvSpPr txBox="1"/>
-          <p:nvPr/>
-        </p:nvSpPr>
-        <p:spPr>
-          <a:xfrm>
-            <a:off x="7205472" y="5330952"/>
-            <a:ext cx="4160520" cy="384048"/>
+                  <a:srgbClr val="DD812F"/>
+                </a:solidFill>
+                <a:latin typeface="Microsoft JhengHei"/>
+              </a:rPr>
+              <a:t>自傳小幫手</a:t>
+            </a:r>
+          </a:p>
+        </p:txBody>
+      </p:sp>
+      <p:sp>
+        <p:nvSpPr>
+          <p:cNvPr id="12" name="TextBox 11"/>
+          <p:cNvSpPr txBox="1"/>
+          <p:nvPr/>
+        </p:nvSpPr>
+        <p:spPr>
+          <a:xfrm>
+            <a:off x="6565392" y="4096512"/>
+            <a:ext cx="4572000" cy="1618488"/>
           </a:xfrm>
           <a:prstGeom prst="rect">
             <a:avLst/>
@@ -3781,7 +3783,10 @@
                 </a:solidFill>
                 <a:latin typeface="Microsoft JhengHei"/>
               </a:rPr>
-              <a:t>哪些官方網址可以作為來源？每年由誰核對與發布？</a:t>
+              <a:t>一次問四題
+依學生回答產生草稿
+空白內容標示待補
+學生修改後再送導師確認</a:t>
             </a:r>
           </a:p>
         </p:txBody>
@@ -3885,7 +3890,7 @@
                 </a:solidFill>
                 <a:latin typeface="Microsoft JhengHei"/>
               </a:rPr>
-              <a:t>資料流與系統架構</a:t>
+              <a:t>招生資料 Agent：每年更新，但不自動發布</a:t>
             </a:r>
           </a:p>
         </p:txBody>
@@ -3920,7 +3925,7 @@
                 </a:solidFill>
                 <a:latin typeface="Microsoft JhengHei"/>
               </a:rPr>
-              <a:t>技術概要</a:t>
+              <a:t>AI 功能</a:t>
             </a:r>
           </a:p>
         </p:txBody>
@@ -3962,7 +3967,7 @@
       </p:sp>
       <p:pic>
         <p:nvPicPr>
-          <p:cNvPr id="6" name="Picture 5" descr="D-05-system-architecture.png"/>
+          <p:cNvPr id="6" name="Picture 5" descr="D-13-admission-rule-update-flow.png"/>
           <p:cNvPicPr>
             <a:picLocks noChangeAspect="1"/>
           </p:cNvPicPr>
@@ -3976,38 +3981,247 @@
         </p:blipFill>
         <p:spPr>
           <a:xfrm>
-            <a:off x="320040" y="3000374"/>
-            <a:ext cx="5623560" cy="1405890"/>
+            <a:off x="2776995" y="1051560"/>
+            <a:ext cx="1669769" cy="5257800"/>
           </a:xfrm>
           <a:prstGeom prst="rect">
             <a:avLst/>
           </a:prstGeom>
         </p:spPr>
       </p:pic>
-      <p:pic>
-        <p:nvPicPr>
-          <p:cNvPr id="7" name="Picture 6" descr="D-06-dfd.png"/>
-          <p:cNvPicPr>
-            <a:picLocks noChangeAspect="1"/>
-          </p:cNvPicPr>
-          <p:nvPr/>
-        </p:nvPicPr>
-        <p:blipFill>
-          <a:blip r:embed="rId3"/>
-          <a:stretch>
-            <a:fillRect/>
-          </a:stretch>
-        </p:blipFill>
-        <p:spPr>
-          <a:xfrm>
-            <a:off x="6172200" y="1079085"/>
-            <a:ext cx="5715000" cy="5248469"/>
-          </a:xfrm>
-          <a:prstGeom prst="rect">
-            <a:avLst/>
-          </a:prstGeom>
-        </p:spPr>
-      </p:pic>
+      <p:sp>
+        <p:nvSpPr>
+          <p:cNvPr id="7" name="TextBox 6"/>
+          <p:cNvSpPr txBox="1"/>
+          <p:nvPr/>
+        </p:nvSpPr>
+        <p:spPr>
+          <a:xfrm>
+            <a:off x="7040880" y="1417320"/>
+            <a:ext cx="4480560" cy="3200400"/>
+          </a:xfrm>
+          <a:prstGeom prst="rect">
+            <a:avLst/>
+          </a:prstGeom>
+          <a:noFill/>
+        </p:spPr>
+        <p:txBody>
+          <a:bodyPr wrap="square" lIns="73152" rIns="73152" tIns="54864">
+            <a:spAutoFit/>
+          </a:bodyPr>
+          <a:lstStyle/>
+          <a:p>
+            <a:pPr>
+              <a:lnSpc>
+                <a:spcPct val="110000"/>
+              </a:lnSpc>
+              <a:spcAft>
+                <a:spcPts val="800"/>
+              </a:spcAft>
+              <a:defRPr sz="1800">
+                <a:solidFill>
+                  <a:srgbClr val="232C36"/>
+                </a:solidFill>
+                <a:latin typeface="Microsoft JhengHei"/>
+              </a:defRPr>
+            </a:pPr>
+            <a:r>
+              <a:t>1. 管理者提供官方來源</a:t>
+            </a:r>
+          </a:p>
+          <a:p>
+            <a:pPr>
+              <a:lnSpc>
+                <a:spcPct val="110000"/>
+              </a:lnSpc>
+              <a:spcAft>
+                <a:spcPts val="800"/>
+              </a:spcAft>
+              <a:defRPr sz="1800">
+                <a:solidFill>
+                  <a:srgbClr val="232C36"/>
+                </a:solidFill>
+                <a:latin typeface="Microsoft JhengHei"/>
+              </a:defRPr>
+            </a:pPr>
+            <a:r>
+              <a:t>2. Agent 偵測變更並擷取校系要求</a:t>
+            </a:r>
+          </a:p>
+          <a:p>
+            <a:pPr>
+              <a:lnSpc>
+                <a:spcPct val="110000"/>
+              </a:lnSpc>
+              <a:spcAft>
+                <a:spcPts val="800"/>
+              </a:spcAft>
+              <a:defRPr sz="1800">
+                <a:solidFill>
+                  <a:srgbClr val="232C36"/>
+                </a:solidFill>
+                <a:latin typeface="Microsoft JhengHei"/>
+              </a:defRPr>
+            </a:pPr>
+            <a:r>
+              <a:t>3. 系統標記為 candidate</a:t>
+            </a:r>
+          </a:p>
+          <a:p>
+            <a:pPr>
+              <a:lnSpc>
+                <a:spcPct val="110000"/>
+              </a:lnSpc>
+              <a:spcAft>
+                <a:spcPts val="800"/>
+              </a:spcAft>
+              <a:defRPr sz="1800">
+                <a:solidFill>
+                  <a:srgbClr val="232C36"/>
+                </a:solidFill>
+                <a:latin typeface="Microsoft JhengHei"/>
+              </a:defRPr>
+            </a:pPr>
+            <a:r>
+              <a:t>4. 管理者核對後才發布 published</a:t>
+            </a:r>
+          </a:p>
+          <a:p>
+            <a:pPr>
+              <a:lnSpc>
+                <a:spcPct val="110000"/>
+              </a:lnSpc>
+              <a:spcAft>
+                <a:spcPts val="800"/>
+              </a:spcAft>
+              <a:defRPr sz="1800">
+                <a:solidFill>
+                  <a:srgbClr val="232C36"/>
+                </a:solidFill>
+                <a:latin typeface="Microsoft JhengHei"/>
+              </a:defRPr>
+            </a:pPr>
+            <a:r>
+              <a:t>5. 學生只看到已發布版本</a:t>
+            </a:r>
+          </a:p>
+        </p:txBody>
+      </p:sp>
+      <p:sp>
+        <p:nvSpPr>
+          <p:cNvPr id="8" name="Rounded Rectangle 7"/>
+          <p:cNvSpPr/>
+          <p:nvPr/>
+        </p:nvSpPr>
+        <p:spPr>
+          <a:xfrm>
+            <a:off x="7040880" y="4892040"/>
+            <a:ext cx="4480560" cy="914400"/>
+          </a:xfrm>
+          <a:prstGeom prst="roundRect">
+            <a:avLst/>
+          </a:prstGeom>
+          <a:solidFill>
+            <a:srgbClr val="F2F6F9"/>
+          </a:solidFill>
+          <a:ln w="15240">
+            <a:solidFill>
+              <a:srgbClr val="B13F3F"/>
+            </a:solidFill>
+          </a:ln>
+        </p:spPr>
+        <p:style>
+          <a:lnRef idx="1">
+            <a:schemeClr val="accent1"/>
+          </a:lnRef>
+          <a:fillRef idx="3">
+            <a:schemeClr val="accent1"/>
+          </a:fillRef>
+          <a:effectRef idx="2">
+            <a:schemeClr val="accent1"/>
+          </a:effectRef>
+          <a:fontRef idx="minor">
+            <a:schemeClr val="lt1"/>
+          </a:fontRef>
+        </p:style>
+        <p:txBody>
+          <a:bodyPr rtlCol="0" anchor="ctr"/>
+          <a:lstStyle/>
+          <a:p>
+            <a:pPr algn="ctr"/>
+          </a:p>
+        </p:txBody>
+      </p:sp>
+      <p:sp>
+        <p:nvSpPr>
+          <p:cNvPr id="9" name="TextBox 8"/>
+          <p:cNvSpPr txBox="1"/>
+          <p:nvPr/>
+        </p:nvSpPr>
+        <p:spPr>
+          <a:xfrm>
+            <a:off x="7205472" y="5001768"/>
+            <a:ext cx="4160520" cy="256032"/>
+          </a:xfrm>
+          <a:prstGeom prst="rect">
+            <a:avLst/>
+          </a:prstGeom>
+          <a:noFill/>
+        </p:spPr>
+        <p:txBody>
+          <a:bodyPr wrap="square" lIns="54864" rIns="54864" tIns="27432" bIns="27432" anchor="t">
+            <a:spAutoFit/>
+          </a:bodyPr>
+          <a:lstStyle/>
+          <a:p>
+            <a:pPr algn="l"/>
+            <a:r>
+              <a:rPr sz="1300" b="1">
+                <a:solidFill>
+                  <a:srgbClr val="B13F3F"/>
+                </a:solidFill>
+                <a:latin typeface="Microsoft JhengHei"/>
+              </a:rPr>
+              <a:t>要請老師確認</a:t>
+            </a:r>
+          </a:p>
+        </p:txBody>
+      </p:sp>
+      <p:sp>
+        <p:nvSpPr>
+          <p:cNvPr id="10" name="TextBox 9"/>
+          <p:cNvSpPr txBox="1"/>
+          <p:nvPr/>
+        </p:nvSpPr>
+        <p:spPr>
+          <a:xfrm>
+            <a:off x="7205472" y="5330952"/>
+            <a:ext cx="4160520" cy="384048"/>
+          </a:xfrm>
+          <a:prstGeom prst="rect">
+            <a:avLst/>
+          </a:prstGeom>
+          <a:noFill/>
+        </p:spPr>
+        <p:txBody>
+          <a:bodyPr wrap="square" lIns="54864" rIns="54864" tIns="27432" bIns="27432" anchor="t">
+            <a:spAutoFit/>
+          </a:bodyPr>
+          <a:lstStyle/>
+          <a:p>
+            <a:pPr algn="l"/>
+            <a:r>
+              <a:rPr sz="1600" b="0">
+                <a:solidFill>
+                  <a:srgbClr val="232C36"/>
+                </a:solidFill>
+                <a:latin typeface="Microsoft JhengHei"/>
+              </a:rPr>
+              <a:t>哪些官方網址可以作為來源？每年由誰核對與發布？</a:t>
+            </a:r>
+          </a:p>
+        </p:txBody>
+      </p:sp>
     </p:spTree>
   </p:cSld>
   <p:clrMapOvr>
@@ -4107,7 +4321,7 @@
                 </a:solidFill>
                 <a:latin typeface="Microsoft JhengHei"/>
               </a:rPr>
-              <a:t>資料表目前如何支撐主線</a:t>
+              <a:t>資料流與系統架構</a:t>
             </a:r>
           </a:p>
         </p:txBody>
@@ -4142,7 +4356,7 @@
                 </a:solidFill>
                 <a:latin typeface="Microsoft JhengHei"/>
               </a:rPr>
-              <a:t>資料設計</a:t>
+              <a:t>技術概要</a:t>
             </a:r>
           </a:p>
         </p:txBody>
@@ -4184,7 +4398,7 @@
       </p:sp>
       <p:pic>
         <p:nvPicPr>
-          <p:cNvPr id="6" name="Picture 5" descr="D-09-erd-v2.png"/>
+          <p:cNvPr id="6" name="Picture 5" descr="D-05-system-architecture.png"/>
           <p:cNvPicPr>
             <a:picLocks noChangeAspect="1"/>
           </p:cNvPicPr>
@@ -4198,49 +4412,38 @@
         </p:blipFill>
         <p:spPr>
           <a:xfrm>
-            <a:off x="411480" y="1073311"/>
-            <a:ext cx="11292839" cy="5214296"/>
+            <a:off x="320040" y="2878435"/>
+            <a:ext cx="5623560" cy="1649768"/>
           </a:xfrm>
           <a:prstGeom prst="rect">
             <a:avLst/>
           </a:prstGeom>
         </p:spPr>
       </p:pic>
-      <p:sp>
-        <p:nvSpPr>
-          <p:cNvPr id="7" name="TextBox 6"/>
-          <p:cNvSpPr txBox="1"/>
-          <p:nvPr/>
-        </p:nvSpPr>
-        <p:spPr>
-          <a:xfrm>
-            <a:off x="640080" y="6309360"/>
-            <a:ext cx="10881360" cy="256032"/>
-          </a:xfrm>
-          <a:prstGeom prst="rect">
-            <a:avLst/>
-          </a:prstGeom>
-          <a:noFill/>
-        </p:spPr>
-        <p:txBody>
-          <a:bodyPr wrap="square" lIns="54864" rIns="54864" tIns="27432" bIns="27432" anchor="t">
-            <a:spAutoFit/>
-          </a:bodyPr>
-          <a:lstStyle/>
-          <a:p>
-            <a:pPr algn="ctr"/>
-            <a:r>
-              <a:rPr sz="1200" b="0">
-                <a:solidFill>
-                  <a:srgbClr val="5D6B79"/>
-                </a:solidFill>
-                <a:latin typeface="Microsoft JhengHei"/>
-              </a:rPr>
-              <a:t>主線資料：學生、原始檔、學習紀錄、目標校系、備審輸出、導師審核</a:t>
-            </a:r>
-          </a:p>
-        </p:txBody>
-      </p:sp>
+      <p:pic>
+        <p:nvPicPr>
+          <p:cNvPr id="7" name="Picture 6" descr="D-06-dfd.png"/>
+          <p:cNvPicPr>
+            <a:picLocks noChangeAspect="1"/>
+          </p:cNvPicPr>
+          <p:nvPr/>
+        </p:nvPicPr>
+        <p:blipFill>
+          <a:blip r:embed="rId3"/>
+          <a:stretch>
+            <a:fillRect/>
+          </a:stretch>
+        </p:blipFill>
+        <p:spPr>
+          <a:xfrm>
+            <a:off x="6172200" y="1654959"/>
+            <a:ext cx="5715000" cy="4096721"/>
+          </a:xfrm>
+          <a:prstGeom prst="rect">
+            <a:avLst/>
+          </a:prstGeom>
+        </p:spPr>
+      </p:pic>
     </p:spTree>
   </p:cSld>
   <p:clrMapOvr>
@@ -4340,7 +4543,7 @@
                 </a:solidFill>
                 <a:latin typeface="Microsoft JhengHei"/>
               </a:rPr>
-              <a:t>目前 AI 使用的安全邊界</a:t>
+              <a:t>資料表目前如何支撐主線</a:t>
             </a:r>
           </a:p>
         </p:txBody>
@@ -4375,7 +4578,7 @@
                 </a:solidFill>
                 <a:latin typeface="Microsoft JhengHei"/>
               </a:rPr>
-              <a:t>風險與限制</a:t>
+              <a:t>資料設計</a:t>
             </a:r>
           </a:p>
         </p:txBody>
@@ -4415,216 +4618,61 @@
           </a:p>
         </p:txBody>
       </p:sp>
-      <p:sp>
-        <p:nvSpPr>
-          <p:cNvPr id="6" name="TextBox 5"/>
-          <p:cNvSpPr txBox="1"/>
-          <p:nvPr/>
-        </p:nvSpPr>
-        <p:spPr>
-          <a:xfrm>
-            <a:off x="777240" y="1325880"/>
-            <a:ext cx="10698480" cy="3566160"/>
-          </a:xfrm>
-          <a:prstGeom prst="rect">
-            <a:avLst/>
-          </a:prstGeom>
-          <a:noFill/>
-        </p:spPr>
-        <p:txBody>
-          <a:bodyPr wrap="square" lIns="73152" rIns="73152" tIns="54864">
-            <a:spAutoFit/>
-          </a:bodyPr>
-          <a:lstStyle/>
-          <a:p>
-            <a:pPr>
-              <a:lnSpc>
-                <a:spcPct val="110000"/>
-              </a:lnSpc>
-              <a:spcAft>
-                <a:spcPts val="800"/>
-              </a:spcAft>
-              <a:defRPr sz="2100">
-                <a:solidFill>
-                  <a:srgbClr val="232C36"/>
-                </a:solidFill>
-                <a:latin typeface="Microsoft JhengHei"/>
-              </a:defRPr>
-            </a:pPr>
-            <a:r>
-              <a:t>學生自己的 API Key：只在這次請求使用，不存檔、不寫入資料庫、不放進網址</a:t>
-            </a:r>
-          </a:p>
-          <a:p>
-            <a:pPr>
-              <a:lnSpc>
-                <a:spcPct val="110000"/>
-              </a:lnSpc>
-              <a:spcAft>
-                <a:spcPts val="800"/>
-              </a:spcAft>
-              <a:defRPr sz="2100">
-                <a:solidFill>
-                  <a:srgbClr val="232C36"/>
-                </a:solidFill>
-                <a:latin typeface="Microsoft JhengHei"/>
-              </a:defRPr>
-            </a:pPr>
-            <a:r>
-              <a:t>系統知識庫：先由科上文件整理，AI 回答時附來源，仍需要老師或科辦核對</a:t>
-            </a:r>
-          </a:p>
-          <a:p>
-            <a:pPr>
-              <a:lnSpc>
-                <a:spcPct val="110000"/>
-              </a:lnSpc>
-              <a:spcAft>
-                <a:spcPts val="800"/>
-              </a:spcAft>
-              <a:defRPr sz="2100">
-                <a:solidFill>
-                  <a:srgbClr val="232C36"/>
-                </a:solidFill>
-                <a:latin typeface="Microsoft JhengHei"/>
-              </a:defRPr>
-            </a:pPr>
-            <a:r>
-              <a:t>AI 產出：是草稿與提醒，學生要修改，導師要確認，系統才產出正式 Word</a:t>
-            </a:r>
-          </a:p>
-          <a:p>
-            <a:pPr>
-              <a:lnSpc>
-                <a:spcPct val="110000"/>
-              </a:lnSpc>
-              <a:spcAft>
-                <a:spcPts val="800"/>
-              </a:spcAft>
-              <a:defRPr sz="2100">
-                <a:solidFill>
-                  <a:srgbClr val="232C36"/>
-                </a:solidFill>
-                <a:latin typeface="Microsoft JhengHei"/>
-              </a:defRPr>
-            </a:pPr>
-            <a:r>
-              <a:t>招生規則：Agent 只能產生待審版本，不能直接覆蓋已發布規則</a:t>
-            </a:r>
-          </a:p>
-        </p:txBody>
-      </p:sp>
-      <p:sp>
-        <p:nvSpPr>
-          <p:cNvPr id="7" name="Rounded Rectangle 6"/>
-          <p:cNvSpPr/>
-          <p:nvPr/>
-        </p:nvSpPr>
-        <p:spPr>
-          <a:xfrm>
-            <a:off x="777240" y="5074920"/>
-            <a:ext cx="10561320" cy="822960"/>
-          </a:xfrm>
-          <a:prstGeom prst="roundRect">
-            <a:avLst/>
-          </a:prstGeom>
-          <a:solidFill>
-            <a:srgbClr val="F2F6F9"/>
-          </a:solidFill>
-          <a:ln w="15240">
-            <a:solidFill>
-              <a:srgbClr val="B13F3F"/>
-            </a:solidFill>
-          </a:ln>
-        </p:spPr>
-        <p:style>
-          <a:lnRef idx="1">
-            <a:schemeClr val="accent1"/>
-          </a:lnRef>
-          <a:fillRef idx="3">
-            <a:schemeClr val="accent1"/>
-          </a:fillRef>
-          <a:effectRef idx="2">
-            <a:schemeClr val="accent1"/>
-          </a:effectRef>
-          <a:fontRef idx="minor">
-            <a:schemeClr val="lt1"/>
-          </a:fontRef>
-        </p:style>
-        <p:txBody>
-          <a:bodyPr rtlCol="0" anchor="ctr"/>
+      <p:pic>
+        <p:nvPicPr>
+          <p:cNvPr id="6" name="Picture 5" descr="D-09-erd-v2.png"/>
+          <p:cNvPicPr>
+            <a:picLocks noChangeAspect="1"/>
+          </p:cNvPicPr>
+          <p:nvPr/>
+        </p:nvPicPr>
+        <p:blipFill>
+          <a:blip r:embed="rId2"/>
+          <a:stretch>
+            <a:fillRect/>
+          </a:stretch>
+        </p:blipFill>
+        <p:spPr>
+          <a:xfrm>
+            <a:off x="411480" y="1073311"/>
+            <a:ext cx="11292839" cy="5214296"/>
+          </a:xfrm>
+          <a:prstGeom prst="rect">
+            <a:avLst/>
+          </a:prstGeom>
+        </p:spPr>
+      </p:pic>
+      <p:sp>
+        <p:nvSpPr>
+          <p:cNvPr id="7" name="TextBox 6"/>
+          <p:cNvSpPr txBox="1"/>
+          <p:nvPr/>
+        </p:nvSpPr>
+        <p:spPr>
+          <a:xfrm>
+            <a:off x="640080" y="6309360"/>
+            <a:ext cx="10881360" cy="256032"/>
+          </a:xfrm>
+          <a:prstGeom prst="rect">
+            <a:avLst/>
+          </a:prstGeom>
+          <a:noFill/>
+        </p:spPr>
+        <p:txBody>
+          <a:bodyPr wrap="square" lIns="54864" rIns="54864" tIns="27432" bIns="27432" anchor="t">
+            <a:spAutoFit/>
+          </a:bodyPr>
           <a:lstStyle/>
           <a:p>
             <a:pPr algn="ctr"/>
-          </a:p>
-        </p:txBody>
-      </p:sp>
-      <p:sp>
-        <p:nvSpPr>
-          <p:cNvPr id="8" name="TextBox 7"/>
-          <p:cNvSpPr txBox="1"/>
-          <p:nvPr/>
-        </p:nvSpPr>
-        <p:spPr>
-          <a:xfrm>
-            <a:off x="941832" y="5184648"/>
-            <a:ext cx="10241280" cy="256032"/>
-          </a:xfrm>
-          <a:prstGeom prst="rect">
-            <a:avLst/>
-          </a:prstGeom>
-          <a:noFill/>
-        </p:spPr>
-        <p:txBody>
-          <a:bodyPr wrap="square" lIns="54864" rIns="54864" tIns="27432" bIns="27432" anchor="t">
-            <a:spAutoFit/>
-          </a:bodyPr>
-          <a:lstStyle/>
-          <a:p>
-            <a:pPr algn="l"/>
-            <a:r>
-              <a:rPr sz="1300" b="1">
-                <a:solidFill>
-                  <a:srgbClr val="B13F3F"/>
-                </a:solidFill>
-                <a:latin typeface="Microsoft JhengHei"/>
-              </a:rPr>
-              <a:t>需要決策</a:t>
-            </a:r>
-          </a:p>
-        </p:txBody>
-      </p:sp>
-      <p:sp>
-        <p:nvSpPr>
-          <p:cNvPr id="9" name="TextBox 8"/>
-          <p:cNvSpPr txBox="1"/>
-          <p:nvPr/>
-        </p:nvSpPr>
-        <p:spPr>
-          <a:xfrm>
-            <a:off x="941832" y="5513831"/>
-            <a:ext cx="10241280" cy="292608"/>
-          </a:xfrm>
-          <a:prstGeom prst="rect">
-            <a:avLst/>
-          </a:prstGeom>
-          <a:noFill/>
-        </p:spPr>
-        <p:txBody>
-          <a:bodyPr wrap="square" lIns="54864" rIns="54864" tIns="27432" bIns="27432" anchor="t">
-            <a:spAutoFit/>
-          </a:bodyPr>
-          <a:lstStyle/>
-          <a:p>
-            <a:pPr algn="l"/>
-            <a:r>
-              <a:rPr sz="1600" b="0">
-                <a:solidFill>
-                  <a:srgbClr val="232C36"/>
-                </a:solidFill>
-                <a:latin typeface="Microsoft JhengHei"/>
-              </a:rPr>
-              <a:t>是否允許把學生資料送到 Google Gemini？若允許，採免費方案、付費方案，或要求學生同意？</a:t>
+            <a:r>
+              <a:rPr sz="1200" b="0">
+                <a:solidFill>
+                  <a:srgbClr val="5D6B79"/>
+                </a:solidFill>
+                <a:latin typeface="Microsoft JhengHei"/>
+              </a:rPr>
+              <a:t>主線資料：學生、原始檔、學習紀錄、目標校系、備審輸出、導師審核</a:t>
             </a:r>
           </a:p>
         </p:txBody>
@@ -4728,7 +4776,7 @@
                 </a:solidFill>
                 <a:latin typeface="Microsoft JhengHei"/>
               </a:rPr>
-              <a:t>請老師先確認：會擋住開發的問題</a:t>
+              <a:t>目前 AI 使用的安全邊界</a:t>
             </a:r>
           </a:p>
         </p:txBody>
@@ -4763,7 +4811,7 @@
                 </a:solidFill>
                 <a:latin typeface="Microsoft JhengHei"/>
               </a:rPr>
-              <a:t>討論清單 1</a:t>
+              <a:t>風險與限制</a:t>
             </a:r>
           </a:p>
         </p:txBody>
@@ -4811,43 +4859,8 @@
         </p:nvSpPr>
         <p:spPr>
           <a:xfrm>
-            <a:off x="777240" y="1115568"/>
-            <a:ext cx="10698480" cy="365760"/>
-          </a:xfrm>
-          <a:prstGeom prst="rect">
-            <a:avLst/>
-          </a:prstGeom>
-          <a:noFill/>
-        </p:spPr>
-        <p:txBody>
-          <a:bodyPr wrap="square" lIns="54864" rIns="54864" tIns="27432" bIns="27432" anchor="t">
-            <a:spAutoFit/>
-          </a:bodyPr>
-          <a:lstStyle/>
-          <a:p>
-            <a:pPr algn="l"/>
-            <a:r>
-              <a:rPr sz="2200" b="1">
-                <a:solidFill>
-                  <a:srgbClr val="B13F3F"/>
-                </a:solidFill>
-                <a:latin typeface="Microsoft JhengHei"/>
-              </a:rPr>
-              <a:t>這三題若沒有答案，AI 與權限設計都可能重做。</a:t>
-            </a:r>
-          </a:p>
-        </p:txBody>
-      </p:sp>
-      <p:sp>
-        <p:nvSpPr>
-          <p:cNvPr id="7" name="TextBox 6"/>
-          <p:cNvSpPr txBox="1"/>
-          <p:nvPr/>
-        </p:nvSpPr>
-        <p:spPr>
-          <a:xfrm>
-            <a:off x="868680" y="1828800"/>
-            <a:ext cx="10424160" cy="2468880"/>
+            <a:off x="777240" y="1325880"/>
+            <a:ext cx="10698480" cy="3566160"/>
           </a:xfrm>
           <a:prstGeom prst="rect">
             <a:avLst/>
@@ -4867,7 +4880,7 @@
               <a:spcAft>
                 <a:spcPts val="800"/>
               </a:spcAft>
-              <a:defRPr sz="2300">
+              <a:defRPr sz="2100">
                 <a:solidFill>
                   <a:srgbClr val="232C36"/>
                 </a:solidFill>
@@ -4875,7 +4888,7 @@
               </a:defRPr>
             </a:pPr>
             <a:r>
-              <a:t>1. 學生資料可以送給 Google Gemini 嗎？需要同意書或改用付費方案嗎？</a:t>
+              <a:t>學生自己的 API Key：只在這次請求使用，不存檔、不寫入資料庫、不放進網址</a:t>
             </a:r>
           </a:p>
           <a:p>
@@ -4886,7 +4899,7 @@
               <a:spcAft>
                 <a:spcPts val="800"/>
               </a:spcAft>
-              <a:defRPr sz="2300">
+              <a:defRPr sz="2100">
                 <a:solidFill>
                   <a:srgbClr val="232C36"/>
                 </a:solidFill>
@@ -4894,7 +4907,7 @@
               </a:defRPr>
             </a:pPr>
             <a:r>
-              <a:t>2. AI 費用由學校、科上、專題經費，還是由學生自行提供金鑰？</a:t>
+              <a:t>系統知識庫：先由科上文件整理，AI 回答時附來源，仍需要老師或科辦核對</a:t>
             </a:r>
           </a:p>
           <a:p>
@@ -4905,7 +4918,7 @@
               <a:spcAft>
                 <a:spcPts val="800"/>
               </a:spcAft>
-              <a:defRPr sz="2300">
+              <a:defRPr sz="2100">
                 <a:solidFill>
                   <a:srgbClr val="232C36"/>
                 </a:solidFill>
@@ -4913,8 +4926,72 @@
               </a:defRPr>
             </a:pPr>
             <a:r>
-              <a:t>3. AI 協助自傳是否可放入備審？是否要標示「AI 協助草稿」並由導師確認？</a:t>
-            </a:r>
+              <a:t>AI 產出：是草稿與提醒，學生要修改，導師要確認，系統才產出正式 Word</a:t>
+            </a:r>
+          </a:p>
+          <a:p>
+            <a:pPr>
+              <a:lnSpc>
+                <a:spcPct val="110000"/>
+              </a:lnSpc>
+              <a:spcAft>
+                <a:spcPts val="800"/>
+              </a:spcAft>
+              <a:defRPr sz="2100">
+                <a:solidFill>
+                  <a:srgbClr val="232C36"/>
+                </a:solidFill>
+                <a:latin typeface="Microsoft JhengHei"/>
+              </a:defRPr>
+            </a:pPr>
+            <a:r>
+              <a:t>招生規則：Agent 只能產生待審版本，不能直接覆蓋已發布規則</a:t>
+            </a:r>
+          </a:p>
+        </p:txBody>
+      </p:sp>
+      <p:sp>
+        <p:nvSpPr>
+          <p:cNvPr id="7" name="Rounded Rectangle 6"/>
+          <p:cNvSpPr/>
+          <p:nvPr/>
+        </p:nvSpPr>
+        <p:spPr>
+          <a:xfrm>
+            <a:off x="777240" y="5074920"/>
+            <a:ext cx="10561320" cy="822960"/>
+          </a:xfrm>
+          <a:prstGeom prst="roundRect">
+            <a:avLst/>
+          </a:prstGeom>
+          <a:solidFill>
+            <a:srgbClr val="F2F6F9"/>
+          </a:solidFill>
+          <a:ln w="15240">
+            <a:solidFill>
+              <a:srgbClr val="B13F3F"/>
+            </a:solidFill>
+          </a:ln>
+        </p:spPr>
+        <p:style>
+          <a:lnRef idx="1">
+            <a:schemeClr val="accent1"/>
+          </a:lnRef>
+          <a:fillRef idx="3">
+            <a:schemeClr val="accent1"/>
+          </a:fillRef>
+          <a:effectRef idx="2">
+            <a:schemeClr val="accent1"/>
+          </a:effectRef>
+          <a:fontRef idx="minor">
+            <a:schemeClr val="lt1"/>
+          </a:fontRef>
+        </p:style>
+        <p:txBody>
+          <a:bodyPr rtlCol="0" anchor="ctr"/>
+          <a:lstStyle/>
+          <a:p>
+            <a:pPr algn="ctr"/>
           </a:p>
         </p:txBody>
       </p:sp>
@@ -4926,29 +5003,64 @@
         </p:nvSpPr>
         <p:spPr>
           <a:xfrm>
-            <a:off x="868680" y="5257800"/>
-            <a:ext cx="10332720" cy="411480"/>
-          </a:xfrm>
-          <a:prstGeom prst="rect">
-            <a:avLst/>
-          </a:prstGeom>
-          <a:noFill/>
-        </p:spPr>
-        <p:txBody>
-          <a:bodyPr wrap="square" lIns="54864" rIns="54864" tIns="27432" bIns="27432" anchor="t">
-            <a:spAutoFit/>
-          </a:bodyPr>
-          <a:lstStyle/>
-          <a:p>
-            <a:pPr algn="ctr"/>
-            <a:r>
-              <a:rPr sz="1900" b="1">
-                <a:solidFill>
-                  <a:srgbClr val="142E4E"/>
-                </a:solidFill>
-                <a:latin typeface="Microsoft JhengHei"/>
-              </a:rPr>
-              <a:t>建議請老師直接給「可以／不可以／需要補件」的決定。</a:t>
+            <a:off x="941832" y="5184648"/>
+            <a:ext cx="10241280" cy="256032"/>
+          </a:xfrm>
+          <a:prstGeom prst="rect">
+            <a:avLst/>
+          </a:prstGeom>
+          <a:noFill/>
+        </p:spPr>
+        <p:txBody>
+          <a:bodyPr wrap="square" lIns="54864" rIns="54864" tIns="27432" bIns="27432" anchor="t">
+            <a:spAutoFit/>
+          </a:bodyPr>
+          <a:lstStyle/>
+          <a:p>
+            <a:pPr algn="l"/>
+            <a:r>
+              <a:rPr sz="1300" b="1">
+                <a:solidFill>
+                  <a:srgbClr val="B13F3F"/>
+                </a:solidFill>
+                <a:latin typeface="Microsoft JhengHei"/>
+              </a:rPr>
+              <a:t>需要決策</a:t>
+            </a:r>
+          </a:p>
+        </p:txBody>
+      </p:sp>
+      <p:sp>
+        <p:nvSpPr>
+          <p:cNvPr id="9" name="TextBox 8"/>
+          <p:cNvSpPr txBox="1"/>
+          <p:nvPr/>
+        </p:nvSpPr>
+        <p:spPr>
+          <a:xfrm>
+            <a:off x="941832" y="5513831"/>
+            <a:ext cx="10241280" cy="292608"/>
+          </a:xfrm>
+          <a:prstGeom prst="rect">
+            <a:avLst/>
+          </a:prstGeom>
+          <a:noFill/>
+        </p:spPr>
+        <p:txBody>
+          <a:bodyPr wrap="square" lIns="54864" rIns="54864" tIns="27432" bIns="27432" anchor="t">
+            <a:spAutoFit/>
+          </a:bodyPr>
+          <a:lstStyle/>
+          <a:p>
+            <a:pPr algn="l"/>
+            <a:r>
+              <a:rPr sz="1600" b="0">
+                <a:solidFill>
+                  <a:srgbClr val="232C36"/>
+                </a:solidFill>
+                <a:latin typeface="Microsoft JhengHei"/>
+              </a:rPr>
+              <a:t>是否允許把學生資料送到 Google Gemini？若允許，採免費方案、付費方案，或要求學生同意？</a:t>
             </a:r>
           </a:p>
         </p:txBody>
@@ -5052,7 +5164,7 @@
                 </a:solidFill>
                 <a:latin typeface="Microsoft JhengHei"/>
               </a:rPr>
-              <a:t>請老師或科辦確認：資料與規則</a:t>
+              <a:t>請老師先確認：會擋住開發的問題</a:t>
             </a:r>
           </a:p>
         </p:txBody>
@@ -5087,7 +5199,7 @@
                 </a:solidFill>
                 <a:latin typeface="Microsoft JhengHei"/>
               </a:rPr>
-              <a:t>討論清單 2</a:t>
+              <a:t>討論清單 1</a:t>
             </a:r>
           </a:p>
         </p:txBody>
@@ -5135,8 +5247,43 @@
         </p:nvSpPr>
         <p:spPr>
           <a:xfrm>
-            <a:off x="868680" y="1234440"/>
-            <a:ext cx="10424160" cy="3474720"/>
+            <a:off x="777240" y="1115568"/>
+            <a:ext cx="10698480" cy="365760"/>
+          </a:xfrm>
+          <a:prstGeom prst="rect">
+            <a:avLst/>
+          </a:prstGeom>
+          <a:noFill/>
+        </p:spPr>
+        <p:txBody>
+          <a:bodyPr wrap="square" lIns="54864" rIns="54864" tIns="27432" bIns="27432" anchor="t">
+            <a:spAutoFit/>
+          </a:bodyPr>
+          <a:lstStyle/>
+          <a:p>
+            <a:pPr algn="l"/>
+            <a:r>
+              <a:rPr sz="2200" b="1">
+                <a:solidFill>
+                  <a:srgbClr val="B13F3F"/>
+                </a:solidFill>
+                <a:latin typeface="Microsoft JhengHei"/>
+              </a:rPr>
+              <a:t>這三題若沒有答案，AI 與權限設計都可能重做。</a:t>
+            </a:r>
+          </a:p>
+        </p:txBody>
+      </p:sp>
+      <p:sp>
+        <p:nvSpPr>
+          <p:cNvPr id="7" name="TextBox 6"/>
+          <p:cNvSpPr txBox="1"/>
+          <p:nvPr/>
+        </p:nvSpPr>
+        <p:spPr>
+          <a:xfrm>
+            <a:off x="868680" y="1828800"/>
+            <a:ext cx="10424160" cy="2468880"/>
           </a:xfrm>
           <a:prstGeom prst="rect">
             <a:avLst/>
@@ -5156,7 +5303,7 @@
               <a:spcAft>
                 <a:spcPts val="800"/>
               </a:spcAft>
-              <a:defRPr sz="2000">
+              <a:defRPr sz="2300">
                 <a:solidFill>
                   <a:srgbClr val="232C36"/>
                 </a:solidFill>
@@ -5164,7 +5311,7 @@
               </a:defRPr>
             </a:pPr>
             <a:r>
-              <a:t>4. 9 份知識庫文件由誰核對？哪些學年度、哪些屆別適用？</a:t>
+              <a:t>1. 學生資料可以送給 Google Gemini 嗎？需要同意書或改用付費方案嗎？</a:t>
             </a:r>
           </a:p>
           <a:p>
@@ -5175,7 +5322,7 @@
               <a:spcAft>
                 <a:spcPts val="800"/>
               </a:spcAft>
-              <a:defRPr sz="2000">
+              <a:defRPr sz="2300">
                 <a:solidFill>
                   <a:srgbClr val="232C36"/>
                 </a:solidFill>
@@ -5183,7 +5330,7 @@
               </a:defRPr>
             </a:pPr>
             <a:r>
-              <a:t>5. 校系的「個人特質與專業技能」要對應哪些資料類別？例如 50% 權重怎麼算？</a:t>
+              <a:t>2. AI 費用由學校、科上、專題經費，還是由學生自行提供金鑰？</a:t>
             </a:r>
           </a:p>
           <a:p>
@@ -5194,7 +5341,7 @@
               <a:spcAft>
                 <a:spcPts val="800"/>
               </a:spcAft>
-              <a:defRPr sz="2000">
+              <a:defRPr sz="2300">
                 <a:solidFill>
                   <a:srgbClr val="232C36"/>
                 </a:solidFill>
@@ -5202,141 +5349,42 @@
               </a:defRPr>
             </a:pPr>
             <a:r>
-              <a:t>6. 招生 Agent 要監測哪些官方網址？各校分則是否列入？</a:t>
-            </a:r>
-          </a:p>
-          <a:p>
-            <a:pPr>
-              <a:lnSpc>
-                <a:spcPct val="110000"/>
-              </a:lnSpc>
-              <a:spcAft>
-                <a:spcPts val="800"/>
-              </a:spcAft>
-              <a:defRPr sz="2000">
-                <a:solidFill>
-                  <a:srgbClr val="232C36"/>
-                </a:solidFill>
-                <a:latin typeface="Microsoft JhengHei"/>
-              </a:defRPr>
-            </a:pPr>
-            <a:r>
-              <a:t>7. 導師是否可看本班學生的成績單、證照、佐證照片與自傳原始檔？專任教師是否不同？</a:t>
-            </a:r>
-          </a:p>
-        </p:txBody>
-      </p:sp>
-      <p:sp>
-        <p:nvSpPr>
-          <p:cNvPr id="7" name="Rounded Rectangle 6"/>
-          <p:cNvSpPr/>
-          <p:nvPr/>
-        </p:nvSpPr>
-        <p:spPr>
-          <a:xfrm>
-            <a:off x="868680" y="5074920"/>
-            <a:ext cx="10424160" cy="822960"/>
-          </a:xfrm>
-          <a:prstGeom prst="roundRect">
-            <a:avLst/>
-          </a:prstGeom>
-          <a:solidFill>
-            <a:srgbClr val="F2F6F9"/>
-          </a:solidFill>
-          <a:ln w="15240">
-            <a:solidFill>
-              <a:srgbClr val="208985"/>
-            </a:solidFill>
-          </a:ln>
-        </p:spPr>
-        <p:style>
-          <a:lnRef idx="1">
-            <a:schemeClr val="accent1"/>
-          </a:lnRef>
-          <a:fillRef idx="3">
-            <a:schemeClr val="accent1"/>
-          </a:fillRef>
-          <a:effectRef idx="2">
-            <a:schemeClr val="accent1"/>
-          </a:effectRef>
-          <a:fontRef idx="minor">
-            <a:schemeClr val="lt1"/>
-          </a:fontRef>
-        </p:style>
-        <p:txBody>
-          <a:bodyPr rtlCol="0" anchor="ctr"/>
+              <a:t>3. AI 協助自傳是否可放入備審？是否要標示「AI 協助草稿」並由導師確認？</a:t>
+            </a:r>
+          </a:p>
+        </p:txBody>
+      </p:sp>
+      <p:sp>
+        <p:nvSpPr>
+          <p:cNvPr id="8" name="TextBox 7"/>
+          <p:cNvSpPr txBox="1"/>
+          <p:nvPr/>
+        </p:nvSpPr>
+        <p:spPr>
+          <a:xfrm>
+            <a:off x="868680" y="5257800"/>
+            <a:ext cx="10332720" cy="411480"/>
+          </a:xfrm>
+          <a:prstGeom prst="rect">
+            <a:avLst/>
+          </a:prstGeom>
+          <a:noFill/>
+        </p:spPr>
+        <p:txBody>
+          <a:bodyPr wrap="square" lIns="54864" rIns="54864" tIns="27432" bIns="27432" anchor="t">
+            <a:spAutoFit/>
+          </a:bodyPr>
           <a:lstStyle/>
           <a:p>
             <a:pPr algn="ctr"/>
-          </a:p>
-        </p:txBody>
-      </p:sp>
-      <p:sp>
-        <p:nvSpPr>
-          <p:cNvPr id="8" name="TextBox 7"/>
-          <p:cNvSpPr txBox="1"/>
-          <p:nvPr/>
-        </p:nvSpPr>
-        <p:spPr>
-          <a:xfrm>
-            <a:off x="1033271" y="5184648"/>
-            <a:ext cx="10104120" cy="256032"/>
-          </a:xfrm>
-          <a:prstGeom prst="rect">
-            <a:avLst/>
-          </a:prstGeom>
-          <a:noFill/>
-        </p:spPr>
-        <p:txBody>
-          <a:bodyPr wrap="square" lIns="54864" rIns="54864" tIns="27432" bIns="27432" anchor="t">
-            <a:spAutoFit/>
-          </a:bodyPr>
-          <a:lstStyle/>
-          <a:p>
-            <a:pPr algn="l"/>
-            <a:r>
-              <a:rPr sz="1300" b="1">
-                <a:solidFill>
-                  <a:srgbClr val="208985"/>
-                </a:solidFill>
-                <a:latin typeface="Microsoft JhengHei"/>
-              </a:rPr>
-              <a:t>目前已知</a:t>
-            </a:r>
-          </a:p>
-        </p:txBody>
-      </p:sp>
-      <p:sp>
-        <p:nvSpPr>
-          <p:cNvPr id="9" name="TextBox 8"/>
-          <p:cNvSpPr txBox="1"/>
-          <p:nvPr/>
-        </p:nvSpPr>
-        <p:spPr>
-          <a:xfrm>
-            <a:off x="1033271" y="5513831"/>
-            <a:ext cx="10104120" cy="292608"/>
-          </a:xfrm>
-          <a:prstGeom prst="rect">
-            <a:avLst/>
-          </a:prstGeom>
-          <a:noFill/>
-        </p:spPr>
-        <p:txBody>
-          <a:bodyPr wrap="square" lIns="54864" rIns="54864" tIns="27432" bIns="27432" anchor="t">
-            <a:spAutoFit/>
-          </a:bodyPr>
-          <a:lstStyle/>
-          <a:p>
-            <a:pPr algn="l"/>
-            <a:r>
-              <a:rPr sz="1600" b="0">
-                <a:solidFill>
-                  <a:srgbClr val="232C36"/>
-                </a:solidFill>
-                <a:latin typeface="Microsoft JhengHei"/>
-              </a:rPr>
-              <a:t>系統可以做到權限限制，但「誰應該看得到」必須由老師與科辦決定。</a:t>
+            <a:r>
+              <a:rPr sz="1900" b="1">
+                <a:solidFill>
+                  <a:srgbClr val="142E4E"/>
+                </a:solidFill>
+                <a:latin typeface="Microsoft JhengHei"/>
+              </a:rPr>
+              <a:t>建議請老師直接給「可以／不可以／需要補件」的決定。</a:t>
             </a:r>
           </a:p>
         </p:txBody>
@@ -5440,7 +5488,7 @@
                 </a:solidFill>
                 <a:latin typeface="Microsoft JhengHei"/>
               </a:rPr>
-              <a:t>請老師補充：尚未定義的角色與例外</a:t>
+              <a:t>請老師或科辦確認：資料與規則</a:t>
             </a:r>
           </a:p>
         </p:txBody>
@@ -5475,7 +5523,7 @@
                 </a:solidFill>
                 <a:latin typeface="Microsoft JhengHei"/>
               </a:rPr>
-              <a:t>討論清單 3</a:t>
+              <a:t>討論清單 2</a:t>
             </a:r>
           </a:p>
         </p:txBody>
@@ -5523,7 +5571,7 @@
         </p:nvSpPr>
         <p:spPr>
           <a:xfrm>
-            <a:off x="868680" y="1325880"/>
+            <a:off x="868680" y="1234440"/>
             <a:ext cx="10424160" cy="3474720"/>
           </a:xfrm>
           <a:prstGeom prst="rect">
@@ -5552,7 +5600,7 @@
               </a:defRPr>
             </a:pPr>
             <a:r>
-              <a:t>8. 科助在系統裡的任務是什麼？要維護資料、協助審核，還是只查看統計？</a:t>
+              <a:t>4. 9 份知識庫文件由誰核對？哪些學年度、哪些屆別適用？</a:t>
             </a:r>
           </a:p>
           <a:p>
@@ -5571,7 +5619,7 @@
               </a:defRPr>
             </a:pPr>
             <a:r>
-              <a:t>9. 期中修完的課暫時看不到、微學分不在成績單上，要怎麼補登與驗證？</a:t>
+              <a:t>5. 校系的「個人特質與專業技能」要對應哪些資料類別？例如 50% 權重怎麼算？</a:t>
             </a:r>
           </a:p>
           <a:p>
@@ -5590,7 +5638,7 @@
               </a:defRPr>
             </a:pPr>
             <a:r>
-              <a:t>10. 讀書計畫是否也需要 AI 小幫手？還是先完成自傳即可？</a:t>
+              <a:t>6. 招生 Agent 要監測哪些官方網址？各校分則是否列入？</a:t>
             </a:r>
           </a:p>
           <a:p>
@@ -5609,42 +5657,122 @@
               </a:defRPr>
             </a:pPr>
             <a:r>
-              <a:t>11. 下次驗收要看完整示範流程，還是先看主線功能？</a:t>
-            </a:r>
-          </a:p>
-        </p:txBody>
-      </p:sp>
-      <p:sp>
-        <p:nvSpPr>
-          <p:cNvPr id="7" name="TextBox 6"/>
-          <p:cNvSpPr txBox="1"/>
-          <p:nvPr/>
-        </p:nvSpPr>
-        <p:spPr>
-          <a:xfrm>
-            <a:off x="868680" y="5257800"/>
-            <a:ext cx="10424160" cy="411480"/>
-          </a:xfrm>
-          <a:prstGeom prst="rect">
-            <a:avLst/>
-          </a:prstGeom>
-          <a:noFill/>
-        </p:spPr>
-        <p:txBody>
-          <a:bodyPr wrap="square" lIns="54864" rIns="54864" tIns="27432" bIns="27432" anchor="t">
-            <a:spAutoFit/>
-          </a:bodyPr>
+              <a:t>7. 導師是否可看本班學生的成績單、證照、佐證照片與自傳原始檔？專任教師是否不同？</a:t>
+            </a:r>
+          </a:p>
+        </p:txBody>
+      </p:sp>
+      <p:sp>
+        <p:nvSpPr>
+          <p:cNvPr id="7" name="Rounded Rectangle 6"/>
+          <p:cNvSpPr/>
+          <p:nvPr/>
+        </p:nvSpPr>
+        <p:spPr>
+          <a:xfrm>
+            <a:off x="868680" y="5074920"/>
+            <a:ext cx="10424160" cy="822960"/>
+          </a:xfrm>
+          <a:prstGeom prst="roundRect">
+            <a:avLst/>
+          </a:prstGeom>
+          <a:solidFill>
+            <a:srgbClr val="F2F6F9"/>
+          </a:solidFill>
+          <a:ln w="15240">
+            <a:solidFill>
+              <a:srgbClr val="208985"/>
+            </a:solidFill>
+          </a:ln>
+        </p:spPr>
+        <p:style>
+          <a:lnRef idx="1">
+            <a:schemeClr val="accent1"/>
+          </a:lnRef>
+          <a:fillRef idx="3">
+            <a:schemeClr val="accent1"/>
+          </a:fillRef>
+          <a:effectRef idx="2">
+            <a:schemeClr val="accent1"/>
+          </a:effectRef>
+          <a:fontRef idx="minor">
+            <a:schemeClr val="lt1"/>
+          </a:fontRef>
+        </p:style>
+        <p:txBody>
+          <a:bodyPr rtlCol="0" anchor="ctr"/>
           <a:lstStyle/>
           <a:p>
             <a:pPr algn="ctr"/>
-            <a:r>
-              <a:rPr sz="1900" b="1">
-                <a:solidFill>
-                  <a:srgbClr val="DD812F"/>
-                </a:solidFill>
-                <a:latin typeface="Microsoft JhengHei"/>
-              </a:rPr>
-              <a:t>這些可以晚一點做，但要先留下明確的待辦與負責人。</a:t>
+          </a:p>
+        </p:txBody>
+      </p:sp>
+      <p:sp>
+        <p:nvSpPr>
+          <p:cNvPr id="8" name="TextBox 7"/>
+          <p:cNvSpPr txBox="1"/>
+          <p:nvPr/>
+        </p:nvSpPr>
+        <p:spPr>
+          <a:xfrm>
+            <a:off x="1033271" y="5184648"/>
+            <a:ext cx="10104120" cy="256032"/>
+          </a:xfrm>
+          <a:prstGeom prst="rect">
+            <a:avLst/>
+          </a:prstGeom>
+          <a:noFill/>
+        </p:spPr>
+        <p:txBody>
+          <a:bodyPr wrap="square" lIns="54864" rIns="54864" tIns="27432" bIns="27432" anchor="t">
+            <a:spAutoFit/>
+          </a:bodyPr>
+          <a:lstStyle/>
+          <a:p>
+            <a:pPr algn="l"/>
+            <a:r>
+              <a:rPr sz="1300" b="1">
+                <a:solidFill>
+                  <a:srgbClr val="208985"/>
+                </a:solidFill>
+                <a:latin typeface="Microsoft JhengHei"/>
+              </a:rPr>
+              <a:t>目前已知</a:t>
+            </a:r>
+          </a:p>
+        </p:txBody>
+      </p:sp>
+      <p:sp>
+        <p:nvSpPr>
+          <p:cNvPr id="9" name="TextBox 8"/>
+          <p:cNvSpPr txBox="1"/>
+          <p:nvPr/>
+        </p:nvSpPr>
+        <p:spPr>
+          <a:xfrm>
+            <a:off x="1033271" y="5513831"/>
+            <a:ext cx="10104120" cy="292608"/>
+          </a:xfrm>
+          <a:prstGeom prst="rect">
+            <a:avLst/>
+          </a:prstGeom>
+          <a:noFill/>
+        </p:spPr>
+        <p:txBody>
+          <a:bodyPr wrap="square" lIns="54864" rIns="54864" tIns="27432" bIns="27432" anchor="t">
+            <a:spAutoFit/>
+          </a:bodyPr>
+          <a:lstStyle/>
+          <a:p>
+            <a:pPr algn="l"/>
+            <a:r>
+              <a:rPr sz="1600" b="0">
+                <a:solidFill>
+                  <a:srgbClr val="232C36"/>
+                </a:solidFill>
+                <a:latin typeface="Microsoft JhengHei"/>
+              </a:rPr>
+              <a:t>系統可以做到權限限制，但「誰應該看得到」必須由老師與科辦決定。</a:t>
             </a:r>
           </a:p>
         </p:txBody>
@@ -5748,7 +5876,7 @@
                 </a:solidFill>
                 <a:latin typeface="Microsoft JhengHei"/>
               </a:rPr>
-              <a:t>建議現場示範順序</a:t>
+              <a:t>請老師補充：尚未定義的角色與例外</a:t>
             </a:r>
           </a:p>
         </p:txBody>
@@ -5783,7 +5911,7 @@
                 </a:solidFill>
                 <a:latin typeface="Microsoft JhengHei"/>
               </a:rPr>
-              <a:t>展示腳本</a:t>
+              <a:t>討論清單 3</a:t>
             </a:r>
           </a:p>
         </p:txBody>
@@ -5825,955 +5953,134 @@
       </p:sp>
       <p:sp>
         <p:nvSpPr>
-          <p:cNvPr id="6" name="Rounded Rectangle 5"/>
-          <p:cNvSpPr/>
-          <p:nvPr/>
-        </p:nvSpPr>
-        <p:spPr>
-          <a:xfrm>
-            <a:off x="685800" y="1417320"/>
-            <a:ext cx="2240280" cy="868680"/>
-          </a:xfrm>
-          <a:prstGeom prst="roundRect">
-            <a:avLst/>
-          </a:prstGeom>
-          <a:solidFill>
-            <a:srgbClr val="F2F6F9"/>
-          </a:solidFill>
-          <a:ln>
-            <a:solidFill>
-              <a:srgbClr val="2D73AB"/>
-            </a:solidFill>
-          </a:ln>
-        </p:spPr>
-        <p:style>
-          <a:lnRef idx="1">
-            <a:schemeClr val="accent1"/>
-          </a:lnRef>
-          <a:fillRef idx="3">
-            <a:schemeClr val="accent1"/>
-          </a:fillRef>
-          <a:effectRef idx="2">
-            <a:schemeClr val="accent1"/>
-          </a:effectRef>
-          <a:fontRef idx="minor">
-            <a:schemeClr val="lt1"/>
-          </a:fontRef>
-        </p:style>
-        <p:txBody>
-          <a:bodyPr rtlCol="0" anchor="ctr"/>
+          <p:cNvPr id="6" name="TextBox 5"/>
+          <p:cNvSpPr txBox="1"/>
+          <p:nvPr/>
+        </p:nvSpPr>
+        <p:spPr>
+          <a:xfrm>
+            <a:off x="868680" y="1325880"/>
+            <a:ext cx="10424160" cy="3474720"/>
+          </a:xfrm>
+          <a:prstGeom prst="rect">
+            <a:avLst/>
+          </a:prstGeom>
+          <a:noFill/>
+        </p:spPr>
+        <p:txBody>
+          <a:bodyPr wrap="square" lIns="73152" rIns="73152" tIns="54864">
+            <a:spAutoFit/>
+          </a:bodyPr>
+          <a:lstStyle/>
+          <a:p>
+            <a:pPr>
+              <a:lnSpc>
+                <a:spcPct val="110000"/>
+              </a:lnSpc>
+              <a:spcAft>
+                <a:spcPts val="800"/>
+              </a:spcAft>
+              <a:defRPr sz="2000">
+                <a:solidFill>
+                  <a:srgbClr val="232C36"/>
+                </a:solidFill>
+                <a:latin typeface="Microsoft JhengHei"/>
+              </a:defRPr>
+            </a:pPr>
+            <a:r>
+              <a:t>8. 科助在系統裡的任務是什麼？要維護資料、協助審核，還是只查看統計？</a:t>
+            </a:r>
+          </a:p>
+          <a:p>
+            <a:pPr>
+              <a:lnSpc>
+                <a:spcPct val="110000"/>
+              </a:lnSpc>
+              <a:spcAft>
+                <a:spcPts val="800"/>
+              </a:spcAft>
+              <a:defRPr sz="2000">
+                <a:solidFill>
+                  <a:srgbClr val="232C36"/>
+                </a:solidFill>
+                <a:latin typeface="Microsoft JhengHei"/>
+              </a:defRPr>
+            </a:pPr>
+            <a:r>
+              <a:t>9. 期中修完的課暫時看不到、微學分不在成績單上，要怎麼補登與驗證？</a:t>
+            </a:r>
+          </a:p>
+          <a:p>
+            <a:pPr>
+              <a:lnSpc>
+                <a:spcPct val="110000"/>
+              </a:lnSpc>
+              <a:spcAft>
+                <a:spcPts val="800"/>
+              </a:spcAft>
+              <a:defRPr sz="2000">
+                <a:solidFill>
+                  <a:srgbClr val="232C36"/>
+                </a:solidFill>
+                <a:latin typeface="Microsoft JhengHei"/>
+              </a:defRPr>
+            </a:pPr>
+            <a:r>
+              <a:t>10. 讀書計畫是否也需要 AI 小幫手？還是先完成自傳即可？</a:t>
+            </a:r>
+          </a:p>
+          <a:p>
+            <a:pPr>
+              <a:lnSpc>
+                <a:spcPct val="110000"/>
+              </a:lnSpc>
+              <a:spcAft>
+                <a:spcPts val="800"/>
+              </a:spcAft>
+              <a:defRPr sz="2000">
+                <a:solidFill>
+                  <a:srgbClr val="232C36"/>
+                </a:solidFill>
+                <a:latin typeface="Microsoft JhengHei"/>
+              </a:defRPr>
+            </a:pPr>
+            <a:r>
+              <a:t>11. 下次驗收要看完整示範流程，還是先看主線功能？</a:t>
+            </a:r>
+          </a:p>
+        </p:txBody>
+      </p:sp>
+      <p:sp>
+        <p:nvSpPr>
+          <p:cNvPr id="7" name="TextBox 6"/>
+          <p:cNvSpPr txBox="1"/>
+          <p:nvPr/>
+        </p:nvSpPr>
+        <p:spPr>
+          <a:xfrm>
+            <a:off x="868680" y="5257800"/>
+            <a:ext cx="10424160" cy="411480"/>
+          </a:xfrm>
+          <a:prstGeom prst="rect">
+            <a:avLst/>
+          </a:prstGeom>
+          <a:noFill/>
+        </p:spPr>
+        <p:txBody>
+          <a:bodyPr wrap="square" lIns="54864" rIns="54864" tIns="27432" bIns="27432" anchor="t">
+            <a:spAutoFit/>
+          </a:bodyPr>
           <a:lstStyle/>
           <a:p>
             <a:pPr algn="ctr"/>
-          </a:p>
-        </p:txBody>
-      </p:sp>
-      <p:sp>
-        <p:nvSpPr>
-          <p:cNvPr id="7" name="TextBox 6"/>
-          <p:cNvSpPr txBox="1"/>
-          <p:nvPr/>
-        </p:nvSpPr>
-        <p:spPr>
-          <a:xfrm>
-            <a:off x="795528" y="1572768"/>
-            <a:ext cx="411480" cy="320040"/>
-          </a:xfrm>
-          <a:prstGeom prst="rect">
-            <a:avLst/>
-          </a:prstGeom>
-          <a:noFill/>
-        </p:spPr>
-        <p:txBody>
-          <a:bodyPr wrap="square" lIns="54864" rIns="54864" tIns="27432" bIns="27432" anchor="t">
-            <a:spAutoFit/>
-          </a:bodyPr>
-          <a:lstStyle/>
-          <a:p>
-            <a:pPr algn="l"/>
-            <a:r>
-              <a:rPr sz="1600" b="1">
-                <a:solidFill>
-                  <a:srgbClr val="208985"/>
-                </a:solidFill>
-                <a:latin typeface="Microsoft JhengHei"/>
-              </a:rPr>
-              <a:t>01</a:t>
-            </a:r>
-          </a:p>
-        </p:txBody>
-      </p:sp>
-      <p:sp>
-        <p:nvSpPr>
-          <p:cNvPr id="8" name="TextBox 7"/>
-          <p:cNvSpPr txBox="1"/>
-          <p:nvPr/>
-        </p:nvSpPr>
-        <p:spPr>
-          <a:xfrm>
-            <a:off x="1216152" y="1600200"/>
-            <a:ext cx="1508760" cy="320040"/>
-          </a:xfrm>
-          <a:prstGeom prst="rect">
-            <a:avLst/>
-          </a:prstGeom>
-          <a:noFill/>
-        </p:spPr>
-        <p:txBody>
-          <a:bodyPr wrap="square" lIns="54864" rIns="54864" tIns="27432" bIns="27432" anchor="t">
-            <a:spAutoFit/>
-          </a:bodyPr>
-          <a:lstStyle/>
-          <a:p>
-            <a:pPr algn="ctr"/>
-            <a:r>
-              <a:rPr sz="1800" b="1">
-                <a:solidFill>
-                  <a:srgbClr val="142E4E"/>
-                </a:solidFill>
-                <a:latin typeface="Microsoft JhengHei"/>
-              </a:rPr>
-              <a:t>學生登入</a:t>
-            </a:r>
-          </a:p>
-        </p:txBody>
-      </p:sp>
-      <p:sp>
-        <p:nvSpPr>
-          <p:cNvPr id="9" name="Rounded Rectangle 8"/>
-          <p:cNvSpPr/>
-          <p:nvPr/>
-        </p:nvSpPr>
-        <p:spPr>
-          <a:xfrm>
-            <a:off x="3520440" y="1417320"/>
-            <a:ext cx="2240280" cy="868680"/>
-          </a:xfrm>
-          <a:prstGeom prst="roundRect">
-            <a:avLst/>
-          </a:prstGeom>
-          <a:solidFill>
-            <a:srgbClr val="F2F6F9"/>
-          </a:solidFill>
-          <a:ln>
-            <a:solidFill>
-              <a:srgbClr val="208985"/>
-            </a:solidFill>
-          </a:ln>
-        </p:spPr>
-        <p:style>
-          <a:lnRef idx="1">
-            <a:schemeClr val="accent1"/>
-          </a:lnRef>
-          <a:fillRef idx="3">
-            <a:schemeClr val="accent1"/>
-          </a:fillRef>
-          <a:effectRef idx="2">
-            <a:schemeClr val="accent1"/>
-          </a:effectRef>
-          <a:fontRef idx="minor">
-            <a:schemeClr val="lt1"/>
-          </a:fontRef>
-        </p:style>
-        <p:txBody>
-          <a:bodyPr rtlCol="0" anchor="ctr"/>
-          <a:lstStyle/>
-          <a:p>
-            <a:pPr algn="ctr"/>
-          </a:p>
-        </p:txBody>
-      </p:sp>
-      <p:sp>
-        <p:nvSpPr>
-          <p:cNvPr id="10" name="TextBox 9"/>
-          <p:cNvSpPr txBox="1"/>
-          <p:nvPr/>
-        </p:nvSpPr>
-        <p:spPr>
-          <a:xfrm>
-            <a:off x="3630168" y="1572768"/>
-            <a:ext cx="411480" cy="320040"/>
-          </a:xfrm>
-          <a:prstGeom prst="rect">
-            <a:avLst/>
-          </a:prstGeom>
-          <a:noFill/>
-        </p:spPr>
-        <p:txBody>
-          <a:bodyPr wrap="square" lIns="54864" rIns="54864" tIns="27432" bIns="27432" anchor="t">
-            <a:spAutoFit/>
-          </a:bodyPr>
-          <a:lstStyle/>
-          <a:p>
-            <a:pPr algn="l"/>
-            <a:r>
-              <a:rPr sz="1600" b="1">
-                <a:solidFill>
-                  <a:srgbClr val="208985"/>
-                </a:solidFill>
-                <a:latin typeface="Microsoft JhengHei"/>
-              </a:rPr>
-              <a:t>02</a:t>
-            </a:r>
-          </a:p>
-        </p:txBody>
-      </p:sp>
-      <p:sp>
-        <p:nvSpPr>
-          <p:cNvPr id="11" name="TextBox 10"/>
-          <p:cNvSpPr txBox="1"/>
-          <p:nvPr/>
-        </p:nvSpPr>
-        <p:spPr>
-          <a:xfrm>
-            <a:off x="4050791" y="1600200"/>
-            <a:ext cx="1508760" cy="320040"/>
-          </a:xfrm>
-          <a:prstGeom prst="rect">
-            <a:avLst/>
-          </a:prstGeom>
-          <a:noFill/>
-        </p:spPr>
-        <p:txBody>
-          <a:bodyPr wrap="square" lIns="54864" rIns="54864" tIns="27432" bIns="27432" anchor="t">
-            <a:spAutoFit/>
-          </a:bodyPr>
-          <a:lstStyle/>
-          <a:p>
-            <a:pPr algn="ctr"/>
-            <a:r>
-              <a:rPr sz="1800" b="1">
-                <a:solidFill>
-                  <a:srgbClr val="142E4E"/>
-                </a:solidFill>
-                <a:latin typeface="Microsoft JhengHei"/>
-              </a:rPr>
-              <a:t>選目標校系</a:t>
-            </a:r>
-          </a:p>
-        </p:txBody>
-      </p:sp>
-      <p:sp>
-        <p:nvSpPr>
-          <p:cNvPr id="12" name="Rounded Rectangle 11"/>
-          <p:cNvSpPr/>
-          <p:nvPr/>
-        </p:nvSpPr>
-        <p:spPr>
-          <a:xfrm>
-            <a:off x="6355080" y="1417320"/>
-            <a:ext cx="2240280" cy="868680"/>
-          </a:xfrm>
-          <a:prstGeom prst="roundRect">
-            <a:avLst/>
-          </a:prstGeom>
-          <a:solidFill>
-            <a:srgbClr val="F2F6F9"/>
-          </a:solidFill>
-          <a:ln>
-            <a:solidFill>
-              <a:srgbClr val="DD812F"/>
-            </a:solidFill>
-          </a:ln>
-        </p:spPr>
-        <p:style>
-          <a:lnRef idx="1">
-            <a:schemeClr val="accent1"/>
-          </a:lnRef>
-          <a:fillRef idx="3">
-            <a:schemeClr val="accent1"/>
-          </a:fillRef>
-          <a:effectRef idx="2">
-            <a:schemeClr val="accent1"/>
-          </a:effectRef>
-          <a:fontRef idx="minor">
-            <a:schemeClr val="lt1"/>
-          </a:fontRef>
-        </p:style>
-        <p:txBody>
-          <a:bodyPr rtlCol="0" anchor="ctr"/>
-          <a:lstStyle/>
-          <a:p>
-            <a:pPr algn="ctr"/>
-          </a:p>
-        </p:txBody>
-      </p:sp>
-      <p:sp>
-        <p:nvSpPr>
-          <p:cNvPr id="13" name="TextBox 12"/>
-          <p:cNvSpPr txBox="1"/>
-          <p:nvPr/>
-        </p:nvSpPr>
-        <p:spPr>
-          <a:xfrm>
-            <a:off x="6464808" y="1572768"/>
-            <a:ext cx="411480" cy="320040"/>
-          </a:xfrm>
-          <a:prstGeom prst="rect">
-            <a:avLst/>
-          </a:prstGeom>
-          <a:noFill/>
-        </p:spPr>
-        <p:txBody>
-          <a:bodyPr wrap="square" lIns="54864" rIns="54864" tIns="27432" bIns="27432" anchor="t">
-            <a:spAutoFit/>
-          </a:bodyPr>
-          <a:lstStyle/>
-          <a:p>
-            <a:pPr algn="l"/>
-            <a:r>
-              <a:rPr sz="1600" b="1">
-                <a:solidFill>
-                  <a:srgbClr val="208985"/>
-                </a:solidFill>
-                <a:latin typeface="Microsoft JhengHei"/>
-              </a:rPr>
-              <a:t>03</a:t>
-            </a:r>
-          </a:p>
-        </p:txBody>
-      </p:sp>
-      <p:sp>
-        <p:nvSpPr>
-          <p:cNvPr id="14" name="TextBox 13"/>
-          <p:cNvSpPr txBox="1"/>
-          <p:nvPr/>
-        </p:nvSpPr>
-        <p:spPr>
-          <a:xfrm>
-            <a:off x="6885432" y="1600200"/>
-            <a:ext cx="1508760" cy="320040"/>
-          </a:xfrm>
-          <a:prstGeom prst="rect">
-            <a:avLst/>
-          </a:prstGeom>
-          <a:noFill/>
-        </p:spPr>
-        <p:txBody>
-          <a:bodyPr wrap="square" lIns="54864" rIns="54864" tIns="27432" bIns="27432" anchor="t">
-            <a:spAutoFit/>
-          </a:bodyPr>
-          <a:lstStyle/>
-          <a:p>
-            <a:pPr algn="ctr"/>
-            <a:r>
-              <a:rPr sz="1800" b="1">
-                <a:solidFill>
-                  <a:srgbClr val="142E4E"/>
-                </a:solidFill>
-                <a:latin typeface="Microsoft JhengHei"/>
-              </a:rPr>
-              <a:t>上傳六類資料</a:t>
-            </a:r>
-          </a:p>
-        </p:txBody>
-      </p:sp>
-      <p:sp>
-        <p:nvSpPr>
-          <p:cNvPr id="15" name="Rounded Rectangle 14"/>
-          <p:cNvSpPr/>
-          <p:nvPr/>
-        </p:nvSpPr>
-        <p:spPr>
-          <a:xfrm>
-            <a:off x="9189720" y="1417320"/>
-            <a:ext cx="2240280" cy="868680"/>
-          </a:xfrm>
-          <a:prstGeom prst="roundRect">
-            <a:avLst/>
-          </a:prstGeom>
-          <a:solidFill>
-            <a:srgbClr val="F2F6F9"/>
-          </a:solidFill>
-          <a:ln>
-            <a:solidFill>
-              <a:srgbClr val="142E4E"/>
-            </a:solidFill>
-          </a:ln>
-        </p:spPr>
-        <p:style>
-          <a:lnRef idx="1">
-            <a:schemeClr val="accent1"/>
-          </a:lnRef>
-          <a:fillRef idx="3">
-            <a:schemeClr val="accent1"/>
-          </a:fillRef>
-          <a:effectRef idx="2">
-            <a:schemeClr val="accent1"/>
-          </a:effectRef>
-          <a:fontRef idx="minor">
-            <a:schemeClr val="lt1"/>
-          </a:fontRef>
-        </p:style>
-        <p:txBody>
-          <a:bodyPr rtlCol="0" anchor="ctr"/>
-          <a:lstStyle/>
-          <a:p>
-            <a:pPr algn="ctr"/>
-          </a:p>
-        </p:txBody>
-      </p:sp>
-      <p:sp>
-        <p:nvSpPr>
-          <p:cNvPr id="16" name="TextBox 15"/>
-          <p:cNvSpPr txBox="1"/>
-          <p:nvPr/>
-        </p:nvSpPr>
-        <p:spPr>
-          <a:xfrm>
-            <a:off x="9299448" y="1572768"/>
-            <a:ext cx="411480" cy="320040"/>
-          </a:xfrm>
-          <a:prstGeom prst="rect">
-            <a:avLst/>
-          </a:prstGeom>
-          <a:noFill/>
-        </p:spPr>
-        <p:txBody>
-          <a:bodyPr wrap="square" lIns="54864" rIns="54864" tIns="27432" bIns="27432" anchor="t">
-            <a:spAutoFit/>
-          </a:bodyPr>
-          <a:lstStyle/>
-          <a:p>
-            <a:pPr algn="l"/>
-            <a:r>
-              <a:rPr sz="1600" b="1">
-                <a:solidFill>
-                  <a:srgbClr val="208985"/>
-                </a:solidFill>
-                <a:latin typeface="Microsoft JhengHei"/>
-              </a:rPr>
-              <a:t>04</a:t>
-            </a:r>
-          </a:p>
-        </p:txBody>
-      </p:sp>
-      <p:sp>
-        <p:nvSpPr>
-          <p:cNvPr id="17" name="TextBox 16"/>
-          <p:cNvSpPr txBox="1"/>
-          <p:nvPr/>
-        </p:nvSpPr>
-        <p:spPr>
-          <a:xfrm>
-            <a:off x="9720072" y="1600200"/>
-            <a:ext cx="1508760" cy="320040"/>
-          </a:xfrm>
-          <a:prstGeom prst="rect">
-            <a:avLst/>
-          </a:prstGeom>
-          <a:noFill/>
-        </p:spPr>
-        <p:txBody>
-          <a:bodyPr wrap="square" lIns="54864" rIns="54864" tIns="27432" bIns="27432" anchor="t">
-            <a:spAutoFit/>
-          </a:bodyPr>
-          <a:lstStyle/>
-          <a:p>
-            <a:pPr algn="ctr"/>
-            <a:r>
-              <a:rPr sz="1800" b="1">
-                <a:solidFill>
-                  <a:srgbClr val="142E4E"/>
-                </a:solidFill>
-                <a:latin typeface="Microsoft JhengHei"/>
-              </a:rPr>
-              <a:t>查看缺件</a:t>
-            </a:r>
-          </a:p>
-        </p:txBody>
-      </p:sp>
-      <p:sp>
-        <p:nvSpPr>
-          <p:cNvPr id="18" name="Rounded Rectangle 17"/>
-          <p:cNvSpPr/>
-          <p:nvPr/>
-        </p:nvSpPr>
-        <p:spPr>
-          <a:xfrm>
-            <a:off x="685800" y="3246120"/>
-            <a:ext cx="2240280" cy="868680"/>
-          </a:xfrm>
-          <a:prstGeom prst="roundRect">
-            <a:avLst/>
-          </a:prstGeom>
-          <a:solidFill>
-            <a:srgbClr val="F2F6F9"/>
-          </a:solidFill>
-          <a:ln>
-            <a:solidFill>
-              <a:srgbClr val="2D73AB"/>
-            </a:solidFill>
-          </a:ln>
-        </p:spPr>
-        <p:style>
-          <a:lnRef idx="1">
-            <a:schemeClr val="accent1"/>
-          </a:lnRef>
-          <a:fillRef idx="3">
-            <a:schemeClr val="accent1"/>
-          </a:fillRef>
-          <a:effectRef idx="2">
-            <a:schemeClr val="accent1"/>
-          </a:effectRef>
-          <a:fontRef idx="minor">
-            <a:schemeClr val="lt1"/>
-          </a:fontRef>
-        </p:style>
-        <p:txBody>
-          <a:bodyPr rtlCol="0" anchor="ctr"/>
-          <a:lstStyle/>
-          <a:p>
-            <a:pPr algn="ctr"/>
-          </a:p>
-        </p:txBody>
-      </p:sp>
-      <p:sp>
-        <p:nvSpPr>
-          <p:cNvPr id="19" name="TextBox 18"/>
-          <p:cNvSpPr txBox="1"/>
-          <p:nvPr/>
-        </p:nvSpPr>
-        <p:spPr>
-          <a:xfrm>
-            <a:off x="795528" y="3401568"/>
-            <a:ext cx="411480" cy="320040"/>
-          </a:xfrm>
-          <a:prstGeom prst="rect">
-            <a:avLst/>
-          </a:prstGeom>
-          <a:noFill/>
-        </p:spPr>
-        <p:txBody>
-          <a:bodyPr wrap="square" lIns="54864" rIns="54864" tIns="27432" bIns="27432" anchor="t">
-            <a:spAutoFit/>
-          </a:bodyPr>
-          <a:lstStyle/>
-          <a:p>
-            <a:pPr algn="l"/>
-            <a:r>
-              <a:rPr sz="1600" b="1">
-                <a:solidFill>
-                  <a:srgbClr val="208985"/>
-                </a:solidFill>
-                <a:latin typeface="Microsoft JhengHei"/>
-              </a:rPr>
-              <a:t>05</a:t>
-            </a:r>
-          </a:p>
-        </p:txBody>
-      </p:sp>
-      <p:sp>
-        <p:nvSpPr>
-          <p:cNvPr id="20" name="TextBox 19"/>
-          <p:cNvSpPr txBox="1"/>
-          <p:nvPr/>
-        </p:nvSpPr>
-        <p:spPr>
-          <a:xfrm>
-            <a:off x="1216152" y="3429000"/>
-            <a:ext cx="1508760" cy="320040"/>
-          </a:xfrm>
-          <a:prstGeom prst="rect">
-            <a:avLst/>
-          </a:prstGeom>
-          <a:noFill/>
-        </p:spPr>
-        <p:txBody>
-          <a:bodyPr wrap="square" lIns="54864" rIns="54864" tIns="27432" bIns="27432" anchor="t">
-            <a:spAutoFit/>
-          </a:bodyPr>
-          <a:lstStyle/>
-          <a:p>
-            <a:pPr algn="ctr"/>
-            <a:r>
-              <a:rPr sz="1800" b="1">
-                <a:solidFill>
-                  <a:srgbClr val="142E4E"/>
-                </a:solidFill>
-                <a:latin typeface="Microsoft JhengHei"/>
-              </a:rPr>
-              <a:t>自傳小幫手</a:t>
-            </a:r>
-          </a:p>
-        </p:txBody>
-      </p:sp>
-      <p:sp>
-        <p:nvSpPr>
-          <p:cNvPr id="21" name="Rounded Rectangle 20"/>
-          <p:cNvSpPr/>
-          <p:nvPr/>
-        </p:nvSpPr>
-        <p:spPr>
-          <a:xfrm>
-            <a:off x="3520440" y="3246120"/>
-            <a:ext cx="2240280" cy="868680"/>
-          </a:xfrm>
-          <a:prstGeom prst="roundRect">
-            <a:avLst/>
-          </a:prstGeom>
-          <a:solidFill>
-            <a:srgbClr val="F2F6F9"/>
-          </a:solidFill>
-          <a:ln>
-            <a:solidFill>
-              <a:srgbClr val="208985"/>
-            </a:solidFill>
-          </a:ln>
-        </p:spPr>
-        <p:style>
-          <a:lnRef idx="1">
-            <a:schemeClr val="accent1"/>
-          </a:lnRef>
-          <a:fillRef idx="3">
-            <a:schemeClr val="accent1"/>
-          </a:fillRef>
-          <a:effectRef idx="2">
-            <a:schemeClr val="accent1"/>
-          </a:effectRef>
-          <a:fontRef idx="minor">
-            <a:schemeClr val="lt1"/>
-          </a:fontRef>
-        </p:style>
-        <p:txBody>
-          <a:bodyPr rtlCol="0" anchor="ctr"/>
-          <a:lstStyle/>
-          <a:p>
-            <a:pPr algn="ctr"/>
-          </a:p>
-        </p:txBody>
-      </p:sp>
-      <p:sp>
-        <p:nvSpPr>
-          <p:cNvPr id="22" name="TextBox 21"/>
-          <p:cNvSpPr txBox="1"/>
-          <p:nvPr/>
-        </p:nvSpPr>
-        <p:spPr>
-          <a:xfrm>
-            <a:off x="3630168" y="3401568"/>
-            <a:ext cx="411480" cy="320040"/>
-          </a:xfrm>
-          <a:prstGeom prst="rect">
-            <a:avLst/>
-          </a:prstGeom>
-          <a:noFill/>
-        </p:spPr>
-        <p:txBody>
-          <a:bodyPr wrap="square" lIns="54864" rIns="54864" tIns="27432" bIns="27432" anchor="t">
-            <a:spAutoFit/>
-          </a:bodyPr>
-          <a:lstStyle/>
-          <a:p>
-            <a:pPr algn="l"/>
-            <a:r>
-              <a:rPr sz="1600" b="1">
-                <a:solidFill>
-                  <a:srgbClr val="208985"/>
-                </a:solidFill>
-                <a:latin typeface="Microsoft JhengHei"/>
-              </a:rPr>
-              <a:t>06</a:t>
-            </a:r>
-          </a:p>
-        </p:txBody>
-      </p:sp>
-      <p:sp>
-        <p:nvSpPr>
-          <p:cNvPr id="23" name="TextBox 22"/>
-          <p:cNvSpPr txBox="1"/>
-          <p:nvPr/>
-        </p:nvSpPr>
-        <p:spPr>
-          <a:xfrm>
-            <a:off x="4050791" y="3429000"/>
-            <a:ext cx="1508760" cy="320040"/>
-          </a:xfrm>
-          <a:prstGeom prst="rect">
-            <a:avLst/>
-          </a:prstGeom>
-          <a:noFill/>
-        </p:spPr>
-        <p:txBody>
-          <a:bodyPr wrap="square" lIns="54864" rIns="54864" tIns="27432" bIns="27432" anchor="t">
-            <a:spAutoFit/>
-          </a:bodyPr>
-          <a:lstStyle/>
-          <a:p>
-            <a:pPr algn="ctr"/>
-            <a:r>
-              <a:rPr sz="1800" b="1">
-                <a:solidFill>
-                  <a:srgbClr val="142E4E"/>
-                </a:solidFill>
-                <a:latin typeface="Microsoft JhengHei"/>
-              </a:rPr>
-              <a:t>小助手問答</a:t>
-            </a:r>
-          </a:p>
-        </p:txBody>
-      </p:sp>
-      <p:sp>
-        <p:nvSpPr>
-          <p:cNvPr id="24" name="Rounded Rectangle 23"/>
-          <p:cNvSpPr/>
-          <p:nvPr/>
-        </p:nvSpPr>
-        <p:spPr>
-          <a:xfrm>
-            <a:off x="6355080" y="3246120"/>
-            <a:ext cx="2240280" cy="868680"/>
-          </a:xfrm>
-          <a:prstGeom prst="roundRect">
-            <a:avLst/>
-          </a:prstGeom>
-          <a:solidFill>
-            <a:srgbClr val="F2F6F9"/>
-          </a:solidFill>
-          <a:ln>
-            <a:solidFill>
-              <a:srgbClr val="DD812F"/>
-            </a:solidFill>
-          </a:ln>
-        </p:spPr>
-        <p:style>
-          <a:lnRef idx="1">
-            <a:schemeClr val="accent1"/>
-          </a:lnRef>
-          <a:fillRef idx="3">
-            <a:schemeClr val="accent1"/>
-          </a:fillRef>
-          <a:effectRef idx="2">
-            <a:schemeClr val="accent1"/>
-          </a:effectRef>
-          <a:fontRef idx="minor">
-            <a:schemeClr val="lt1"/>
-          </a:fontRef>
-        </p:style>
-        <p:txBody>
-          <a:bodyPr rtlCol="0" anchor="ctr"/>
-          <a:lstStyle/>
-          <a:p>
-            <a:pPr algn="ctr"/>
-          </a:p>
-        </p:txBody>
-      </p:sp>
-      <p:sp>
-        <p:nvSpPr>
-          <p:cNvPr id="25" name="TextBox 24"/>
-          <p:cNvSpPr txBox="1"/>
-          <p:nvPr/>
-        </p:nvSpPr>
-        <p:spPr>
-          <a:xfrm>
-            <a:off x="6464808" y="3401568"/>
-            <a:ext cx="411480" cy="320040"/>
-          </a:xfrm>
-          <a:prstGeom prst="rect">
-            <a:avLst/>
-          </a:prstGeom>
-          <a:noFill/>
-        </p:spPr>
-        <p:txBody>
-          <a:bodyPr wrap="square" lIns="54864" rIns="54864" tIns="27432" bIns="27432" anchor="t">
-            <a:spAutoFit/>
-          </a:bodyPr>
-          <a:lstStyle/>
-          <a:p>
-            <a:pPr algn="l"/>
-            <a:r>
-              <a:rPr sz="1600" b="1">
-                <a:solidFill>
-                  <a:srgbClr val="208985"/>
-                </a:solidFill>
-                <a:latin typeface="Microsoft JhengHei"/>
-              </a:rPr>
-              <a:t>07</a:t>
-            </a:r>
-          </a:p>
-        </p:txBody>
-      </p:sp>
-      <p:sp>
-        <p:nvSpPr>
-          <p:cNvPr id="26" name="TextBox 25"/>
-          <p:cNvSpPr txBox="1"/>
-          <p:nvPr/>
-        </p:nvSpPr>
-        <p:spPr>
-          <a:xfrm>
-            <a:off x="6885432" y="3429000"/>
-            <a:ext cx="1508760" cy="320040"/>
-          </a:xfrm>
-          <a:prstGeom prst="rect">
-            <a:avLst/>
-          </a:prstGeom>
-          <a:noFill/>
-        </p:spPr>
-        <p:txBody>
-          <a:bodyPr wrap="square" lIns="54864" rIns="54864" tIns="27432" bIns="27432" anchor="t">
-            <a:spAutoFit/>
-          </a:bodyPr>
-          <a:lstStyle/>
-          <a:p>
-            <a:pPr algn="ctr"/>
-            <a:r>
-              <a:rPr sz="1800" b="1">
-                <a:solidFill>
-                  <a:srgbClr val="142E4E"/>
-                </a:solidFill>
-                <a:latin typeface="Microsoft JhengHei"/>
-              </a:rPr>
-              <a:t>導師確認</a:t>
-            </a:r>
-          </a:p>
-        </p:txBody>
-      </p:sp>
-      <p:sp>
-        <p:nvSpPr>
-          <p:cNvPr id="27" name="Rounded Rectangle 26"/>
-          <p:cNvSpPr/>
-          <p:nvPr/>
-        </p:nvSpPr>
-        <p:spPr>
-          <a:xfrm>
-            <a:off x="9189720" y="3246120"/>
-            <a:ext cx="2240280" cy="868680"/>
-          </a:xfrm>
-          <a:prstGeom prst="roundRect">
-            <a:avLst/>
-          </a:prstGeom>
-          <a:solidFill>
-            <a:srgbClr val="F2F6F9"/>
-          </a:solidFill>
-          <a:ln>
-            <a:solidFill>
-              <a:srgbClr val="142E4E"/>
-            </a:solidFill>
-          </a:ln>
-        </p:spPr>
-        <p:style>
-          <a:lnRef idx="1">
-            <a:schemeClr val="accent1"/>
-          </a:lnRef>
-          <a:fillRef idx="3">
-            <a:schemeClr val="accent1"/>
-          </a:fillRef>
-          <a:effectRef idx="2">
-            <a:schemeClr val="accent1"/>
-          </a:effectRef>
-          <a:fontRef idx="minor">
-            <a:schemeClr val="lt1"/>
-          </a:fontRef>
-        </p:style>
-        <p:txBody>
-          <a:bodyPr rtlCol="0" anchor="ctr"/>
-          <a:lstStyle/>
-          <a:p>
-            <a:pPr algn="ctr"/>
-          </a:p>
-        </p:txBody>
-      </p:sp>
-      <p:sp>
-        <p:nvSpPr>
-          <p:cNvPr id="28" name="TextBox 27"/>
-          <p:cNvSpPr txBox="1"/>
-          <p:nvPr/>
-        </p:nvSpPr>
-        <p:spPr>
-          <a:xfrm>
-            <a:off x="9299448" y="3401568"/>
-            <a:ext cx="411480" cy="320040"/>
-          </a:xfrm>
-          <a:prstGeom prst="rect">
-            <a:avLst/>
-          </a:prstGeom>
-          <a:noFill/>
-        </p:spPr>
-        <p:txBody>
-          <a:bodyPr wrap="square" lIns="54864" rIns="54864" tIns="27432" bIns="27432" anchor="t">
-            <a:spAutoFit/>
-          </a:bodyPr>
-          <a:lstStyle/>
-          <a:p>
-            <a:pPr algn="l"/>
-            <a:r>
-              <a:rPr sz="1600" b="1">
-                <a:solidFill>
-                  <a:srgbClr val="208985"/>
-                </a:solidFill>
-                <a:latin typeface="Microsoft JhengHei"/>
-              </a:rPr>
-              <a:t>08</a:t>
-            </a:r>
-          </a:p>
-        </p:txBody>
-      </p:sp>
-      <p:sp>
-        <p:nvSpPr>
-          <p:cNvPr id="29" name="TextBox 28"/>
-          <p:cNvSpPr txBox="1"/>
-          <p:nvPr/>
-        </p:nvSpPr>
-        <p:spPr>
-          <a:xfrm>
-            <a:off x="9720072" y="3429000"/>
-            <a:ext cx="1508760" cy="320040"/>
-          </a:xfrm>
-          <a:prstGeom prst="rect">
-            <a:avLst/>
-          </a:prstGeom>
-          <a:noFill/>
-        </p:spPr>
-        <p:txBody>
-          <a:bodyPr wrap="square" lIns="54864" rIns="54864" tIns="27432" bIns="27432" anchor="t">
-            <a:spAutoFit/>
-          </a:bodyPr>
-          <a:lstStyle/>
-          <a:p>
-            <a:pPr algn="ctr"/>
-            <a:r>
-              <a:rPr sz="1800" b="1">
-                <a:solidFill>
-                  <a:srgbClr val="142E4E"/>
-                </a:solidFill>
-                <a:latin typeface="Microsoft JhengHei"/>
-              </a:rPr>
-              <a:t>下載 Word</a:t>
-            </a:r>
-          </a:p>
-        </p:txBody>
-      </p:sp>
-      <p:sp>
-        <p:nvSpPr>
-          <p:cNvPr id="30" name="TextBox 29"/>
-          <p:cNvSpPr txBox="1"/>
-          <p:nvPr/>
-        </p:nvSpPr>
-        <p:spPr>
-          <a:xfrm>
-            <a:off x="822960" y="5532120"/>
-            <a:ext cx="10424160" cy="347472"/>
-          </a:xfrm>
-          <a:prstGeom prst="rect">
-            <a:avLst/>
-          </a:prstGeom>
-          <a:noFill/>
-        </p:spPr>
-        <p:txBody>
-          <a:bodyPr wrap="square" lIns="54864" rIns="54864" tIns="27432" bIns="27432" anchor="t">
-            <a:spAutoFit/>
-          </a:bodyPr>
-          <a:lstStyle/>
-          <a:p>
-            <a:pPr algn="ctr"/>
-            <a:r>
-              <a:rPr sz="1800" b="1">
-                <a:solidFill>
-                  <a:srgbClr val="232C36"/>
-                </a:solidFill>
-                <a:latin typeface="Microsoft JhengHei"/>
-              </a:rPr>
-              <a:t>管理員補充示範：上傳招生資料 → Agent 擷取 → 管理者核對 → 發布校系規則</a:t>
+            <a:r>
+              <a:rPr sz="1900" b="1">
+                <a:solidFill>
+                  <a:srgbClr val="DD812F"/>
+                </a:solidFill>
+                <a:latin typeface="Microsoft JhengHei"/>
+              </a:rPr>
+              <a:t>這些可以晚一點做，但要先留下明確的待辦與負責人。</a:t>
             </a:r>
           </a:p>
         </p:txBody>
@@ -6877,7 +6184,7 @@
                 </a:solidFill>
                 <a:latin typeface="Microsoft JhengHei"/>
               </a:rPr>
-              <a:t>希望老師今天帶走的結論</a:t>
+              <a:t>建議現場示範順序</a:t>
             </a:r>
           </a:p>
         </p:txBody>
@@ -6912,7 +6219,7 @@
                 </a:solidFill>
                 <a:latin typeface="Microsoft JhengHei"/>
               </a:rPr>
-              <a:t>收尾</a:t>
+              <a:t>展示腳本</a:t>
             </a:r>
           </a:p>
         </p:txBody>
@@ -6954,134 +6261,955 @@
       </p:sp>
       <p:sp>
         <p:nvSpPr>
-          <p:cNvPr id="6" name="TextBox 5"/>
-          <p:cNvSpPr txBox="1"/>
-          <p:nvPr/>
-        </p:nvSpPr>
-        <p:spPr>
-          <a:xfrm>
-            <a:off x="914400" y="1417320"/>
-            <a:ext cx="10241280" cy="3108960"/>
-          </a:xfrm>
-          <a:prstGeom prst="rect">
-            <a:avLst/>
-          </a:prstGeom>
-          <a:noFill/>
-        </p:spPr>
-        <p:txBody>
-          <a:bodyPr wrap="square" lIns="73152" rIns="73152" tIns="54864">
-            <a:spAutoFit/>
-          </a:bodyPr>
-          <a:lstStyle/>
-          <a:p>
-            <a:pPr>
-              <a:lnSpc>
-                <a:spcPct val="110000"/>
-              </a:lnSpc>
-              <a:spcAft>
-                <a:spcPts val="800"/>
-              </a:spcAft>
-              <a:defRPr sz="2400">
+          <p:cNvPr id="6" name="Rounded Rectangle 5"/>
+          <p:cNvSpPr/>
+          <p:nvPr/>
+        </p:nvSpPr>
+        <p:spPr>
+          <a:xfrm>
+            <a:off x="685800" y="1417320"/>
+            <a:ext cx="2240280" cy="868680"/>
+          </a:xfrm>
+          <a:prstGeom prst="roundRect">
+            <a:avLst/>
+          </a:prstGeom>
+          <a:solidFill>
+            <a:srgbClr val="F2F6F9"/>
+          </a:solidFill>
+          <a:ln>
+            <a:solidFill>
+              <a:srgbClr val="2D73AB"/>
+            </a:solidFill>
+          </a:ln>
+        </p:spPr>
+        <p:style>
+          <a:lnRef idx="1">
+            <a:schemeClr val="accent1"/>
+          </a:lnRef>
+          <a:fillRef idx="3">
+            <a:schemeClr val="accent1"/>
+          </a:fillRef>
+          <a:effectRef idx="2">
+            <a:schemeClr val="accent1"/>
+          </a:effectRef>
+          <a:fontRef idx="minor">
+            <a:schemeClr val="lt1"/>
+          </a:fontRef>
+        </p:style>
+        <p:txBody>
+          <a:bodyPr rtlCol="0" anchor="ctr"/>
+          <a:lstStyle/>
+          <a:p>
+            <a:pPr algn="ctr"/>
+          </a:p>
+        </p:txBody>
+      </p:sp>
+      <p:sp>
+        <p:nvSpPr>
+          <p:cNvPr id="7" name="TextBox 6"/>
+          <p:cNvSpPr txBox="1"/>
+          <p:nvPr/>
+        </p:nvSpPr>
+        <p:spPr>
+          <a:xfrm>
+            <a:off x="795528" y="1572768"/>
+            <a:ext cx="411480" cy="320040"/>
+          </a:xfrm>
+          <a:prstGeom prst="rect">
+            <a:avLst/>
+          </a:prstGeom>
+          <a:noFill/>
+        </p:spPr>
+        <p:txBody>
+          <a:bodyPr wrap="square" lIns="54864" rIns="54864" tIns="27432" bIns="27432" anchor="t">
+            <a:spAutoFit/>
+          </a:bodyPr>
+          <a:lstStyle/>
+          <a:p>
+            <a:pPr algn="l"/>
+            <a:r>
+              <a:rPr sz="1600" b="1">
+                <a:solidFill>
+                  <a:srgbClr val="208985"/>
+                </a:solidFill>
+                <a:latin typeface="Microsoft JhengHei"/>
+              </a:rPr>
+              <a:t>01</a:t>
+            </a:r>
+          </a:p>
+        </p:txBody>
+      </p:sp>
+      <p:sp>
+        <p:nvSpPr>
+          <p:cNvPr id="8" name="TextBox 7"/>
+          <p:cNvSpPr txBox="1"/>
+          <p:nvPr/>
+        </p:nvSpPr>
+        <p:spPr>
+          <a:xfrm>
+            <a:off x="1216152" y="1600200"/>
+            <a:ext cx="1508760" cy="320040"/>
+          </a:xfrm>
+          <a:prstGeom prst="rect">
+            <a:avLst/>
+          </a:prstGeom>
+          <a:noFill/>
+        </p:spPr>
+        <p:txBody>
+          <a:bodyPr wrap="square" lIns="54864" rIns="54864" tIns="27432" bIns="27432" anchor="t">
+            <a:spAutoFit/>
+          </a:bodyPr>
+          <a:lstStyle/>
+          <a:p>
+            <a:pPr algn="ctr"/>
+            <a:r>
+              <a:rPr sz="1800" b="1">
                 <a:solidFill>
                   <a:srgbClr val="142E4E"/>
                 </a:solidFill>
                 <a:latin typeface="Microsoft JhengHei"/>
-              </a:defRPr>
-            </a:pPr>
-            <a:r>
-              <a:t>主線：學生資料整理與備審產出流程是否正確？</a:t>
-            </a:r>
-          </a:p>
-          <a:p>
-            <a:pPr>
-              <a:lnSpc>
-                <a:spcPct val="110000"/>
-              </a:lnSpc>
-              <a:spcAft>
-                <a:spcPts val="800"/>
-              </a:spcAft>
-              <a:defRPr sz="2400">
+              </a:rPr>
+              <a:t>學生登入</a:t>
+            </a:r>
+          </a:p>
+        </p:txBody>
+      </p:sp>
+      <p:sp>
+        <p:nvSpPr>
+          <p:cNvPr id="9" name="Rounded Rectangle 8"/>
+          <p:cNvSpPr/>
+          <p:nvPr/>
+        </p:nvSpPr>
+        <p:spPr>
+          <a:xfrm>
+            <a:off x="3520440" y="1417320"/>
+            <a:ext cx="2240280" cy="868680"/>
+          </a:xfrm>
+          <a:prstGeom prst="roundRect">
+            <a:avLst/>
+          </a:prstGeom>
+          <a:solidFill>
+            <a:srgbClr val="F2F6F9"/>
+          </a:solidFill>
+          <a:ln>
+            <a:solidFill>
+              <a:srgbClr val="208985"/>
+            </a:solidFill>
+          </a:ln>
+        </p:spPr>
+        <p:style>
+          <a:lnRef idx="1">
+            <a:schemeClr val="accent1"/>
+          </a:lnRef>
+          <a:fillRef idx="3">
+            <a:schemeClr val="accent1"/>
+          </a:fillRef>
+          <a:effectRef idx="2">
+            <a:schemeClr val="accent1"/>
+          </a:effectRef>
+          <a:fontRef idx="minor">
+            <a:schemeClr val="lt1"/>
+          </a:fontRef>
+        </p:style>
+        <p:txBody>
+          <a:bodyPr rtlCol="0" anchor="ctr"/>
+          <a:lstStyle/>
+          <a:p>
+            <a:pPr algn="ctr"/>
+          </a:p>
+        </p:txBody>
+      </p:sp>
+      <p:sp>
+        <p:nvSpPr>
+          <p:cNvPr id="10" name="TextBox 9"/>
+          <p:cNvSpPr txBox="1"/>
+          <p:nvPr/>
+        </p:nvSpPr>
+        <p:spPr>
+          <a:xfrm>
+            <a:off x="3630168" y="1572768"/>
+            <a:ext cx="411480" cy="320040"/>
+          </a:xfrm>
+          <a:prstGeom prst="rect">
+            <a:avLst/>
+          </a:prstGeom>
+          <a:noFill/>
+        </p:spPr>
+        <p:txBody>
+          <a:bodyPr wrap="square" lIns="54864" rIns="54864" tIns="27432" bIns="27432" anchor="t">
+            <a:spAutoFit/>
+          </a:bodyPr>
+          <a:lstStyle/>
+          <a:p>
+            <a:pPr algn="l"/>
+            <a:r>
+              <a:rPr sz="1600" b="1">
+                <a:solidFill>
+                  <a:srgbClr val="208985"/>
+                </a:solidFill>
+                <a:latin typeface="Microsoft JhengHei"/>
+              </a:rPr>
+              <a:t>02</a:t>
+            </a:r>
+          </a:p>
+        </p:txBody>
+      </p:sp>
+      <p:sp>
+        <p:nvSpPr>
+          <p:cNvPr id="11" name="TextBox 10"/>
+          <p:cNvSpPr txBox="1"/>
+          <p:nvPr/>
+        </p:nvSpPr>
+        <p:spPr>
+          <a:xfrm>
+            <a:off x="4050791" y="1600200"/>
+            <a:ext cx="1508760" cy="320040"/>
+          </a:xfrm>
+          <a:prstGeom prst="rect">
+            <a:avLst/>
+          </a:prstGeom>
+          <a:noFill/>
+        </p:spPr>
+        <p:txBody>
+          <a:bodyPr wrap="square" lIns="54864" rIns="54864" tIns="27432" bIns="27432" anchor="t">
+            <a:spAutoFit/>
+          </a:bodyPr>
+          <a:lstStyle/>
+          <a:p>
+            <a:pPr algn="ctr"/>
+            <a:r>
+              <a:rPr sz="1800" b="1">
                 <a:solidFill>
                   <a:srgbClr val="142E4E"/>
                 </a:solidFill>
                 <a:latin typeface="Microsoft JhengHei"/>
-              </a:defRPr>
-            </a:pPr>
-            <a:r>
-              <a:t>權限：導師、專任教師、科助與管理員的可見範圍如何分？</a:t>
-            </a:r>
-          </a:p>
-          <a:p>
-            <a:pPr>
-              <a:lnSpc>
-                <a:spcPct val="110000"/>
-              </a:lnSpc>
-              <a:spcAft>
-                <a:spcPts val="800"/>
-              </a:spcAft>
-              <a:defRPr sz="2400">
+              </a:rPr>
+              <a:t>選目標校系</a:t>
+            </a:r>
+          </a:p>
+        </p:txBody>
+      </p:sp>
+      <p:sp>
+        <p:nvSpPr>
+          <p:cNvPr id="12" name="Rounded Rectangle 11"/>
+          <p:cNvSpPr/>
+          <p:nvPr/>
+        </p:nvSpPr>
+        <p:spPr>
+          <a:xfrm>
+            <a:off x="6355080" y="1417320"/>
+            <a:ext cx="2240280" cy="868680"/>
+          </a:xfrm>
+          <a:prstGeom prst="roundRect">
+            <a:avLst/>
+          </a:prstGeom>
+          <a:solidFill>
+            <a:srgbClr val="F2F6F9"/>
+          </a:solidFill>
+          <a:ln>
+            <a:solidFill>
+              <a:srgbClr val="DD812F"/>
+            </a:solidFill>
+          </a:ln>
+        </p:spPr>
+        <p:style>
+          <a:lnRef idx="1">
+            <a:schemeClr val="accent1"/>
+          </a:lnRef>
+          <a:fillRef idx="3">
+            <a:schemeClr val="accent1"/>
+          </a:fillRef>
+          <a:effectRef idx="2">
+            <a:schemeClr val="accent1"/>
+          </a:effectRef>
+          <a:fontRef idx="minor">
+            <a:schemeClr val="lt1"/>
+          </a:fontRef>
+        </p:style>
+        <p:txBody>
+          <a:bodyPr rtlCol="0" anchor="ctr"/>
+          <a:lstStyle/>
+          <a:p>
+            <a:pPr algn="ctr"/>
+          </a:p>
+        </p:txBody>
+      </p:sp>
+      <p:sp>
+        <p:nvSpPr>
+          <p:cNvPr id="13" name="TextBox 12"/>
+          <p:cNvSpPr txBox="1"/>
+          <p:nvPr/>
+        </p:nvSpPr>
+        <p:spPr>
+          <a:xfrm>
+            <a:off x="6464808" y="1572768"/>
+            <a:ext cx="411480" cy="320040"/>
+          </a:xfrm>
+          <a:prstGeom prst="rect">
+            <a:avLst/>
+          </a:prstGeom>
+          <a:noFill/>
+        </p:spPr>
+        <p:txBody>
+          <a:bodyPr wrap="square" lIns="54864" rIns="54864" tIns="27432" bIns="27432" anchor="t">
+            <a:spAutoFit/>
+          </a:bodyPr>
+          <a:lstStyle/>
+          <a:p>
+            <a:pPr algn="l"/>
+            <a:r>
+              <a:rPr sz="1600" b="1">
+                <a:solidFill>
+                  <a:srgbClr val="208985"/>
+                </a:solidFill>
+                <a:latin typeface="Microsoft JhengHei"/>
+              </a:rPr>
+              <a:t>03</a:t>
+            </a:r>
+          </a:p>
+        </p:txBody>
+      </p:sp>
+      <p:sp>
+        <p:nvSpPr>
+          <p:cNvPr id="14" name="TextBox 13"/>
+          <p:cNvSpPr txBox="1"/>
+          <p:nvPr/>
+        </p:nvSpPr>
+        <p:spPr>
+          <a:xfrm>
+            <a:off x="6885432" y="1600200"/>
+            <a:ext cx="1508760" cy="320040"/>
+          </a:xfrm>
+          <a:prstGeom prst="rect">
+            <a:avLst/>
+          </a:prstGeom>
+          <a:noFill/>
+        </p:spPr>
+        <p:txBody>
+          <a:bodyPr wrap="square" lIns="54864" rIns="54864" tIns="27432" bIns="27432" anchor="t">
+            <a:spAutoFit/>
+          </a:bodyPr>
+          <a:lstStyle/>
+          <a:p>
+            <a:pPr algn="ctr"/>
+            <a:r>
+              <a:rPr sz="1800" b="1">
                 <a:solidFill>
                   <a:srgbClr val="142E4E"/>
                 </a:solidFill>
                 <a:latin typeface="Microsoft JhengHei"/>
-              </a:defRPr>
-            </a:pPr>
-            <a:r>
-              <a:t>AI：資料是否可送出、誰負責核對、AI 草稿是否可接受？</a:t>
-            </a:r>
-          </a:p>
-          <a:p>
-            <a:pPr>
-              <a:lnSpc>
-                <a:spcPct val="110000"/>
-              </a:lnSpc>
-              <a:spcAft>
-                <a:spcPts val="800"/>
-              </a:spcAft>
-              <a:defRPr sz="2400">
+              </a:rPr>
+              <a:t>上傳六類資料</a:t>
+            </a:r>
+          </a:p>
+        </p:txBody>
+      </p:sp>
+      <p:sp>
+        <p:nvSpPr>
+          <p:cNvPr id="15" name="Rounded Rectangle 14"/>
+          <p:cNvSpPr/>
+          <p:nvPr/>
+        </p:nvSpPr>
+        <p:spPr>
+          <a:xfrm>
+            <a:off x="9189720" y="1417320"/>
+            <a:ext cx="2240280" cy="868680"/>
+          </a:xfrm>
+          <a:prstGeom prst="roundRect">
+            <a:avLst/>
+          </a:prstGeom>
+          <a:solidFill>
+            <a:srgbClr val="F2F6F9"/>
+          </a:solidFill>
+          <a:ln>
+            <a:solidFill>
+              <a:srgbClr val="142E4E"/>
+            </a:solidFill>
+          </a:ln>
+        </p:spPr>
+        <p:style>
+          <a:lnRef idx="1">
+            <a:schemeClr val="accent1"/>
+          </a:lnRef>
+          <a:fillRef idx="3">
+            <a:schemeClr val="accent1"/>
+          </a:fillRef>
+          <a:effectRef idx="2">
+            <a:schemeClr val="accent1"/>
+          </a:effectRef>
+          <a:fontRef idx="minor">
+            <a:schemeClr val="lt1"/>
+          </a:fontRef>
+        </p:style>
+        <p:txBody>
+          <a:bodyPr rtlCol="0" anchor="ctr"/>
+          <a:lstStyle/>
+          <a:p>
+            <a:pPr algn="ctr"/>
+          </a:p>
+        </p:txBody>
+      </p:sp>
+      <p:sp>
+        <p:nvSpPr>
+          <p:cNvPr id="16" name="TextBox 15"/>
+          <p:cNvSpPr txBox="1"/>
+          <p:nvPr/>
+        </p:nvSpPr>
+        <p:spPr>
+          <a:xfrm>
+            <a:off x="9299448" y="1572768"/>
+            <a:ext cx="411480" cy="320040"/>
+          </a:xfrm>
+          <a:prstGeom prst="rect">
+            <a:avLst/>
+          </a:prstGeom>
+          <a:noFill/>
+        </p:spPr>
+        <p:txBody>
+          <a:bodyPr wrap="square" lIns="54864" rIns="54864" tIns="27432" bIns="27432" anchor="t">
+            <a:spAutoFit/>
+          </a:bodyPr>
+          <a:lstStyle/>
+          <a:p>
+            <a:pPr algn="l"/>
+            <a:r>
+              <a:rPr sz="1600" b="1">
+                <a:solidFill>
+                  <a:srgbClr val="208985"/>
+                </a:solidFill>
+                <a:latin typeface="Microsoft JhengHei"/>
+              </a:rPr>
+              <a:t>04</a:t>
+            </a:r>
+          </a:p>
+        </p:txBody>
+      </p:sp>
+      <p:sp>
+        <p:nvSpPr>
+          <p:cNvPr id="17" name="TextBox 16"/>
+          <p:cNvSpPr txBox="1"/>
+          <p:nvPr/>
+        </p:nvSpPr>
+        <p:spPr>
+          <a:xfrm>
+            <a:off x="9720072" y="1600200"/>
+            <a:ext cx="1508760" cy="320040"/>
+          </a:xfrm>
+          <a:prstGeom prst="rect">
+            <a:avLst/>
+          </a:prstGeom>
+          <a:noFill/>
+        </p:spPr>
+        <p:txBody>
+          <a:bodyPr wrap="square" lIns="54864" rIns="54864" tIns="27432" bIns="27432" anchor="t">
+            <a:spAutoFit/>
+          </a:bodyPr>
+          <a:lstStyle/>
+          <a:p>
+            <a:pPr algn="ctr"/>
+            <a:r>
+              <a:rPr sz="1800" b="1">
                 <a:solidFill>
                   <a:srgbClr val="142E4E"/>
                 </a:solidFill>
                 <a:latin typeface="Microsoft JhengHei"/>
-              </a:defRPr>
-            </a:pPr>
-            <a:r>
-              <a:t>下一步：哪些決策今天定案，哪些列為後續功能？</a:t>
-            </a:r>
-          </a:p>
-        </p:txBody>
-      </p:sp>
-      <p:sp>
-        <p:nvSpPr>
-          <p:cNvPr id="7" name="TextBox 6"/>
-          <p:cNvSpPr txBox="1"/>
-          <p:nvPr/>
-        </p:nvSpPr>
-        <p:spPr>
-          <a:xfrm>
-            <a:off x="822960" y="5166360"/>
-            <a:ext cx="10515600" cy="502920"/>
-          </a:xfrm>
-          <a:prstGeom prst="rect">
-            <a:avLst/>
-          </a:prstGeom>
-          <a:noFill/>
-        </p:spPr>
-        <p:txBody>
-          <a:bodyPr wrap="square" lIns="54864" rIns="54864" tIns="27432" bIns="27432" anchor="t">
-            <a:spAutoFit/>
-          </a:bodyPr>
+              </a:rPr>
+              <a:t>查看缺件</a:t>
+            </a:r>
+          </a:p>
+        </p:txBody>
+      </p:sp>
+      <p:sp>
+        <p:nvSpPr>
+          <p:cNvPr id="18" name="Rounded Rectangle 17"/>
+          <p:cNvSpPr/>
+          <p:nvPr/>
+        </p:nvSpPr>
+        <p:spPr>
+          <a:xfrm>
+            <a:off x="685800" y="3246120"/>
+            <a:ext cx="2240280" cy="868680"/>
+          </a:xfrm>
+          <a:prstGeom prst="roundRect">
+            <a:avLst/>
+          </a:prstGeom>
+          <a:solidFill>
+            <a:srgbClr val="F2F6F9"/>
+          </a:solidFill>
+          <a:ln>
+            <a:solidFill>
+              <a:srgbClr val="2D73AB"/>
+            </a:solidFill>
+          </a:ln>
+        </p:spPr>
+        <p:style>
+          <a:lnRef idx="1">
+            <a:schemeClr val="accent1"/>
+          </a:lnRef>
+          <a:fillRef idx="3">
+            <a:schemeClr val="accent1"/>
+          </a:fillRef>
+          <a:effectRef idx="2">
+            <a:schemeClr val="accent1"/>
+          </a:effectRef>
+          <a:fontRef idx="minor">
+            <a:schemeClr val="lt1"/>
+          </a:fontRef>
+        </p:style>
+        <p:txBody>
+          <a:bodyPr rtlCol="0" anchor="ctr"/>
           <a:lstStyle/>
           <a:p>
             <a:pPr algn="ctr"/>
-            <a:r>
-              <a:rPr sz="2500" b="1">
+          </a:p>
+        </p:txBody>
+      </p:sp>
+      <p:sp>
+        <p:nvSpPr>
+          <p:cNvPr id="19" name="TextBox 18"/>
+          <p:cNvSpPr txBox="1"/>
+          <p:nvPr/>
+        </p:nvSpPr>
+        <p:spPr>
+          <a:xfrm>
+            <a:off x="795528" y="3401568"/>
+            <a:ext cx="411480" cy="320040"/>
+          </a:xfrm>
+          <a:prstGeom prst="rect">
+            <a:avLst/>
+          </a:prstGeom>
+          <a:noFill/>
+        </p:spPr>
+        <p:txBody>
+          <a:bodyPr wrap="square" lIns="54864" rIns="54864" tIns="27432" bIns="27432" anchor="t">
+            <a:spAutoFit/>
+          </a:bodyPr>
+          <a:lstStyle/>
+          <a:p>
+            <a:pPr algn="l"/>
+            <a:r>
+              <a:rPr sz="1600" b="1">
                 <a:solidFill>
                   <a:srgbClr val="208985"/>
                 </a:solidFill>
                 <a:latin typeface="Microsoft JhengHei"/>
               </a:rPr>
-              <a:t>謝謝老師，請協助我們先把主線定下來。</a:t>
+              <a:t>05</a:t>
+            </a:r>
+          </a:p>
+        </p:txBody>
+      </p:sp>
+      <p:sp>
+        <p:nvSpPr>
+          <p:cNvPr id="20" name="TextBox 19"/>
+          <p:cNvSpPr txBox="1"/>
+          <p:nvPr/>
+        </p:nvSpPr>
+        <p:spPr>
+          <a:xfrm>
+            <a:off x="1216152" y="3429000"/>
+            <a:ext cx="1508760" cy="320040"/>
+          </a:xfrm>
+          <a:prstGeom prst="rect">
+            <a:avLst/>
+          </a:prstGeom>
+          <a:noFill/>
+        </p:spPr>
+        <p:txBody>
+          <a:bodyPr wrap="square" lIns="54864" rIns="54864" tIns="27432" bIns="27432" anchor="t">
+            <a:spAutoFit/>
+          </a:bodyPr>
+          <a:lstStyle/>
+          <a:p>
+            <a:pPr algn="ctr"/>
+            <a:r>
+              <a:rPr sz="1800" b="1">
+                <a:solidFill>
+                  <a:srgbClr val="142E4E"/>
+                </a:solidFill>
+                <a:latin typeface="Microsoft JhengHei"/>
+              </a:rPr>
+              <a:t>自傳小幫手</a:t>
+            </a:r>
+          </a:p>
+        </p:txBody>
+      </p:sp>
+      <p:sp>
+        <p:nvSpPr>
+          <p:cNvPr id="21" name="Rounded Rectangle 20"/>
+          <p:cNvSpPr/>
+          <p:nvPr/>
+        </p:nvSpPr>
+        <p:spPr>
+          <a:xfrm>
+            <a:off x="3520440" y="3246120"/>
+            <a:ext cx="2240280" cy="868680"/>
+          </a:xfrm>
+          <a:prstGeom prst="roundRect">
+            <a:avLst/>
+          </a:prstGeom>
+          <a:solidFill>
+            <a:srgbClr val="F2F6F9"/>
+          </a:solidFill>
+          <a:ln>
+            <a:solidFill>
+              <a:srgbClr val="208985"/>
+            </a:solidFill>
+          </a:ln>
+        </p:spPr>
+        <p:style>
+          <a:lnRef idx="1">
+            <a:schemeClr val="accent1"/>
+          </a:lnRef>
+          <a:fillRef idx="3">
+            <a:schemeClr val="accent1"/>
+          </a:fillRef>
+          <a:effectRef idx="2">
+            <a:schemeClr val="accent1"/>
+          </a:effectRef>
+          <a:fontRef idx="minor">
+            <a:schemeClr val="lt1"/>
+          </a:fontRef>
+        </p:style>
+        <p:txBody>
+          <a:bodyPr rtlCol="0" anchor="ctr"/>
+          <a:lstStyle/>
+          <a:p>
+            <a:pPr algn="ctr"/>
+          </a:p>
+        </p:txBody>
+      </p:sp>
+      <p:sp>
+        <p:nvSpPr>
+          <p:cNvPr id="22" name="TextBox 21"/>
+          <p:cNvSpPr txBox="1"/>
+          <p:nvPr/>
+        </p:nvSpPr>
+        <p:spPr>
+          <a:xfrm>
+            <a:off x="3630168" y="3401568"/>
+            <a:ext cx="411480" cy="320040"/>
+          </a:xfrm>
+          <a:prstGeom prst="rect">
+            <a:avLst/>
+          </a:prstGeom>
+          <a:noFill/>
+        </p:spPr>
+        <p:txBody>
+          <a:bodyPr wrap="square" lIns="54864" rIns="54864" tIns="27432" bIns="27432" anchor="t">
+            <a:spAutoFit/>
+          </a:bodyPr>
+          <a:lstStyle/>
+          <a:p>
+            <a:pPr algn="l"/>
+            <a:r>
+              <a:rPr sz="1600" b="1">
+                <a:solidFill>
+                  <a:srgbClr val="208985"/>
+                </a:solidFill>
+                <a:latin typeface="Microsoft JhengHei"/>
+              </a:rPr>
+              <a:t>06</a:t>
+            </a:r>
+          </a:p>
+        </p:txBody>
+      </p:sp>
+      <p:sp>
+        <p:nvSpPr>
+          <p:cNvPr id="23" name="TextBox 22"/>
+          <p:cNvSpPr txBox="1"/>
+          <p:nvPr/>
+        </p:nvSpPr>
+        <p:spPr>
+          <a:xfrm>
+            <a:off x="4050791" y="3429000"/>
+            <a:ext cx="1508760" cy="320040"/>
+          </a:xfrm>
+          <a:prstGeom prst="rect">
+            <a:avLst/>
+          </a:prstGeom>
+          <a:noFill/>
+        </p:spPr>
+        <p:txBody>
+          <a:bodyPr wrap="square" lIns="54864" rIns="54864" tIns="27432" bIns="27432" anchor="t">
+            <a:spAutoFit/>
+          </a:bodyPr>
+          <a:lstStyle/>
+          <a:p>
+            <a:pPr algn="ctr"/>
+            <a:r>
+              <a:rPr sz="1800" b="1">
+                <a:solidFill>
+                  <a:srgbClr val="142E4E"/>
+                </a:solidFill>
+                <a:latin typeface="Microsoft JhengHei"/>
+              </a:rPr>
+              <a:t>小助手問答</a:t>
+            </a:r>
+          </a:p>
+        </p:txBody>
+      </p:sp>
+      <p:sp>
+        <p:nvSpPr>
+          <p:cNvPr id="24" name="Rounded Rectangle 23"/>
+          <p:cNvSpPr/>
+          <p:nvPr/>
+        </p:nvSpPr>
+        <p:spPr>
+          <a:xfrm>
+            <a:off x="6355080" y="3246120"/>
+            <a:ext cx="2240280" cy="868680"/>
+          </a:xfrm>
+          <a:prstGeom prst="roundRect">
+            <a:avLst/>
+          </a:prstGeom>
+          <a:solidFill>
+            <a:srgbClr val="F2F6F9"/>
+          </a:solidFill>
+          <a:ln>
+            <a:solidFill>
+              <a:srgbClr val="DD812F"/>
+            </a:solidFill>
+          </a:ln>
+        </p:spPr>
+        <p:style>
+          <a:lnRef idx="1">
+            <a:schemeClr val="accent1"/>
+          </a:lnRef>
+          <a:fillRef idx="3">
+            <a:schemeClr val="accent1"/>
+          </a:fillRef>
+          <a:effectRef idx="2">
+            <a:schemeClr val="accent1"/>
+          </a:effectRef>
+          <a:fontRef idx="minor">
+            <a:schemeClr val="lt1"/>
+          </a:fontRef>
+        </p:style>
+        <p:txBody>
+          <a:bodyPr rtlCol="0" anchor="ctr"/>
+          <a:lstStyle/>
+          <a:p>
+            <a:pPr algn="ctr"/>
+          </a:p>
+        </p:txBody>
+      </p:sp>
+      <p:sp>
+        <p:nvSpPr>
+          <p:cNvPr id="25" name="TextBox 24"/>
+          <p:cNvSpPr txBox="1"/>
+          <p:nvPr/>
+        </p:nvSpPr>
+        <p:spPr>
+          <a:xfrm>
+            <a:off x="6464808" y="3401568"/>
+            <a:ext cx="411480" cy="320040"/>
+          </a:xfrm>
+          <a:prstGeom prst="rect">
+            <a:avLst/>
+          </a:prstGeom>
+          <a:noFill/>
+        </p:spPr>
+        <p:txBody>
+          <a:bodyPr wrap="square" lIns="54864" rIns="54864" tIns="27432" bIns="27432" anchor="t">
+            <a:spAutoFit/>
+          </a:bodyPr>
+          <a:lstStyle/>
+          <a:p>
+            <a:pPr algn="l"/>
+            <a:r>
+              <a:rPr sz="1600" b="1">
+                <a:solidFill>
+                  <a:srgbClr val="208985"/>
+                </a:solidFill>
+                <a:latin typeface="Microsoft JhengHei"/>
+              </a:rPr>
+              <a:t>07</a:t>
+            </a:r>
+          </a:p>
+        </p:txBody>
+      </p:sp>
+      <p:sp>
+        <p:nvSpPr>
+          <p:cNvPr id="26" name="TextBox 25"/>
+          <p:cNvSpPr txBox="1"/>
+          <p:nvPr/>
+        </p:nvSpPr>
+        <p:spPr>
+          <a:xfrm>
+            <a:off x="6885432" y="3429000"/>
+            <a:ext cx="1508760" cy="320040"/>
+          </a:xfrm>
+          <a:prstGeom prst="rect">
+            <a:avLst/>
+          </a:prstGeom>
+          <a:noFill/>
+        </p:spPr>
+        <p:txBody>
+          <a:bodyPr wrap="square" lIns="54864" rIns="54864" tIns="27432" bIns="27432" anchor="t">
+            <a:spAutoFit/>
+          </a:bodyPr>
+          <a:lstStyle/>
+          <a:p>
+            <a:pPr algn="ctr"/>
+            <a:r>
+              <a:rPr sz="1800" b="1">
+                <a:solidFill>
+                  <a:srgbClr val="142E4E"/>
+                </a:solidFill>
+                <a:latin typeface="Microsoft JhengHei"/>
+              </a:rPr>
+              <a:t>導師確認</a:t>
+            </a:r>
+          </a:p>
+        </p:txBody>
+      </p:sp>
+      <p:sp>
+        <p:nvSpPr>
+          <p:cNvPr id="27" name="Rounded Rectangle 26"/>
+          <p:cNvSpPr/>
+          <p:nvPr/>
+        </p:nvSpPr>
+        <p:spPr>
+          <a:xfrm>
+            <a:off x="9189720" y="3246120"/>
+            <a:ext cx="2240280" cy="868680"/>
+          </a:xfrm>
+          <a:prstGeom prst="roundRect">
+            <a:avLst/>
+          </a:prstGeom>
+          <a:solidFill>
+            <a:srgbClr val="F2F6F9"/>
+          </a:solidFill>
+          <a:ln>
+            <a:solidFill>
+              <a:srgbClr val="142E4E"/>
+            </a:solidFill>
+          </a:ln>
+        </p:spPr>
+        <p:style>
+          <a:lnRef idx="1">
+            <a:schemeClr val="accent1"/>
+          </a:lnRef>
+          <a:fillRef idx="3">
+            <a:schemeClr val="accent1"/>
+          </a:fillRef>
+          <a:effectRef idx="2">
+            <a:schemeClr val="accent1"/>
+          </a:effectRef>
+          <a:fontRef idx="minor">
+            <a:schemeClr val="lt1"/>
+          </a:fontRef>
+        </p:style>
+        <p:txBody>
+          <a:bodyPr rtlCol="0" anchor="ctr"/>
+          <a:lstStyle/>
+          <a:p>
+            <a:pPr algn="ctr"/>
+          </a:p>
+        </p:txBody>
+      </p:sp>
+      <p:sp>
+        <p:nvSpPr>
+          <p:cNvPr id="28" name="TextBox 27"/>
+          <p:cNvSpPr txBox="1"/>
+          <p:nvPr/>
+        </p:nvSpPr>
+        <p:spPr>
+          <a:xfrm>
+            <a:off x="9299448" y="3401568"/>
+            <a:ext cx="411480" cy="320040"/>
+          </a:xfrm>
+          <a:prstGeom prst="rect">
+            <a:avLst/>
+          </a:prstGeom>
+          <a:noFill/>
+        </p:spPr>
+        <p:txBody>
+          <a:bodyPr wrap="square" lIns="54864" rIns="54864" tIns="27432" bIns="27432" anchor="t">
+            <a:spAutoFit/>
+          </a:bodyPr>
+          <a:lstStyle/>
+          <a:p>
+            <a:pPr algn="l"/>
+            <a:r>
+              <a:rPr sz="1600" b="1">
+                <a:solidFill>
+                  <a:srgbClr val="208985"/>
+                </a:solidFill>
+                <a:latin typeface="Microsoft JhengHei"/>
+              </a:rPr>
+              <a:t>08</a:t>
+            </a:r>
+          </a:p>
+        </p:txBody>
+      </p:sp>
+      <p:sp>
+        <p:nvSpPr>
+          <p:cNvPr id="29" name="TextBox 28"/>
+          <p:cNvSpPr txBox="1"/>
+          <p:nvPr/>
+        </p:nvSpPr>
+        <p:spPr>
+          <a:xfrm>
+            <a:off x="9720072" y="3429000"/>
+            <a:ext cx="1508760" cy="320040"/>
+          </a:xfrm>
+          <a:prstGeom prst="rect">
+            <a:avLst/>
+          </a:prstGeom>
+          <a:noFill/>
+        </p:spPr>
+        <p:txBody>
+          <a:bodyPr wrap="square" lIns="54864" rIns="54864" tIns="27432" bIns="27432" anchor="t">
+            <a:spAutoFit/>
+          </a:bodyPr>
+          <a:lstStyle/>
+          <a:p>
+            <a:pPr algn="ctr"/>
+            <a:r>
+              <a:rPr sz="1800" b="1">
+                <a:solidFill>
+                  <a:srgbClr val="142E4E"/>
+                </a:solidFill>
+                <a:latin typeface="Microsoft JhengHei"/>
+              </a:rPr>
+              <a:t>下載 Word</a:t>
+            </a:r>
+          </a:p>
+        </p:txBody>
+      </p:sp>
+      <p:sp>
+        <p:nvSpPr>
+          <p:cNvPr id="30" name="TextBox 29"/>
+          <p:cNvSpPr txBox="1"/>
+          <p:nvPr/>
+        </p:nvSpPr>
+        <p:spPr>
+          <a:xfrm>
+            <a:off x="822960" y="5532120"/>
+            <a:ext cx="10424160" cy="347472"/>
+          </a:xfrm>
+          <a:prstGeom prst="rect">
+            <a:avLst/>
+          </a:prstGeom>
+          <a:noFill/>
+        </p:spPr>
+        <p:txBody>
+          <a:bodyPr wrap="square" lIns="54864" rIns="54864" tIns="27432" bIns="27432" anchor="t">
+            <a:spAutoFit/>
+          </a:bodyPr>
+          <a:lstStyle/>
+          <a:p>
+            <a:pPr algn="ctr"/>
+            <a:r>
+              <a:rPr sz="1800" b="1">
+                <a:solidFill>
+                  <a:srgbClr val="232C36"/>
+                </a:solidFill>
+                <a:latin typeface="Microsoft JhengHei"/>
+              </a:rPr>
+              <a:t>管理員補充示範：上傳招生資料 → Agent 擷取 → 管理者核對 → 發布校系規則</a:t>
             </a:r>
           </a:p>
         </p:txBody>
@@ -7185,7 +7313,7 @@
                 </a:solidFill>
                 <a:latin typeface="Microsoft JhengHei"/>
               </a:rPr>
-              <a:t>附錄｜舊版整體使用案例圖</a:t>
+              <a:t>希望老師今天帶走的結論</a:t>
             </a:r>
           </a:p>
         </p:txBody>
@@ -7220,7 +7348,7 @@
                 </a:solidFill>
                 <a:latin typeface="Microsoft JhengHei"/>
               </a:rPr>
-              <a:t>流程圖附錄</a:t>
+              <a:t>收尾</a:t>
             </a:r>
           </a:p>
         </p:txBody>
@@ -7260,30 +7388,105 @@
           </a:p>
         </p:txBody>
       </p:sp>
-      <p:pic>
-        <p:nvPicPr>
-          <p:cNvPr id="6" name="Picture 5" descr="D-01-use-case.png"/>
-          <p:cNvPicPr>
-            <a:picLocks noChangeAspect="1"/>
-          </p:cNvPicPr>
-          <p:nvPr/>
-        </p:nvPicPr>
-        <p:blipFill>
-          <a:blip r:embed="rId2"/>
-          <a:stretch>
-            <a:fillRect/>
-          </a:stretch>
-        </p:blipFill>
-        <p:spPr>
-          <a:xfrm>
-            <a:off x="502920" y="3335073"/>
-            <a:ext cx="11201400" cy="782212"/>
-          </a:xfrm>
-          <a:prstGeom prst="rect">
-            <a:avLst/>
-          </a:prstGeom>
-        </p:spPr>
-      </p:pic>
+      <p:sp>
+        <p:nvSpPr>
+          <p:cNvPr id="6" name="TextBox 5"/>
+          <p:cNvSpPr txBox="1"/>
+          <p:nvPr/>
+        </p:nvSpPr>
+        <p:spPr>
+          <a:xfrm>
+            <a:off x="914400" y="1417320"/>
+            <a:ext cx="10241280" cy="3108960"/>
+          </a:xfrm>
+          <a:prstGeom prst="rect">
+            <a:avLst/>
+          </a:prstGeom>
+          <a:noFill/>
+        </p:spPr>
+        <p:txBody>
+          <a:bodyPr wrap="square" lIns="73152" rIns="73152" tIns="54864">
+            <a:spAutoFit/>
+          </a:bodyPr>
+          <a:lstStyle/>
+          <a:p>
+            <a:pPr>
+              <a:lnSpc>
+                <a:spcPct val="110000"/>
+              </a:lnSpc>
+              <a:spcAft>
+                <a:spcPts val="800"/>
+              </a:spcAft>
+              <a:defRPr sz="2400">
+                <a:solidFill>
+                  <a:srgbClr val="142E4E"/>
+                </a:solidFill>
+                <a:latin typeface="Microsoft JhengHei"/>
+              </a:defRPr>
+            </a:pPr>
+            <a:r>
+              <a:t>主線：學生資料整理與備審產出流程是否正確？</a:t>
+            </a:r>
+          </a:p>
+          <a:p>
+            <a:pPr>
+              <a:lnSpc>
+                <a:spcPct val="110000"/>
+              </a:lnSpc>
+              <a:spcAft>
+                <a:spcPts val="800"/>
+              </a:spcAft>
+              <a:defRPr sz="2400">
+                <a:solidFill>
+                  <a:srgbClr val="142E4E"/>
+                </a:solidFill>
+                <a:latin typeface="Microsoft JhengHei"/>
+              </a:defRPr>
+            </a:pPr>
+            <a:r>
+              <a:t>權限：導師、專任教師、科助與管理員的可見範圍如何分？</a:t>
+            </a:r>
+          </a:p>
+          <a:p>
+            <a:pPr>
+              <a:lnSpc>
+                <a:spcPct val="110000"/>
+              </a:lnSpc>
+              <a:spcAft>
+                <a:spcPts val="800"/>
+              </a:spcAft>
+              <a:defRPr sz="2400">
+                <a:solidFill>
+                  <a:srgbClr val="142E4E"/>
+                </a:solidFill>
+                <a:latin typeface="Microsoft JhengHei"/>
+              </a:defRPr>
+            </a:pPr>
+            <a:r>
+              <a:t>AI：資料是否可送出、誰負責核對、AI 草稿是否可接受？</a:t>
+            </a:r>
+          </a:p>
+          <a:p>
+            <a:pPr>
+              <a:lnSpc>
+                <a:spcPct val="110000"/>
+              </a:lnSpc>
+              <a:spcAft>
+                <a:spcPts val="800"/>
+              </a:spcAft>
+              <a:defRPr sz="2400">
+                <a:solidFill>
+                  <a:srgbClr val="142E4E"/>
+                </a:solidFill>
+                <a:latin typeface="Microsoft JhengHei"/>
+              </a:defRPr>
+            </a:pPr>
+            <a:r>
+              <a:t>下一步：哪些決策今天定案，哪些列為後續功能？</a:t>
+            </a:r>
+          </a:p>
+        </p:txBody>
+      </p:sp>
       <p:sp>
         <p:nvSpPr>
           <p:cNvPr id="7" name="TextBox 6"/>
@@ -7292,8 +7495,8 @@
         </p:nvSpPr>
         <p:spPr>
           <a:xfrm>
-            <a:off x="658368" y="6272784"/>
-            <a:ext cx="10881360" cy="228600"/>
+            <a:off x="822960" y="5166360"/>
+            <a:ext cx="10515600" cy="502920"/>
           </a:xfrm>
           <a:prstGeom prst="rect">
             <a:avLst/>
@@ -7308,13 +7511,13 @@
           <a:p>
             <a:pPr algn="ctr"/>
             <a:r>
-              <a:rPr sz="1000" b="0">
-                <a:solidFill>
-                  <a:srgbClr val="5D6B79"/>
-                </a:solidFill>
-                <a:latin typeface="Microsoft JhengHei"/>
-              </a:rPr>
-              <a:t>原圖取自 docs/images，作為目前規格與實作的對照版本</a:t>
+              <a:rPr sz="2500" b="1">
+                <a:solidFill>
+                  <a:srgbClr val="208985"/>
+                </a:solidFill>
+                <a:latin typeface="Microsoft JhengHei"/>
+              </a:rPr>
+              <a:t>謝謝老師，請協助我們先把主線定下來。</a:t>
             </a:r>
           </a:p>
         </p:txBody>
@@ -8052,7 +8255,7 @@
                 </a:solidFill>
                 <a:latin typeface="Microsoft JhengHei"/>
               </a:rPr>
-              <a:t>附錄｜整體使用案例圖</a:t>
+              <a:t>附錄｜舊版整體使用案例圖</a:t>
             </a:r>
           </a:p>
         </p:txBody>
@@ -8129,7 +8332,7 @@
       </p:sp>
       <p:pic>
         <p:nvPicPr>
-          <p:cNvPr id="6" name="Picture 5" descr="D-01-use-case-v2.png"/>
+          <p:cNvPr id="6" name="Picture 5" descr="D-01-use-case.png"/>
           <p:cNvPicPr>
             <a:picLocks noChangeAspect="1"/>
           </p:cNvPicPr>
@@ -8143,8 +8346,8 @@
         </p:blipFill>
         <p:spPr>
           <a:xfrm>
-            <a:off x="2550614" y="1143000"/>
-            <a:ext cx="7106010" cy="5166360"/>
+            <a:off x="502920" y="3335073"/>
+            <a:ext cx="11201400" cy="782212"/>
           </a:xfrm>
           <a:prstGeom prst="rect">
             <a:avLst/>
@@ -8285,7 +8488,7 @@
                 </a:solidFill>
                 <a:latin typeface="Microsoft JhengHei"/>
               </a:rPr>
-              <a:t>附錄｜學生使用案例圖</a:t>
+              <a:t>附錄｜整體使用案例圖</a:t>
             </a:r>
           </a:p>
         </p:txBody>
@@ -8362,7 +8565,7 @@
       </p:sp>
       <p:pic>
         <p:nvPicPr>
-          <p:cNvPr id="6" name="Picture 5" descr="D-01-use-case-student.png"/>
+          <p:cNvPr id="6" name="Picture 5" descr="D-01-use-case-v2.png"/>
           <p:cNvPicPr>
             <a:picLocks noChangeAspect="1"/>
           </p:cNvPicPr>
@@ -8376,8 +8579,8 @@
         </p:blipFill>
         <p:spPr>
           <a:xfrm>
-            <a:off x="2907260" y="1143000"/>
-            <a:ext cx="6392718" cy="5166360"/>
+            <a:off x="2140384" y="1143000"/>
+            <a:ext cx="7926470" cy="5166360"/>
           </a:xfrm>
           <a:prstGeom prst="rect">
             <a:avLst/>
@@ -8518,7 +8721,7 @@
                 </a:solidFill>
                 <a:latin typeface="Microsoft JhengHei"/>
               </a:rPr>
-              <a:t>附錄｜導師使用案例圖</a:t>
+              <a:t>附錄｜學生使用案例圖</a:t>
             </a:r>
           </a:p>
         </p:txBody>
@@ -8595,7 +8798,7 @@
       </p:sp>
       <p:pic>
         <p:nvPicPr>
-          <p:cNvPr id="6" name="Picture 5" descr="D-01-use-case-teacher.png"/>
+          <p:cNvPr id="6" name="Picture 5" descr="D-01-use-case-student.png"/>
           <p:cNvPicPr>
             <a:picLocks noChangeAspect="1"/>
           </p:cNvPicPr>
@@ -8609,8 +8812,8 @@
         </p:blipFill>
         <p:spPr>
           <a:xfrm>
-            <a:off x="2020529" y="1143000"/>
-            <a:ext cx="8166181" cy="5166360"/>
+            <a:off x="3220343" y="1143000"/>
+            <a:ext cx="5766552" cy="5166360"/>
           </a:xfrm>
           <a:prstGeom prst="rect">
             <a:avLst/>
@@ -8751,7 +8954,7 @@
                 </a:solidFill>
                 <a:latin typeface="Microsoft JhengHei"/>
               </a:rPr>
-              <a:t>附錄｜管理員使用案例圖</a:t>
+              <a:t>附錄｜導師使用案例圖</a:t>
             </a:r>
           </a:p>
         </p:txBody>
@@ -8828,7 +9031,7 @@
       </p:sp>
       <p:pic>
         <p:nvPicPr>
-          <p:cNvPr id="6" name="Picture 5" descr="D-01-use-case-admin.png"/>
+          <p:cNvPr id="6" name="Picture 5" descr="D-01-use-case-teacher.png"/>
           <p:cNvPicPr>
             <a:picLocks noChangeAspect="1"/>
           </p:cNvPicPr>
@@ -8984,7 +9187,7 @@
                 </a:solidFill>
                 <a:latin typeface="Microsoft JhengHei"/>
               </a:rPr>
-              <a:t>附錄｜登入與角色導向流程</a:t>
+              <a:t>附錄｜管理員使用案例圖</a:t>
             </a:r>
           </a:p>
         </p:txBody>
@@ -9061,7 +9264,7 @@
       </p:sp>
       <p:pic>
         <p:nvPicPr>
-          <p:cNvPr id="6" name="Picture 5" descr="D-02-login-role-routing.png"/>
+          <p:cNvPr id="6" name="Picture 5" descr="D-01-use-case-admin.png"/>
           <p:cNvPicPr>
             <a:picLocks noChangeAspect="1"/>
           </p:cNvPicPr>
@@ -9075,8 +9278,8 @@
         </p:blipFill>
         <p:spPr>
           <a:xfrm>
-            <a:off x="3870749" y="1143000"/>
-            <a:ext cx="4465740" cy="5166360"/>
+            <a:off x="2020529" y="1143000"/>
+            <a:ext cx="8166181" cy="5166360"/>
           </a:xfrm>
           <a:prstGeom prst="rect">
             <a:avLst/>
@@ -9217,7 +9420,7 @@
                 </a:solidFill>
                 <a:latin typeface="Microsoft JhengHei"/>
               </a:rPr>
-              <a:t>附錄｜學生流程</a:t>
+              <a:t>附錄｜登入與角色導向流程</a:t>
             </a:r>
           </a:p>
         </p:txBody>
@@ -9294,7 +9497,7 @@
       </p:sp>
       <p:pic>
         <p:nvPicPr>
-          <p:cNvPr id="6" name="Picture 5" descr="D-02-student-flow.png"/>
+          <p:cNvPr id="6" name="Picture 5" descr="D-02-login-role-routing.png"/>
           <p:cNvPicPr>
             <a:picLocks noChangeAspect="1"/>
           </p:cNvPicPr>
@@ -9308,8 +9511,8 @@
         </p:blipFill>
         <p:spPr>
           <a:xfrm>
-            <a:off x="5670805" y="1142999"/>
-            <a:ext cx="865629" cy="5166360"/>
+            <a:off x="3740477" y="1143000"/>
+            <a:ext cx="4726284" cy="5166360"/>
           </a:xfrm>
           <a:prstGeom prst="rect">
             <a:avLst/>
@@ -9450,7 +9653,7 @@
                 </a:solidFill>
                 <a:latin typeface="Microsoft JhengHei"/>
               </a:rPr>
-              <a:t>附錄｜專題審核流程</a:t>
+              <a:t>附錄｜學生流程</a:t>
             </a:r>
           </a:p>
         </p:txBody>
@@ -9527,7 +9730,7 @@
       </p:sp>
       <p:pic>
         <p:nvPicPr>
-          <p:cNvPr id="6" name="Picture 5" descr="D-03-group-project-review-flow.png"/>
+          <p:cNvPr id="6" name="Picture 5" descr="D-02-student-flow.png"/>
           <p:cNvPicPr>
             <a:picLocks noChangeAspect="1"/>
           </p:cNvPicPr>
@@ -9541,8 +9744,8 @@
         </p:blipFill>
         <p:spPr>
           <a:xfrm>
-            <a:off x="4225192" y="1143000"/>
-            <a:ext cx="3756854" cy="5166360"/>
+            <a:off x="5670805" y="1142999"/>
+            <a:ext cx="865629" cy="5166360"/>
           </a:xfrm>
           <a:prstGeom prst="rect">
             <a:avLst/>
@@ -9683,7 +9886,7 @@
                 </a:solidFill>
                 <a:latin typeface="Microsoft JhengHei"/>
               </a:rPr>
-              <a:t>附錄｜管理維護流程</a:t>
+              <a:t>附錄｜專題審核流程</a:t>
             </a:r>
           </a:p>
         </p:txBody>
@@ -9760,7 +9963,7 @@
       </p:sp>
       <p:pic>
         <p:nvPicPr>
-          <p:cNvPr id="6" name="Picture 5" descr="D-04-admin-maintenance-flow.png"/>
+          <p:cNvPr id="6" name="Picture 5" descr="D-03-group-project-review-flow.png"/>
           <p:cNvPicPr>
             <a:picLocks noChangeAspect="1"/>
           </p:cNvPicPr>
@@ -9774,8 +9977,8 @@
         </p:blipFill>
         <p:spPr>
           <a:xfrm>
-            <a:off x="5272605" y="1143000"/>
-            <a:ext cx="1662029" cy="5166359"/>
+            <a:off x="4225192" y="1143000"/>
+            <a:ext cx="3756854" cy="5166360"/>
           </a:xfrm>
           <a:prstGeom prst="rect">
             <a:avLst/>
@@ -9916,7 +10119,7 @@
                 </a:solidFill>
                 <a:latin typeface="Microsoft JhengHei"/>
               </a:rPr>
-              <a:t>附錄｜系統架構圖</a:t>
+              <a:t>附錄｜管理維護流程</a:t>
             </a:r>
           </a:p>
         </p:txBody>
@@ -9993,7 +10196,7 @@
       </p:sp>
       <p:pic>
         <p:nvPicPr>
-          <p:cNvPr id="6" name="Picture 5" descr="D-05-system-architecture.png"/>
+          <p:cNvPr id="6" name="Picture 5" descr="D-04-admin-maintenance-flow.png"/>
           <p:cNvPicPr>
             <a:picLocks noChangeAspect="1"/>
           </p:cNvPicPr>
@@ -10007,8 +10210,8 @@
         </p:blipFill>
         <p:spPr>
           <a:xfrm>
-            <a:off x="502920" y="2326005"/>
-            <a:ext cx="11201400" cy="2800350"/>
+            <a:off x="5272605" y="1143000"/>
+            <a:ext cx="1662029" cy="5166359"/>
           </a:xfrm>
           <a:prstGeom prst="rect">
             <a:avLst/>
@@ -10149,7 +10352,7 @@
                 </a:solidFill>
                 <a:latin typeface="Microsoft JhengHei"/>
               </a:rPr>
-              <a:t>附錄｜資料流程圖</a:t>
+              <a:t>附錄｜系統架構圖</a:t>
             </a:r>
           </a:p>
         </p:txBody>
@@ -10226,7 +10429,7 @@
       </p:sp>
       <p:pic>
         <p:nvPicPr>
-          <p:cNvPr id="6" name="Picture 5" descr="D-06-dfd.png"/>
+          <p:cNvPr id="6" name="Picture 5" descr="D-05-system-architecture.png"/>
           <p:cNvPicPr>
             <a:picLocks noChangeAspect="1"/>
           </p:cNvPicPr>
@@ -10240,8 +10443,8 @@
         </p:blipFill>
         <p:spPr>
           <a:xfrm>
-            <a:off x="3290824" y="1143000"/>
-            <a:ext cx="5625592" cy="5166360"/>
+            <a:off x="502920" y="2083117"/>
+            <a:ext cx="11201400" cy="3286125"/>
           </a:xfrm>
           <a:prstGeom prst="rect">
             <a:avLst/>
@@ -10977,7 +11180,7 @@
                 </a:solidFill>
                 <a:latin typeface="Microsoft JhengHei"/>
               </a:rPr>
-              <a:t>附錄｜AI Agent 流程</a:t>
+              <a:t>附錄｜資料流程圖</a:t>
             </a:r>
           </a:p>
         </p:txBody>
@@ -11054,7 +11257,7 @@
       </p:sp>
       <p:pic>
         <p:nvPicPr>
-          <p:cNvPr id="6" name="Picture 5" descr="D-08-ai-agent-flow.png"/>
+          <p:cNvPr id="6" name="Picture 5" descr="D-06-dfd.png"/>
           <p:cNvPicPr>
             <a:picLocks noChangeAspect="1"/>
           </p:cNvPicPr>
@@ -11068,8 +11271,8 @@
         </p:blipFill>
         <p:spPr>
           <a:xfrm>
-            <a:off x="5084311" y="1143000"/>
-            <a:ext cx="2038617" cy="5166360"/>
+            <a:off x="2500037" y="1143000"/>
+            <a:ext cx="7207164" cy="5166360"/>
           </a:xfrm>
           <a:prstGeom prst="rect">
             <a:avLst/>
@@ -11210,7 +11413,7 @@
                 </a:solidFill>
                 <a:latin typeface="Microsoft JhengHei"/>
               </a:rPr>
-              <a:t>附錄｜舊版 ERD 資料表關聯</a:t>
+              <a:t>附錄｜AI Agent 流程</a:t>
             </a:r>
           </a:p>
         </p:txBody>
@@ -11287,7 +11490,7 @@
       </p:sp>
       <p:pic>
         <p:nvPicPr>
-          <p:cNvPr id="6" name="Picture 5" descr="D-09-erd.png"/>
+          <p:cNvPr id="6" name="Picture 5" descr="D-08-ai-agent-flow.png"/>
           <p:cNvPicPr>
             <a:picLocks noChangeAspect="1"/>
           </p:cNvPicPr>
@@ -11301,8 +11504,8 @@
         </p:blipFill>
         <p:spPr>
           <a:xfrm>
-            <a:off x="1428064" y="1143000"/>
-            <a:ext cx="9351111" cy="5166360"/>
+            <a:off x="5084311" y="1143000"/>
+            <a:ext cx="2038617" cy="5166360"/>
           </a:xfrm>
           <a:prstGeom prst="rect">
             <a:avLst/>
@@ -11443,7 +11646,7 @@
                 </a:solidFill>
                 <a:latin typeface="Microsoft JhengHei"/>
               </a:rPr>
-              <a:t>附錄｜ERD 資料表關聯</a:t>
+              <a:t>附錄｜舊版 ERD 資料表關聯</a:t>
             </a:r>
           </a:p>
         </p:txBody>
@@ -11520,7 +11723,7 @@
       </p:sp>
       <p:pic>
         <p:nvPicPr>
-          <p:cNvPr id="6" name="Picture 5" descr="D-09-erd-v2.png"/>
+          <p:cNvPr id="6" name="Picture 5" descr="D-09-erd.png"/>
           <p:cNvPicPr>
             <a:picLocks noChangeAspect="1"/>
           </p:cNvPicPr>
@@ -11534,8 +11737,8 @@
         </p:blipFill>
         <p:spPr>
           <a:xfrm>
-            <a:off x="509108" y="1143000"/>
-            <a:ext cx="11189022" cy="5166360"/>
+            <a:off x="1428064" y="1143000"/>
+            <a:ext cx="9351111" cy="5166360"/>
           </a:xfrm>
           <a:prstGeom prst="rect">
             <a:avLst/>
@@ -11676,7 +11879,7 @@
                 </a:solidFill>
                 <a:latin typeface="Microsoft JhengHei"/>
               </a:rPr>
-              <a:t>附錄｜主線流程</a:t>
+              <a:t>附錄｜ERD 資料表關聯</a:t>
             </a:r>
           </a:p>
         </p:txBody>
@@ -11753,7 +11956,7 @@
       </p:sp>
       <p:pic>
         <p:nvPicPr>
-          <p:cNvPr id="6" name="Picture 5" descr="D-10-main-line-flow.png"/>
+          <p:cNvPr id="6" name="Picture 5" descr="D-09-erd-v2.png"/>
           <p:cNvPicPr>
             <a:picLocks noChangeAspect="1"/>
           </p:cNvPicPr>
@@ -11767,8 +11970,8 @@
         </p:blipFill>
         <p:spPr>
           <a:xfrm>
-            <a:off x="5267446" y="1143000"/>
-            <a:ext cx="1672347" cy="5166359"/>
+            <a:off x="509108" y="1143000"/>
+            <a:ext cx="11189022" cy="5166360"/>
           </a:xfrm>
           <a:prstGeom prst="rect">
             <a:avLst/>
@@ -11909,7 +12112,7 @@
                 </a:solidFill>
                 <a:latin typeface="Microsoft JhengHei"/>
               </a:rPr>
-              <a:t>附錄｜期中核心流程</a:t>
+              <a:t>附錄｜主線流程</a:t>
             </a:r>
           </a:p>
         </p:txBody>
@@ -11986,7 +12189,7 @@
       </p:sp>
       <p:pic>
         <p:nvPicPr>
-          <p:cNvPr id="6" name="Picture 5" descr="D-10-midterm-core-flow.png"/>
+          <p:cNvPr id="6" name="Picture 5" descr="D-10-main-line-flow.png"/>
           <p:cNvPicPr>
             <a:picLocks noChangeAspect="1"/>
           </p:cNvPicPr>
@@ -12000,8 +12203,8 @@
         </p:blipFill>
         <p:spPr>
           <a:xfrm>
-            <a:off x="1611133" y="1143000"/>
-            <a:ext cx="8984973" cy="5166360"/>
+            <a:off x="5202724" y="1143000"/>
+            <a:ext cx="1801791" cy="5166360"/>
           </a:xfrm>
           <a:prstGeom prst="rect">
             <a:avLst/>
@@ -12142,7 +12345,7 @@
                 </a:solidFill>
                 <a:latin typeface="Microsoft JhengHei"/>
               </a:rPr>
-              <a:t>附錄｜報表總覽</a:t>
+              <a:t>附錄｜期中核心流程</a:t>
             </a:r>
           </a:p>
         </p:txBody>
@@ -12219,7 +12422,7 @@
       </p:sp>
       <p:pic>
         <p:nvPicPr>
-          <p:cNvPr id="6" name="Picture 5" descr="D-10-report-overview.png"/>
+          <p:cNvPr id="6" name="Picture 5" descr="D-10-midterm-core-flow.png"/>
           <p:cNvPicPr>
             <a:picLocks noChangeAspect="1"/>
           </p:cNvPicPr>
@@ -12233,8 +12436,8 @@
         </p:blipFill>
         <p:spPr>
           <a:xfrm>
-            <a:off x="502920" y="2912877"/>
-            <a:ext cx="11201399" cy="1626605"/>
+            <a:off x="1611133" y="1143000"/>
+            <a:ext cx="8984973" cy="5166360"/>
           </a:xfrm>
           <a:prstGeom prst="rect">
             <a:avLst/>
@@ -12375,7 +12578,7 @@
                 </a:solidFill>
                 <a:latin typeface="Microsoft JhengHei"/>
               </a:rPr>
-              <a:t>附錄｜行政表單流程</a:t>
+              <a:t>附錄｜報表總覽</a:t>
             </a:r>
           </a:p>
         </p:txBody>
@@ -12452,7 +12655,7 @@
       </p:sp>
       <p:pic>
         <p:nvPicPr>
-          <p:cNvPr id="6" name="Picture 5" descr="D-11-admin-forms-flow.png"/>
+          <p:cNvPr id="6" name="Picture 5" descr="D-10-report-overview.png"/>
           <p:cNvPicPr>
             <a:picLocks noChangeAspect="1"/>
           </p:cNvPicPr>
@@ -12466,8 +12669,8 @@
         </p:blipFill>
         <p:spPr>
           <a:xfrm>
-            <a:off x="5101327" y="1143000"/>
-            <a:ext cx="2004584" cy="5166360"/>
+            <a:off x="502920" y="2912877"/>
+            <a:ext cx="11201399" cy="1626605"/>
           </a:xfrm>
           <a:prstGeom prst="rect">
             <a:avLst/>
@@ -12608,7 +12811,7 @@
                 </a:solidFill>
                 <a:latin typeface="Microsoft JhengHei"/>
               </a:rPr>
-              <a:t>附錄｜招生規則更新流程</a:t>
+              <a:t>附錄｜行政表單流程</a:t>
             </a:r>
           </a:p>
         </p:txBody>
@@ -12685,7 +12888,7 @@
       </p:sp>
       <p:pic>
         <p:nvPicPr>
-          <p:cNvPr id="6" name="Picture 5" descr="D-13-admission-rule-update-flow.png"/>
+          <p:cNvPr id="6" name="Picture 5" descr="D-11-admin-forms-flow.png"/>
           <p:cNvPicPr>
             <a:picLocks noChangeAspect="1"/>
           </p:cNvPicPr>
@@ -12699,8 +12902,8 @@
         </p:blipFill>
         <p:spPr>
           <a:xfrm>
-            <a:off x="5283254" y="1143000"/>
-            <a:ext cx="1640730" cy="5166360"/>
+            <a:off x="5101327" y="1143000"/>
+            <a:ext cx="2004584" cy="5166360"/>
           </a:xfrm>
           <a:prstGeom prst="rect">
             <a:avLst/>
@@ -12841,7 +13044,7 @@
                 </a:solidFill>
                 <a:latin typeface="Microsoft JhengHei"/>
               </a:rPr>
-              <a:t>附錄｜角色責任圖</a:t>
+              <a:t>附錄｜招生規則更新流程</a:t>
             </a:r>
           </a:p>
         </p:txBody>
@@ -12918,7 +13121,7 @@
       </p:sp>
       <p:pic>
         <p:nvPicPr>
-          <p:cNvPr id="6" name="Picture 5" descr="D-14-role-responsibility.png"/>
+          <p:cNvPr id="6" name="Picture 5" descr="D-13-admission-rule-update-flow.png"/>
           <p:cNvPicPr>
             <a:picLocks noChangeAspect="1"/>
           </p:cNvPicPr>
@@ -12932,8 +13135,8 @@
         </p:blipFill>
         <p:spPr>
           <a:xfrm>
-            <a:off x="502920" y="2804636"/>
-            <a:ext cx="11201400" cy="1843087"/>
+            <a:off x="5283254" y="1143000"/>
+            <a:ext cx="1640730" cy="5166360"/>
           </a:xfrm>
           <a:prstGeom prst="rect">
             <a:avLst/>
@@ -13074,7 +13277,7 @@
                 </a:solidFill>
                 <a:latin typeface="Microsoft JhengHei"/>
               </a:rPr>
-              <a:t>附錄｜報表總覽（第二版）</a:t>
+              <a:t>附錄｜角色責任圖</a:t>
             </a:r>
           </a:p>
         </p:txBody>
@@ -13151,7 +13354,7 @@
       </p:sp>
       <p:pic>
         <p:nvPicPr>
-          <p:cNvPr id="6" name="Picture 5" descr="D-15-report-overview.png"/>
+          <p:cNvPr id="6" name="Picture 5" descr="D-14-role-responsibility.png"/>
           <p:cNvPicPr>
             <a:picLocks noChangeAspect="1"/>
           </p:cNvPicPr>
@@ -13165,8 +13368,8 @@
         </p:blipFill>
         <p:spPr>
           <a:xfrm>
-            <a:off x="502920" y="3426142"/>
-            <a:ext cx="11201400" cy="600075"/>
+            <a:off x="502920" y="2797492"/>
+            <a:ext cx="11201400" cy="1857375"/>
           </a:xfrm>
           <a:prstGeom prst="rect">
             <a:avLst/>
@@ -13398,8 +13601,8 @@
         </p:blipFill>
         <p:spPr>
           <a:xfrm>
-            <a:off x="5245246" y="1051560"/>
-            <a:ext cx="1716746" cy="5303520"/>
+            <a:off x="5178806" y="1051560"/>
+            <a:ext cx="1849626" cy="5303520"/>
           </a:xfrm>
           <a:prstGeom prst="rect">
             <a:avLst/>
@@ -13540,7 +13743,7 @@
                 </a:solidFill>
                 <a:latin typeface="Microsoft JhengHei"/>
               </a:rPr>
-              <a:t>附錄｜導師確認流程</a:t>
+              <a:t>附錄｜報表總覽（第二版）</a:t>
             </a:r>
           </a:p>
         </p:txBody>
@@ -13617,7 +13820,7 @@
       </p:sp>
       <p:pic>
         <p:nvPicPr>
-          <p:cNvPr id="6" name="Picture 5" descr="D-16-teacher-confirm-flow.png"/>
+          <p:cNvPr id="6" name="Picture 5" descr="D-15-report-overview.png"/>
           <p:cNvPicPr>
             <a:picLocks noChangeAspect="1"/>
           </p:cNvPicPr>
@@ -13631,8 +13834,8 @@
         </p:blipFill>
         <p:spPr>
           <a:xfrm>
-            <a:off x="4538150" y="1143000"/>
-            <a:ext cx="3130938" cy="5166360"/>
+            <a:off x="502920" y="3054667"/>
+            <a:ext cx="11201400" cy="1343025"/>
           </a:xfrm>
           <a:prstGeom prst="rect">
             <a:avLst/>
@@ -13773,7 +13976,7 @@
                 </a:solidFill>
                 <a:latin typeface="Microsoft JhengHei"/>
               </a:rPr>
-              <a:t>附錄｜管理員維護招生要求流程</a:t>
+              <a:t>附錄｜導師確認流程</a:t>
             </a:r>
           </a:p>
         </p:txBody>
@@ -13850,7 +14053,7 @@
       </p:sp>
       <p:pic>
         <p:nvPicPr>
-          <p:cNvPr id="6" name="Picture 5" descr="D-17-admin-maintain-requirements.png"/>
+          <p:cNvPr id="6" name="Picture 5" descr="D-16-teacher-confirm-flow.png"/>
           <p:cNvPicPr>
             <a:picLocks noChangeAspect="1"/>
           </p:cNvPicPr>
@@ -13864,8 +14067,474 @@
         </p:blipFill>
         <p:spPr>
           <a:xfrm>
+            <a:off x="4057916" y="1143000"/>
+            <a:ext cx="4091406" cy="5166360"/>
+          </a:xfrm>
+          <a:prstGeom prst="rect">
+            <a:avLst/>
+          </a:prstGeom>
+        </p:spPr>
+      </p:pic>
+      <p:sp>
+        <p:nvSpPr>
+          <p:cNvPr id="7" name="TextBox 6"/>
+          <p:cNvSpPr txBox="1"/>
+          <p:nvPr/>
+        </p:nvSpPr>
+        <p:spPr>
+          <a:xfrm>
+            <a:off x="658368" y="6272784"/>
+            <a:ext cx="10881360" cy="228600"/>
+          </a:xfrm>
+          <a:prstGeom prst="rect">
+            <a:avLst/>
+          </a:prstGeom>
+          <a:noFill/>
+        </p:spPr>
+        <p:txBody>
+          <a:bodyPr wrap="square" lIns="54864" rIns="54864" tIns="27432" bIns="27432" anchor="t">
+            <a:spAutoFit/>
+          </a:bodyPr>
+          <a:lstStyle/>
+          <a:p>
+            <a:pPr algn="ctr"/>
+            <a:r>
+              <a:rPr sz="1000" b="0">
+                <a:solidFill>
+                  <a:srgbClr val="5D6B79"/>
+                </a:solidFill>
+                <a:latin typeface="Microsoft JhengHei"/>
+              </a:rPr>
+              <a:t>原圖取自 docs/images，作為目前規格與實作的對照版本</a:t>
+            </a:r>
+          </a:p>
+        </p:txBody>
+      </p:sp>
+    </p:spTree>
+  </p:cSld>
+  <p:clrMapOvr>
+    <a:masterClrMapping/>
+  </p:clrMapOvr>
+</p:sld>
+</file>
+
+<file path=ppt/slides/slide42.xml><?xml version="1.0" encoding="utf-8"?>
+<p:sld xmlns:a="http://schemas.openxmlformats.org/drawingml/2006/main" xmlns:p="http://schemas.openxmlformats.org/presentationml/2006/main" xmlns:r="http://schemas.openxmlformats.org/officeDocument/2006/relationships">
+  <p:cSld>
+    <p:bg>
+      <p:bgPr>
+        <a:solidFill>
+          <a:srgbClr val="FFFFFF"/>
+        </a:solidFill>
+        <a:effectLst/>
+      </p:bgPr>
+    </p:bg>
+    <p:spTree>
+      <p:nvGrpSpPr>
+        <p:cNvPr id="1" name=""/>
+        <p:cNvGrpSpPr/>
+        <p:nvPr/>
+      </p:nvGrpSpPr>
+      <p:grpSpPr/>
+      <p:sp>
+        <p:nvSpPr>
+          <p:cNvPr id="2" name="Rectangle 1"/>
+          <p:cNvSpPr/>
+          <p:nvPr/>
+        </p:nvSpPr>
+        <p:spPr>
+          <a:xfrm>
+            <a:off x="0" y="0"/>
+            <a:ext cx="12191695" cy="164592"/>
+          </a:xfrm>
+          <a:prstGeom prst="rect">
+            <a:avLst/>
+          </a:prstGeom>
+          <a:solidFill>
+            <a:srgbClr val="208985"/>
+          </a:solidFill>
+          <a:ln>
+            <a:noFill/>
+          </a:ln>
+        </p:spPr>
+        <p:style>
+          <a:lnRef idx="1">
+            <a:schemeClr val="accent1"/>
+          </a:lnRef>
+          <a:fillRef idx="3">
+            <a:schemeClr val="accent1"/>
+          </a:fillRef>
+          <a:effectRef idx="2">
+            <a:schemeClr val="accent1"/>
+          </a:effectRef>
+          <a:fontRef idx="minor">
+            <a:schemeClr val="lt1"/>
+          </a:fontRef>
+        </p:style>
+        <p:txBody>
+          <a:bodyPr rtlCol="0" anchor="ctr"/>
+          <a:lstStyle/>
+          <a:p>
+            <a:pPr algn="ctr"/>
+          </a:p>
+        </p:txBody>
+      </p:sp>
+      <p:sp>
+        <p:nvSpPr>
+          <p:cNvPr id="3" name="TextBox 2"/>
+          <p:cNvSpPr txBox="1"/>
+          <p:nvPr/>
+        </p:nvSpPr>
+        <p:spPr>
+          <a:xfrm>
+            <a:off x="566928" y="438912"/>
+            <a:ext cx="10881360" cy="502920"/>
+          </a:xfrm>
+          <a:prstGeom prst="rect">
+            <a:avLst/>
+          </a:prstGeom>
+          <a:noFill/>
+        </p:spPr>
+        <p:txBody>
+          <a:bodyPr wrap="square" lIns="54864" rIns="54864" tIns="27432" bIns="27432" anchor="t">
+            <a:spAutoFit/>
+          </a:bodyPr>
+          <a:lstStyle/>
+          <a:p>
+            <a:pPr algn="l"/>
+            <a:r>
+              <a:rPr sz="2700" b="1">
+                <a:solidFill>
+                  <a:srgbClr val="142E4E"/>
+                </a:solidFill>
+                <a:latin typeface="Microsoft JhengHei"/>
+              </a:rPr>
+              <a:t>附錄｜管理員維護招生要求流程</a:t>
+            </a:r>
+          </a:p>
+        </p:txBody>
+      </p:sp>
+      <p:sp>
+        <p:nvSpPr>
+          <p:cNvPr id="4" name="TextBox 3"/>
+          <p:cNvSpPr txBox="1"/>
+          <p:nvPr/>
+        </p:nvSpPr>
+        <p:spPr>
+          <a:xfrm>
+            <a:off x="10378440" y="512064"/>
+            <a:ext cx="1234440" cy="228600"/>
+          </a:xfrm>
+          <a:prstGeom prst="rect">
+            <a:avLst/>
+          </a:prstGeom>
+          <a:noFill/>
+        </p:spPr>
+        <p:txBody>
+          <a:bodyPr wrap="square" lIns="54864" rIns="54864" tIns="27432" bIns="27432" anchor="t">
+            <a:spAutoFit/>
+          </a:bodyPr>
+          <a:lstStyle/>
+          <a:p>
+            <a:pPr algn="r"/>
+            <a:r>
+              <a:rPr sz="900" b="1">
+                <a:solidFill>
+                  <a:srgbClr val="208985"/>
+                </a:solidFill>
+                <a:latin typeface="Microsoft JhengHei"/>
+              </a:rPr>
+              <a:t>流程圖附錄</a:t>
+            </a:r>
+          </a:p>
+        </p:txBody>
+      </p:sp>
+      <p:sp>
+        <p:nvSpPr>
+          <p:cNvPr id="5" name="TextBox 4"/>
+          <p:cNvSpPr txBox="1"/>
+          <p:nvPr/>
+        </p:nvSpPr>
+        <p:spPr>
+          <a:xfrm>
+            <a:off x="566928" y="6565392"/>
+            <a:ext cx="7772400" cy="182880"/>
+          </a:xfrm>
+          <a:prstGeom prst="rect">
+            <a:avLst/>
+          </a:prstGeom>
+          <a:noFill/>
+        </p:spPr>
+        <p:txBody>
+          <a:bodyPr wrap="square" lIns="54864" rIns="54864" tIns="27432" bIns="27432" anchor="t">
+            <a:spAutoFit/>
+          </a:bodyPr>
+          <a:lstStyle/>
+          <a:p>
+            <a:pPr algn="l"/>
+            <a:r>
+              <a:rPr sz="800" b="0">
+                <a:solidFill>
+                  <a:srgbClr val="5D6B79"/>
+                </a:solidFill>
+                <a:latin typeface="Microsoft JhengHei"/>
+              </a:rPr>
+              <a:t>資管科智慧學習歷程系統｜指導老師討論版</a:t>
+            </a:r>
+          </a:p>
+        </p:txBody>
+      </p:sp>
+      <p:pic>
+        <p:nvPicPr>
+          <p:cNvPr id="6" name="Picture 5" descr="D-17-admin-maintain-requirements.png"/>
+          <p:cNvPicPr>
+            <a:picLocks noChangeAspect="1"/>
+          </p:cNvPicPr>
+          <p:nvPr/>
+        </p:nvPicPr>
+        <p:blipFill>
+          <a:blip r:embed="rId2"/>
+          <a:stretch>
+            <a:fillRect/>
+          </a:stretch>
+        </p:blipFill>
+        <p:spPr>
+          <a:xfrm>
             <a:off x="4978051" y="1143000"/>
             <a:ext cx="2251137" cy="5166360"/>
+          </a:xfrm>
+          <a:prstGeom prst="rect">
+            <a:avLst/>
+          </a:prstGeom>
+        </p:spPr>
+      </p:pic>
+      <p:sp>
+        <p:nvSpPr>
+          <p:cNvPr id="7" name="TextBox 6"/>
+          <p:cNvSpPr txBox="1"/>
+          <p:nvPr/>
+        </p:nvSpPr>
+        <p:spPr>
+          <a:xfrm>
+            <a:off x="658368" y="6272784"/>
+            <a:ext cx="10881360" cy="228600"/>
+          </a:xfrm>
+          <a:prstGeom prst="rect">
+            <a:avLst/>
+          </a:prstGeom>
+          <a:noFill/>
+        </p:spPr>
+        <p:txBody>
+          <a:bodyPr wrap="square" lIns="54864" rIns="54864" tIns="27432" bIns="27432" anchor="t">
+            <a:spAutoFit/>
+          </a:bodyPr>
+          <a:lstStyle/>
+          <a:p>
+            <a:pPr algn="ctr"/>
+            <a:r>
+              <a:rPr sz="1000" b="0">
+                <a:solidFill>
+                  <a:srgbClr val="5D6B79"/>
+                </a:solidFill>
+                <a:latin typeface="Microsoft JhengHei"/>
+              </a:rPr>
+              <a:t>原圖取自 docs/images，作為目前規格與實作的對照版本</a:t>
+            </a:r>
+          </a:p>
+        </p:txBody>
+      </p:sp>
+    </p:spTree>
+  </p:cSld>
+  <p:clrMapOvr>
+    <a:masterClrMapping/>
+  </p:clrMapOvr>
+</p:sld>
+</file>
+
+<file path=ppt/slides/slide43.xml><?xml version="1.0" encoding="utf-8"?>
+<p:sld xmlns:a="http://schemas.openxmlformats.org/drawingml/2006/main" xmlns:p="http://schemas.openxmlformats.org/presentationml/2006/main" xmlns:r="http://schemas.openxmlformats.org/officeDocument/2006/relationships">
+  <p:cSld>
+    <p:bg>
+      <p:bgPr>
+        <a:solidFill>
+          <a:srgbClr val="FFFFFF"/>
+        </a:solidFill>
+        <a:effectLst/>
+      </p:bgPr>
+    </p:bg>
+    <p:spTree>
+      <p:nvGrpSpPr>
+        <p:cNvPr id="1" name=""/>
+        <p:cNvGrpSpPr/>
+        <p:nvPr/>
+      </p:nvGrpSpPr>
+      <p:grpSpPr/>
+      <p:sp>
+        <p:nvSpPr>
+          <p:cNvPr id="2" name="Rectangle 1"/>
+          <p:cNvSpPr/>
+          <p:nvPr/>
+        </p:nvSpPr>
+        <p:spPr>
+          <a:xfrm>
+            <a:off x="0" y="0"/>
+            <a:ext cx="12191695" cy="164592"/>
+          </a:xfrm>
+          <a:prstGeom prst="rect">
+            <a:avLst/>
+          </a:prstGeom>
+          <a:solidFill>
+            <a:srgbClr val="208985"/>
+          </a:solidFill>
+          <a:ln>
+            <a:noFill/>
+          </a:ln>
+        </p:spPr>
+        <p:style>
+          <a:lnRef idx="1">
+            <a:schemeClr val="accent1"/>
+          </a:lnRef>
+          <a:fillRef idx="3">
+            <a:schemeClr val="accent1"/>
+          </a:fillRef>
+          <a:effectRef idx="2">
+            <a:schemeClr val="accent1"/>
+          </a:effectRef>
+          <a:fontRef idx="minor">
+            <a:schemeClr val="lt1"/>
+          </a:fontRef>
+        </p:style>
+        <p:txBody>
+          <a:bodyPr rtlCol="0" anchor="ctr"/>
+          <a:lstStyle/>
+          <a:p>
+            <a:pPr algn="ctr"/>
+          </a:p>
+        </p:txBody>
+      </p:sp>
+      <p:sp>
+        <p:nvSpPr>
+          <p:cNvPr id="3" name="TextBox 2"/>
+          <p:cNvSpPr txBox="1"/>
+          <p:nvPr/>
+        </p:nvSpPr>
+        <p:spPr>
+          <a:xfrm>
+            <a:off x="566928" y="438912"/>
+            <a:ext cx="10881360" cy="502920"/>
+          </a:xfrm>
+          <a:prstGeom prst="rect">
+            <a:avLst/>
+          </a:prstGeom>
+          <a:noFill/>
+        </p:spPr>
+        <p:txBody>
+          <a:bodyPr wrap="square" lIns="54864" rIns="54864" tIns="27432" bIns="27432" anchor="t">
+            <a:spAutoFit/>
+          </a:bodyPr>
+          <a:lstStyle/>
+          <a:p>
+            <a:pPr algn="l"/>
+            <a:r>
+              <a:rPr sz="2700" b="1">
+                <a:solidFill>
+                  <a:srgbClr val="142E4E"/>
+                </a:solidFill>
+                <a:latin typeface="Microsoft JhengHei"/>
+              </a:rPr>
+              <a:t>附錄｜科辦上傳紀錄流程（服務、公假、嘉獎）</a:t>
+            </a:r>
+          </a:p>
+        </p:txBody>
+      </p:sp>
+      <p:sp>
+        <p:nvSpPr>
+          <p:cNvPr id="4" name="TextBox 3"/>
+          <p:cNvSpPr txBox="1"/>
+          <p:nvPr/>
+        </p:nvSpPr>
+        <p:spPr>
+          <a:xfrm>
+            <a:off x="10378440" y="512064"/>
+            <a:ext cx="1234440" cy="228600"/>
+          </a:xfrm>
+          <a:prstGeom prst="rect">
+            <a:avLst/>
+          </a:prstGeom>
+          <a:noFill/>
+        </p:spPr>
+        <p:txBody>
+          <a:bodyPr wrap="square" lIns="54864" rIns="54864" tIns="27432" bIns="27432" anchor="t">
+            <a:spAutoFit/>
+          </a:bodyPr>
+          <a:lstStyle/>
+          <a:p>
+            <a:pPr algn="r"/>
+            <a:r>
+              <a:rPr sz="900" b="1">
+                <a:solidFill>
+                  <a:srgbClr val="208985"/>
+                </a:solidFill>
+                <a:latin typeface="Microsoft JhengHei"/>
+              </a:rPr>
+              <a:t>流程圖附錄</a:t>
+            </a:r>
+          </a:p>
+        </p:txBody>
+      </p:sp>
+      <p:sp>
+        <p:nvSpPr>
+          <p:cNvPr id="5" name="TextBox 4"/>
+          <p:cNvSpPr txBox="1"/>
+          <p:nvPr/>
+        </p:nvSpPr>
+        <p:spPr>
+          <a:xfrm>
+            <a:off x="566928" y="6565392"/>
+            <a:ext cx="7772400" cy="182880"/>
+          </a:xfrm>
+          <a:prstGeom prst="rect">
+            <a:avLst/>
+          </a:prstGeom>
+          <a:noFill/>
+        </p:spPr>
+        <p:txBody>
+          <a:bodyPr wrap="square" lIns="54864" rIns="54864" tIns="27432" bIns="27432" anchor="t">
+            <a:spAutoFit/>
+          </a:bodyPr>
+          <a:lstStyle/>
+          <a:p>
+            <a:pPr algn="l"/>
+            <a:r>
+              <a:rPr sz="800" b="0">
+                <a:solidFill>
+                  <a:srgbClr val="5D6B79"/>
+                </a:solidFill>
+                <a:latin typeface="Microsoft JhengHei"/>
+              </a:rPr>
+              <a:t>資管科智慧學習歷程系統｜指導老師討論版</a:t>
+            </a:r>
+          </a:p>
+        </p:txBody>
+      </p:sp>
+      <p:pic>
+        <p:nvPicPr>
+          <p:cNvPr id="6" name="Picture 5" descr="D-18-staff-service-record-flow.png"/>
+          <p:cNvPicPr>
+            <a:picLocks noChangeAspect="1"/>
+          </p:cNvPicPr>
+          <p:nvPr/>
+        </p:nvPicPr>
+        <p:blipFill>
+          <a:blip r:embed="rId2"/>
+          <a:stretch>
+            <a:fillRect/>
+          </a:stretch>
+        </p:blipFill>
+        <p:spPr>
+          <a:xfrm>
+            <a:off x="3129738" y="1143000"/>
+            <a:ext cx="5947762" cy="5166360"/>
           </a:xfrm>
           <a:prstGeom prst="rect">
             <a:avLst/>
@@ -14097,8 +14766,8 @@
         </p:blipFill>
         <p:spPr>
           <a:xfrm>
-            <a:off x="594360" y="3304319"/>
-            <a:ext cx="4572000" cy="752280"/>
+            <a:off x="594360" y="3301403"/>
+            <a:ext cx="4572000" cy="758112"/>
           </a:xfrm>
           <a:prstGeom prst="rect">
             <a:avLst/>
@@ -14509,8 +15178,8 @@
         </p:blipFill>
         <p:spPr>
           <a:xfrm>
-            <a:off x="2742969" y="1024128"/>
-            <a:ext cx="6675581" cy="5394960"/>
+            <a:off x="3069905" y="1024128"/>
+            <a:ext cx="6021709" cy="5394960"/>
           </a:xfrm>
           <a:prstGeom prst="rect">
             <a:avLst/>
@@ -14814,7 +15483,7 @@
                 </a:solidFill>
                 <a:latin typeface="Microsoft JhengHei"/>
               </a:rPr>
-              <a:t>管理端使用案例</a:t>
+              <a:t>科辦／科助使用案例</a:t>
             </a:r>
           </a:p>
         </p:txBody>
@@ -14849,7 +15518,7 @@
                 </a:solidFill>
                 <a:latin typeface="Microsoft JhengHei"/>
               </a:rPr>
-              <a:t>行政／管理員端</a:t>
+              <a:t>科辦／科助端</a:t>
             </a:r>
           </a:p>
         </p:txBody>
@@ -14891,7 +15560,7 @@
       </p:sp>
       <p:pic>
         <p:nvPicPr>
-          <p:cNvPr id="6" name="Picture 5" descr="D-01-use-case-admin.png"/>
+          <p:cNvPr id="6" name="Picture 5" descr="D-01-use-case-staff.png"/>
           <p:cNvPicPr>
             <a:picLocks noChangeAspect="1"/>
           </p:cNvPicPr>
@@ -14905,8 +15574,8 @@
         </p:blipFill>
         <p:spPr>
           <a:xfrm>
-            <a:off x="1817001" y="1024127"/>
-            <a:ext cx="8527517" cy="5394960"/>
+            <a:off x="2336382" y="1024128"/>
+            <a:ext cx="7488754" cy="5394960"/>
           </a:xfrm>
           <a:prstGeom prst="rect">
             <a:avLst/>
@@ -15012,7 +15681,7 @@
                 </a:solidFill>
                 <a:latin typeface="Microsoft JhengHei"/>
               </a:rPr>
-              <a:t>AI Agent：系統的兩個 AI 角色</a:t>
+              <a:t>管理端使用案例</a:t>
             </a:r>
           </a:p>
         </p:txBody>
@@ -15047,7 +15716,7 @@
                 </a:solidFill>
                 <a:latin typeface="Microsoft JhengHei"/>
               </a:rPr>
-              <a:t>AI 功能</a:t>
+              <a:t>行政／管理員端</a:t>
             </a:r>
           </a:p>
         </p:txBody>
@@ -15089,7 +15758,7 @@
       </p:sp>
       <p:pic>
         <p:nvPicPr>
-          <p:cNvPr id="6" name="Picture 5" descr="D-08-ai-agent-flow.png"/>
+          <p:cNvPr id="6" name="Picture 5" descr="D-01-use-case-admin.png"/>
           <p:cNvPicPr>
             <a:picLocks noChangeAspect="1"/>
           </p:cNvPicPr>
@@ -15103,250 +15772,14 @@
         </p:blipFill>
         <p:spPr>
           <a:xfrm>
-            <a:off x="2290572" y="1078992"/>
-            <a:ext cx="2002536" cy="5074920"/>
+            <a:off x="1817001" y="1024127"/>
+            <a:ext cx="8527517" cy="5394960"/>
           </a:xfrm>
           <a:prstGeom prst="rect">
             <a:avLst/>
           </a:prstGeom>
         </p:spPr>
       </p:pic>
-      <p:sp>
-        <p:nvSpPr>
-          <p:cNvPr id="7" name="Rounded Rectangle 6"/>
-          <p:cNvSpPr/>
-          <p:nvPr/>
-        </p:nvSpPr>
-        <p:spPr>
-          <a:xfrm>
-            <a:off x="6400800" y="1234440"/>
-            <a:ext cx="4892040" cy="2148840"/>
-          </a:xfrm>
-          <a:prstGeom prst="roundRect">
-            <a:avLst/>
-          </a:prstGeom>
-          <a:solidFill>
-            <a:srgbClr val="F2F6F9"/>
-          </a:solidFill>
-          <a:ln w="15240">
-            <a:solidFill>
-              <a:srgbClr val="208985"/>
-            </a:solidFill>
-          </a:ln>
-        </p:spPr>
-        <p:style>
-          <a:lnRef idx="1">
-            <a:schemeClr val="accent1"/>
-          </a:lnRef>
-          <a:fillRef idx="3">
-            <a:schemeClr val="accent1"/>
-          </a:fillRef>
-          <a:effectRef idx="2">
-            <a:schemeClr val="accent1"/>
-          </a:effectRef>
-          <a:fontRef idx="minor">
-            <a:schemeClr val="lt1"/>
-          </a:fontRef>
-        </p:style>
-        <p:txBody>
-          <a:bodyPr rtlCol="0" anchor="ctr"/>
-          <a:lstStyle/>
-          <a:p>
-            <a:pPr algn="ctr"/>
-          </a:p>
-        </p:txBody>
-      </p:sp>
-      <p:sp>
-        <p:nvSpPr>
-          <p:cNvPr id="8" name="TextBox 7"/>
-          <p:cNvSpPr txBox="1"/>
-          <p:nvPr/>
-        </p:nvSpPr>
-        <p:spPr>
-          <a:xfrm>
-            <a:off x="6565392" y="1344168"/>
-            <a:ext cx="4572000" cy="256032"/>
-          </a:xfrm>
-          <a:prstGeom prst="rect">
-            <a:avLst/>
-          </a:prstGeom>
-          <a:noFill/>
-        </p:spPr>
-        <p:txBody>
-          <a:bodyPr wrap="square" lIns="54864" rIns="54864" tIns="27432" bIns="27432" anchor="t">
-            <a:spAutoFit/>
-          </a:bodyPr>
-          <a:lstStyle/>
-          <a:p>
-            <a:pPr algn="l"/>
-            <a:r>
-              <a:rPr sz="1300" b="1">
-                <a:solidFill>
-                  <a:srgbClr val="208985"/>
-                </a:solidFill>
-                <a:latin typeface="Microsoft JhengHei"/>
-              </a:rPr>
-              <a:t>資管科小助手</a:t>
-            </a:r>
-          </a:p>
-        </p:txBody>
-      </p:sp>
-      <p:sp>
-        <p:nvSpPr>
-          <p:cNvPr id="9" name="TextBox 8"/>
-          <p:cNvSpPr txBox="1"/>
-          <p:nvPr/>
-        </p:nvSpPr>
-        <p:spPr>
-          <a:xfrm>
-            <a:off x="6565392" y="1673352"/>
-            <a:ext cx="4572000" cy="1618488"/>
-          </a:xfrm>
-          <a:prstGeom prst="rect">
-            <a:avLst/>
-          </a:prstGeom>
-          <a:noFill/>
-        </p:spPr>
-        <p:txBody>
-          <a:bodyPr wrap="square" lIns="54864" rIns="54864" tIns="27432" bIns="27432" anchor="t">
-            <a:spAutoFit/>
-          </a:bodyPr>
-          <a:lstStyle/>
-          <a:p>
-            <a:pPr algn="l"/>
-            <a:r>
-              <a:rPr sz="1600" b="0">
-                <a:solidFill>
-                  <a:srgbClr val="232C36"/>
-                </a:solidFill>
-                <a:latin typeface="Microsoft JhengHei"/>
-              </a:rPr>
-              <a:t>查詢科上規則
-查看自己的進度與缺件
-回答下一步問題
-檢查自傳內容一致性</a:t>
-            </a:r>
-          </a:p>
-        </p:txBody>
-      </p:sp>
-      <p:sp>
-        <p:nvSpPr>
-          <p:cNvPr id="10" name="Rounded Rectangle 9"/>
-          <p:cNvSpPr/>
-          <p:nvPr/>
-        </p:nvSpPr>
-        <p:spPr>
-          <a:xfrm>
-            <a:off x="6400800" y="3657600"/>
-            <a:ext cx="4892040" cy="2148840"/>
-          </a:xfrm>
-          <a:prstGeom prst="roundRect">
-            <a:avLst/>
-          </a:prstGeom>
-          <a:solidFill>
-            <a:srgbClr val="F2F6F9"/>
-          </a:solidFill>
-          <a:ln w="15240">
-            <a:solidFill>
-              <a:srgbClr val="DD812F"/>
-            </a:solidFill>
-          </a:ln>
-        </p:spPr>
-        <p:style>
-          <a:lnRef idx="1">
-            <a:schemeClr val="accent1"/>
-          </a:lnRef>
-          <a:fillRef idx="3">
-            <a:schemeClr val="accent1"/>
-          </a:fillRef>
-          <a:effectRef idx="2">
-            <a:schemeClr val="accent1"/>
-          </a:effectRef>
-          <a:fontRef idx="minor">
-            <a:schemeClr val="lt1"/>
-          </a:fontRef>
-        </p:style>
-        <p:txBody>
-          <a:bodyPr rtlCol="0" anchor="ctr"/>
-          <a:lstStyle/>
-          <a:p>
-            <a:pPr algn="ctr"/>
-          </a:p>
-        </p:txBody>
-      </p:sp>
-      <p:sp>
-        <p:nvSpPr>
-          <p:cNvPr id="11" name="TextBox 10"/>
-          <p:cNvSpPr txBox="1"/>
-          <p:nvPr/>
-        </p:nvSpPr>
-        <p:spPr>
-          <a:xfrm>
-            <a:off x="6565392" y="3767328"/>
-            <a:ext cx="4572000" cy="256032"/>
-          </a:xfrm>
-          <a:prstGeom prst="rect">
-            <a:avLst/>
-          </a:prstGeom>
-          <a:noFill/>
-        </p:spPr>
-        <p:txBody>
-          <a:bodyPr wrap="square" lIns="54864" rIns="54864" tIns="27432" bIns="27432" anchor="t">
-            <a:spAutoFit/>
-          </a:bodyPr>
-          <a:lstStyle/>
-          <a:p>
-            <a:pPr algn="l"/>
-            <a:r>
-              <a:rPr sz="1300" b="1">
-                <a:solidFill>
-                  <a:srgbClr val="DD812F"/>
-                </a:solidFill>
-                <a:latin typeface="Microsoft JhengHei"/>
-              </a:rPr>
-              <a:t>自傳小幫手</a:t>
-            </a:r>
-          </a:p>
-        </p:txBody>
-      </p:sp>
-      <p:sp>
-        <p:nvSpPr>
-          <p:cNvPr id="12" name="TextBox 11"/>
-          <p:cNvSpPr txBox="1"/>
-          <p:nvPr/>
-        </p:nvSpPr>
-        <p:spPr>
-          <a:xfrm>
-            <a:off x="6565392" y="4096512"/>
-            <a:ext cx="4572000" cy="1618488"/>
-          </a:xfrm>
-          <a:prstGeom prst="rect">
-            <a:avLst/>
-          </a:prstGeom>
-          <a:noFill/>
-        </p:spPr>
-        <p:txBody>
-          <a:bodyPr wrap="square" lIns="54864" rIns="54864" tIns="27432" bIns="27432" anchor="t">
-            <a:spAutoFit/>
-          </a:bodyPr>
-          <a:lstStyle/>
-          <a:p>
-            <a:pPr algn="l"/>
-            <a:r>
-              <a:rPr sz="1600" b="0">
-                <a:solidFill>
-                  <a:srgbClr val="232C36"/>
-                </a:solidFill>
-                <a:latin typeface="Microsoft JhengHei"/>
-              </a:rPr>
-              <a:t>一次問四題
-依學生回答產生草稿
-空白內容標示待補
-學生修改後再送導師確認</a:t>
-            </a:r>
-          </a:p>
-        </p:txBody>
-      </p:sp>
     </p:spTree>
   </p:cSld>
   <p:clrMapOvr>

--- a/docs/AI_指導老師討論簡報_2026-10-07.pptx
+++ b/docs/AI_指導老師討論簡報_2026-10-07.pptx
@@ -41,13 +41,6 @@
     <p:sldId id="289" r:id="rId40"/>
     <p:sldId id="290" r:id="rId41"/>
     <p:sldId id="291" r:id="rId42"/>
-    <p:sldId id="292" r:id="rId43"/>
-    <p:sldId id="293" r:id="rId44"/>
-    <p:sldId id="294" r:id="rId45"/>
-    <p:sldId id="295" r:id="rId46"/>
-    <p:sldId id="296" r:id="rId47"/>
-    <p:sldId id="297" r:id="rId48"/>
-    <p:sldId id="298" r:id="rId49"/>
   </p:sldIdLst>
   <p:sldSz cx="12191695" cy="6858000" type="screen4x3"/>
   <p:notesSz cx="6858000" cy="9144000"/>
@@ -3456,7 +3449,7 @@
                 </a:solidFill>
                 <a:latin typeface="Microsoft JhengHei"/>
               </a:rPr>
-              <a:t>AI Agent：系統的兩個 AI 角色</a:t>
+              <a:t>競賽報名流程（後續擴充草稿）</a:t>
             </a:r>
           </a:p>
         </p:txBody>
@@ -3491,7 +3484,7 @@
                 </a:solidFill>
                 <a:latin typeface="Microsoft JhengHei"/>
               </a:rPr>
-              <a:t>AI 功能</a:t>
+              <a:t>待問科助</a:t>
             </a:r>
           </a:p>
         </p:txBody>
@@ -3531,30 +3524,41 @@
           </a:p>
         </p:txBody>
       </p:sp>
-      <p:pic>
-        <p:nvPicPr>
-          <p:cNvPr id="6" name="Picture 5" descr="D-08-ai-agent-flow.png"/>
-          <p:cNvPicPr>
-            <a:picLocks noChangeAspect="1"/>
-          </p:cNvPicPr>
-          <p:nvPr/>
-        </p:nvPicPr>
-        <p:blipFill>
-          <a:blip r:embed="rId2"/>
-          <a:stretch>
-            <a:fillRect/>
-          </a:stretch>
-        </p:blipFill>
-        <p:spPr>
-          <a:xfrm>
-            <a:off x="2290572" y="1078992"/>
-            <a:ext cx="2002536" cy="5074920"/>
-          </a:xfrm>
-          <a:prstGeom prst="rect">
-            <a:avLst/>
-          </a:prstGeom>
-        </p:spPr>
-      </p:pic>
+      <p:sp>
+        <p:nvSpPr>
+          <p:cNvPr id="6" name="TextBox 5"/>
+          <p:cNvSpPr txBox="1"/>
+          <p:nvPr/>
+        </p:nvSpPr>
+        <p:spPr>
+          <a:xfrm>
+            <a:off x="749808" y="1115568"/>
+            <a:ext cx="10698480" cy="384048"/>
+          </a:xfrm>
+          <a:prstGeom prst="rect">
+            <a:avLst/>
+          </a:prstGeom>
+          <a:noFill/>
+        </p:spPr>
+        <p:txBody>
+          <a:bodyPr wrap="square" lIns="54864" rIns="54864" tIns="27432" bIns="27432" anchor="t">
+            <a:spAutoFit/>
+          </a:bodyPr>
+          <a:lstStyle/>
+          <a:p>
+            <a:pPr algn="ctr"/>
+            <a:r>
+              <a:rPr sz="2000" b="1">
+                <a:solidFill>
+                  <a:srgbClr val="DD812F"/>
+                </a:solidFill>
+                <a:latin typeface="Microsoft JhengHei"/>
+              </a:rPr>
+              <a:t>以下是討論草稿，不列入目前主線；是否由科辦開放報名，仍要先問科助。</a:t>
+            </a:r>
+          </a:p>
+        </p:txBody>
+      </p:sp>
       <p:sp>
         <p:nvSpPr>
           <p:cNvPr id="7" name="Rounded Rectangle 6"/>
@@ -3563,8 +3567,8 @@
         </p:nvSpPr>
         <p:spPr>
           <a:xfrm>
-            <a:off x="6400800" y="1234440"/>
-            <a:ext cx="4892040" cy="2148840"/>
+            <a:off x="502920" y="1783080"/>
+            <a:ext cx="3246120" cy="1078992"/>
           </a:xfrm>
           <a:prstGeom prst="roundRect">
             <a:avLst/>
@@ -3572,9 +3576,9 @@
           <a:solidFill>
             <a:srgbClr val="F2F6F9"/>
           </a:solidFill>
-          <a:ln w="15240">
+          <a:ln w="17780">
             <a:solidFill>
-              <a:srgbClr val="208985"/>
+              <a:srgbClr val="DD812F"/>
             </a:solidFill>
           </a:ln>
         </p:spPr>
@@ -3608,29 +3612,29 @@
         </p:nvSpPr>
         <p:spPr>
           <a:xfrm>
-            <a:off x="6565392" y="1344168"/>
-            <a:ext cx="4572000" cy="256032"/>
-          </a:xfrm>
-          <a:prstGeom prst="rect">
-            <a:avLst/>
-          </a:prstGeom>
-          <a:noFill/>
-        </p:spPr>
-        <p:txBody>
-          <a:bodyPr wrap="square" lIns="54864" rIns="54864" tIns="27432" bIns="27432" anchor="t">
-            <a:spAutoFit/>
-          </a:bodyPr>
-          <a:lstStyle/>
-          <a:p>
-            <a:pPr algn="l"/>
-            <a:r>
-              <a:rPr sz="1300" b="1">
-                <a:solidFill>
-                  <a:srgbClr val="208985"/>
-                </a:solidFill>
-                <a:latin typeface="Microsoft JhengHei"/>
-              </a:rPr>
-              <a:t>資管科小助手</a:t>
+            <a:off x="640080" y="1892807"/>
+            <a:ext cx="2971800" cy="246888"/>
+          </a:xfrm>
+          <a:prstGeom prst="rect">
+            <a:avLst/>
+          </a:prstGeom>
+          <a:noFill/>
+        </p:spPr>
+        <p:txBody>
+          <a:bodyPr wrap="square" lIns="54864" rIns="54864" tIns="27432" bIns="27432" anchor="t">
+            <a:spAutoFit/>
+          </a:bodyPr>
+          <a:lstStyle/>
+          <a:p>
+            <a:pPr algn="ctr"/>
+            <a:r>
+              <a:rPr sz="1400" b="1">
+                <a:solidFill>
+                  <a:srgbClr val="DD812F"/>
+                </a:solidFill>
+                <a:latin typeface="Microsoft JhengHei"/>
+              </a:rPr>
+              <a:t>科辦</a:t>
             </a:r>
           </a:p>
         </p:txBody>
@@ -3643,32 +3647,30 @@
         </p:nvSpPr>
         <p:spPr>
           <a:xfrm>
-            <a:off x="6565392" y="1673352"/>
-            <a:ext cx="4572000" cy="1618488"/>
-          </a:xfrm>
-          <a:prstGeom prst="rect">
-            <a:avLst/>
-          </a:prstGeom>
-          <a:noFill/>
-        </p:spPr>
-        <p:txBody>
-          <a:bodyPr wrap="square" lIns="54864" rIns="54864" tIns="27432" bIns="27432" anchor="t">
-            <a:spAutoFit/>
-          </a:bodyPr>
-          <a:lstStyle/>
-          <a:p>
-            <a:pPr algn="l"/>
-            <a:r>
-              <a:rPr sz="1600" b="0">
+            <a:off x="667512" y="2212848"/>
+            <a:ext cx="2907792" cy="502920"/>
+          </a:xfrm>
+          <a:prstGeom prst="rect">
+            <a:avLst/>
+          </a:prstGeom>
+          <a:noFill/>
+        </p:spPr>
+        <p:txBody>
+          <a:bodyPr wrap="square" lIns="54864" rIns="54864" tIns="27432" bIns="27432" anchor="t">
+            <a:spAutoFit/>
+          </a:bodyPr>
+          <a:lstStyle/>
+          <a:p>
+            <a:pPr algn="ctr"/>
+            <a:r>
+              <a:rPr sz="1500" b="0">
                 <a:solidFill>
                   <a:srgbClr val="232C36"/>
                 </a:solidFill>
                 <a:latin typeface="Microsoft JhengHei"/>
               </a:rPr>
-              <a:t>查詢科上規則
-查看自己的進度與缺件
-回答下一步問題
-檢查自傳內容一致性</a:t>
+              <a:t>建立競賽事項
+報名期限、主辦方、報名方式</a:t>
             </a:r>
           </a:p>
         </p:txBody>
@@ -3681,8 +3683,588 @@
         </p:nvSpPr>
         <p:spPr>
           <a:xfrm>
-            <a:off x="6400800" y="3657600"/>
-            <a:ext cx="4892040" cy="2148840"/>
+            <a:off x="4389120" y="1783080"/>
+            <a:ext cx="3246120" cy="1078992"/>
+          </a:xfrm>
+          <a:prstGeom prst="roundRect">
+            <a:avLst/>
+          </a:prstGeom>
+          <a:solidFill>
+            <a:srgbClr val="F2F6F9"/>
+          </a:solidFill>
+          <a:ln w="17780">
+            <a:solidFill>
+              <a:srgbClr val="2D73AB"/>
+            </a:solidFill>
+          </a:ln>
+        </p:spPr>
+        <p:style>
+          <a:lnRef idx="1">
+            <a:schemeClr val="accent1"/>
+          </a:lnRef>
+          <a:fillRef idx="3">
+            <a:schemeClr val="accent1"/>
+          </a:fillRef>
+          <a:effectRef idx="2">
+            <a:schemeClr val="accent1"/>
+          </a:effectRef>
+          <a:fontRef idx="minor">
+            <a:schemeClr val="lt1"/>
+          </a:fontRef>
+        </p:style>
+        <p:txBody>
+          <a:bodyPr rtlCol="0" anchor="ctr"/>
+          <a:lstStyle/>
+          <a:p>
+            <a:pPr algn="ctr"/>
+          </a:p>
+        </p:txBody>
+      </p:sp>
+      <p:sp>
+        <p:nvSpPr>
+          <p:cNvPr id="11" name="TextBox 10"/>
+          <p:cNvSpPr txBox="1"/>
+          <p:nvPr/>
+        </p:nvSpPr>
+        <p:spPr>
+          <a:xfrm>
+            <a:off x="4526280" y="1892807"/>
+            <a:ext cx="2971800" cy="246888"/>
+          </a:xfrm>
+          <a:prstGeom prst="rect">
+            <a:avLst/>
+          </a:prstGeom>
+          <a:noFill/>
+        </p:spPr>
+        <p:txBody>
+          <a:bodyPr wrap="square" lIns="54864" rIns="54864" tIns="27432" bIns="27432" anchor="t">
+            <a:spAutoFit/>
+          </a:bodyPr>
+          <a:lstStyle/>
+          <a:p>
+            <a:pPr algn="ctr"/>
+            <a:r>
+              <a:rPr sz="1400" b="1">
+                <a:solidFill>
+                  <a:srgbClr val="2D73AB"/>
+                </a:solidFill>
+                <a:latin typeface="Microsoft JhengHei"/>
+              </a:rPr>
+              <a:t>學生</a:t>
+            </a:r>
+          </a:p>
+        </p:txBody>
+      </p:sp>
+      <p:sp>
+        <p:nvSpPr>
+          <p:cNvPr id="12" name="TextBox 11"/>
+          <p:cNvSpPr txBox="1"/>
+          <p:nvPr/>
+        </p:nvSpPr>
+        <p:spPr>
+          <a:xfrm>
+            <a:off x="4553712" y="2212848"/>
+            <a:ext cx="2907792" cy="502920"/>
+          </a:xfrm>
+          <a:prstGeom prst="rect">
+            <a:avLst/>
+          </a:prstGeom>
+          <a:noFill/>
+        </p:spPr>
+        <p:txBody>
+          <a:bodyPr wrap="square" lIns="54864" rIns="54864" tIns="27432" bIns="27432" anchor="t">
+            <a:spAutoFit/>
+          </a:bodyPr>
+          <a:lstStyle/>
+          <a:p>
+            <a:pPr algn="ctr"/>
+            <a:r>
+              <a:rPr sz="1500" b="0">
+                <a:solidFill>
+                  <a:srgbClr val="232C36"/>
+                </a:solidFill>
+                <a:latin typeface="Microsoft JhengHei"/>
+              </a:rPr>
+              <a:t>從系統申請報名
+留下參賽紀錄</a:t>
+            </a:r>
+          </a:p>
+        </p:txBody>
+      </p:sp>
+      <p:sp>
+        <p:nvSpPr>
+          <p:cNvPr id="13" name="Rounded Rectangle 12"/>
+          <p:cNvSpPr/>
+          <p:nvPr/>
+        </p:nvSpPr>
+        <p:spPr>
+          <a:xfrm>
+            <a:off x="8275320" y="1783080"/>
+            <a:ext cx="3246120" cy="1078992"/>
+          </a:xfrm>
+          <a:prstGeom prst="roundRect">
+            <a:avLst/>
+          </a:prstGeom>
+          <a:solidFill>
+            <a:srgbClr val="F2F6F9"/>
+          </a:solidFill>
+          <a:ln w="17780">
+            <a:solidFill>
+              <a:srgbClr val="208985"/>
+            </a:solidFill>
+          </a:ln>
+        </p:spPr>
+        <p:style>
+          <a:lnRef idx="1">
+            <a:schemeClr val="accent1"/>
+          </a:lnRef>
+          <a:fillRef idx="3">
+            <a:schemeClr val="accent1"/>
+          </a:fillRef>
+          <a:effectRef idx="2">
+            <a:schemeClr val="accent1"/>
+          </a:effectRef>
+          <a:fontRef idx="minor">
+            <a:schemeClr val="lt1"/>
+          </a:fontRef>
+        </p:style>
+        <p:txBody>
+          <a:bodyPr rtlCol="0" anchor="ctr"/>
+          <a:lstStyle/>
+          <a:p>
+            <a:pPr algn="ctr"/>
+          </a:p>
+        </p:txBody>
+      </p:sp>
+      <p:sp>
+        <p:nvSpPr>
+          <p:cNvPr id="14" name="TextBox 13"/>
+          <p:cNvSpPr txBox="1"/>
+          <p:nvPr/>
+        </p:nvSpPr>
+        <p:spPr>
+          <a:xfrm>
+            <a:off x="8412480" y="1892807"/>
+            <a:ext cx="2971800" cy="246888"/>
+          </a:xfrm>
+          <a:prstGeom prst="rect">
+            <a:avLst/>
+          </a:prstGeom>
+          <a:noFill/>
+        </p:spPr>
+        <p:txBody>
+          <a:bodyPr wrap="square" lIns="54864" rIns="54864" tIns="27432" bIns="27432" anchor="t">
+            <a:spAutoFit/>
+          </a:bodyPr>
+          <a:lstStyle/>
+          <a:p>
+            <a:pPr algn="ctr"/>
+            <a:r>
+              <a:rPr sz="1400" b="1">
+                <a:solidFill>
+                  <a:srgbClr val="208985"/>
+                </a:solidFill>
+                <a:latin typeface="Microsoft JhengHei"/>
+              </a:rPr>
+              <a:t>指導老師</a:t>
+            </a:r>
+          </a:p>
+        </p:txBody>
+      </p:sp>
+      <p:sp>
+        <p:nvSpPr>
+          <p:cNvPr id="15" name="TextBox 14"/>
+          <p:cNvSpPr txBox="1"/>
+          <p:nvPr/>
+        </p:nvSpPr>
+        <p:spPr>
+          <a:xfrm>
+            <a:off x="8439912" y="2212848"/>
+            <a:ext cx="2907792" cy="502920"/>
+          </a:xfrm>
+          <a:prstGeom prst="rect">
+            <a:avLst/>
+          </a:prstGeom>
+          <a:noFill/>
+        </p:spPr>
+        <p:txBody>
+          <a:bodyPr wrap="square" lIns="54864" rIns="54864" tIns="27432" bIns="27432" anchor="t">
+            <a:spAutoFit/>
+          </a:bodyPr>
+          <a:lstStyle/>
+          <a:p>
+            <a:pPr algn="ctr"/>
+            <a:r>
+              <a:rPr sz="1500" b="0">
+                <a:solidFill>
+                  <a:srgbClr val="232C36"/>
+                </a:solidFill>
+                <a:latin typeface="Microsoft JhengHei"/>
+              </a:rPr>
+              <a:t>確認參賽資格或
+指導老師關係</a:t>
+            </a:r>
+          </a:p>
+        </p:txBody>
+      </p:sp>
+      <p:sp>
+        <p:nvSpPr>
+          <p:cNvPr id="16" name="Rounded Rectangle 15"/>
+          <p:cNvSpPr/>
+          <p:nvPr/>
+        </p:nvSpPr>
+        <p:spPr>
+          <a:xfrm>
+            <a:off x="502920" y="3383280"/>
+            <a:ext cx="3246120" cy="1078992"/>
+          </a:xfrm>
+          <a:prstGeom prst="roundRect">
+            <a:avLst/>
+          </a:prstGeom>
+          <a:solidFill>
+            <a:srgbClr val="F2F6F9"/>
+          </a:solidFill>
+          <a:ln w="17780">
+            <a:solidFill>
+              <a:srgbClr val="142E4E"/>
+            </a:solidFill>
+          </a:ln>
+        </p:spPr>
+        <p:style>
+          <a:lnRef idx="1">
+            <a:schemeClr val="accent1"/>
+          </a:lnRef>
+          <a:fillRef idx="3">
+            <a:schemeClr val="accent1"/>
+          </a:fillRef>
+          <a:effectRef idx="2">
+            <a:schemeClr val="accent1"/>
+          </a:effectRef>
+          <a:fontRef idx="minor">
+            <a:schemeClr val="lt1"/>
+          </a:fontRef>
+        </p:style>
+        <p:txBody>
+          <a:bodyPr rtlCol="0" anchor="ctr"/>
+          <a:lstStyle/>
+          <a:p>
+            <a:pPr algn="ctr"/>
+          </a:p>
+        </p:txBody>
+      </p:sp>
+      <p:sp>
+        <p:nvSpPr>
+          <p:cNvPr id="17" name="TextBox 16"/>
+          <p:cNvSpPr txBox="1"/>
+          <p:nvPr/>
+        </p:nvSpPr>
+        <p:spPr>
+          <a:xfrm>
+            <a:off x="640080" y="3493008"/>
+            <a:ext cx="2971800" cy="246888"/>
+          </a:xfrm>
+          <a:prstGeom prst="rect">
+            <a:avLst/>
+          </a:prstGeom>
+          <a:noFill/>
+        </p:spPr>
+        <p:txBody>
+          <a:bodyPr wrap="square" lIns="54864" rIns="54864" tIns="27432" bIns="27432" anchor="t">
+            <a:spAutoFit/>
+          </a:bodyPr>
+          <a:lstStyle/>
+          <a:p>
+            <a:pPr algn="ctr"/>
+            <a:r>
+              <a:rPr sz="1400" b="1">
+                <a:solidFill>
+                  <a:srgbClr val="142E4E"/>
+                </a:solidFill>
+                <a:latin typeface="Microsoft JhengHei"/>
+              </a:rPr>
+              <a:t>主辦方／AREC</a:t>
+            </a:r>
+          </a:p>
+        </p:txBody>
+      </p:sp>
+      <p:sp>
+        <p:nvSpPr>
+          <p:cNvPr id="18" name="TextBox 17"/>
+          <p:cNvSpPr txBox="1"/>
+          <p:nvPr/>
+        </p:nvSpPr>
+        <p:spPr>
+          <a:xfrm>
+            <a:off x="667512" y="3813048"/>
+            <a:ext cx="2907792" cy="502920"/>
+          </a:xfrm>
+          <a:prstGeom prst="rect">
+            <a:avLst/>
+          </a:prstGeom>
+          <a:noFill/>
+        </p:spPr>
+        <p:txBody>
+          <a:bodyPr wrap="square" lIns="54864" rIns="54864" tIns="27432" bIns="27432" anchor="t">
+            <a:spAutoFit/>
+          </a:bodyPr>
+          <a:lstStyle/>
+          <a:p>
+            <a:pPr algn="ctr"/>
+            <a:r>
+              <a:rPr sz="1500" b="0">
+                <a:solidFill>
+                  <a:srgbClr val="232C36"/>
+                </a:solidFill>
+                <a:latin typeface="Microsoft JhengHei"/>
+              </a:rPr>
+              <a:t>提供參賽或得獎
+證明</a:t>
+            </a:r>
+          </a:p>
+        </p:txBody>
+      </p:sp>
+      <p:sp>
+        <p:nvSpPr>
+          <p:cNvPr id="19" name="Rounded Rectangle 18"/>
+          <p:cNvSpPr/>
+          <p:nvPr/>
+        </p:nvSpPr>
+        <p:spPr>
+          <a:xfrm>
+            <a:off x="4389120" y="3383280"/>
+            <a:ext cx="3246120" cy="1078992"/>
+          </a:xfrm>
+          <a:prstGeom prst="roundRect">
+            <a:avLst/>
+          </a:prstGeom>
+          <a:solidFill>
+            <a:srgbClr val="F2F6F9"/>
+          </a:solidFill>
+          <a:ln w="17780">
+            <a:solidFill>
+              <a:srgbClr val="DD812F"/>
+            </a:solidFill>
+          </a:ln>
+        </p:spPr>
+        <p:style>
+          <a:lnRef idx="1">
+            <a:schemeClr val="accent1"/>
+          </a:lnRef>
+          <a:fillRef idx="3">
+            <a:schemeClr val="accent1"/>
+          </a:fillRef>
+          <a:effectRef idx="2">
+            <a:schemeClr val="accent1"/>
+          </a:effectRef>
+          <a:fontRef idx="minor">
+            <a:schemeClr val="lt1"/>
+          </a:fontRef>
+        </p:style>
+        <p:txBody>
+          <a:bodyPr rtlCol="0" anchor="ctr"/>
+          <a:lstStyle/>
+          <a:p>
+            <a:pPr algn="ctr"/>
+          </a:p>
+        </p:txBody>
+      </p:sp>
+      <p:sp>
+        <p:nvSpPr>
+          <p:cNvPr id="20" name="TextBox 19"/>
+          <p:cNvSpPr txBox="1"/>
+          <p:nvPr/>
+        </p:nvSpPr>
+        <p:spPr>
+          <a:xfrm>
+            <a:off x="4526280" y="3493008"/>
+            <a:ext cx="2971800" cy="246888"/>
+          </a:xfrm>
+          <a:prstGeom prst="rect">
+            <a:avLst/>
+          </a:prstGeom>
+          <a:noFill/>
+        </p:spPr>
+        <p:txBody>
+          <a:bodyPr wrap="square" lIns="54864" rIns="54864" tIns="27432" bIns="27432" anchor="t">
+            <a:spAutoFit/>
+          </a:bodyPr>
+          <a:lstStyle/>
+          <a:p>
+            <a:pPr algn="ctr"/>
+            <a:r>
+              <a:rPr sz="1400" b="1">
+                <a:solidFill>
+                  <a:srgbClr val="DD812F"/>
+                </a:solidFill>
+                <a:latin typeface="Microsoft JhengHei"/>
+              </a:rPr>
+              <a:t>科辦</a:t>
+            </a:r>
+          </a:p>
+        </p:txBody>
+      </p:sp>
+      <p:sp>
+        <p:nvSpPr>
+          <p:cNvPr id="21" name="TextBox 20"/>
+          <p:cNvSpPr txBox="1"/>
+          <p:nvPr/>
+        </p:nvSpPr>
+        <p:spPr>
+          <a:xfrm>
+            <a:off x="4553712" y="3813048"/>
+            <a:ext cx="2907792" cy="502920"/>
+          </a:xfrm>
+          <a:prstGeom prst="rect">
+            <a:avLst/>
+          </a:prstGeom>
+          <a:noFill/>
+        </p:spPr>
+        <p:txBody>
+          <a:bodyPr wrap="square" lIns="54864" rIns="54864" tIns="27432" bIns="27432" anchor="t">
+            <a:spAutoFit/>
+          </a:bodyPr>
+          <a:lstStyle/>
+          <a:p>
+            <a:pPr algn="ctr"/>
+            <a:r>
+              <a:rPr sz="1500" b="0">
+                <a:solidFill>
+                  <a:srgbClr val="232C36"/>
+                </a:solidFill>
+                <a:latin typeface="Microsoft JhengHei"/>
+              </a:rPr>
+              <a:t>管理公假、嘉獎
+等校內行政紀錄</a:t>
+            </a:r>
+          </a:p>
+        </p:txBody>
+      </p:sp>
+      <p:sp>
+        <p:nvSpPr>
+          <p:cNvPr id="22" name="Rounded Rectangle 21"/>
+          <p:cNvSpPr/>
+          <p:nvPr/>
+        </p:nvSpPr>
+        <p:spPr>
+          <a:xfrm>
+            <a:off x="8275320" y="3383280"/>
+            <a:ext cx="3246120" cy="1078992"/>
+          </a:xfrm>
+          <a:prstGeom prst="roundRect">
+            <a:avLst/>
+          </a:prstGeom>
+          <a:solidFill>
+            <a:srgbClr val="F2F6F9"/>
+          </a:solidFill>
+          <a:ln w="17780">
+            <a:solidFill>
+              <a:srgbClr val="2D73AB"/>
+            </a:solidFill>
+          </a:ln>
+        </p:spPr>
+        <p:style>
+          <a:lnRef idx="1">
+            <a:schemeClr val="accent1"/>
+          </a:lnRef>
+          <a:fillRef idx="3">
+            <a:schemeClr val="accent1"/>
+          </a:fillRef>
+          <a:effectRef idx="2">
+            <a:schemeClr val="accent1"/>
+          </a:effectRef>
+          <a:fontRef idx="minor">
+            <a:schemeClr val="lt1"/>
+          </a:fontRef>
+        </p:style>
+        <p:txBody>
+          <a:bodyPr rtlCol="0" anchor="ctr"/>
+          <a:lstStyle/>
+          <a:p>
+            <a:pPr algn="ctr"/>
+          </a:p>
+        </p:txBody>
+      </p:sp>
+      <p:sp>
+        <p:nvSpPr>
+          <p:cNvPr id="23" name="TextBox 22"/>
+          <p:cNvSpPr txBox="1"/>
+          <p:nvPr/>
+        </p:nvSpPr>
+        <p:spPr>
+          <a:xfrm>
+            <a:off x="8412480" y="3493008"/>
+            <a:ext cx="2971800" cy="246888"/>
+          </a:xfrm>
+          <a:prstGeom prst="rect">
+            <a:avLst/>
+          </a:prstGeom>
+          <a:noFill/>
+        </p:spPr>
+        <p:txBody>
+          <a:bodyPr wrap="square" lIns="54864" rIns="54864" tIns="27432" bIns="27432" anchor="t">
+            <a:spAutoFit/>
+          </a:bodyPr>
+          <a:lstStyle/>
+          <a:p>
+            <a:pPr algn="ctr"/>
+            <a:r>
+              <a:rPr sz="1400" b="1">
+                <a:solidFill>
+                  <a:srgbClr val="2D73AB"/>
+                </a:solidFill>
+                <a:latin typeface="Microsoft JhengHei"/>
+              </a:rPr>
+              <a:t>學生</a:t>
+            </a:r>
+          </a:p>
+        </p:txBody>
+      </p:sp>
+      <p:sp>
+        <p:nvSpPr>
+          <p:cNvPr id="24" name="TextBox 23"/>
+          <p:cNvSpPr txBox="1"/>
+          <p:nvPr/>
+        </p:nvSpPr>
+        <p:spPr>
+          <a:xfrm>
+            <a:off x="8439912" y="3813048"/>
+            <a:ext cx="2907792" cy="502920"/>
+          </a:xfrm>
+          <a:prstGeom prst="rect">
+            <a:avLst/>
+          </a:prstGeom>
+          <a:noFill/>
+        </p:spPr>
+        <p:txBody>
+          <a:bodyPr wrap="square" lIns="54864" rIns="54864" tIns="27432" bIns="27432" anchor="t">
+            <a:spAutoFit/>
+          </a:bodyPr>
+          <a:lstStyle/>
+          <a:p>
+            <a:pPr algn="ctr"/>
+            <a:r>
+              <a:rPr sz="1500" b="0">
+                <a:solidFill>
+                  <a:srgbClr val="232C36"/>
+                </a:solidFill>
+                <a:latin typeface="Microsoft JhengHei"/>
+              </a:rPr>
+              <a:t>上傳證明
+納入學習歷程</a:t>
+            </a:r>
+          </a:p>
+        </p:txBody>
+      </p:sp>
+      <p:sp>
+        <p:nvSpPr>
+          <p:cNvPr id="25" name="Rounded Rectangle 24"/>
+          <p:cNvSpPr/>
+          <p:nvPr/>
+        </p:nvSpPr>
+        <p:spPr>
+          <a:xfrm>
+            <a:off x="731520" y="5166360"/>
+            <a:ext cx="10698480" cy="804672"/>
           </a:xfrm>
           <a:prstGeom prst="roundRect">
             <a:avLst/>
@@ -3720,14 +4302,14 @@
       </p:sp>
       <p:sp>
         <p:nvSpPr>
-          <p:cNvPr id="11" name="TextBox 10"/>
-          <p:cNvSpPr txBox="1"/>
-          <p:nvPr/>
-        </p:nvSpPr>
-        <p:spPr>
-          <a:xfrm>
-            <a:off x="6565392" y="3767328"/>
-            <a:ext cx="4572000" cy="256032"/>
+          <p:cNvPr id="26" name="TextBox 25"/>
+          <p:cNvSpPr txBox="1"/>
+          <p:nvPr/>
+        </p:nvSpPr>
+        <p:spPr>
+          <a:xfrm>
+            <a:off x="896112" y="5276088"/>
+            <a:ext cx="10378440" cy="256032"/>
           </a:xfrm>
           <a:prstGeom prst="rect">
             <a:avLst/>
@@ -3748,21 +4330,21 @@
                 </a:solidFill>
                 <a:latin typeface="Microsoft JhengHei"/>
               </a:rPr>
-              <a:t>自傳小幫手</a:t>
-            </a:r>
-          </a:p>
-        </p:txBody>
-      </p:sp>
-      <p:sp>
-        <p:nvSpPr>
-          <p:cNvPr id="12" name="TextBox 11"/>
-          <p:cNvSpPr txBox="1"/>
-          <p:nvPr/>
-        </p:nvSpPr>
-        <p:spPr>
-          <a:xfrm>
-            <a:off x="6565392" y="4096512"/>
-            <a:ext cx="4572000" cy="1618488"/>
+              <a:t>草稿中的來源邊界</a:t>
+            </a:r>
+          </a:p>
+        </p:txBody>
+      </p:sp>
+      <p:sp>
+        <p:nvSpPr>
+          <p:cNvPr id="27" name="TextBox 26"/>
+          <p:cNvSpPr txBox="1"/>
+          <p:nvPr/>
+        </p:nvSpPr>
+        <p:spPr>
+          <a:xfrm>
+            <a:off x="896112" y="5605272"/>
+            <a:ext cx="10378440" cy="274320"/>
           </a:xfrm>
           <a:prstGeom prst="rect">
             <a:avLst/>
@@ -3783,10 +4365,7 @@
                 </a:solidFill>
                 <a:latin typeface="Microsoft JhengHei"/>
               </a:rPr>
-              <a:t>一次問四題
-依學生回答產生草稿
-空白內容標示待補
-學生修改後再送導師確認</a:t>
+              <a:t>外部競賽證明由主辦單位或 AREC 開立；科辦只有在自己是主辦方時才可能開立證明。公假與嘉獎是另一類校內行政紀錄。以上仍待科助確認。</a:t>
             </a:r>
           </a:p>
         </p:txBody>
@@ -3890,7 +4469,7 @@
                 </a:solidFill>
                 <a:latin typeface="Microsoft JhengHei"/>
               </a:rPr>
-              <a:t>招生資料 Agent：每年更新，但不自動發布</a:t>
+              <a:t>AI Agent：系統的兩個 AI 角色</a:t>
             </a:r>
           </a:p>
         </p:txBody>
@@ -3965,158 +4544,16 @@
           </a:p>
         </p:txBody>
       </p:sp>
-      <p:pic>
-        <p:nvPicPr>
-          <p:cNvPr id="6" name="Picture 5" descr="D-13-admission-rule-update-flow.png"/>
-          <p:cNvPicPr>
-            <a:picLocks noChangeAspect="1"/>
-          </p:cNvPicPr>
-          <p:nvPr/>
-        </p:nvPicPr>
-        <p:blipFill>
-          <a:blip r:embed="rId2"/>
-          <a:stretch>
-            <a:fillRect/>
-          </a:stretch>
-        </p:blipFill>
-        <p:spPr>
-          <a:xfrm>
-            <a:off x="2776995" y="1051560"/>
-            <a:ext cx="1669769" cy="5257800"/>
-          </a:xfrm>
-          <a:prstGeom prst="rect">
-            <a:avLst/>
-          </a:prstGeom>
-        </p:spPr>
-      </p:pic>
-      <p:sp>
-        <p:nvSpPr>
-          <p:cNvPr id="7" name="TextBox 6"/>
-          <p:cNvSpPr txBox="1"/>
-          <p:nvPr/>
-        </p:nvSpPr>
-        <p:spPr>
-          <a:xfrm>
-            <a:off x="7040880" y="1417320"/>
-            <a:ext cx="4480560" cy="3200400"/>
-          </a:xfrm>
-          <a:prstGeom prst="rect">
-            <a:avLst/>
-          </a:prstGeom>
-          <a:noFill/>
-        </p:spPr>
-        <p:txBody>
-          <a:bodyPr wrap="square" lIns="73152" rIns="73152" tIns="54864">
-            <a:spAutoFit/>
-          </a:bodyPr>
-          <a:lstStyle/>
-          <a:p>
-            <a:pPr>
-              <a:lnSpc>
-                <a:spcPct val="110000"/>
-              </a:lnSpc>
-              <a:spcAft>
-                <a:spcPts val="800"/>
-              </a:spcAft>
-              <a:defRPr sz="1800">
-                <a:solidFill>
-                  <a:srgbClr val="232C36"/>
-                </a:solidFill>
-                <a:latin typeface="Microsoft JhengHei"/>
-              </a:defRPr>
-            </a:pPr>
-            <a:r>
-              <a:t>1. 管理者提供官方來源</a:t>
-            </a:r>
-          </a:p>
-          <a:p>
-            <a:pPr>
-              <a:lnSpc>
-                <a:spcPct val="110000"/>
-              </a:lnSpc>
-              <a:spcAft>
-                <a:spcPts val="800"/>
-              </a:spcAft>
-              <a:defRPr sz="1800">
-                <a:solidFill>
-                  <a:srgbClr val="232C36"/>
-                </a:solidFill>
-                <a:latin typeface="Microsoft JhengHei"/>
-              </a:defRPr>
-            </a:pPr>
-            <a:r>
-              <a:t>2. Agent 偵測變更並擷取校系要求</a:t>
-            </a:r>
-          </a:p>
-          <a:p>
-            <a:pPr>
-              <a:lnSpc>
-                <a:spcPct val="110000"/>
-              </a:lnSpc>
-              <a:spcAft>
-                <a:spcPts val="800"/>
-              </a:spcAft>
-              <a:defRPr sz="1800">
-                <a:solidFill>
-                  <a:srgbClr val="232C36"/>
-                </a:solidFill>
-                <a:latin typeface="Microsoft JhengHei"/>
-              </a:defRPr>
-            </a:pPr>
-            <a:r>
-              <a:t>3. 系統標記為 candidate</a:t>
-            </a:r>
-          </a:p>
-          <a:p>
-            <a:pPr>
-              <a:lnSpc>
-                <a:spcPct val="110000"/>
-              </a:lnSpc>
-              <a:spcAft>
-                <a:spcPts val="800"/>
-              </a:spcAft>
-              <a:defRPr sz="1800">
-                <a:solidFill>
-                  <a:srgbClr val="232C36"/>
-                </a:solidFill>
-                <a:latin typeface="Microsoft JhengHei"/>
-              </a:defRPr>
-            </a:pPr>
-            <a:r>
-              <a:t>4. 管理者核對後才發布 published</a:t>
-            </a:r>
-          </a:p>
-          <a:p>
-            <a:pPr>
-              <a:lnSpc>
-                <a:spcPct val="110000"/>
-              </a:lnSpc>
-              <a:spcAft>
-                <a:spcPts val="800"/>
-              </a:spcAft>
-              <a:defRPr sz="1800">
-                <a:solidFill>
-                  <a:srgbClr val="232C36"/>
-                </a:solidFill>
-                <a:latin typeface="Microsoft JhengHei"/>
-              </a:defRPr>
-            </a:pPr>
-            <a:r>
-              <a:t>5. 學生只看到已發布版本</a:t>
-            </a:r>
-          </a:p>
-        </p:txBody>
-      </p:sp>
-      <p:sp>
-        <p:nvSpPr>
-          <p:cNvPr id="8" name="Rounded Rectangle 7"/>
+      <p:sp>
+        <p:nvSpPr>
+          <p:cNvPr id="6" name="Rounded Rectangle 5"/>
           <p:cNvSpPr/>
           <p:nvPr/>
         </p:nvSpPr>
         <p:spPr>
           <a:xfrm>
-            <a:off x="7040880" y="4892040"/>
-            <a:ext cx="4480560" cy="914400"/>
+            <a:off x="822960" y="1417320"/>
+            <a:ext cx="4983480" cy="2331720"/>
           </a:xfrm>
           <a:prstGeom prst="roundRect">
             <a:avLst/>
@@ -4126,7 +4563,7 @@
           </a:solidFill>
           <a:ln w="15240">
             <a:solidFill>
-              <a:srgbClr val="B13F3F"/>
+              <a:srgbClr val="208985"/>
             </a:solidFill>
           </a:ln>
         </p:spPr>
@@ -4154,14 +4591,14 @@
       </p:sp>
       <p:sp>
         <p:nvSpPr>
-          <p:cNvPr id="9" name="TextBox 8"/>
-          <p:cNvSpPr txBox="1"/>
-          <p:nvPr/>
-        </p:nvSpPr>
-        <p:spPr>
-          <a:xfrm>
-            <a:off x="7205472" y="5001768"/>
-            <a:ext cx="4160520" cy="256032"/>
+          <p:cNvPr id="7" name="TextBox 6"/>
+          <p:cNvSpPr txBox="1"/>
+          <p:nvPr/>
+        </p:nvSpPr>
+        <p:spPr>
+          <a:xfrm>
+            <a:off x="987552" y="1527048"/>
+            <a:ext cx="4663440" cy="256032"/>
           </a:xfrm>
           <a:prstGeom prst="rect">
             <a:avLst/>
@@ -4178,12 +4615,95 @@
             <a:r>
               <a:rPr sz="1300" b="1">
                 <a:solidFill>
-                  <a:srgbClr val="B13F3F"/>
-                </a:solidFill>
-                <a:latin typeface="Microsoft JhengHei"/>
-              </a:rPr>
-              <a:t>要請老師確認</a:t>
-            </a:r>
+                  <a:srgbClr val="208985"/>
+                </a:solidFill>
+                <a:latin typeface="Microsoft JhengHei"/>
+              </a:rPr>
+              <a:t>資管科小助手</a:t>
+            </a:r>
+          </a:p>
+        </p:txBody>
+      </p:sp>
+      <p:sp>
+        <p:nvSpPr>
+          <p:cNvPr id="8" name="TextBox 7"/>
+          <p:cNvSpPr txBox="1"/>
+          <p:nvPr/>
+        </p:nvSpPr>
+        <p:spPr>
+          <a:xfrm>
+            <a:off x="987552" y="1856232"/>
+            <a:ext cx="4663440" cy="1801367"/>
+          </a:xfrm>
+          <a:prstGeom prst="rect">
+            <a:avLst/>
+          </a:prstGeom>
+          <a:noFill/>
+        </p:spPr>
+        <p:txBody>
+          <a:bodyPr wrap="square" lIns="54864" rIns="54864" tIns="27432" bIns="27432" anchor="t">
+            <a:spAutoFit/>
+          </a:bodyPr>
+          <a:lstStyle/>
+          <a:p>
+            <a:pPr algn="l"/>
+            <a:r>
+              <a:rPr sz="1600" b="0">
+                <a:solidFill>
+                  <a:srgbClr val="232C36"/>
+                </a:solidFill>
+                <a:latin typeface="Microsoft JhengHei"/>
+              </a:rPr>
+              <a:t>查詢科上規則
+查看自己的進度與缺件
+回答下一步問題
+檢查自傳內容一致性</a:t>
+            </a:r>
+          </a:p>
+        </p:txBody>
+      </p:sp>
+      <p:sp>
+        <p:nvSpPr>
+          <p:cNvPr id="9" name="Rounded Rectangle 8"/>
+          <p:cNvSpPr/>
+          <p:nvPr/>
+        </p:nvSpPr>
+        <p:spPr>
+          <a:xfrm>
+            <a:off x="6355080" y="1417320"/>
+            <a:ext cx="4983480" cy="2331720"/>
+          </a:xfrm>
+          <a:prstGeom prst="roundRect">
+            <a:avLst/>
+          </a:prstGeom>
+          <a:solidFill>
+            <a:srgbClr val="F2F6F9"/>
+          </a:solidFill>
+          <a:ln w="15240">
+            <a:solidFill>
+              <a:srgbClr val="DD812F"/>
+            </a:solidFill>
+          </a:ln>
+        </p:spPr>
+        <p:style>
+          <a:lnRef idx="1">
+            <a:schemeClr val="accent1"/>
+          </a:lnRef>
+          <a:fillRef idx="3">
+            <a:schemeClr val="accent1"/>
+          </a:fillRef>
+          <a:effectRef idx="2">
+            <a:schemeClr val="accent1"/>
+          </a:effectRef>
+          <a:fontRef idx="minor">
+            <a:schemeClr val="lt1"/>
+          </a:fontRef>
+        </p:style>
+        <p:txBody>
+          <a:bodyPr rtlCol="0" anchor="ctr"/>
+          <a:lstStyle/>
+          <a:p>
+            <a:pPr algn="ctr"/>
           </a:p>
         </p:txBody>
       </p:sp>
@@ -4195,8 +4715,8 @@
         </p:nvSpPr>
         <p:spPr>
           <a:xfrm>
-            <a:off x="7205472" y="5330952"/>
-            <a:ext cx="4160520" cy="384048"/>
+            <a:off x="6519672" y="1527048"/>
+            <a:ext cx="4663440" cy="256032"/>
           </a:xfrm>
           <a:prstGeom prst="rect">
             <a:avLst/>
@@ -4211,13 +4731,166 @@
           <a:p>
             <a:pPr algn="l"/>
             <a:r>
+              <a:rPr sz="1300" b="1">
+                <a:solidFill>
+                  <a:srgbClr val="DD812F"/>
+                </a:solidFill>
+                <a:latin typeface="Microsoft JhengHei"/>
+              </a:rPr>
+              <a:t>自傳小幫手</a:t>
+            </a:r>
+          </a:p>
+        </p:txBody>
+      </p:sp>
+      <p:sp>
+        <p:nvSpPr>
+          <p:cNvPr id="11" name="TextBox 10"/>
+          <p:cNvSpPr txBox="1"/>
+          <p:nvPr/>
+        </p:nvSpPr>
+        <p:spPr>
+          <a:xfrm>
+            <a:off x="6519672" y="1856232"/>
+            <a:ext cx="4663440" cy="1801367"/>
+          </a:xfrm>
+          <a:prstGeom prst="rect">
+            <a:avLst/>
+          </a:prstGeom>
+          <a:noFill/>
+        </p:spPr>
+        <p:txBody>
+          <a:bodyPr wrap="square" lIns="54864" rIns="54864" tIns="27432" bIns="27432" anchor="t">
+            <a:spAutoFit/>
+          </a:bodyPr>
+          <a:lstStyle/>
+          <a:p>
+            <a:pPr algn="l"/>
+            <a:r>
               <a:rPr sz="1600" b="0">
                 <a:solidFill>
                   <a:srgbClr val="232C36"/>
                 </a:solidFill>
                 <a:latin typeface="Microsoft JhengHei"/>
               </a:rPr>
-              <a:t>哪些官方網址可以作為來源？每年由誰核對與發布？</a:t>
+              <a:t>一次問四題
+依學生回答產生草稿
+空白內容標示待補
+學生修改後再送導師確認</a:t>
+            </a:r>
+          </a:p>
+        </p:txBody>
+      </p:sp>
+      <p:sp>
+        <p:nvSpPr>
+          <p:cNvPr id="12" name="Rounded Rectangle 11"/>
+          <p:cNvSpPr/>
+          <p:nvPr/>
+        </p:nvSpPr>
+        <p:spPr>
+          <a:xfrm>
+            <a:off x="822960" y="4251960"/>
+            <a:ext cx="10515600" cy="1051560"/>
+          </a:xfrm>
+          <a:prstGeom prst="roundRect">
+            <a:avLst/>
+          </a:prstGeom>
+          <a:solidFill>
+            <a:srgbClr val="F2F6F9"/>
+          </a:solidFill>
+          <a:ln w="15240">
+            <a:solidFill>
+              <a:srgbClr val="142E4E"/>
+            </a:solidFill>
+          </a:ln>
+        </p:spPr>
+        <p:style>
+          <a:lnRef idx="1">
+            <a:schemeClr val="accent1"/>
+          </a:lnRef>
+          <a:fillRef idx="3">
+            <a:schemeClr val="accent1"/>
+          </a:fillRef>
+          <a:effectRef idx="2">
+            <a:schemeClr val="accent1"/>
+          </a:effectRef>
+          <a:fontRef idx="minor">
+            <a:schemeClr val="lt1"/>
+          </a:fontRef>
+        </p:style>
+        <p:txBody>
+          <a:bodyPr rtlCol="0" anchor="ctr"/>
+          <a:lstStyle/>
+          <a:p>
+            <a:pPr algn="ctr"/>
+          </a:p>
+        </p:txBody>
+      </p:sp>
+      <p:sp>
+        <p:nvSpPr>
+          <p:cNvPr id="13" name="TextBox 12"/>
+          <p:cNvSpPr txBox="1"/>
+          <p:nvPr/>
+        </p:nvSpPr>
+        <p:spPr>
+          <a:xfrm>
+            <a:off x="987552" y="4361688"/>
+            <a:ext cx="10195560" cy="256032"/>
+          </a:xfrm>
+          <a:prstGeom prst="rect">
+            <a:avLst/>
+          </a:prstGeom>
+          <a:noFill/>
+        </p:spPr>
+        <p:txBody>
+          <a:bodyPr wrap="square" lIns="54864" rIns="54864" tIns="27432" bIns="27432" anchor="t">
+            <a:spAutoFit/>
+          </a:bodyPr>
+          <a:lstStyle/>
+          <a:p>
+            <a:pPr algn="l"/>
+            <a:r>
+              <a:rPr sz="1300" b="1">
+                <a:solidFill>
+                  <a:srgbClr val="142E4E"/>
+                </a:solidFill>
+                <a:latin typeface="Microsoft JhengHei"/>
+              </a:rPr>
+              <a:t>共同邊界</a:t>
+            </a:r>
+          </a:p>
+        </p:txBody>
+      </p:sp>
+      <p:sp>
+        <p:nvSpPr>
+          <p:cNvPr id="14" name="TextBox 13"/>
+          <p:cNvSpPr txBox="1"/>
+          <p:nvPr/>
+        </p:nvSpPr>
+        <p:spPr>
+          <a:xfrm>
+            <a:off x="987552" y="4690872"/>
+            <a:ext cx="10195560" cy="521207"/>
+          </a:xfrm>
+          <a:prstGeom prst="rect">
+            <a:avLst/>
+          </a:prstGeom>
+          <a:noFill/>
+        </p:spPr>
+        <p:txBody>
+          <a:bodyPr wrap="square" lIns="54864" rIns="54864" tIns="27432" bIns="27432" anchor="t">
+            <a:spAutoFit/>
+          </a:bodyPr>
+          <a:lstStyle/>
+          <a:p>
+            <a:pPr algn="l"/>
+            <a:r>
+              <a:rPr sz="1600" b="0">
+                <a:solidFill>
+                  <a:srgbClr val="232C36"/>
+                </a:solidFill>
+                <a:latin typeface="Microsoft JhengHei"/>
+              </a:rPr>
+              <a:t>AI 提供草稿、分類與提醒；學生確認資料，導師確認備審，管理者確認招生規則。</a:t>
             </a:r>
           </a:p>
         </p:txBody>
@@ -4321,7 +4994,7 @@
                 </a:solidFill>
                 <a:latin typeface="Microsoft JhengHei"/>
               </a:rPr>
-              <a:t>資料流與系統架構</a:t>
+              <a:t>招生資料 Agent：每年更新，但不自動發布</a:t>
             </a:r>
           </a:p>
         </p:txBody>
@@ -4356,7 +5029,7 @@
                 </a:solidFill>
                 <a:latin typeface="Microsoft JhengHei"/>
               </a:rPr>
-              <a:t>技術概要</a:t>
+              <a:t>AI 功能</a:t>
             </a:r>
           </a:p>
         </p:txBody>
@@ -4398,7 +5071,7 @@
       </p:sp>
       <p:pic>
         <p:nvPicPr>
-          <p:cNvPr id="6" name="Picture 5" descr="D-05-system-architecture.png"/>
+          <p:cNvPr id="6" name="Picture 5" descr="D-13-admission-rule-update-flow.png"/>
           <p:cNvPicPr>
             <a:picLocks noChangeAspect="1"/>
           </p:cNvPicPr>
@@ -4412,38 +5085,247 @@
         </p:blipFill>
         <p:spPr>
           <a:xfrm>
-            <a:off x="320040" y="2878435"/>
-            <a:ext cx="5623560" cy="1649768"/>
+            <a:off x="2776995" y="1051560"/>
+            <a:ext cx="1669769" cy="5257800"/>
           </a:xfrm>
           <a:prstGeom prst="rect">
             <a:avLst/>
           </a:prstGeom>
         </p:spPr>
       </p:pic>
-      <p:pic>
-        <p:nvPicPr>
-          <p:cNvPr id="7" name="Picture 6" descr="D-06-dfd.png"/>
-          <p:cNvPicPr>
-            <a:picLocks noChangeAspect="1"/>
-          </p:cNvPicPr>
-          <p:nvPr/>
-        </p:nvPicPr>
-        <p:blipFill>
-          <a:blip r:embed="rId3"/>
-          <a:stretch>
-            <a:fillRect/>
-          </a:stretch>
-        </p:blipFill>
-        <p:spPr>
-          <a:xfrm>
-            <a:off x="6172200" y="1654959"/>
-            <a:ext cx="5715000" cy="4096721"/>
-          </a:xfrm>
-          <a:prstGeom prst="rect">
-            <a:avLst/>
-          </a:prstGeom>
-        </p:spPr>
-      </p:pic>
+      <p:sp>
+        <p:nvSpPr>
+          <p:cNvPr id="7" name="TextBox 6"/>
+          <p:cNvSpPr txBox="1"/>
+          <p:nvPr/>
+        </p:nvSpPr>
+        <p:spPr>
+          <a:xfrm>
+            <a:off x="7040880" y="1417320"/>
+            <a:ext cx="4480560" cy="3200400"/>
+          </a:xfrm>
+          <a:prstGeom prst="rect">
+            <a:avLst/>
+          </a:prstGeom>
+          <a:noFill/>
+        </p:spPr>
+        <p:txBody>
+          <a:bodyPr wrap="square" lIns="73152" rIns="73152" tIns="54864">
+            <a:spAutoFit/>
+          </a:bodyPr>
+          <a:lstStyle/>
+          <a:p>
+            <a:pPr>
+              <a:lnSpc>
+                <a:spcPct val="110000"/>
+              </a:lnSpc>
+              <a:spcAft>
+                <a:spcPts val="800"/>
+              </a:spcAft>
+              <a:defRPr sz="1800">
+                <a:solidFill>
+                  <a:srgbClr val="232C36"/>
+                </a:solidFill>
+                <a:latin typeface="Microsoft JhengHei"/>
+              </a:defRPr>
+            </a:pPr>
+            <a:r>
+              <a:t>1. 管理者提供官方來源</a:t>
+            </a:r>
+          </a:p>
+          <a:p>
+            <a:pPr>
+              <a:lnSpc>
+                <a:spcPct val="110000"/>
+              </a:lnSpc>
+              <a:spcAft>
+                <a:spcPts val="800"/>
+              </a:spcAft>
+              <a:defRPr sz="1800">
+                <a:solidFill>
+                  <a:srgbClr val="232C36"/>
+                </a:solidFill>
+                <a:latin typeface="Microsoft JhengHei"/>
+              </a:defRPr>
+            </a:pPr>
+            <a:r>
+              <a:t>2. Agent 偵測變更並擷取校系要求</a:t>
+            </a:r>
+          </a:p>
+          <a:p>
+            <a:pPr>
+              <a:lnSpc>
+                <a:spcPct val="110000"/>
+              </a:lnSpc>
+              <a:spcAft>
+                <a:spcPts val="800"/>
+              </a:spcAft>
+              <a:defRPr sz="1800">
+                <a:solidFill>
+                  <a:srgbClr val="232C36"/>
+                </a:solidFill>
+                <a:latin typeface="Microsoft JhengHei"/>
+              </a:defRPr>
+            </a:pPr>
+            <a:r>
+              <a:t>3. 系統標記為 candidate</a:t>
+            </a:r>
+          </a:p>
+          <a:p>
+            <a:pPr>
+              <a:lnSpc>
+                <a:spcPct val="110000"/>
+              </a:lnSpc>
+              <a:spcAft>
+                <a:spcPts val="800"/>
+              </a:spcAft>
+              <a:defRPr sz="1800">
+                <a:solidFill>
+                  <a:srgbClr val="232C36"/>
+                </a:solidFill>
+                <a:latin typeface="Microsoft JhengHei"/>
+              </a:defRPr>
+            </a:pPr>
+            <a:r>
+              <a:t>4. 管理者核對後才發布 published</a:t>
+            </a:r>
+          </a:p>
+          <a:p>
+            <a:pPr>
+              <a:lnSpc>
+                <a:spcPct val="110000"/>
+              </a:lnSpc>
+              <a:spcAft>
+                <a:spcPts val="800"/>
+              </a:spcAft>
+              <a:defRPr sz="1800">
+                <a:solidFill>
+                  <a:srgbClr val="232C36"/>
+                </a:solidFill>
+                <a:latin typeface="Microsoft JhengHei"/>
+              </a:defRPr>
+            </a:pPr>
+            <a:r>
+              <a:t>5. 學生只看到已發布版本</a:t>
+            </a:r>
+          </a:p>
+        </p:txBody>
+      </p:sp>
+      <p:sp>
+        <p:nvSpPr>
+          <p:cNvPr id="8" name="Rounded Rectangle 7"/>
+          <p:cNvSpPr/>
+          <p:nvPr/>
+        </p:nvSpPr>
+        <p:spPr>
+          <a:xfrm>
+            <a:off x="7040880" y="4892040"/>
+            <a:ext cx="4480560" cy="914400"/>
+          </a:xfrm>
+          <a:prstGeom prst="roundRect">
+            <a:avLst/>
+          </a:prstGeom>
+          <a:solidFill>
+            <a:srgbClr val="F2F6F9"/>
+          </a:solidFill>
+          <a:ln w="15240">
+            <a:solidFill>
+              <a:srgbClr val="B13F3F"/>
+            </a:solidFill>
+          </a:ln>
+        </p:spPr>
+        <p:style>
+          <a:lnRef idx="1">
+            <a:schemeClr val="accent1"/>
+          </a:lnRef>
+          <a:fillRef idx="3">
+            <a:schemeClr val="accent1"/>
+          </a:fillRef>
+          <a:effectRef idx="2">
+            <a:schemeClr val="accent1"/>
+          </a:effectRef>
+          <a:fontRef idx="minor">
+            <a:schemeClr val="lt1"/>
+          </a:fontRef>
+        </p:style>
+        <p:txBody>
+          <a:bodyPr rtlCol="0" anchor="ctr"/>
+          <a:lstStyle/>
+          <a:p>
+            <a:pPr algn="ctr"/>
+          </a:p>
+        </p:txBody>
+      </p:sp>
+      <p:sp>
+        <p:nvSpPr>
+          <p:cNvPr id="9" name="TextBox 8"/>
+          <p:cNvSpPr txBox="1"/>
+          <p:nvPr/>
+        </p:nvSpPr>
+        <p:spPr>
+          <a:xfrm>
+            <a:off x="7205472" y="5001768"/>
+            <a:ext cx="4160520" cy="256032"/>
+          </a:xfrm>
+          <a:prstGeom prst="rect">
+            <a:avLst/>
+          </a:prstGeom>
+          <a:noFill/>
+        </p:spPr>
+        <p:txBody>
+          <a:bodyPr wrap="square" lIns="54864" rIns="54864" tIns="27432" bIns="27432" anchor="t">
+            <a:spAutoFit/>
+          </a:bodyPr>
+          <a:lstStyle/>
+          <a:p>
+            <a:pPr algn="l"/>
+            <a:r>
+              <a:rPr sz="1300" b="1">
+                <a:solidFill>
+                  <a:srgbClr val="B13F3F"/>
+                </a:solidFill>
+                <a:latin typeface="Microsoft JhengHei"/>
+              </a:rPr>
+              <a:t>要請老師確認</a:t>
+            </a:r>
+          </a:p>
+        </p:txBody>
+      </p:sp>
+      <p:sp>
+        <p:nvSpPr>
+          <p:cNvPr id="10" name="TextBox 9"/>
+          <p:cNvSpPr txBox="1"/>
+          <p:nvPr/>
+        </p:nvSpPr>
+        <p:spPr>
+          <a:xfrm>
+            <a:off x="7205472" y="5330952"/>
+            <a:ext cx="4160520" cy="384048"/>
+          </a:xfrm>
+          <a:prstGeom prst="rect">
+            <a:avLst/>
+          </a:prstGeom>
+          <a:noFill/>
+        </p:spPr>
+        <p:txBody>
+          <a:bodyPr wrap="square" lIns="54864" rIns="54864" tIns="27432" bIns="27432" anchor="t">
+            <a:spAutoFit/>
+          </a:bodyPr>
+          <a:lstStyle/>
+          <a:p>
+            <a:pPr algn="l"/>
+            <a:r>
+              <a:rPr sz="1600" b="0">
+                <a:solidFill>
+                  <a:srgbClr val="232C36"/>
+                </a:solidFill>
+                <a:latin typeface="Microsoft JhengHei"/>
+              </a:rPr>
+              <a:t>哪些官方網址可以作為來源？每年由誰核對與發布？</a:t>
+            </a:r>
+          </a:p>
+        </p:txBody>
+      </p:sp>
     </p:spTree>
   </p:cSld>
   <p:clrMapOvr>
@@ -4543,7 +5425,7 @@
                 </a:solidFill>
                 <a:latin typeface="Microsoft JhengHei"/>
               </a:rPr>
-              <a:t>資料表目前如何支撐主線</a:t>
+              <a:t>資料流與系統架構</a:t>
             </a:r>
           </a:p>
         </p:txBody>
@@ -4578,7 +5460,7 @@
                 </a:solidFill>
                 <a:latin typeface="Microsoft JhengHei"/>
               </a:rPr>
-              <a:t>資料設計</a:t>
+              <a:t>技術概要</a:t>
             </a:r>
           </a:p>
         </p:txBody>
@@ -4620,7 +5502,7 @@
       </p:sp>
       <p:pic>
         <p:nvPicPr>
-          <p:cNvPr id="6" name="Picture 5" descr="D-09-erd-v2.png"/>
+          <p:cNvPr id="6" name="Picture 5" descr="D-05-system-architecture.png"/>
           <p:cNvPicPr>
             <a:picLocks noChangeAspect="1"/>
           </p:cNvPicPr>
@@ -4634,49 +5516,38 @@
         </p:blipFill>
         <p:spPr>
           <a:xfrm>
-            <a:off x="411480" y="1073311"/>
-            <a:ext cx="11292839" cy="5214296"/>
+            <a:off x="320040" y="2878435"/>
+            <a:ext cx="5623560" cy="1649768"/>
           </a:xfrm>
           <a:prstGeom prst="rect">
             <a:avLst/>
           </a:prstGeom>
         </p:spPr>
       </p:pic>
-      <p:sp>
-        <p:nvSpPr>
-          <p:cNvPr id="7" name="TextBox 6"/>
-          <p:cNvSpPr txBox="1"/>
-          <p:nvPr/>
-        </p:nvSpPr>
-        <p:spPr>
-          <a:xfrm>
-            <a:off x="640080" y="6309360"/>
-            <a:ext cx="10881360" cy="256032"/>
-          </a:xfrm>
-          <a:prstGeom prst="rect">
-            <a:avLst/>
-          </a:prstGeom>
-          <a:noFill/>
-        </p:spPr>
-        <p:txBody>
-          <a:bodyPr wrap="square" lIns="54864" rIns="54864" tIns="27432" bIns="27432" anchor="t">
-            <a:spAutoFit/>
-          </a:bodyPr>
-          <a:lstStyle/>
-          <a:p>
-            <a:pPr algn="ctr"/>
-            <a:r>
-              <a:rPr sz="1200" b="0">
-                <a:solidFill>
-                  <a:srgbClr val="5D6B79"/>
-                </a:solidFill>
-                <a:latin typeface="Microsoft JhengHei"/>
-              </a:rPr>
-              <a:t>主線資料：學生、原始檔、學習紀錄、目標校系、備審輸出、導師審核</a:t>
-            </a:r>
-          </a:p>
-        </p:txBody>
-      </p:sp>
+      <p:pic>
+        <p:nvPicPr>
+          <p:cNvPr id="7" name="Picture 6" descr="D-06-dfd.png"/>
+          <p:cNvPicPr>
+            <a:picLocks noChangeAspect="1"/>
+          </p:cNvPicPr>
+          <p:nvPr/>
+        </p:nvPicPr>
+        <p:blipFill>
+          <a:blip r:embed="rId3"/>
+          <a:stretch>
+            <a:fillRect/>
+          </a:stretch>
+        </p:blipFill>
+        <p:spPr>
+          <a:xfrm>
+            <a:off x="6172200" y="1644024"/>
+            <a:ext cx="5715000" cy="4118590"/>
+          </a:xfrm>
+          <a:prstGeom prst="rect">
+            <a:avLst/>
+          </a:prstGeom>
+        </p:spPr>
+      </p:pic>
     </p:spTree>
   </p:cSld>
   <p:clrMapOvr>
@@ -4776,7 +5647,7 @@
                 </a:solidFill>
                 <a:latin typeface="Microsoft JhengHei"/>
               </a:rPr>
-              <a:t>目前 AI 使用的安全邊界</a:t>
+              <a:t>資料表目前如何支撐主線</a:t>
             </a:r>
           </a:p>
         </p:txBody>
@@ -4811,7 +5682,7 @@
                 </a:solidFill>
                 <a:latin typeface="Microsoft JhengHei"/>
               </a:rPr>
-              <a:t>風險與限制</a:t>
+              <a:t>資料設計</a:t>
             </a:r>
           </a:p>
         </p:txBody>
@@ -4851,216 +5722,61 @@
           </a:p>
         </p:txBody>
       </p:sp>
-      <p:sp>
-        <p:nvSpPr>
-          <p:cNvPr id="6" name="TextBox 5"/>
-          <p:cNvSpPr txBox="1"/>
-          <p:nvPr/>
-        </p:nvSpPr>
-        <p:spPr>
-          <a:xfrm>
-            <a:off x="777240" y="1325880"/>
-            <a:ext cx="10698480" cy="3566160"/>
-          </a:xfrm>
-          <a:prstGeom prst="rect">
-            <a:avLst/>
-          </a:prstGeom>
-          <a:noFill/>
-        </p:spPr>
-        <p:txBody>
-          <a:bodyPr wrap="square" lIns="73152" rIns="73152" tIns="54864">
-            <a:spAutoFit/>
-          </a:bodyPr>
-          <a:lstStyle/>
-          <a:p>
-            <a:pPr>
-              <a:lnSpc>
-                <a:spcPct val="110000"/>
-              </a:lnSpc>
-              <a:spcAft>
-                <a:spcPts val="800"/>
-              </a:spcAft>
-              <a:defRPr sz="2100">
-                <a:solidFill>
-                  <a:srgbClr val="232C36"/>
-                </a:solidFill>
-                <a:latin typeface="Microsoft JhengHei"/>
-              </a:defRPr>
-            </a:pPr>
-            <a:r>
-              <a:t>學生自己的 API Key：只在這次請求使用，不存檔、不寫入資料庫、不放進網址</a:t>
-            </a:r>
-          </a:p>
-          <a:p>
-            <a:pPr>
-              <a:lnSpc>
-                <a:spcPct val="110000"/>
-              </a:lnSpc>
-              <a:spcAft>
-                <a:spcPts val="800"/>
-              </a:spcAft>
-              <a:defRPr sz="2100">
-                <a:solidFill>
-                  <a:srgbClr val="232C36"/>
-                </a:solidFill>
-                <a:latin typeface="Microsoft JhengHei"/>
-              </a:defRPr>
-            </a:pPr>
-            <a:r>
-              <a:t>系統知識庫：先由科上文件整理，AI 回答時附來源，仍需要老師或科辦核對</a:t>
-            </a:r>
-          </a:p>
-          <a:p>
-            <a:pPr>
-              <a:lnSpc>
-                <a:spcPct val="110000"/>
-              </a:lnSpc>
-              <a:spcAft>
-                <a:spcPts val="800"/>
-              </a:spcAft>
-              <a:defRPr sz="2100">
-                <a:solidFill>
-                  <a:srgbClr val="232C36"/>
-                </a:solidFill>
-                <a:latin typeface="Microsoft JhengHei"/>
-              </a:defRPr>
-            </a:pPr>
-            <a:r>
-              <a:t>AI 產出：是草稿與提醒，學生要修改，導師要確認，系統才產出正式 Word</a:t>
-            </a:r>
-          </a:p>
-          <a:p>
-            <a:pPr>
-              <a:lnSpc>
-                <a:spcPct val="110000"/>
-              </a:lnSpc>
-              <a:spcAft>
-                <a:spcPts val="800"/>
-              </a:spcAft>
-              <a:defRPr sz="2100">
-                <a:solidFill>
-                  <a:srgbClr val="232C36"/>
-                </a:solidFill>
-                <a:latin typeface="Microsoft JhengHei"/>
-              </a:defRPr>
-            </a:pPr>
-            <a:r>
-              <a:t>招生規則：Agent 只能產生待審版本，不能直接覆蓋已發布規則</a:t>
-            </a:r>
-          </a:p>
-        </p:txBody>
-      </p:sp>
-      <p:sp>
-        <p:nvSpPr>
-          <p:cNvPr id="7" name="Rounded Rectangle 6"/>
-          <p:cNvSpPr/>
-          <p:nvPr/>
-        </p:nvSpPr>
-        <p:spPr>
-          <a:xfrm>
-            <a:off x="777240" y="5074920"/>
-            <a:ext cx="10561320" cy="822960"/>
-          </a:xfrm>
-          <a:prstGeom prst="roundRect">
-            <a:avLst/>
-          </a:prstGeom>
-          <a:solidFill>
-            <a:srgbClr val="F2F6F9"/>
-          </a:solidFill>
-          <a:ln w="15240">
-            <a:solidFill>
-              <a:srgbClr val="B13F3F"/>
-            </a:solidFill>
-          </a:ln>
-        </p:spPr>
-        <p:style>
-          <a:lnRef idx="1">
-            <a:schemeClr val="accent1"/>
-          </a:lnRef>
-          <a:fillRef idx="3">
-            <a:schemeClr val="accent1"/>
-          </a:fillRef>
-          <a:effectRef idx="2">
-            <a:schemeClr val="accent1"/>
-          </a:effectRef>
-          <a:fontRef idx="minor">
-            <a:schemeClr val="lt1"/>
-          </a:fontRef>
-        </p:style>
-        <p:txBody>
-          <a:bodyPr rtlCol="0" anchor="ctr"/>
+      <p:pic>
+        <p:nvPicPr>
+          <p:cNvPr id="6" name="Picture 5" descr="D-09-erd-v2.png"/>
+          <p:cNvPicPr>
+            <a:picLocks noChangeAspect="1"/>
+          </p:cNvPicPr>
+          <p:nvPr/>
+        </p:nvPicPr>
+        <p:blipFill>
+          <a:blip r:embed="rId2"/>
+          <a:stretch>
+            <a:fillRect/>
+          </a:stretch>
+        </p:blipFill>
+        <p:spPr>
+          <a:xfrm>
+            <a:off x="411480" y="1073311"/>
+            <a:ext cx="11292839" cy="5214296"/>
+          </a:xfrm>
+          <a:prstGeom prst="rect">
+            <a:avLst/>
+          </a:prstGeom>
+        </p:spPr>
+      </p:pic>
+      <p:sp>
+        <p:nvSpPr>
+          <p:cNvPr id="7" name="TextBox 6"/>
+          <p:cNvSpPr txBox="1"/>
+          <p:nvPr/>
+        </p:nvSpPr>
+        <p:spPr>
+          <a:xfrm>
+            <a:off x="640080" y="6309360"/>
+            <a:ext cx="10881360" cy="256032"/>
+          </a:xfrm>
+          <a:prstGeom prst="rect">
+            <a:avLst/>
+          </a:prstGeom>
+          <a:noFill/>
+        </p:spPr>
+        <p:txBody>
+          <a:bodyPr wrap="square" lIns="54864" rIns="54864" tIns="27432" bIns="27432" anchor="t">
+            <a:spAutoFit/>
+          </a:bodyPr>
           <a:lstStyle/>
           <a:p>
             <a:pPr algn="ctr"/>
-          </a:p>
-        </p:txBody>
-      </p:sp>
-      <p:sp>
-        <p:nvSpPr>
-          <p:cNvPr id="8" name="TextBox 7"/>
-          <p:cNvSpPr txBox="1"/>
-          <p:nvPr/>
-        </p:nvSpPr>
-        <p:spPr>
-          <a:xfrm>
-            <a:off x="941832" y="5184648"/>
-            <a:ext cx="10241280" cy="256032"/>
-          </a:xfrm>
-          <a:prstGeom prst="rect">
-            <a:avLst/>
-          </a:prstGeom>
-          <a:noFill/>
-        </p:spPr>
-        <p:txBody>
-          <a:bodyPr wrap="square" lIns="54864" rIns="54864" tIns="27432" bIns="27432" anchor="t">
-            <a:spAutoFit/>
-          </a:bodyPr>
-          <a:lstStyle/>
-          <a:p>
-            <a:pPr algn="l"/>
-            <a:r>
-              <a:rPr sz="1300" b="1">
-                <a:solidFill>
-                  <a:srgbClr val="B13F3F"/>
-                </a:solidFill>
-                <a:latin typeface="Microsoft JhengHei"/>
-              </a:rPr>
-              <a:t>需要決策</a:t>
-            </a:r>
-          </a:p>
-        </p:txBody>
-      </p:sp>
-      <p:sp>
-        <p:nvSpPr>
-          <p:cNvPr id="9" name="TextBox 8"/>
-          <p:cNvSpPr txBox="1"/>
-          <p:nvPr/>
-        </p:nvSpPr>
-        <p:spPr>
-          <a:xfrm>
-            <a:off x="941832" y="5513831"/>
-            <a:ext cx="10241280" cy="292608"/>
-          </a:xfrm>
-          <a:prstGeom prst="rect">
-            <a:avLst/>
-          </a:prstGeom>
-          <a:noFill/>
-        </p:spPr>
-        <p:txBody>
-          <a:bodyPr wrap="square" lIns="54864" rIns="54864" tIns="27432" bIns="27432" anchor="t">
-            <a:spAutoFit/>
-          </a:bodyPr>
-          <a:lstStyle/>
-          <a:p>
-            <a:pPr algn="l"/>
-            <a:r>
-              <a:rPr sz="1600" b="0">
-                <a:solidFill>
-                  <a:srgbClr val="232C36"/>
-                </a:solidFill>
-                <a:latin typeface="Microsoft JhengHei"/>
-              </a:rPr>
-              <a:t>是否允許把學生資料送到 Google Gemini？若允許，採免費方案、付費方案，或要求學生同意？</a:t>
+            <a:r>
+              <a:rPr sz="1200" b="0">
+                <a:solidFill>
+                  <a:srgbClr val="5D6B79"/>
+                </a:solidFill>
+                <a:latin typeface="Microsoft JhengHei"/>
+              </a:rPr>
+              <a:t>主線資料：學生、原始檔、學習紀錄、目標校系、備審輸出、導師審核</a:t>
             </a:r>
           </a:p>
         </p:txBody>
@@ -5164,7 +5880,7 @@
                 </a:solidFill>
                 <a:latin typeface="Microsoft JhengHei"/>
               </a:rPr>
-              <a:t>請老師先確認：會擋住開發的問題</a:t>
+              <a:t>目前 AI 使用的安全邊界</a:t>
             </a:r>
           </a:p>
         </p:txBody>
@@ -5199,7 +5915,7 @@
                 </a:solidFill>
                 <a:latin typeface="Microsoft JhengHei"/>
               </a:rPr>
-              <a:t>討論清單 1</a:t>
+              <a:t>風險與限制</a:t>
             </a:r>
           </a:p>
         </p:txBody>
@@ -5247,43 +5963,8 @@
         </p:nvSpPr>
         <p:spPr>
           <a:xfrm>
-            <a:off x="777240" y="1115568"/>
-            <a:ext cx="10698480" cy="365760"/>
-          </a:xfrm>
-          <a:prstGeom prst="rect">
-            <a:avLst/>
-          </a:prstGeom>
-          <a:noFill/>
-        </p:spPr>
-        <p:txBody>
-          <a:bodyPr wrap="square" lIns="54864" rIns="54864" tIns="27432" bIns="27432" anchor="t">
-            <a:spAutoFit/>
-          </a:bodyPr>
-          <a:lstStyle/>
-          <a:p>
-            <a:pPr algn="l"/>
-            <a:r>
-              <a:rPr sz="2200" b="1">
-                <a:solidFill>
-                  <a:srgbClr val="B13F3F"/>
-                </a:solidFill>
-                <a:latin typeface="Microsoft JhengHei"/>
-              </a:rPr>
-              <a:t>這三題若沒有答案，AI 與權限設計都可能重做。</a:t>
-            </a:r>
-          </a:p>
-        </p:txBody>
-      </p:sp>
-      <p:sp>
-        <p:nvSpPr>
-          <p:cNvPr id="7" name="TextBox 6"/>
-          <p:cNvSpPr txBox="1"/>
-          <p:nvPr/>
-        </p:nvSpPr>
-        <p:spPr>
-          <a:xfrm>
-            <a:off x="868680" y="1828800"/>
-            <a:ext cx="10424160" cy="2468880"/>
+            <a:off x="777240" y="1325880"/>
+            <a:ext cx="10698480" cy="3566160"/>
           </a:xfrm>
           <a:prstGeom prst="rect">
             <a:avLst/>
@@ -5303,7 +5984,7 @@
               <a:spcAft>
                 <a:spcPts val="800"/>
               </a:spcAft>
-              <a:defRPr sz="2300">
+              <a:defRPr sz="2100">
                 <a:solidFill>
                   <a:srgbClr val="232C36"/>
                 </a:solidFill>
@@ -5311,7 +5992,7 @@
               </a:defRPr>
             </a:pPr>
             <a:r>
-              <a:t>1. 學生資料可以送給 Google Gemini 嗎？需要同意書或改用付費方案嗎？</a:t>
+              <a:t>學生自己的 API Key：只在這次請求使用，不存檔、不寫入資料庫、不放進網址</a:t>
             </a:r>
           </a:p>
           <a:p>
@@ -5322,7 +6003,7 @@
               <a:spcAft>
                 <a:spcPts val="800"/>
               </a:spcAft>
-              <a:defRPr sz="2300">
+              <a:defRPr sz="2100">
                 <a:solidFill>
                   <a:srgbClr val="232C36"/>
                 </a:solidFill>
@@ -5330,7 +6011,7 @@
               </a:defRPr>
             </a:pPr>
             <a:r>
-              <a:t>2. AI 費用由學校、科上、專題經費，還是由學生自行提供金鑰？</a:t>
+              <a:t>系統知識庫：先由科上文件整理，AI 回答時附來源，仍需要老師或科辦核對</a:t>
             </a:r>
           </a:p>
           <a:p>
@@ -5341,7 +6022,7 @@
               <a:spcAft>
                 <a:spcPts val="800"/>
               </a:spcAft>
-              <a:defRPr sz="2300">
+              <a:defRPr sz="2100">
                 <a:solidFill>
                   <a:srgbClr val="232C36"/>
                 </a:solidFill>
@@ -5349,8 +6030,72 @@
               </a:defRPr>
             </a:pPr>
             <a:r>
-              <a:t>3. AI 協助自傳是否可放入備審？是否要標示「AI 協助草稿」並由導師確認？</a:t>
-            </a:r>
+              <a:t>AI 產出：是草稿與提醒，學生要修改，導師要確認，系統才產出正式 Word</a:t>
+            </a:r>
+          </a:p>
+          <a:p>
+            <a:pPr>
+              <a:lnSpc>
+                <a:spcPct val="110000"/>
+              </a:lnSpc>
+              <a:spcAft>
+                <a:spcPts val="800"/>
+              </a:spcAft>
+              <a:defRPr sz="2100">
+                <a:solidFill>
+                  <a:srgbClr val="232C36"/>
+                </a:solidFill>
+                <a:latin typeface="Microsoft JhengHei"/>
+              </a:defRPr>
+            </a:pPr>
+            <a:r>
+              <a:t>招生規則：Agent 只能產生待審版本，不能直接覆蓋已發布規則</a:t>
+            </a:r>
+          </a:p>
+        </p:txBody>
+      </p:sp>
+      <p:sp>
+        <p:nvSpPr>
+          <p:cNvPr id="7" name="Rounded Rectangle 6"/>
+          <p:cNvSpPr/>
+          <p:nvPr/>
+        </p:nvSpPr>
+        <p:spPr>
+          <a:xfrm>
+            <a:off x="777240" y="5074920"/>
+            <a:ext cx="10561320" cy="822960"/>
+          </a:xfrm>
+          <a:prstGeom prst="roundRect">
+            <a:avLst/>
+          </a:prstGeom>
+          <a:solidFill>
+            <a:srgbClr val="F2F6F9"/>
+          </a:solidFill>
+          <a:ln w="15240">
+            <a:solidFill>
+              <a:srgbClr val="B13F3F"/>
+            </a:solidFill>
+          </a:ln>
+        </p:spPr>
+        <p:style>
+          <a:lnRef idx="1">
+            <a:schemeClr val="accent1"/>
+          </a:lnRef>
+          <a:fillRef idx="3">
+            <a:schemeClr val="accent1"/>
+          </a:fillRef>
+          <a:effectRef idx="2">
+            <a:schemeClr val="accent1"/>
+          </a:effectRef>
+          <a:fontRef idx="minor">
+            <a:schemeClr val="lt1"/>
+          </a:fontRef>
+        </p:style>
+        <p:txBody>
+          <a:bodyPr rtlCol="0" anchor="ctr"/>
+          <a:lstStyle/>
+          <a:p>
+            <a:pPr algn="ctr"/>
           </a:p>
         </p:txBody>
       </p:sp>
@@ -5362,29 +6107,64 @@
         </p:nvSpPr>
         <p:spPr>
           <a:xfrm>
-            <a:off x="868680" y="5257800"/>
-            <a:ext cx="10332720" cy="411480"/>
-          </a:xfrm>
-          <a:prstGeom prst="rect">
-            <a:avLst/>
-          </a:prstGeom>
-          <a:noFill/>
-        </p:spPr>
-        <p:txBody>
-          <a:bodyPr wrap="square" lIns="54864" rIns="54864" tIns="27432" bIns="27432" anchor="t">
-            <a:spAutoFit/>
-          </a:bodyPr>
-          <a:lstStyle/>
-          <a:p>
-            <a:pPr algn="ctr"/>
-            <a:r>
-              <a:rPr sz="1900" b="1">
-                <a:solidFill>
-                  <a:srgbClr val="142E4E"/>
-                </a:solidFill>
-                <a:latin typeface="Microsoft JhengHei"/>
-              </a:rPr>
-              <a:t>建議請老師直接給「可以／不可以／需要補件」的決定。</a:t>
+            <a:off x="941832" y="5184648"/>
+            <a:ext cx="10241280" cy="256032"/>
+          </a:xfrm>
+          <a:prstGeom prst="rect">
+            <a:avLst/>
+          </a:prstGeom>
+          <a:noFill/>
+        </p:spPr>
+        <p:txBody>
+          <a:bodyPr wrap="square" lIns="54864" rIns="54864" tIns="27432" bIns="27432" anchor="t">
+            <a:spAutoFit/>
+          </a:bodyPr>
+          <a:lstStyle/>
+          <a:p>
+            <a:pPr algn="l"/>
+            <a:r>
+              <a:rPr sz="1300" b="1">
+                <a:solidFill>
+                  <a:srgbClr val="B13F3F"/>
+                </a:solidFill>
+                <a:latin typeface="Microsoft JhengHei"/>
+              </a:rPr>
+              <a:t>需要決策</a:t>
+            </a:r>
+          </a:p>
+        </p:txBody>
+      </p:sp>
+      <p:sp>
+        <p:nvSpPr>
+          <p:cNvPr id="9" name="TextBox 8"/>
+          <p:cNvSpPr txBox="1"/>
+          <p:nvPr/>
+        </p:nvSpPr>
+        <p:spPr>
+          <a:xfrm>
+            <a:off x="941832" y="5513831"/>
+            <a:ext cx="10241280" cy="292608"/>
+          </a:xfrm>
+          <a:prstGeom prst="rect">
+            <a:avLst/>
+          </a:prstGeom>
+          <a:noFill/>
+        </p:spPr>
+        <p:txBody>
+          <a:bodyPr wrap="square" lIns="54864" rIns="54864" tIns="27432" bIns="27432" anchor="t">
+            <a:spAutoFit/>
+          </a:bodyPr>
+          <a:lstStyle/>
+          <a:p>
+            <a:pPr algn="l"/>
+            <a:r>
+              <a:rPr sz="1600" b="0">
+                <a:solidFill>
+                  <a:srgbClr val="232C36"/>
+                </a:solidFill>
+                <a:latin typeface="Microsoft JhengHei"/>
+              </a:rPr>
+              <a:t>是否允許把學生資料送到 Google Gemini？若允許，採免費方案、付費方案，或要求學生同意？</a:t>
             </a:r>
           </a:p>
         </p:txBody>
@@ -5488,7 +6268,7 @@
                 </a:solidFill>
                 <a:latin typeface="Microsoft JhengHei"/>
               </a:rPr>
-              <a:t>請老師或科辦確認：資料與規則</a:t>
+              <a:t>請老師先確認：會擋住開發的問題</a:t>
             </a:r>
           </a:p>
         </p:txBody>
@@ -5523,7 +6303,7 @@
                 </a:solidFill>
                 <a:latin typeface="Microsoft JhengHei"/>
               </a:rPr>
-              <a:t>討論清單 2</a:t>
+              <a:t>討論清單 1</a:t>
             </a:r>
           </a:p>
         </p:txBody>
@@ -5571,8 +6351,43 @@
         </p:nvSpPr>
         <p:spPr>
           <a:xfrm>
-            <a:off x="868680" y="1234440"/>
-            <a:ext cx="10424160" cy="3474720"/>
+            <a:off x="777240" y="1115568"/>
+            <a:ext cx="10698480" cy="365760"/>
+          </a:xfrm>
+          <a:prstGeom prst="rect">
+            <a:avLst/>
+          </a:prstGeom>
+          <a:noFill/>
+        </p:spPr>
+        <p:txBody>
+          <a:bodyPr wrap="square" lIns="54864" rIns="54864" tIns="27432" bIns="27432" anchor="t">
+            <a:spAutoFit/>
+          </a:bodyPr>
+          <a:lstStyle/>
+          <a:p>
+            <a:pPr algn="l"/>
+            <a:r>
+              <a:rPr sz="2200" b="1">
+                <a:solidFill>
+                  <a:srgbClr val="B13F3F"/>
+                </a:solidFill>
+                <a:latin typeface="Microsoft JhengHei"/>
+              </a:rPr>
+              <a:t>這三題若沒有答案，AI 與權限設計都可能重做。</a:t>
+            </a:r>
+          </a:p>
+        </p:txBody>
+      </p:sp>
+      <p:sp>
+        <p:nvSpPr>
+          <p:cNvPr id="7" name="TextBox 6"/>
+          <p:cNvSpPr txBox="1"/>
+          <p:nvPr/>
+        </p:nvSpPr>
+        <p:spPr>
+          <a:xfrm>
+            <a:off x="868680" y="1828800"/>
+            <a:ext cx="10424160" cy="2468880"/>
           </a:xfrm>
           <a:prstGeom prst="rect">
             <a:avLst/>
@@ -5592,7 +6407,7 @@
               <a:spcAft>
                 <a:spcPts val="800"/>
               </a:spcAft>
-              <a:defRPr sz="2000">
+              <a:defRPr sz="2300">
                 <a:solidFill>
                   <a:srgbClr val="232C36"/>
                 </a:solidFill>
@@ -5600,7 +6415,7 @@
               </a:defRPr>
             </a:pPr>
             <a:r>
-              <a:t>4. 9 份知識庫文件由誰核對？哪些學年度、哪些屆別適用？</a:t>
+              <a:t>1. 學生資料可以送給 Google Gemini 嗎？需要同意書或改用付費方案嗎？</a:t>
             </a:r>
           </a:p>
           <a:p>
@@ -5611,7 +6426,7 @@
               <a:spcAft>
                 <a:spcPts val="800"/>
               </a:spcAft>
-              <a:defRPr sz="2000">
+              <a:defRPr sz="2300">
                 <a:solidFill>
                   <a:srgbClr val="232C36"/>
                 </a:solidFill>
@@ -5619,7 +6434,7 @@
               </a:defRPr>
             </a:pPr>
             <a:r>
-              <a:t>5. 校系的「個人特質與專業技能」要對應哪些資料類別？例如 50% 權重怎麼算？</a:t>
+              <a:t>2. AI 費用由學校、科上、專題經費，還是由學生自行提供金鑰？</a:t>
             </a:r>
           </a:p>
           <a:p>
@@ -5630,7 +6445,7 @@
               <a:spcAft>
                 <a:spcPts val="800"/>
               </a:spcAft>
-              <a:defRPr sz="2000">
+              <a:defRPr sz="2300">
                 <a:solidFill>
                   <a:srgbClr val="232C36"/>
                 </a:solidFill>
@@ -5638,141 +6453,42 @@
               </a:defRPr>
             </a:pPr>
             <a:r>
-              <a:t>6. 招生 Agent 要監測哪些官方網址？各校分則是否列入？</a:t>
-            </a:r>
-          </a:p>
-          <a:p>
-            <a:pPr>
-              <a:lnSpc>
-                <a:spcPct val="110000"/>
-              </a:lnSpc>
-              <a:spcAft>
-                <a:spcPts val="800"/>
-              </a:spcAft>
-              <a:defRPr sz="2000">
-                <a:solidFill>
-                  <a:srgbClr val="232C36"/>
-                </a:solidFill>
-                <a:latin typeface="Microsoft JhengHei"/>
-              </a:defRPr>
-            </a:pPr>
-            <a:r>
-              <a:t>7. 導師是否可看本班學生的成績單、證照、佐證照片與自傳原始檔？專任教師是否不同？</a:t>
-            </a:r>
-          </a:p>
-        </p:txBody>
-      </p:sp>
-      <p:sp>
-        <p:nvSpPr>
-          <p:cNvPr id="7" name="Rounded Rectangle 6"/>
-          <p:cNvSpPr/>
-          <p:nvPr/>
-        </p:nvSpPr>
-        <p:spPr>
-          <a:xfrm>
-            <a:off x="868680" y="5074920"/>
-            <a:ext cx="10424160" cy="822960"/>
-          </a:xfrm>
-          <a:prstGeom prst="roundRect">
-            <a:avLst/>
-          </a:prstGeom>
-          <a:solidFill>
-            <a:srgbClr val="F2F6F9"/>
-          </a:solidFill>
-          <a:ln w="15240">
-            <a:solidFill>
-              <a:srgbClr val="208985"/>
-            </a:solidFill>
-          </a:ln>
-        </p:spPr>
-        <p:style>
-          <a:lnRef idx="1">
-            <a:schemeClr val="accent1"/>
-          </a:lnRef>
-          <a:fillRef idx="3">
-            <a:schemeClr val="accent1"/>
-          </a:fillRef>
-          <a:effectRef idx="2">
-            <a:schemeClr val="accent1"/>
-          </a:effectRef>
-          <a:fontRef idx="minor">
-            <a:schemeClr val="lt1"/>
-          </a:fontRef>
-        </p:style>
-        <p:txBody>
-          <a:bodyPr rtlCol="0" anchor="ctr"/>
+              <a:t>3. AI 協助自傳是否可放入備審？是否要標示「AI 協助草稿」並由導師確認？</a:t>
+            </a:r>
+          </a:p>
+        </p:txBody>
+      </p:sp>
+      <p:sp>
+        <p:nvSpPr>
+          <p:cNvPr id="8" name="TextBox 7"/>
+          <p:cNvSpPr txBox="1"/>
+          <p:nvPr/>
+        </p:nvSpPr>
+        <p:spPr>
+          <a:xfrm>
+            <a:off x="868680" y="5257800"/>
+            <a:ext cx="10332720" cy="411480"/>
+          </a:xfrm>
+          <a:prstGeom prst="rect">
+            <a:avLst/>
+          </a:prstGeom>
+          <a:noFill/>
+        </p:spPr>
+        <p:txBody>
+          <a:bodyPr wrap="square" lIns="54864" rIns="54864" tIns="27432" bIns="27432" anchor="t">
+            <a:spAutoFit/>
+          </a:bodyPr>
           <a:lstStyle/>
           <a:p>
             <a:pPr algn="ctr"/>
-          </a:p>
-        </p:txBody>
-      </p:sp>
-      <p:sp>
-        <p:nvSpPr>
-          <p:cNvPr id="8" name="TextBox 7"/>
-          <p:cNvSpPr txBox="1"/>
-          <p:nvPr/>
-        </p:nvSpPr>
-        <p:spPr>
-          <a:xfrm>
-            <a:off x="1033271" y="5184648"/>
-            <a:ext cx="10104120" cy="256032"/>
-          </a:xfrm>
-          <a:prstGeom prst="rect">
-            <a:avLst/>
-          </a:prstGeom>
-          <a:noFill/>
-        </p:spPr>
-        <p:txBody>
-          <a:bodyPr wrap="square" lIns="54864" rIns="54864" tIns="27432" bIns="27432" anchor="t">
-            <a:spAutoFit/>
-          </a:bodyPr>
-          <a:lstStyle/>
-          <a:p>
-            <a:pPr algn="l"/>
-            <a:r>
-              <a:rPr sz="1300" b="1">
-                <a:solidFill>
-                  <a:srgbClr val="208985"/>
-                </a:solidFill>
-                <a:latin typeface="Microsoft JhengHei"/>
-              </a:rPr>
-              <a:t>目前已知</a:t>
-            </a:r>
-          </a:p>
-        </p:txBody>
-      </p:sp>
-      <p:sp>
-        <p:nvSpPr>
-          <p:cNvPr id="9" name="TextBox 8"/>
-          <p:cNvSpPr txBox="1"/>
-          <p:nvPr/>
-        </p:nvSpPr>
-        <p:spPr>
-          <a:xfrm>
-            <a:off x="1033271" y="5513831"/>
-            <a:ext cx="10104120" cy="292608"/>
-          </a:xfrm>
-          <a:prstGeom prst="rect">
-            <a:avLst/>
-          </a:prstGeom>
-          <a:noFill/>
-        </p:spPr>
-        <p:txBody>
-          <a:bodyPr wrap="square" lIns="54864" rIns="54864" tIns="27432" bIns="27432" anchor="t">
-            <a:spAutoFit/>
-          </a:bodyPr>
-          <a:lstStyle/>
-          <a:p>
-            <a:pPr algn="l"/>
-            <a:r>
-              <a:rPr sz="1600" b="0">
-                <a:solidFill>
-                  <a:srgbClr val="232C36"/>
-                </a:solidFill>
-                <a:latin typeface="Microsoft JhengHei"/>
-              </a:rPr>
-              <a:t>系統可以做到權限限制，但「誰應該看得到」必須由老師與科辦決定。</a:t>
+            <a:r>
+              <a:rPr sz="1900" b="1">
+                <a:solidFill>
+                  <a:srgbClr val="142E4E"/>
+                </a:solidFill>
+                <a:latin typeface="Microsoft JhengHei"/>
+              </a:rPr>
+              <a:t>建議請老師直接給「可以／不可以／需要補件」的決定。</a:t>
             </a:r>
           </a:p>
         </p:txBody>
@@ -5876,7 +6592,7 @@
                 </a:solidFill>
                 <a:latin typeface="Microsoft JhengHei"/>
               </a:rPr>
-              <a:t>請老師補充：尚未定義的角色與例外</a:t>
+              <a:t>請老師或科辦確認：資料與規則</a:t>
             </a:r>
           </a:p>
         </p:txBody>
@@ -5911,7 +6627,7 @@
                 </a:solidFill>
                 <a:latin typeface="Microsoft JhengHei"/>
               </a:rPr>
-              <a:t>討論清單 3</a:t>
+              <a:t>討論清單 2</a:t>
             </a:r>
           </a:p>
         </p:txBody>
@@ -5959,7 +6675,7 @@
         </p:nvSpPr>
         <p:spPr>
           <a:xfrm>
-            <a:off x="868680" y="1325880"/>
+            <a:off x="868680" y="1234440"/>
             <a:ext cx="10424160" cy="3474720"/>
           </a:xfrm>
           <a:prstGeom prst="rect">
@@ -5988,7 +6704,7 @@
               </a:defRPr>
             </a:pPr>
             <a:r>
-              <a:t>8. 科助在系統裡的任務是什麼？要維護資料、協助審核，還是只查看統計？</a:t>
+              <a:t>4. 9 份知識庫文件由誰核對？哪些學年度、哪些屆別適用？</a:t>
             </a:r>
           </a:p>
           <a:p>
@@ -6007,7 +6723,7 @@
               </a:defRPr>
             </a:pPr>
             <a:r>
-              <a:t>9. 期中修完的課暫時看不到、微學分不在成績單上，要怎麼補登與驗證？</a:t>
+              <a:t>5. 校系的「個人特質與專業技能」要對應哪些資料類別？例如 50% 權重怎麼算？</a:t>
             </a:r>
           </a:p>
           <a:p>
@@ -6026,7 +6742,7 @@
               </a:defRPr>
             </a:pPr>
             <a:r>
-              <a:t>10. 讀書計畫是否也需要 AI 小幫手？還是先完成自傳即可？</a:t>
+              <a:t>6. 招生 Agent 要監測哪些官方網址？各校分則是否列入？</a:t>
             </a:r>
           </a:p>
           <a:p>
@@ -6045,42 +6761,122 @@
               </a:defRPr>
             </a:pPr>
             <a:r>
-              <a:t>11. 下次驗收要看完整示範流程，還是先看主線功能？</a:t>
-            </a:r>
-          </a:p>
-        </p:txBody>
-      </p:sp>
-      <p:sp>
-        <p:nvSpPr>
-          <p:cNvPr id="7" name="TextBox 6"/>
-          <p:cNvSpPr txBox="1"/>
-          <p:nvPr/>
-        </p:nvSpPr>
-        <p:spPr>
-          <a:xfrm>
-            <a:off x="868680" y="5257800"/>
-            <a:ext cx="10424160" cy="411480"/>
-          </a:xfrm>
-          <a:prstGeom prst="rect">
-            <a:avLst/>
-          </a:prstGeom>
-          <a:noFill/>
-        </p:spPr>
-        <p:txBody>
-          <a:bodyPr wrap="square" lIns="54864" rIns="54864" tIns="27432" bIns="27432" anchor="t">
-            <a:spAutoFit/>
-          </a:bodyPr>
+              <a:t>7. 導師是否可看本班學生的成績單、證照、佐證照片與自傳原始檔？專任教師是否不同？</a:t>
+            </a:r>
+          </a:p>
+        </p:txBody>
+      </p:sp>
+      <p:sp>
+        <p:nvSpPr>
+          <p:cNvPr id="7" name="Rounded Rectangle 6"/>
+          <p:cNvSpPr/>
+          <p:nvPr/>
+        </p:nvSpPr>
+        <p:spPr>
+          <a:xfrm>
+            <a:off x="868680" y="5074920"/>
+            <a:ext cx="10424160" cy="822960"/>
+          </a:xfrm>
+          <a:prstGeom prst="roundRect">
+            <a:avLst/>
+          </a:prstGeom>
+          <a:solidFill>
+            <a:srgbClr val="F2F6F9"/>
+          </a:solidFill>
+          <a:ln w="15240">
+            <a:solidFill>
+              <a:srgbClr val="208985"/>
+            </a:solidFill>
+          </a:ln>
+        </p:spPr>
+        <p:style>
+          <a:lnRef idx="1">
+            <a:schemeClr val="accent1"/>
+          </a:lnRef>
+          <a:fillRef idx="3">
+            <a:schemeClr val="accent1"/>
+          </a:fillRef>
+          <a:effectRef idx="2">
+            <a:schemeClr val="accent1"/>
+          </a:effectRef>
+          <a:fontRef idx="minor">
+            <a:schemeClr val="lt1"/>
+          </a:fontRef>
+        </p:style>
+        <p:txBody>
+          <a:bodyPr rtlCol="0" anchor="ctr"/>
           <a:lstStyle/>
           <a:p>
             <a:pPr algn="ctr"/>
-            <a:r>
-              <a:rPr sz="1900" b="1">
-                <a:solidFill>
-                  <a:srgbClr val="DD812F"/>
-                </a:solidFill>
-                <a:latin typeface="Microsoft JhengHei"/>
-              </a:rPr>
-              <a:t>這些可以晚一點做，但要先留下明確的待辦與負責人。</a:t>
+          </a:p>
+        </p:txBody>
+      </p:sp>
+      <p:sp>
+        <p:nvSpPr>
+          <p:cNvPr id="8" name="TextBox 7"/>
+          <p:cNvSpPr txBox="1"/>
+          <p:nvPr/>
+        </p:nvSpPr>
+        <p:spPr>
+          <a:xfrm>
+            <a:off x="1033271" y="5184648"/>
+            <a:ext cx="10104120" cy="256032"/>
+          </a:xfrm>
+          <a:prstGeom prst="rect">
+            <a:avLst/>
+          </a:prstGeom>
+          <a:noFill/>
+        </p:spPr>
+        <p:txBody>
+          <a:bodyPr wrap="square" lIns="54864" rIns="54864" tIns="27432" bIns="27432" anchor="t">
+            <a:spAutoFit/>
+          </a:bodyPr>
+          <a:lstStyle/>
+          <a:p>
+            <a:pPr algn="l"/>
+            <a:r>
+              <a:rPr sz="1300" b="1">
+                <a:solidFill>
+                  <a:srgbClr val="208985"/>
+                </a:solidFill>
+                <a:latin typeface="Microsoft JhengHei"/>
+              </a:rPr>
+              <a:t>目前已知</a:t>
+            </a:r>
+          </a:p>
+        </p:txBody>
+      </p:sp>
+      <p:sp>
+        <p:nvSpPr>
+          <p:cNvPr id="9" name="TextBox 8"/>
+          <p:cNvSpPr txBox="1"/>
+          <p:nvPr/>
+        </p:nvSpPr>
+        <p:spPr>
+          <a:xfrm>
+            <a:off x="1033271" y="5513831"/>
+            <a:ext cx="10104120" cy="292608"/>
+          </a:xfrm>
+          <a:prstGeom prst="rect">
+            <a:avLst/>
+          </a:prstGeom>
+          <a:noFill/>
+        </p:spPr>
+        <p:txBody>
+          <a:bodyPr wrap="square" lIns="54864" rIns="54864" tIns="27432" bIns="27432" anchor="t">
+            <a:spAutoFit/>
+          </a:bodyPr>
+          <a:lstStyle/>
+          <a:p>
+            <a:pPr algn="l"/>
+            <a:r>
+              <a:rPr sz="1600" b="0">
+                <a:solidFill>
+                  <a:srgbClr val="232C36"/>
+                </a:solidFill>
+                <a:latin typeface="Microsoft JhengHei"/>
+              </a:rPr>
+              <a:t>系統可以做到權限限制，但「誰應該看得到」必須由老師與科辦決定。</a:t>
             </a:r>
           </a:p>
         </p:txBody>
@@ -6184,7 +6980,7 @@
                 </a:solidFill>
                 <a:latin typeface="Microsoft JhengHei"/>
               </a:rPr>
-              <a:t>建議現場示範順序</a:t>
+              <a:t>請老師補充：尚未定義的角色與例外</a:t>
             </a:r>
           </a:p>
         </p:txBody>
@@ -6219,7 +7015,7 @@
                 </a:solidFill>
                 <a:latin typeface="Microsoft JhengHei"/>
               </a:rPr>
-              <a:t>展示腳本</a:t>
+              <a:t>討論清單 3</a:t>
             </a:r>
           </a:p>
         </p:txBody>
@@ -6261,955 +7057,134 @@
       </p:sp>
       <p:sp>
         <p:nvSpPr>
-          <p:cNvPr id="6" name="Rounded Rectangle 5"/>
-          <p:cNvSpPr/>
-          <p:nvPr/>
-        </p:nvSpPr>
-        <p:spPr>
-          <a:xfrm>
-            <a:off x="685800" y="1417320"/>
-            <a:ext cx="2240280" cy="868680"/>
-          </a:xfrm>
-          <a:prstGeom prst="roundRect">
-            <a:avLst/>
-          </a:prstGeom>
-          <a:solidFill>
-            <a:srgbClr val="F2F6F9"/>
-          </a:solidFill>
-          <a:ln>
-            <a:solidFill>
-              <a:srgbClr val="2D73AB"/>
-            </a:solidFill>
-          </a:ln>
-        </p:spPr>
-        <p:style>
-          <a:lnRef idx="1">
-            <a:schemeClr val="accent1"/>
-          </a:lnRef>
-          <a:fillRef idx="3">
-            <a:schemeClr val="accent1"/>
-          </a:fillRef>
-          <a:effectRef idx="2">
-            <a:schemeClr val="accent1"/>
-          </a:effectRef>
-          <a:fontRef idx="minor">
-            <a:schemeClr val="lt1"/>
-          </a:fontRef>
-        </p:style>
-        <p:txBody>
-          <a:bodyPr rtlCol="0" anchor="ctr"/>
+          <p:cNvPr id="6" name="TextBox 5"/>
+          <p:cNvSpPr txBox="1"/>
+          <p:nvPr/>
+        </p:nvSpPr>
+        <p:spPr>
+          <a:xfrm>
+            <a:off x="868680" y="1325880"/>
+            <a:ext cx="10424160" cy="3474720"/>
+          </a:xfrm>
+          <a:prstGeom prst="rect">
+            <a:avLst/>
+          </a:prstGeom>
+          <a:noFill/>
+        </p:spPr>
+        <p:txBody>
+          <a:bodyPr wrap="square" lIns="73152" rIns="73152" tIns="54864">
+            <a:spAutoFit/>
+          </a:bodyPr>
+          <a:lstStyle/>
+          <a:p>
+            <a:pPr>
+              <a:lnSpc>
+                <a:spcPct val="110000"/>
+              </a:lnSpc>
+              <a:spcAft>
+                <a:spcPts val="800"/>
+              </a:spcAft>
+              <a:defRPr sz="2000">
+                <a:solidFill>
+                  <a:srgbClr val="232C36"/>
+                </a:solidFill>
+                <a:latin typeface="Microsoft JhengHei"/>
+              </a:defRPr>
+            </a:pPr>
+            <a:r>
+              <a:t>8. 科助在系統裡的任務是什麼？要維護資料、協助審核，還是只查看統計？</a:t>
+            </a:r>
+          </a:p>
+          <a:p>
+            <a:pPr>
+              <a:lnSpc>
+                <a:spcPct val="110000"/>
+              </a:lnSpc>
+              <a:spcAft>
+                <a:spcPts val="800"/>
+              </a:spcAft>
+              <a:defRPr sz="2000">
+                <a:solidFill>
+                  <a:srgbClr val="232C36"/>
+                </a:solidFill>
+                <a:latin typeface="Microsoft JhengHei"/>
+              </a:defRPr>
+            </a:pPr>
+            <a:r>
+              <a:t>9. 期中修完的課暫時看不到、微學分不在成績單上，要怎麼補登與驗證？</a:t>
+            </a:r>
+          </a:p>
+          <a:p>
+            <a:pPr>
+              <a:lnSpc>
+                <a:spcPct val="110000"/>
+              </a:lnSpc>
+              <a:spcAft>
+                <a:spcPts val="800"/>
+              </a:spcAft>
+              <a:defRPr sz="2000">
+                <a:solidFill>
+                  <a:srgbClr val="232C36"/>
+                </a:solidFill>
+                <a:latin typeface="Microsoft JhengHei"/>
+              </a:defRPr>
+            </a:pPr>
+            <a:r>
+              <a:t>10. 讀書計畫是否也需要 AI 小幫手？還是先完成自傳即可？</a:t>
+            </a:r>
+          </a:p>
+          <a:p>
+            <a:pPr>
+              <a:lnSpc>
+                <a:spcPct val="110000"/>
+              </a:lnSpc>
+              <a:spcAft>
+                <a:spcPts val="800"/>
+              </a:spcAft>
+              <a:defRPr sz="2000">
+                <a:solidFill>
+                  <a:srgbClr val="232C36"/>
+                </a:solidFill>
+                <a:latin typeface="Microsoft JhengHei"/>
+              </a:defRPr>
+            </a:pPr>
+            <a:r>
+              <a:t>11. 下次驗收要看完整示範流程，還是先看主線功能？</a:t>
+            </a:r>
+          </a:p>
+        </p:txBody>
+      </p:sp>
+      <p:sp>
+        <p:nvSpPr>
+          <p:cNvPr id="7" name="TextBox 6"/>
+          <p:cNvSpPr txBox="1"/>
+          <p:nvPr/>
+        </p:nvSpPr>
+        <p:spPr>
+          <a:xfrm>
+            <a:off x="868680" y="5257800"/>
+            <a:ext cx="10424160" cy="411480"/>
+          </a:xfrm>
+          <a:prstGeom prst="rect">
+            <a:avLst/>
+          </a:prstGeom>
+          <a:noFill/>
+        </p:spPr>
+        <p:txBody>
+          <a:bodyPr wrap="square" lIns="54864" rIns="54864" tIns="27432" bIns="27432" anchor="t">
+            <a:spAutoFit/>
+          </a:bodyPr>
           <a:lstStyle/>
           <a:p>
             <a:pPr algn="ctr"/>
-          </a:p>
-        </p:txBody>
-      </p:sp>
-      <p:sp>
-        <p:nvSpPr>
-          <p:cNvPr id="7" name="TextBox 6"/>
-          <p:cNvSpPr txBox="1"/>
-          <p:nvPr/>
-        </p:nvSpPr>
-        <p:spPr>
-          <a:xfrm>
-            <a:off x="795528" y="1572768"/>
-            <a:ext cx="411480" cy="320040"/>
-          </a:xfrm>
-          <a:prstGeom prst="rect">
-            <a:avLst/>
-          </a:prstGeom>
-          <a:noFill/>
-        </p:spPr>
-        <p:txBody>
-          <a:bodyPr wrap="square" lIns="54864" rIns="54864" tIns="27432" bIns="27432" anchor="t">
-            <a:spAutoFit/>
-          </a:bodyPr>
-          <a:lstStyle/>
-          <a:p>
-            <a:pPr algn="l"/>
-            <a:r>
-              <a:rPr sz="1600" b="1">
-                <a:solidFill>
-                  <a:srgbClr val="208985"/>
-                </a:solidFill>
-                <a:latin typeface="Microsoft JhengHei"/>
-              </a:rPr>
-              <a:t>01</a:t>
-            </a:r>
-          </a:p>
-        </p:txBody>
-      </p:sp>
-      <p:sp>
-        <p:nvSpPr>
-          <p:cNvPr id="8" name="TextBox 7"/>
-          <p:cNvSpPr txBox="1"/>
-          <p:nvPr/>
-        </p:nvSpPr>
-        <p:spPr>
-          <a:xfrm>
-            <a:off x="1216152" y="1600200"/>
-            <a:ext cx="1508760" cy="320040"/>
-          </a:xfrm>
-          <a:prstGeom prst="rect">
-            <a:avLst/>
-          </a:prstGeom>
-          <a:noFill/>
-        </p:spPr>
-        <p:txBody>
-          <a:bodyPr wrap="square" lIns="54864" rIns="54864" tIns="27432" bIns="27432" anchor="t">
-            <a:spAutoFit/>
-          </a:bodyPr>
-          <a:lstStyle/>
-          <a:p>
-            <a:pPr algn="ctr"/>
-            <a:r>
-              <a:rPr sz="1800" b="1">
-                <a:solidFill>
-                  <a:srgbClr val="142E4E"/>
-                </a:solidFill>
-                <a:latin typeface="Microsoft JhengHei"/>
-              </a:rPr>
-              <a:t>學生登入</a:t>
-            </a:r>
-          </a:p>
-        </p:txBody>
-      </p:sp>
-      <p:sp>
-        <p:nvSpPr>
-          <p:cNvPr id="9" name="Rounded Rectangle 8"/>
-          <p:cNvSpPr/>
-          <p:nvPr/>
-        </p:nvSpPr>
-        <p:spPr>
-          <a:xfrm>
-            <a:off x="3520440" y="1417320"/>
-            <a:ext cx="2240280" cy="868680"/>
-          </a:xfrm>
-          <a:prstGeom prst="roundRect">
-            <a:avLst/>
-          </a:prstGeom>
-          <a:solidFill>
-            <a:srgbClr val="F2F6F9"/>
-          </a:solidFill>
-          <a:ln>
-            <a:solidFill>
-              <a:srgbClr val="208985"/>
-            </a:solidFill>
-          </a:ln>
-        </p:spPr>
-        <p:style>
-          <a:lnRef idx="1">
-            <a:schemeClr val="accent1"/>
-          </a:lnRef>
-          <a:fillRef idx="3">
-            <a:schemeClr val="accent1"/>
-          </a:fillRef>
-          <a:effectRef idx="2">
-            <a:schemeClr val="accent1"/>
-          </a:effectRef>
-          <a:fontRef idx="minor">
-            <a:schemeClr val="lt1"/>
-          </a:fontRef>
-        </p:style>
-        <p:txBody>
-          <a:bodyPr rtlCol="0" anchor="ctr"/>
-          <a:lstStyle/>
-          <a:p>
-            <a:pPr algn="ctr"/>
-          </a:p>
-        </p:txBody>
-      </p:sp>
-      <p:sp>
-        <p:nvSpPr>
-          <p:cNvPr id="10" name="TextBox 9"/>
-          <p:cNvSpPr txBox="1"/>
-          <p:nvPr/>
-        </p:nvSpPr>
-        <p:spPr>
-          <a:xfrm>
-            <a:off x="3630168" y="1572768"/>
-            <a:ext cx="411480" cy="320040"/>
-          </a:xfrm>
-          <a:prstGeom prst="rect">
-            <a:avLst/>
-          </a:prstGeom>
-          <a:noFill/>
-        </p:spPr>
-        <p:txBody>
-          <a:bodyPr wrap="square" lIns="54864" rIns="54864" tIns="27432" bIns="27432" anchor="t">
-            <a:spAutoFit/>
-          </a:bodyPr>
-          <a:lstStyle/>
-          <a:p>
-            <a:pPr algn="l"/>
-            <a:r>
-              <a:rPr sz="1600" b="1">
-                <a:solidFill>
-                  <a:srgbClr val="208985"/>
-                </a:solidFill>
-                <a:latin typeface="Microsoft JhengHei"/>
-              </a:rPr>
-              <a:t>02</a:t>
-            </a:r>
-          </a:p>
-        </p:txBody>
-      </p:sp>
-      <p:sp>
-        <p:nvSpPr>
-          <p:cNvPr id="11" name="TextBox 10"/>
-          <p:cNvSpPr txBox="1"/>
-          <p:nvPr/>
-        </p:nvSpPr>
-        <p:spPr>
-          <a:xfrm>
-            <a:off x="4050791" y="1600200"/>
-            <a:ext cx="1508760" cy="320040"/>
-          </a:xfrm>
-          <a:prstGeom prst="rect">
-            <a:avLst/>
-          </a:prstGeom>
-          <a:noFill/>
-        </p:spPr>
-        <p:txBody>
-          <a:bodyPr wrap="square" lIns="54864" rIns="54864" tIns="27432" bIns="27432" anchor="t">
-            <a:spAutoFit/>
-          </a:bodyPr>
-          <a:lstStyle/>
-          <a:p>
-            <a:pPr algn="ctr"/>
-            <a:r>
-              <a:rPr sz="1800" b="1">
-                <a:solidFill>
-                  <a:srgbClr val="142E4E"/>
-                </a:solidFill>
-                <a:latin typeface="Microsoft JhengHei"/>
-              </a:rPr>
-              <a:t>選目標校系</a:t>
-            </a:r>
-          </a:p>
-        </p:txBody>
-      </p:sp>
-      <p:sp>
-        <p:nvSpPr>
-          <p:cNvPr id="12" name="Rounded Rectangle 11"/>
-          <p:cNvSpPr/>
-          <p:nvPr/>
-        </p:nvSpPr>
-        <p:spPr>
-          <a:xfrm>
-            <a:off x="6355080" y="1417320"/>
-            <a:ext cx="2240280" cy="868680"/>
-          </a:xfrm>
-          <a:prstGeom prst="roundRect">
-            <a:avLst/>
-          </a:prstGeom>
-          <a:solidFill>
-            <a:srgbClr val="F2F6F9"/>
-          </a:solidFill>
-          <a:ln>
-            <a:solidFill>
-              <a:srgbClr val="DD812F"/>
-            </a:solidFill>
-          </a:ln>
-        </p:spPr>
-        <p:style>
-          <a:lnRef idx="1">
-            <a:schemeClr val="accent1"/>
-          </a:lnRef>
-          <a:fillRef idx="3">
-            <a:schemeClr val="accent1"/>
-          </a:fillRef>
-          <a:effectRef idx="2">
-            <a:schemeClr val="accent1"/>
-          </a:effectRef>
-          <a:fontRef idx="minor">
-            <a:schemeClr val="lt1"/>
-          </a:fontRef>
-        </p:style>
-        <p:txBody>
-          <a:bodyPr rtlCol="0" anchor="ctr"/>
-          <a:lstStyle/>
-          <a:p>
-            <a:pPr algn="ctr"/>
-          </a:p>
-        </p:txBody>
-      </p:sp>
-      <p:sp>
-        <p:nvSpPr>
-          <p:cNvPr id="13" name="TextBox 12"/>
-          <p:cNvSpPr txBox="1"/>
-          <p:nvPr/>
-        </p:nvSpPr>
-        <p:spPr>
-          <a:xfrm>
-            <a:off x="6464808" y="1572768"/>
-            <a:ext cx="411480" cy="320040"/>
-          </a:xfrm>
-          <a:prstGeom prst="rect">
-            <a:avLst/>
-          </a:prstGeom>
-          <a:noFill/>
-        </p:spPr>
-        <p:txBody>
-          <a:bodyPr wrap="square" lIns="54864" rIns="54864" tIns="27432" bIns="27432" anchor="t">
-            <a:spAutoFit/>
-          </a:bodyPr>
-          <a:lstStyle/>
-          <a:p>
-            <a:pPr algn="l"/>
-            <a:r>
-              <a:rPr sz="1600" b="1">
-                <a:solidFill>
-                  <a:srgbClr val="208985"/>
-                </a:solidFill>
-                <a:latin typeface="Microsoft JhengHei"/>
-              </a:rPr>
-              <a:t>03</a:t>
-            </a:r>
-          </a:p>
-        </p:txBody>
-      </p:sp>
-      <p:sp>
-        <p:nvSpPr>
-          <p:cNvPr id="14" name="TextBox 13"/>
-          <p:cNvSpPr txBox="1"/>
-          <p:nvPr/>
-        </p:nvSpPr>
-        <p:spPr>
-          <a:xfrm>
-            <a:off x="6885432" y="1600200"/>
-            <a:ext cx="1508760" cy="320040"/>
-          </a:xfrm>
-          <a:prstGeom prst="rect">
-            <a:avLst/>
-          </a:prstGeom>
-          <a:noFill/>
-        </p:spPr>
-        <p:txBody>
-          <a:bodyPr wrap="square" lIns="54864" rIns="54864" tIns="27432" bIns="27432" anchor="t">
-            <a:spAutoFit/>
-          </a:bodyPr>
-          <a:lstStyle/>
-          <a:p>
-            <a:pPr algn="ctr"/>
-            <a:r>
-              <a:rPr sz="1800" b="1">
-                <a:solidFill>
-                  <a:srgbClr val="142E4E"/>
-                </a:solidFill>
-                <a:latin typeface="Microsoft JhengHei"/>
-              </a:rPr>
-              <a:t>上傳六類資料</a:t>
-            </a:r>
-          </a:p>
-        </p:txBody>
-      </p:sp>
-      <p:sp>
-        <p:nvSpPr>
-          <p:cNvPr id="15" name="Rounded Rectangle 14"/>
-          <p:cNvSpPr/>
-          <p:nvPr/>
-        </p:nvSpPr>
-        <p:spPr>
-          <a:xfrm>
-            <a:off x="9189720" y="1417320"/>
-            <a:ext cx="2240280" cy="868680"/>
-          </a:xfrm>
-          <a:prstGeom prst="roundRect">
-            <a:avLst/>
-          </a:prstGeom>
-          <a:solidFill>
-            <a:srgbClr val="F2F6F9"/>
-          </a:solidFill>
-          <a:ln>
-            <a:solidFill>
-              <a:srgbClr val="142E4E"/>
-            </a:solidFill>
-          </a:ln>
-        </p:spPr>
-        <p:style>
-          <a:lnRef idx="1">
-            <a:schemeClr val="accent1"/>
-          </a:lnRef>
-          <a:fillRef idx="3">
-            <a:schemeClr val="accent1"/>
-          </a:fillRef>
-          <a:effectRef idx="2">
-            <a:schemeClr val="accent1"/>
-          </a:effectRef>
-          <a:fontRef idx="minor">
-            <a:schemeClr val="lt1"/>
-          </a:fontRef>
-        </p:style>
-        <p:txBody>
-          <a:bodyPr rtlCol="0" anchor="ctr"/>
-          <a:lstStyle/>
-          <a:p>
-            <a:pPr algn="ctr"/>
-          </a:p>
-        </p:txBody>
-      </p:sp>
-      <p:sp>
-        <p:nvSpPr>
-          <p:cNvPr id="16" name="TextBox 15"/>
-          <p:cNvSpPr txBox="1"/>
-          <p:nvPr/>
-        </p:nvSpPr>
-        <p:spPr>
-          <a:xfrm>
-            <a:off x="9299448" y="1572768"/>
-            <a:ext cx="411480" cy="320040"/>
-          </a:xfrm>
-          <a:prstGeom prst="rect">
-            <a:avLst/>
-          </a:prstGeom>
-          <a:noFill/>
-        </p:spPr>
-        <p:txBody>
-          <a:bodyPr wrap="square" lIns="54864" rIns="54864" tIns="27432" bIns="27432" anchor="t">
-            <a:spAutoFit/>
-          </a:bodyPr>
-          <a:lstStyle/>
-          <a:p>
-            <a:pPr algn="l"/>
-            <a:r>
-              <a:rPr sz="1600" b="1">
-                <a:solidFill>
-                  <a:srgbClr val="208985"/>
-                </a:solidFill>
-                <a:latin typeface="Microsoft JhengHei"/>
-              </a:rPr>
-              <a:t>04</a:t>
-            </a:r>
-          </a:p>
-        </p:txBody>
-      </p:sp>
-      <p:sp>
-        <p:nvSpPr>
-          <p:cNvPr id="17" name="TextBox 16"/>
-          <p:cNvSpPr txBox="1"/>
-          <p:nvPr/>
-        </p:nvSpPr>
-        <p:spPr>
-          <a:xfrm>
-            <a:off x="9720072" y="1600200"/>
-            <a:ext cx="1508760" cy="320040"/>
-          </a:xfrm>
-          <a:prstGeom prst="rect">
-            <a:avLst/>
-          </a:prstGeom>
-          <a:noFill/>
-        </p:spPr>
-        <p:txBody>
-          <a:bodyPr wrap="square" lIns="54864" rIns="54864" tIns="27432" bIns="27432" anchor="t">
-            <a:spAutoFit/>
-          </a:bodyPr>
-          <a:lstStyle/>
-          <a:p>
-            <a:pPr algn="ctr"/>
-            <a:r>
-              <a:rPr sz="1800" b="1">
-                <a:solidFill>
-                  <a:srgbClr val="142E4E"/>
-                </a:solidFill>
-                <a:latin typeface="Microsoft JhengHei"/>
-              </a:rPr>
-              <a:t>查看缺件</a:t>
-            </a:r>
-          </a:p>
-        </p:txBody>
-      </p:sp>
-      <p:sp>
-        <p:nvSpPr>
-          <p:cNvPr id="18" name="Rounded Rectangle 17"/>
-          <p:cNvSpPr/>
-          <p:nvPr/>
-        </p:nvSpPr>
-        <p:spPr>
-          <a:xfrm>
-            <a:off x="685800" y="3246120"/>
-            <a:ext cx="2240280" cy="868680"/>
-          </a:xfrm>
-          <a:prstGeom prst="roundRect">
-            <a:avLst/>
-          </a:prstGeom>
-          <a:solidFill>
-            <a:srgbClr val="F2F6F9"/>
-          </a:solidFill>
-          <a:ln>
-            <a:solidFill>
-              <a:srgbClr val="2D73AB"/>
-            </a:solidFill>
-          </a:ln>
-        </p:spPr>
-        <p:style>
-          <a:lnRef idx="1">
-            <a:schemeClr val="accent1"/>
-          </a:lnRef>
-          <a:fillRef idx="3">
-            <a:schemeClr val="accent1"/>
-          </a:fillRef>
-          <a:effectRef idx="2">
-            <a:schemeClr val="accent1"/>
-          </a:effectRef>
-          <a:fontRef idx="minor">
-            <a:schemeClr val="lt1"/>
-          </a:fontRef>
-        </p:style>
-        <p:txBody>
-          <a:bodyPr rtlCol="0" anchor="ctr"/>
-          <a:lstStyle/>
-          <a:p>
-            <a:pPr algn="ctr"/>
-          </a:p>
-        </p:txBody>
-      </p:sp>
-      <p:sp>
-        <p:nvSpPr>
-          <p:cNvPr id="19" name="TextBox 18"/>
-          <p:cNvSpPr txBox="1"/>
-          <p:nvPr/>
-        </p:nvSpPr>
-        <p:spPr>
-          <a:xfrm>
-            <a:off x="795528" y="3401568"/>
-            <a:ext cx="411480" cy="320040"/>
-          </a:xfrm>
-          <a:prstGeom prst="rect">
-            <a:avLst/>
-          </a:prstGeom>
-          <a:noFill/>
-        </p:spPr>
-        <p:txBody>
-          <a:bodyPr wrap="square" lIns="54864" rIns="54864" tIns="27432" bIns="27432" anchor="t">
-            <a:spAutoFit/>
-          </a:bodyPr>
-          <a:lstStyle/>
-          <a:p>
-            <a:pPr algn="l"/>
-            <a:r>
-              <a:rPr sz="1600" b="1">
-                <a:solidFill>
-                  <a:srgbClr val="208985"/>
-                </a:solidFill>
-                <a:latin typeface="Microsoft JhengHei"/>
-              </a:rPr>
-              <a:t>05</a:t>
-            </a:r>
-          </a:p>
-        </p:txBody>
-      </p:sp>
-      <p:sp>
-        <p:nvSpPr>
-          <p:cNvPr id="20" name="TextBox 19"/>
-          <p:cNvSpPr txBox="1"/>
-          <p:nvPr/>
-        </p:nvSpPr>
-        <p:spPr>
-          <a:xfrm>
-            <a:off x="1216152" y="3429000"/>
-            <a:ext cx="1508760" cy="320040"/>
-          </a:xfrm>
-          <a:prstGeom prst="rect">
-            <a:avLst/>
-          </a:prstGeom>
-          <a:noFill/>
-        </p:spPr>
-        <p:txBody>
-          <a:bodyPr wrap="square" lIns="54864" rIns="54864" tIns="27432" bIns="27432" anchor="t">
-            <a:spAutoFit/>
-          </a:bodyPr>
-          <a:lstStyle/>
-          <a:p>
-            <a:pPr algn="ctr"/>
-            <a:r>
-              <a:rPr sz="1800" b="1">
-                <a:solidFill>
-                  <a:srgbClr val="142E4E"/>
-                </a:solidFill>
-                <a:latin typeface="Microsoft JhengHei"/>
-              </a:rPr>
-              <a:t>自傳小幫手</a:t>
-            </a:r>
-          </a:p>
-        </p:txBody>
-      </p:sp>
-      <p:sp>
-        <p:nvSpPr>
-          <p:cNvPr id="21" name="Rounded Rectangle 20"/>
-          <p:cNvSpPr/>
-          <p:nvPr/>
-        </p:nvSpPr>
-        <p:spPr>
-          <a:xfrm>
-            <a:off x="3520440" y="3246120"/>
-            <a:ext cx="2240280" cy="868680"/>
-          </a:xfrm>
-          <a:prstGeom prst="roundRect">
-            <a:avLst/>
-          </a:prstGeom>
-          <a:solidFill>
-            <a:srgbClr val="F2F6F9"/>
-          </a:solidFill>
-          <a:ln>
-            <a:solidFill>
-              <a:srgbClr val="208985"/>
-            </a:solidFill>
-          </a:ln>
-        </p:spPr>
-        <p:style>
-          <a:lnRef idx="1">
-            <a:schemeClr val="accent1"/>
-          </a:lnRef>
-          <a:fillRef idx="3">
-            <a:schemeClr val="accent1"/>
-          </a:fillRef>
-          <a:effectRef idx="2">
-            <a:schemeClr val="accent1"/>
-          </a:effectRef>
-          <a:fontRef idx="minor">
-            <a:schemeClr val="lt1"/>
-          </a:fontRef>
-        </p:style>
-        <p:txBody>
-          <a:bodyPr rtlCol="0" anchor="ctr"/>
-          <a:lstStyle/>
-          <a:p>
-            <a:pPr algn="ctr"/>
-          </a:p>
-        </p:txBody>
-      </p:sp>
-      <p:sp>
-        <p:nvSpPr>
-          <p:cNvPr id="22" name="TextBox 21"/>
-          <p:cNvSpPr txBox="1"/>
-          <p:nvPr/>
-        </p:nvSpPr>
-        <p:spPr>
-          <a:xfrm>
-            <a:off x="3630168" y="3401568"/>
-            <a:ext cx="411480" cy="320040"/>
-          </a:xfrm>
-          <a:prstGeom prst="rect">
-            <a:avLst/>
-          </a:prstGeom>
-          <a:noFill/>
-        </p:spPr>
-        <p:txBody>
-          <a:bodyPr wrap="square" lIns="54864" rIns="54864" tIns="27432" bIns="27432" anchor="t">
-            <a:spAutoFit/>
-          </a:bodyPr>
-          <a:lstStyle/>
-          <a:p>
-            <a:pPr algn="l"/>
-            <a:r>
-              <a:rPr sz="1600" b="1">
-                <a:solidFill>
-                  <a:srgbClr val="208985"/>
-                </a:solidFill>
-                <a:latin typeface="Microsoft JhengHei"/>
-              </a:rPr>
-              <a:t>06</a:t>
-            </a:r>
-          </a:p>
-        </p:txBody>
-      </p:sp>
-      <p:sp>
-        <p:nvSpPr>
-          <p:cNvPr id="23" name="TextBox 22"/>
-          <p:cNvSpPr txBox="1"/>
-          <p:nvPr/>
-        </p:nvSpPr>
-        <p:spPr>
-          <a:xfrm>
-            <a:off x="4050791" y="3429000"/>
-            <a:ext cx="1508760" cy="320040"/>
-          </a:xfrm>
-          <a:prstGeom prst="rect">
-            <a:avLst/>
-          </a:prstGeom>
-          <a:noFill/>
-        </p:spPr>
-        <p:txBody>
-          <a:bodyPr wrap="square" lIns="54864" rIns="54864" tIns="27432" bIns="27432" anchor="t">
-            <a:spAutoFit/>
-          </a:bodyPr>
-          <a:lstStyle/>
-          <a:p>
-            <a:pPr algn="ctr"/>
-            <a:r>
-              <a:rPr sz="1800" b="1">
-                <a:solidFill>
-                  <a:srgbClr val="142E4E"/>
-                </a:solidFill>
-                <a:latin typeface="Microsoft JhengHei"/>
-              </a:rPr>
-              <a:t>小助手問答</a:t>
-            </a:r>
-          </a:p>
-        </p:txBody>
-      </p:sp>
-      <p:sp>
-        <p:nvSpPr>
-          <p:cNvPr id="24" name="Rounded Rectangle 23"/>
-          <p:cNvSpPr/>
-          <p:nvPr/>
-        </p:nvSpPr>
-        <p:spPr>
-          <a:xfrm>
-            <a:off x="6355080" y="3246120"/>
-            <a:ext cx="2240280" cy="868680"/>
-          </a:xfrm>
-          <a:prstGeom prst="roundRect">
-            <a:avLst/>
-          </a:prstGeom>
-          <a:solidFill>
-            <a:srgbClr val="F2F6F9"/>
-          </a:solidFill>
-          <a:ln>
-            <a:solidFill>
-              <a:srgbClr val="DD812F"/>
-            </a:solidFill>
-          </a:ln>
-        </p:spPr>
-        <p:style>
-          <a:lnRef idx="1">
-            <a:schemeClr val="accent1"/>
-          </a:lnRef>
-          <a:fillRef idx="3">
-            <a:schemeClr val="accent1"/>
-          </a:fillRef>
-          <a:effectRef idx="2">
-            <a:schemeClr val="accent1"/>
-          </a:effectRef>
-          <a:fontRef idx="minor">
-            <a:schemeClr val="lt1"/>
-          </a:fontRef>
-        </p:style>
-        <p:txBody>
-          <a:bodyPr rtlCol="0" anchor="ctr"/>
-          <a:lstStyle/>
-          <a:p>
-            <a:pPr algn="ctr"/>
-          </a:p>
-        </p:txBody>
-      </p:sp>
-      <p:sp>
-        <p:nvSpPr>
-          <p:cNvPr id="25" name="TextBox 24"/>
-          <p:cNvSpPr txBox="1"/>
-          <p:nvPr/>
-        </p:nvSpPr>
-        <p:spPr>
-          <a:xfrm>
-            <a:off x="6464808" y="3401568"/>
-            <a:ext cx="411480" cy="320040"/>
-          </a:xfrm>
-          <a:prstGeom prst="rect">
-            <a:avLst/>
-          </a:prstGeom>
-          <a:noFill/>
-        </p:spPr>
-        <p:txBody>
-          <a:bodyPr wrap="square" lIns="54864" rIns="54864" tIns="27432" bIns="27432" anchor="t">
-            <a:spAutoFit/>
-          </a:bodyPr>
-          <a:lstStyle/>
-          <a:p>
-            <a:pPr algn="l"/>
-            <a:r>
-              <a:rPr sz="1600" b="1">
-                <a:solidFill>
-                  <a:srgbClr val="208985"/>
-                </a:solidFill>
-                <a:latin typeface="Microsoft JhengHei"/>
-              </a:rPr>
-              <a:t>07</a:t>
-            </a:r>
-          </a:p>
-        </p:txBody>
-      </p:sp>
-      <p:sp>
-        <p:nvSpPr>
-          <p:cNvPr id="26" name="TextBox 25"/>
-          <p:cNvSpPr txBox="1"/>
-          <p:nvPr/>
-        </p:nvSpPr>
-        <p:spPr>
-          <a:xfrm>
-            <a:off x="6885432" y="3429000"/>
-            <a:ext cx="1508760" cy="320040"/>
-          </a:xfrm>
-          <a:prstGeom prst="rect">
-            <a:avLst/>
-          </a:prstGeom>
-          <a:noFill/>
-        </p:spPr>
-        <p:txBody>
-          <a:bodyPr wrap="square" lIns="54864" rIns="54864" tIns="27432" bIns="27432" anchor="t">
-            <a:spAutoFit/>
-          </a:bodyPr>
-          <a:lstStyle/>
-          <a:p>
-            <a:pPr algn="ctr"/>
-            <a:r>
-              <a:rPr sz="1800" b="1">
-                <a:solidFill>
-                  <a:srgbClr val="142E4E"/>
-                </a:solidFill>
-                <a:latin typeface="Microsoft JhengHei"/>
-              </a:rPr>
-              <a:t>導師確認</a:t>
-            </a:r>
-          </a:p>
-        </p:txBody>
-      </p:sp>
-      <p:sp>
-        <p:nvSpPr>
-          <p:cNvPr id="27" name="Rounded Rectangle 26"/>
-          <p:cNvSpPr/>
-          <p:nvPr/>
-        </p:nvSpPr>
-        <p:spPr>
-          <a:xfrm>
-            <a:off x="9189720" y="3246120"/>
-            <a:ext cx="2240280" cy="868680"/>
-          </a:xfrm>
-          <a:prstGeom prst="roundRect">
-            <a:avLst/>
-          </a:prstGeom>
-          <a:solidFill>
-            <a:srgbClr val="F2F6F9"/>
-          </a:solidFill>
-          <a:ln>
-            <a:solidFill>
-              <a:srgbClr val="142E4E"/>
-            </a:solidFill>
-          </a:ln>
-        </p:spPr>
-        <p:style>
-          <a:lnRef idx="1">
-            <a:schemeClr val="accent1"/>
-          </a:lnRef>
-          <a:fillRef idx="3">
-            <a:schemeClr val="accent1"/>
-          </a:fillRef>
-          <a:effectRef idx="2">
-            <a:schemeClr val="accent1"/>
-          </a:effectRef>
-          <a:fontRef idx="minor">
-            <a:schemeClr val="lt1"/>
-          </a:fontRef>
-        </p:style>
-        <p:txBody>
-          <a:bodyPr rtlCol="0" anchor="ctr"/>
-          <a:lstStyle/>
-          <a:p>
-            <a:pPr algn="ctr"/>
-          </a:p>
-        </p:txBody>
-      </p:sp>
-      <p:sp>
-        <p:nvSpPr>
-          <p:cNvPr id="28" name="TextBox 27"/>
-          <p:cNvSpPr txBox="1"/>
-          <p:nvPr/>
-        </p:nvSpPr>
-        <p:spPr>
-          <a:xfrm>
-            <a:off x="9299448" y="3401568"/>
-            <a:ext cx="411480" cy="320040"/>
-          </a:xfrm>
-          <a:prstGeom prst="rect">
-            <a:avLst/>
-          </a:prstGeom>
-          <a:noFill/>
-        </p:spPr>
-        <p:txBody>
-          <a:bodyPr wrap="square" lIns="54864" rIns="54864" tIns="27432" bIns="27432" anchor="t">
-            <a:spAutoFit/>
-          </a:bodyPr>
-          <a:lstStyle/>
-          <a:p>
-            <a:pPr algn="l"/>
-            <a:r>
-              <a:rPr sz="1600" b="1">
-                <a:solidFill>
-                  <a:srgbClr val="208985"/>
-                </a:solidFill>
-                <a:latin typeface="Microsoft JhengHei"/>
-              </a:rPr>
-              <a:t>08</a:t>
-            </a:r>
-          </a:p>
-        </p:txBody>
-      </p:sp>
-      <p:sp>
-        <p:nvSpPr>
-          <p:cNvPr id="29" name="TextBox 28"/>
-          <p:cNvSpPr txBox="1"/>
-          <p:nvPr/>
-        </p:nvSpPr>
-        <p:spPr>
-          <a:xfrm>
-            <a:off x="9720072" y="3429000"/>
-            <a:ext cx="1508760" cy="320040"/>
-          </a:xfrm>
-          <a:prstGeom prst="rect">
-            <a:avLst/>
-          </a:prstGeom>
-          <a:noFill/>
-        </p:spPr>
-        <p:txBody>
-          <a:bodyPr wrap="square" lIns="54864" rIns="54864" tIns="27432" bIns="27432" anchor="t">
-            <a:spAutoFit/>
-          </a:bodyPr>
-          <a:lstStyle/>
-          <a:p>
-            <a:pPr algn="ctr"/>
-            <a:r>
-              <a:rPr sz="1800" b="1">
-                <a:solidFill>
-                  <a:srgbClr val="142E4E"/>
-                </a:solidFill>
-                <a:latin typeface="Microsoft JhengHei"/>
-              </a:rPr>
-              <a:t>下載 Word</a:t>
-            </a:r>
-          </a:p>
-        </p:txBody>
-      </p:sp>
-      <p:sp>
-        <p:nvSpPr>
-          <p:cNvPr id="30" name="TextBox 29"/>
-          <p:cNvSpPr txBox="1"/>
-          <p:nvPr/>
-        </p:nvSpPr>
-        <p:spPr>
-          <a:xfrm>
-            <a:off x="822960" y="5532120"/>
-            <a:ext cx="10424160" cy="347472"/>
-          </a:xfrm>
-          <a:prstGeom prst="rect">
-            <a:avLst/>
-          </a:prstGeom>
-          <a:noFill/>
-        </p:spPr>
-        <p:txBody>
-          <a:bodyPr wrap="square" lIns="54864" rIns="54864" tIns="27432" bIns="27432" anchor="t">
-            <a:spAutoFit/>
-          </a:bodyPr>
-          <a:lstStyle/>
-          <a:p>
-            <a:pPr algn="ctr"/>
-            <a:r>
-              <a:rPr sz="1800" b="1">
-                <a:solidFill>
-                  <a:srgbClr val="232C36"/>
-                </a:solidFill>
-                <a:latin typeface="Microsoft JhengHei"/>
-              </a:rPr>
-              <a:t>管理員補充示範：上傳招生資料 → Agent 擷取 → 管理者核對 → 發布校系規則</a:t>
+            <a:r>
+              <a:rPr sz="1900" b="1">
+                <a:solidFill>
+                  <a:srgbClr val="DD812F"/>
+                </a:solidFill>
+                <a:latin typeface="Microsoft JhengHei"/>
+              </a:rPr>
+              <a:t>這些可以晚一點做，但要先留下明確的待辦與負責人。</a:t>
             </a:r>
           </a:p>
         </p:txBody>
@@ -7313,7 +7288,7 @@
                 </a:solidFill>
                 <a:latin typeface="Microsoft JhengHei"/>
               </a:rPr>
-              <a:t>希望老師今天帶走的結論</a:t>
+              <a:t>建議現場示範順序</a:t>
             </a:r>
           </a:p>
         </p:txBody>
@@ -7348,7 +7323,7 @@
                 </a:solidFill>
                 <a:latin typeface="Microsoft JhengHei"/>
               </a:rPr>
-              <a:t>收尾</a:t>
+              <a:t>展示腳本</a:t>
             </a:r>
           </a:p>
         </p:txBody>
@@ -7390,134 +7365,955 @@
       </p:sp>
       <p:sp>
         <p:nvSpPr>
-          <p:cNvPr id="6" name="TextBox 5"/>
-          <p:cNvSpPr txBox="1"/>
-          <p:nvPr/>
-        </p:nvSpPr>
-        <p:spPr>
-          <a:xfrm>
-            <a:off x="914400" y="1417320"/>
-            <a:ext cx="10241280" cy="3108960"/>
-          </a:xfrm>
-          <a:prstGeom prst="rect">
-            <a:avLst/>
-          </a:prstGeom>
-          <a:noFill/>
-        </p:spPr>
-        <p:txBody>
-          <a:bodyPr wrap="square" lIns="73152" rIns="73152" tIns="54864">
-            <a:spAutoFit/>
-          </a:bodyPr>
-          <a:lstStyle/>
-          <a:p>
-            <a:pPr>
-              <a:lnSpc>
-                <a:spcPct val="110000"/>
-              </a:lnSpc>
-              <a:spcAft>
-                <a:spcPts val="800"/>
-              </a:spcAft>
-              <a:defRPr sz="2400">
+          <p:cNvPr id="6" name="Rounded Rectangle 5"/>
+          <p:cNvSpPr/>
+          <p:nvPr/>
+        </p:nvSpPr>
+        <p:spPr>
+          <a:xfrm>
+            <a:off x="685800" y="1417320"/>
+            <a:ext cx="2240280" cy="868680"/>
+          </a:xfrm>
+          <a:prstGeom prst="roundRect">
+            <a:avLst/>
+          </a:prstGeom>
+          <a:solidFill>
+            <a:srgbClr val="F2F6F9"/>
+          </a:solidFill>
+          <a:ln>
+            <a:solidFill>
+              <a:srgbClr val="2D73AB"/>
+            </a:solidFill>
+          </a:ln>
+        </p:spPr>
+        <p:style>
+          <a:lnRef idx="1">
+            <a:schemeClr val="accent1"/>
+          </a:lnRef>
+          <a:fillRef idx="3">
+            <a:schemeClr val="accent1"/>
+          </a:fillRef>
+          <a:effectRef idx="2">
+            <a:schemeClr val="accent1"/>
+          </a:effectRef>
+          <a:fontRef idx="minor">
+            <a:schemeClr val="lt1"/>
+          </a:fontRef>
+        </p:style>
+        <p:txBody>
+          <a:bodyPr rtlCol="0" anchor="ctr"/>
+          <a:lstStyle/>
+          <a:p>
+            <a:pPr algn="ctr"/>
+          </a:p>
+        </p:txBody>
+      </p:sp>
+      <p:sp>
+        <p:nvSpPr>
+          <p:cNvPr id="7" name="TextBox 6"/>
+          <p:cNvSpPr txBox="1"/>
+          <p:nvPr/>
+        </p:nvSpPr>
+        <p:spPr>
+          <a:xfrm>
+            <a:off x="795528" y="1572768"/>
+            <a:ext cx="411480" cy="320040"/>
+          </a:xfrm>
+          <a:prstGeom prst="rect">
+            <a:avLst/>
+          </a:prstGeom>
+          <a:noFill/>
+        </p:spPr>
+        <p:txBody>
+          <a:bodyPr wrap="square" lIns="54864" rIns="54864" tIns="27432" bIns="27432" anchor="t">
+            <a:spAutoFit/>
+          </a:bodyPr>
+          <a:lstStyle/>
+          <a:p>
+            <a:pPr algn="l"/>
+            <a:r>
+              <a:rPr sz="1600" b="1">
+                <a:solidFill>
+                  <a:srgbClr val="208985"/>
+                </a:solidFill>
+                <a:latin typeface="Microsoft JhengHei"/>
+              </a:rPr>
+              <a:t>01</a:t>
+            </a:r>
+          </a:p>
+        </p:txBody>
+      </p:sp>
+      <p:sp>
+        <p:nvSpPr>
+          <p:cNvPr id="8" name="TextBox 7"/>
+          <p:cNvSpPr txBox="1"/>
+          <p:nvPr/>
+        </p:nvSpPr>
+        <p:spPr>
+          <a:xfrm>
+            <a:off x="1216152" y="1600200"/>
+            <a:ext cx="1508760" cy="320040"/>
+          </a:xfrm>
+          <a:prstGeom prst="rect">
+            <a:avLst/>
+          </a:prstGeom>
+          <a:noFill/>
+        </p:spPr>
+        <p:txBody>
+          <a:bodyPr wrap="square" lIns="54864" rIns="54864" tIns="27432" bIns="27432" anchor="t">
+            <a:spAutoFit/>
+          </a:bodyPr>
+          <a:lstStyle/>
+          <a:p>
+            <a:pPr algn="ctr"/>
+            <a:r>
+              <a:rPr sz="1800" b="1">
                 <a:solidFill>
                   <a:srgbClr val="142E4E"/>
                 </a:solidFill>
                 <a:latin typeface="Microsoft JhengHei"/>
-              </a:defRPr>
-            </a:pPr>
-            <a:r>
-              <a:t>主線：學生資料整理與備審產出流程是否正確？</a:t>
-            </a:r>
-          </a:p>
-          <a:p>
-            <a:pPr>
-              <a:lnSpc>
-                <a:spcPct val="110000"/>
-              </a:lnSpc>
-              <a:spcAft>
-                <a:spcPts val="800"/>
-              </a:spcAft>
-              <a:defRPr sz="2400">
+              </a:rPr>
+              <a:t>學生登入</a:t>
+            </a:r>
+          </a:p>
+        </p:txBody>
+      </p:sp>
+      <p:sp>
+        <p:nvSpPr>
+          <p:cNvPr id="9" name="Rounded Rectangle 8"/>
+          <p:cNvSpPr/>
+          <p:nvPr/>
+        </p:nvSpPr>
+        <p:spPr>
+          <a:xfrm>
+            <a:off x="3520440" y="1417320"/>
+            <a:ext cx="2240280" cy="868680"/>
+          </a:xfrm>
+          <a:prstGeom prst="roundRect">
+            <a:avLst/>
+          </a:prstGeom>
+          <a:solidFill>
+            <a:srgbClr val="F2F6F9"/>
+          </a:solidFill>
+          <a:ln>
+            <a:solidFill>
+              <a:srgbClr val="208985"/>
+            </a:solidFill>
+          </a:ln>
+        </p:spPr>
+        <p:style>
+          <a:lnRef idx="1">
+            <a:schemeClr val="accent1"/>
+          </a:lnRef>
+          <a:fillRef idx="3">
+            <a:schemeClr val="accent1"/>
+          </a:fillRef>
+          <a:effectRef idx="2">
+            <a:schemeClr val="accent1"/>
+          </a:effectRef>
+          <a:fontRef idx="minor">
+            <a:schemeClr val="lt1"/>
+          </a:fontRef>
+        </p:style>
+        <p:txBody>
+          <a:bodyPr rtlCol="0" anchor="ctr"/>
+          <a:lstStyle/>
+          <a:p>
+            <a:pPr algn="ctr"/>
+          </a:p>
+        </p:txBody>
+      </p:sp>
+      <p:sp>
+        <p:nvSpPr>
+          <p:cNvPr id="10" name="TextBox 9"/>
+          <p:cNvSpPr txBox="1"/>
+          <p:nvPr/>
+        </p:nvSpPr>
+        <p:spPr>
+          <a:xfrm>
+            <a:off x="3630168" y="1572768"/>
+            <a:ext cx="411480" cy="320040"/>
+          </a:xfrm>
+          <a:prstGeom prst="rect">
+            <a:avLst/>
+          </a:prstGeom>
+          <a:noFill/>
+        </p:spPr>
+        <p:txBody>
+          <a:bodyPr wrap="square" lIns="54864" rIns="54864" tIns="27432" bIns="27432" anchor="t">
+            <a:spAutoFit/>
+          </a:bodyPr>
+          <a:lstStyle/>
+          <a:p>
+            <a:pPr algn="l"/>
+            <a:r>
+              <a:rPr sz="1600" b="1">
+                <a:solidFill>
+                  <a:srgbClr val="208985"/>
+                </a:solidFill>
+                <a:latin typeface="Microsoft JhengHei"/>
+              </a:rPr>
+              <a:t>02</a:t>
+            </a:r>
+          </a:p>
+        </p:txBody>
+      </p:sp>
+      <p:sp>
+        <p:nvSpPr>
+          <p:cNvPr id="11" name="TextBox 10"/>
+          <p:cNvSpPr txBox="1"/>
+          <p:nvPr/>
+        </p:nvSpPr>
+        <p:spPr>
+          <a:xfrm>
+            <a:off x="4050791" y="1600200"/>
+            <a:ext cx="1508760" cy="320040"/>
+          </a:xfrm>
+          <a:prstGeom prst="rect">
+            <a:avLst/>
+          </a:prstGeom>
+          <a:noFill/>
+        </p:spPr>
+        <p:txBody>
+          <a:bodyPr wrap="square" lIns="54864" rIns="54864" tIns="27432" bIns="27432" anchor="t">
+            <a:spAutoFit/>
+          </a:bodyPr>
+          <a:lstStyle/>
+          <a:p>
+            <a:pPr algn="ctr"/>
+            <a:r>
+              <a:rPr sz="1800" b="1">
                 <a:solidFill>
                   <a:srgbClr val="142E4E"/>
                 </a:solidFill>
                 <a:latin typeface="Microsoft JhengHei"/>
-              </a:defRPr>
-            </a:pPr>
-            <a:r>
-              <a:t>權限：導師、專任教師、科助與管理員的可見範圍如何分？</a:t>
-            </a:r>
-          </a:p>
-          <a:p>
-            <a:pPr>
-              <a:lnSpc>
-                <a:spcPct val="110000"/>
-              </a:lnSpc>
-              <a:spcAft>
-                <a:spcPts val="800"/>
-              </a:spcAft>
-              <a:defRPr sz="2400">
+              </a:rPr>
+              <a:t>選目標校系</a:t>
+            </a:r>
+          </a:p>
+        </p:txBody>
+      </p:sp>
+      <p:sp>
+        <p:nvSpPr>
+          <p:cNvPr id="12" name="Rounded Rectangle 11"/>
+          <p:cNvSpPr/>
+          <p:nvPr/>
+        </p:nvSpPr>
+        <p:spPr>
+          <a:xfrm>
+            <a:off x="6355080" y="1417320"/>
+            <a:ext cx="2240280" cy="868680"/>
+          </a:xfrm>
+          <a:prstGeom prst="roundRect">
+            <a:avLst/>
+          </a:prstGeom>
+          <a:solidFill>
+            <a:srgbClr val="F2F6F9"/>
+          </a:solidFill>
+          <a:ln>
+            <a:solidFill>
+              <a:srgbClr val="DD812F"/>
+            </a:solidFill>
+          </a:ln>
+        </p:spPr>
+        <p:style>
+          <a:lnRef idx="1">
+            <a:schemeClr val="accent1"/>
+          </a:lnRef>
+          <a:fillRef idx="3">
+            <a:schemeClr val="accent1"/>
+          </a:fillRef>
+          <a:effectRef idx="2">
+            <a:schemeClr val="accent1"/>
+          </a:effectRef>
+          <a:fontRef idx="minor">
+            <a:schemeClr val="lt1"/>
+          </a:fontRef>
+        </p:style>
+        <p:txBody>
+          <a:bodyPr rtlCol="0" anchor="ctr"/>
+          <a:lstStyle/>
+          <a:p>
+            <a:pPr algn="ctr"/>
+          </a:p>
+        </p:txBody>
+      </p:sp>
+      <p:sp>
+        <p:nvSpPr>
+          <p:cNvPr id="13" name="TextBox 12"/>
+          <p:cNvSpPr txBox="1"/>
+          <p:nvPr/>
+        </p:nvSpPr>
+        <p:spPr>
+          <a:xfrm>
+            <a:off x="6464808" y="1572768"/>
+            <a:ext cx="411480" cy="320040"/>
+          </a:xfrm>
+          <a:prstGeom prst="rect">
+            <a:avLst/>
+          </a:prstGeom>
+          <a:noFill/>
+        </p:spPr>
+        <p:txBody>
+          <a:bodyPr wrap="square" lIns="54864" rIns="54864" tIns="27432" bIns="27432" anchor="t">
+            <a:spAutoFit/>
+          </a:bodyPr>
+          <a:lstStyle/>
+          <a:p>
+            <a:pPr algn="l"/>
+            <a:r>
+              <a:rPr sz="1600" b="1">
+                <a:solidFill>
+                  <a:srgbClr val="208985"/>
+                </a:solidFill>
+                <a:latin typeface="Microsoft JhengHei"/>
+              </a:rPr>
+              <a:t>03</a:t>
+            </a:r>
+          </a:p>
+        </p:txBody>
+      </p:sp>
+      <p:sp>
+        <p:nvSpPr>
+          <p:cNvPr id="14" name="TextBox 13"/>
+          <p:cNvSpPr txBox="1"/>
+          <p:nvPr/>
+        </p:nvSpPr>
+        <p:spPr>
+          <a:xfrm>
+            <a:off x="6885432" y="1600200"/>
+            <a:ext cx="1508760" cy="320040"/>
+          </a:xfrm>
+          <a:prstGeom prst="rect">
+            <a:avLst/>
+          </a:prstGeom>
+          <a:noFill/>
+        </p:spPr>
+        <p:txBody>
+          <a:bodyPr wrap="square" lIns="54864" rIns="54864" tIns="27432" bIns="27432" anchor="t">
+            <a:spAutoFit/>
+          </a:bodyPr>
+          <a:lstStyle/>
+          <a:p>
+            <a:pPr algn="ctr"/>
+            <a:r>
+              <a:rPr sz="1800" b="1">
                 <a:solidFill>
                   <a:srgbClr val="142E4E"/>
                 </a:solidFill>
                 <a:latin typeface="Microsoft JhengHei"/>
-              </a:defRPr>
-            </a:pPr>
-            <a:r>
-              <a:t>AI：資料是否可送出、誰負責核對、AI 草稿是否可接受？</a:t>
-            </a:r>
-          </a:p>
-          <a:p>
-            <a:pPr>
-              <a:lnSpc>
-                <a:spcPct val="110000"/>
-              </a:lnSpc>
-              <a:spcAft>
-                <a:spcPts val="800"/>
-              </a:spcAft>
-              <a:defRPr sz="2400">
+              </a:rPr>
+              <a:t>上傳六類資料</a:t>
+            </a:r>
+          </a:p>
+        </p:txBody>
+      </p:sp>
+      <p:sp>
+        <p:nvSpPr>
+          <p:cNvPr id="15" name="Rounded Rectangle 14"/>
+          <p:cNvSpPr/>
+          <p:nvPr/>
+        </p:nvSpPr>
+        <p:spPr>
+          <a:xfrm>
+            <a:off x="9189720" y="1417320"/>
+            <a:ext cx="2240280" cy="868680"/>
+          </a:xfrm>
+          <a:prstGeom prst="roundRect">
+            <a:avLst/>
+          </a:prstGeom>
+          <a:solidFill>
+            <a:srgbClr val="F2F6F9"/>
+          </a:solidFill>
+          <a:ln>
+            <a:solidFill>
+              <a:srgbClr val="142E4E"/>
+            </a:solidFill>
+          </a:ln>
+        </p:spPr>
+        <p:style>
+          <a:lnRef idx="1">
+            <a:schemeClr val="accent1"/>
+          </a:lnRef>
+          <a:fillRef idx="3">
+            <a:schemeClr val="accent1"/>
+          </a:fillRef>
+          <a:effectRef idx="2">
+            <a:schemeClr val="accent1"/>
+          </a:effectRef>
+          <a:fontRef idx="minor">
+            <a:schemeClr val="lt1"/>
+          </a:fontRef>
+        </p:style>
+        <p:txBody>
+          <a:bodyPr rtlCol="0" anchor="ctr"/>
+          <a:lstStyle/>
+          <a:p>
+            <a:pPr algn="ctr"/>
+          </a:p>
+        </p:txBody>
+      </p:sp>
+      <p:sp>
+        <p:nvSpPr>
+          <p:cNvPr id="16" name="TextBox 15"/>
+          <p:cNvSpPr txBox="1"/>
+          <p:nvPr/>
+        </p:nvSpPr>
+        <p:spPr>
+          <a:xfrm>
+            <a:off x="9299448" y="1572768"/>
+            <a:ext cx="411480" cy="320040"/>
+          </a:xfrm>
+          <a:prstGeom prst="rect">
+            <a:avLst/>
+          </a:prstGeom>
+          <a:noFill/>
+        </p:spPr>
+        <p:txBody>
+          <a:bodyPr wrap="square" lIns="54864" rIns="54864" tIns="27432" bIns="27432" anchor="t">
+            <a:spAutoFit/>
+          </a:bodyPr>
+          <a:lstStyle/>
+          <a:p>
+            <a:pPr algn="l"/>
+            <a:r>
+              <a:rPr sz="1600" b="1">
+                <a:solidFill>
+                  <a:srgbClr val="208985"/>
+                </a:solidFill>
+                <a:latin typeface="Microsoft JhengHei"/>
+              </a:rPr>
+              <a:t>04</a:t>
+            </a:r>
+          </a:p>
+        </p:txBody>
+      </p:sp>
+      <p:sp>
+        <p:nvSpPr>
+          <p:cNvPr id="17" name="TextBox 16"/>
+          <p:cNvSpPr txBox="1"/>
+          <p:nvPr/>
+        </p:nvSpPr>
+        <p:spPr>
+          <a:xfrm>
+            <a:off x="9720072" y="1600200"/>
+            <a:ext cx="1508760" cy="320040"/>
+          </a:xfrm>
+          <a:prstGeom prst="rect">
+            <a:avLst/>
+          </a:prstGeom>
+          <a:noFill/>
+        </p:spPr>
+        <p:txBody>
+          <a:bodyPr wrap="square" lIns="54864" rIns="54864" tIns="27432" bIns="27432" anchor="t">
+            <a:spAutoFit/>
+          </a:bodyPr>
+          <a:lstStyle/>
+          <a:p>
+            <a:pPr algn="ctr"/>
+            <a:r>
+              <a:rPr sz="1800" b="1">
                 <a:solidFill>
                   <a:srgbClr val="142E4E"/>
                 </a:solidFill>
                 <a:latin typeface="Microsoft JhengHei"/>
-              </a:defRPr>
-            </a:pPr>
-            <a:r>
-              <a:t>下一步：哪些決策今天定案，哪些列為後續功能？</a:t>
-            </a:r>
-          </a:p>
-        </p:txBody>
-      </p:sp>
-      <p:sp>
-        <p:nvSpPr>
-          <p:cNvPr id="7" name="TextBox 6"/>
-          <p:cNvSpPr txBox="1"/>
-          <p:nvPr/>
-        </p:nvSpPr>
-        <p:spPr>
-          <a:xfrm>
-            <a:off x="822960" y="5166360"/>
-            <a:ext cx="10515600" cy="502920"/>
-          </a:xfrm>
-          <a:prstGeom prst="rect">
-            <a:avLst/>
-          </a:prstGeom>
-          <a:noFill/>
-        </p:spPr>
-        <p:txBody>
-          <a:bodyPr wrap="square" lIns="54864" rIns="54864" tIns="27432" bIns="27432" anchor="t">
-            <a:spAutoFit/>
-          </a:bodyPr>
+              </a:rPr>
+              <a:t>查看缺件</a:t>
+            </a:r>
+          </a:p>
+        </p:txBody>
+      </p:sp>
+      <p:sp>
+        <p:nvSpPr>
+          <p:cNvPr id="18" name="Rounded Rectangle 17"/>
+          <p:cNvSpPr/>
+          <p:nvPr/>
+        </p:nvSpPr>
+        <p:spPr>
+          <a:xfrm>
+            <a:off x="685800" y="3246120"/>
+            <a:ext cx="2240280" cy="868680"/>
+          </a:xfrm>
+          <a:prstGeom prst="roundRect">
+            <a:avLst/>
+          </a:prstGeom>
+          <a:solidFill>
+            <a:srgbClr val="F2F6F9"/>
+          </a:solidFill>
+          <a:ln>
+            <a:solidFill>
+              <a:srgbClr val="2D73AB"/>
+            </a:solidFill>
+          </a:ln>
+        </p:spPr>
+        <p:style>
+          <a:lnRef idx="1">
+            <a:schemeClr val="accent1"/>
+          </a:lnRef>
+          <a:fillRef idx="3">
+            <a:schemeClr val="accent1"/>
+          </a:fillRef>
+          <a:effectRef idx="2">
+            <a:schemeClr val="accent1"/>
+          </a:effectRef>
+          <a:fontRef idx="minor">
+            <a:schemeClr val="lt1"/>
+          </a:fontRef>
+        </p:style>
+        <p:txBody>
+          <a:bodyPr rtlCol="0" anchor="ctr"/>
           <a:lstStyle/>
           <a:p>
             <a:pPr algn="ctr"/>
-            <a:r>
-              <a:rPr sz="2500" b="1">
+          </a:p>
+        </p:txBody>
+      </p:sp>
+      <p:sp>
+        <p:nvSpPr>
+          <p:cNvPr id="19" name="TextBox 18"/>
+          <p:cNvSpPr txBox="1"/>
+          <p:nvPr/>
+        </p:nvSpPr>
+        <p:spPr>
+          <a:xfrm>
+            <a:off x="795528" y="3401568"/>
+            <a:ext cx="411480" cy="320040"/>
+          </a:xfrm>
+          <a:prstGeom prst="rect">
+            <a:avLst/>
+          </a:prstGeom>
+          <a:noFill/>
+        </p:spPr>
+        <p:txBody>
+          <a:bodyPr wrap="square" lIns="54864" rIns="54864" tIns="27432" bIns="27432" anchor="t">
+            <a:spAutoFit/>
+          </a:bodyPr>
+          <a:lstStyle/>
+          <a:p>
+            <a:pPr algn="l"/>
+            <a:r>
+              <a:rPr sz="1600" b="1">
                 <a:solidFill>
                   <a:srgbClr val="208985"/>
                 </a:solidFill>
                 <a:latin typeface="Microsoft JhengHei"/>
               </a:rPr>
-              <a:t>謝謝老師，請協助我們先把主線定下來。</a:t>
+              <a:t>05</a:t>
+            </a:r>
+          </a:p>
+        </p:txBody>
+      </p:sp>
+      <p:sp>
+        <p:nvSpPr>
+          <p:cNvPr id="20" name="TextBox 19"/>
+          <p:cNvSpPr txBox="1"/>
+          <p:nvPr/>
+        </p:nvSpPr>
+        <p:spPr>
+          <a:xfrm>
+            <a:off x="1216152" y="3429000"/>
+            <a:ext cx="1508760" cy="320040"/>
+          </a:xfrm>
+          <a:prstGeom prst="rect">
+            <a:avLst/>
+          </a:prstGeom>
+          <a:noFill/>
+        </p:spPr>
+        <p:txBody>
+          <a:bodyPr wrap="square" lIns="54864" rIns="54864" tIns="27432" bIns="27432" anchor="t">
+            <a:spAutoFit/>
+          </a:bodyPr>
+          <a:lstStyle/>
+          <a:p>
+            <a:pPr algn="ctr"/>
+            <a:r>
+              <a:rPr sz="1800" b="1">
+                <a:solidFill>
+                  <a:srgbClr val="142E4E"/>
+                </a:solidFill>
+                <a:latin typeface="Microsoft JhengHei"/>
+              </a:rPr>
+              <a:t>自傳小幫手</a:t>
+            </a:r>
+          </a:p>
+        </p:txBody>
+      </p:sp>
+      <p:sp>
+        <p:nvSpPr>
+          <p:cNvPr id="21" name="Rounded Rectangle 20"/>
+          <p:cNvSpPr/>
+          <p:nvPr/>
+        </p:nvSpPr>
+        <p:spPr>
+          <a:xfrm>
+            <a:off x="3520440" y="3246120"/>
+            <a:ext cx="2240280" cy="868680"/>
+          </a:xfrm>
+          <a:prstGeom prst="roundRect">
+            <a:avLst/>
+          </a:prstGeom>
+          <a:solidFill>
+            <a:srgbClr val="F2F6F9"/>
+          </a:solidFill>
+          <a:ln>
+            <a:solidFill>
+              <a:srgbClr val="208985"/>
+            </a:solidFill>
+          </a:ln>
+        </p:spPr>
+        <p:style>
+          <a:lnRef idx="1">
+            <a:schemeClr val="accent1"/>
+          </a:lnRef>
+          <a:fillRef idx="3">
+            <a:schemeClr val="accent1"/>
+          </a:fillRef>
+          <a:effectRef idx="2">
+            <a:schemeClr val="accent1"/>
+          </a:effectRef>
+          <a:fontRef idx="minor">
+            <a:schemeClr val="lt1"/>
+          </a:fontRef>
+        </p:style>
+        <p:txBody>
+          <a:bodyPr rtlCol="0" anchor="ctr"/>
+          <a:lstStyle/>
+          <a:p>
+            <a:pPr algn="ctr"/>
+          </a:p>
+        </p:txBody>
+      </p:sp>
+      <p:sp>
+        <p:nvSpPr>
+          <p:cNvPr id="22" name="TextBox 21"/>
+          <p:cNvSpPr txBox="1"/>
+          <p:nvPr/>
+        </p:nvSpPr>
+        <p:spPr>
+          <a:xfrm>
+            <a:off x="3630168" y="3401568"/>
+            <a:ext cx="411480" cy="320040"/>
+          </a:xfrm>
+          <a:prstGeom prst="rect">
+            <a:avLst/>
+          </a:prstGeom>
+          <a:noFill/>
+        </p:spPr>
+        <p:txBody>
+          <a:bodyPr wrap="square" lIns="54864" rIns="54864" tIns="27432" bIns="27432" anchor="t">
+            <a:spAutoFit/>
+          </a:bodyPr>
+          <a:lstStyle/>
+          <a:p>
+            <a:pPr algn="l"/>
+            <a:r>
+              <a:rPr sz="1600" b="1">
+                <a:solidFill>
+                  <a:srgbClr val="208985"/>
+                </a:solidFill>
+                <a:latin typeface="Microsoft JhengHei"/>
+              </a:rPr>
+              <a:t>06</a:t>
+            </a:r>
+          </a:p>
+        </p:txBody>
+      </p:sp>
+      <p:sp>
+        <p:nvSpPr>
+          <p:cNvPr id="23" name="TextBox 22"/>
+          <p:cNvSpPr txBox="1"/>
+          <p:nvPr/>
+        </p:nvSpPr>
+        <p:spPr>
+          <a:xfrm>
+            <a:off x="4050791" y="3429000"/>
+            <a:ext cx="1508760" cy="320040"/>
+          </a:xfrm>
+          <a:prstGeom prst="rect">
+            <a:avLst/>
+          </a:prstGeom>
+          <a:noFill/>
+        </p:spPr>
+        <p:txBody>
+          <a:bodyPr wrap="square" lIns="54864" rIns="54864" tIns="27432" bIns="27432" anchor="t">
+            <a:spAutoFit/>
+          </a:bodyPr>
+          <a:lstStyle/>
+          <a:p>
+            <a:pPr algn="ctr"/>
+            <a:r>
+              <a:rPr sz="1800" b="1">
+                <a:solidFill>
+                  <a:srgbClr val="142E4E"/>
+                </a:solidFill>
+                <a:latin typeface="Microsoft JhengHei"/>
+              </a:rPr>
+              <a:t>小助手問答</a:t>
+            </a:r>
+          </a:p>
+        </p:txBody>
+      </p:sp>
+      <p:sp>
+        <p:nvSpPr>
+          <p:cNvPr id="24" name="Rounded Rectangle 23"/>
+          <p:cNvSpPr/>
+          <p:nvPr/>
+        </p:nvSpPr>
+        <p:spPr>
+          <a:xfrm>
+            <a:off x="6355080" y="3246120"/>
+            <a:ext cx="2240280" cy="868680"/>
+          </a:xfrm>
+          <a:prstGeom prst="roundRect">
+            <a:avLst/>
+          </a:prstGeom>
+          <a:solidFill>
+            <a:srgbClr val="F2F6F9"/>
+          </a:solidFill>
+          <a:ln>
+            <a:solidFill>
+              <a:srgbClr val="DD812F"/>
+            </a:solidFill>
+          </a:ln>
+        </p:spPr>
+        <p:style>
+          <a:lnRef idx="1">
+            <a:schemeClr val="accent1"/>
+          </a:lnRef>
+          <a:fillRef idx="3">
+            <a:schemeClr val="accent1"/>
+          </a:fillRef>
+          <a:effectRef idx="2">
+            <a:schemeClr val="accent1"/>
+          </a:effectRef>
+          <a:fontRef idx="minor">
+            <a:schemeClr val="lt1"/>
+          </a:fontRef>
+        </p:style>
+        <p:txBody>
+          <a:bodyPr rtlCol="0" anchor="ctr"/>
+          <a:lstStyle/>
+          <a:p>
+            <a:pPr algn="ctr"/>
+          </a:p>
+        </p:txBody>
+      </p:sp>
+      <p:sp>
+        <p:nvSpPr>
+          <p:cNvPr id="25" name="TextBox 24"/>
+          <p:cNvSpPr txBox="1"/>
+          <p:nvPr/>
+        </p:nvSpPr>
+        <p:spPr>
+          <a:xfrm>
+            <a:off x="6464808" y="3401568"/>
+            <a:ext cx="411480" cy="320040"/>
+          </a:xfrm>
+          <a:prstGeom prst="rect">
+            <a:avLst/>
+          </a:prstGeom>
+          <a:noFill/>
+        </p:spPr>
+        <p:txBody>
+          <a:bodyPr wrap="square" lIns="54864" rIns="54864" tIns="27432" bIns="27432" anchor="t">
+            <a:spAutoFit/>
+          </a:bodyPr>
+          <a:lstStyle/>
+          <a:p>
+            <a:pPr algn="l"/>
+            <a:r>
+              <a:rPr sz="1600" b="1">
+                <a:solidFill>
+                  <a:srgbClr val="208985"/>
+                </a:solidFill>
+                <a:latin typeface="Microsoft JhengHei"/>
+              </a:rPr>
+              <a:t>07</a:t>
+            </a:r>
+          </a:p>
+        </p:txBody>
+      </p:sp>
+      <p:sp>
+        <p:nvSpPr>
+          <p:cNvPr id="26" name="TextBox 25"/>
+          <p:cNvSpPr txBox="1"/>
+          <p:nvPr/>
+        </p:nvSpPr>
+        <p:spPr>
+          <a:xfrm>
+            <a:off x="6885432" y="3429000"/>
+            <a:ext cx="1508760" cy="320040"/>
+          </a:xfrm>
+          <a:prstGeom prst="rect">
+            <a:avLst/>
+          </a:prstGeom>
+          <a:noFill/>
+        </p:spPr>
+        <p:txBody>
+          <a:bodyPr wrap="square" lIns="54864" rIns="54864" tIns="27432" bIns="27432" anchor="t">
+            <a:spAutoFit/>
+          </a:bodyPr>
+          <a:lstStyle/>
+          <a:p>
+            <a:pPr algn="ctr"/>
+            <a:r>
+              <a:rPr sz="1800" b="1">
+                <a:solidFill>
+                  <a:srgbClr val="142E4E"/>
+                </a:solidFill>
+                <a:latin typeface="Microsoft JhengHei"/>
+              </a:rPr>
+              <a:t>導師確認</a:t>
+            </a:r>
+          </a:p>
+        </p:txBody>
+      </p:sp>
+      <p:sp>
+        <p:nvSpPr>
+          <p:cNvPr id="27" name="Rounded Rectangle 26"/>
+          <p:cNvSpPr/>
+          <p:nvPr/>
+        </p:nvSpPr>
+        <p:spPr>
+          <a:xfrm>
+            <a:off x="9189720" y="3246120"/>
+            <a:ext cx="2240280" cy="868680"/>
+          </a:xfrm>
+          <a:prstGeom prst="roundRect">
+            <a:avLst/>
+          </a:prstGeom>
+          <a:solidFill>
+            <a:srgbClr val="F2F6F9"/>
+          </a:solidFill>
+          <a:ln>
+            <a:solidFill>
+              <a:srgbClr val="142E4E"/>
+            </a:solidFill>
+          </a:ln>
+        </p:spPr>
+        <p:style>
+          <a:lnRef idx="1">
+            <a:schemeClr val="accent1"/>
+          </a:lnRef>
+          <a:fillRef idx="3">
+            <a:schemeClr val="accent1"/>
+          </a:fillRef>
+          <a:effectRef idx="2">
+            <a:schemeClr val="accent1"/>
+          </a:effectRef>
+          <a:fontRef idx="minor">
+            <a:schemeClr val="lt1"/>
+          </a:fontRef>
+        </p:style>
+        <p:txBody>
+          <a:bodyPr rtlCol="0" anchor="ctr"/>
+          <a:lstStyle/>
+          <a:p>
+            <a:pPr algn="ctr"/>
+          </a:p>
+        </p:txBody>
+      </p:sp>
+      <p:sp>
+        <p:nvSpPr>
+          <p:cNvPr id="28" name="TextBox 27"/>
+          <p:cNvSpPr txBox="1"/>
+          <p:nvPr/>
+        </p:nvSpPr>
+        <p:spPr>
+          <a:xfrm>
+            <a:off x="9299448" y="3401568"/>
+            <a:ext cx="411480" cy="320040"/>
+          </a:xfrm>
+          <a:prstGeom prst="rect">
+            <a:avLst/>
+          </a:prstGeom>
+          <a:noFill/>
+        </p:spPr>
+        <p:txBody>
+          <a:bodyPr wrap="square" lIns="54864" rIns="54864" tIns="27432" bIns="27432" anchor="t">
+            <a:spAutoFit/>
+          </a:bodyPr>
+          <a:lstStyle/>
+          <a:p>
+            <a:pPr algn="l"/>
+            <a:r>
+              <a:rPr sz="1600" b="1">
+                <a:solidFill>
+                  <a:srgbClr val="208985"/>
+                </a:solidFill>
+                <a:latin typeface="Microsoft JhengHei"/>
+              </a:rPr>
+              <a:t>08</a:t>
+            </a:r>
+          </a:p>
+        </p:txBody>
+      </p:sp>
+      <p:sp>
+        <p:nvSpPr>
+          <p:cNvPr id="29" name="TextBox 28"/>
+          <p:cNvSpPr txBox="1"/>
+          <p:nvPr/>
+        </p:nvSpPr>
+        <p:spPr>
+          <a:xfrm>
+            <a:off x="9720072" y="3429000"/>
+            <a:ext cx="1508760" cy="320040"/>
+          </a:xfrm>
+          <a:prstGeom prst="rect">
+            <a:avLst/>
+          </a:prstGeom>
+          <a:noFill/>
+        </p:spPr>
+        <p:txBody>
+          <a:bodyPr wrap="square" lIns="54864" rIns="54864" tIns="27432" bIns="27432" anchor="t">
+            <a:spAutoFit/>
+          </a:bodyPr>
+          <a:lstStyle/>
+          <a:p>
+            <a:pPr algn="ctr"/>
+            <a:r>
+              <a:rPr sz="1800" b="1">
+                <a:solidFill>
+                  <a:srgbClr val="142E4E"/>
+                </a:solidFill>
+                <a:latin typeface="Microsoft JhengHei"/>
+              </a:rPr>
+              <a:t>下載 Word</a:t>
+            </a:r>
+          </a:p>
+        </p:txBody>
+      </p:sp>
+      <p:sp>
+        <p:nvSpPr>
+          <p:cNvPr id="30" name="TextBox 29"/>
+          <p:cNvSpPr txBox="1"/>
+          <p:nvPr/>
+        </p:nvSpPr>
+        <p:spPr>
+          <a:xfrm>
+            <a:off x="822960" y="5532120"/>
+            <a:ext cx="10424160" cy="347472"/>
+          </a:xfrm>
+          <a:prstGeom prst="rect">
+            <a:avLst/>
+          </a:prstGeom>
+          <a:noFill/>
+        </p:spPr>
+        <p:txBody>
+          <a:bodyPr wrap="square" lIns="54864" rIns="54864" tIns="27432" bIns="27432" anchor="t">
+            <a:spAutoFit/>
+          </a:bodyPr>
+          <a:lstStyle/>
+          <a:p>
+            <a:pPr algn="ctr"/>
+            <a:r>
+              <a:rPr sz="1800" b="1">
+                <a:solidFill>
+                  <a:srgbClr val="232C36"/>
+                </a:solidFill>
+                <a:latin typeface="Microsoft JhengHei"/>
+              </a:rPr>
+              <a:t>管理員補充示範：上傳招生資料 → Agent 擷取 → 管理者核對 → 發布校系規則</a:t>
             </a:r>
           </a:p>
         </p:txBody>
@@ -8255,7 +9051,7 @@
                 </a:solidFill>
                 <a:latin typeface="Microsoft JhengHei"/>
               </a:rPr>
-              <a:t>附錄｜舊版整體使用案例圖</a:t>
+              <a:t>希望老師今天帶走的結論</a:t>
             </a:r>
           </a:p>
         </p:txBody>
@@ -8290,7 +9086,7 @@
                 </a:solidFill>
                 <a:latin typeface="Microsoft JhengHei"/>
               </a:rPr>
-              <a:t>流程圖附錄</a:t>
+              <a:t>收尾</a:t>
             </a:r>
           </a:p>
         </p:txBody>
@@ -8330,30 +9126,105 @@
           </a:p>
         </p:txBody>
       </p:sp>
-      <p:pic>
-        <p:nvPicPr>
-          <p:cNvPr id="6" name="Picture 5" descr="D-01-use-case.png"/>
-          <p:cNvPicPr>
-            <a:picLocks noChangeAspect="1"/>
-          </p:cNvPicPr>
-          <p:nvPr/>
-        </p:nvPicPr>
-        <p:blipFill>
-          <a:blip r:embed="rId2"/>
-          <a:stretch>
-            <a:fillRect/>
-          </a:stretch>
-        </p:blipFill>
-        <p:spPr>
-          <a:xfrm>
-            <a:off x="502920" y="3335073"/>
-            <a:ext cx="11201400" cy="782212"/>
-          </a:xfrm>
-          <a:prstGeom prst="rect">
-            <a:avLst/>
-          </a:prstGeom>
-        </p:spPr>
-      </p:pic>
+      <p:sp>
+        <p:nvSpPr>
+          <p:cNvPr id="6" name="TextBox 5"/>
+          <p:cNvSpPr txBox="1"/>
+          <p:nvPr/>
+        </p:nvSpPr>
+        <p:spPr>
+          <a:xfrm>
+            <a:off x="914400" y="1417320"/>
+            <a:ext cx="10241280" cy="3108960"/>
+          </a:xfrm>
+          <a:prstGeom prst="rect">
+            <a:avLst/>
+          </a:prstGeom>
+          <a:noFill/>
+        </p:spPr>
+        <p:txBody>
+          <a:bodyPr wrap="square" lIns="73152" rIns="73152" tIns="54864">
+            <a:spAutoFit/>
+          </a:bodyPr>
+          <a:lstStyle/>
+          <a:p>
+            <a:pPr>
+              <a:lnSpc>
+                <a:spcPct val="110000"/>
+              </a:lnSpc>
+              <a:spcAft>
+                <a:spcPts val="800"/>
+              </a:spcAft>
+              <a:defRPr sz="2400">
+                <a:solidFill>
+                  <a:srgbClr val="142E4E"/>
+                </a:solidFill>
+                <a:latin typeface="Microsoft JhengHei"/>
+              </a:defRPr>
+            </a:pPr>
+            <a:r>
+              <a:t>主線：學生資料整理與備審產出流程是否正確？</a:t>
+            </a:r>
+          </a:p>
+          <a:p>
+            <a:pPr>
+              <a:lnSpc>
+                <a:spcPct val="110000"/>
+              </a:lnSpc>
+              <a:spcAft>
+                <a:spcPts val="800"/>
+              </a:spcAft>
+              <a:defRPr sz="2400">
+                <a:solidFill>
+                  <a:srgbClr val="142E4E"/>
+                </a:solidFill>
+                <a:latin typeface="Microsoft JhengHei"/>
+              </a:defRPr>
+            </a:pPr>
+            <a:r>
+              <a:t>權限：導師、專任教師、科助與管理員的可見範圍如何分？</a:t>
+            </a:r>
+          </a:p>
+          <a:p>
+            <a:pPr>
+              <a:lnSpc>
+                <a:spcPct val="110000"/>
+              </a:lnSpc>
+              <a:spcAft>
+                <a:spcPts val="800"/>
+              </a:spcAft>
+              <a:defRPr sz="2400">
+                <a:solidFill>
+                  <a:srgbClr val="142E4E"/>
+                </a:solidFill>
+                <a:latin typeface="Microsoft JhengHei"/>
+              </a:defRPr>
+            </a:pPr>
+            <a:r>
+              <a:t>AI：資料是否可送出、誰負責核對、AI 草稿是否可接受？</a:t>
+            </a:r>
+          </a:p>
+          <a:p>
+            <a:pPr>
+              <a:lnSpc>
+                <a:spcPct val="110000"/>
+              </a:lnSpc>
+              <a:spcAft>
+                <a:spcPts val="800"/>
+              </a:spcAft>
+              <a:defRPr sz="2400">
+                <a:solidFill>
+                  <a:srgbClr val="142E4E"/>
+                </a:solidFill>
+                <a:latin typeface="Microsoft JhengHei"/>
+              </a:defRPr>
+            </a:pPr>
+            <a:r>
+              <a:t>下一步：哪些決策今天定案，哪些列為後續功能？</a:t>
+            </a:r>
+          </a:p>
+        </p:txBody>
+      </p:sp>
       <p:sp>
         <p:nvSpPr>
           <p:cNvPr id="7" name="TextBox 6"/>
@@ -8362,8 +9233,8 @@
         </p:nvSpPr>
         <p:spPr>
           <a:xfrm>
-            <a:off x="658368" y="6272784"/>
-            <a:ext cx="10881360" cy="228600"/>
+            <a:off x="822960" y="5166360"/>
+            <a:ext cx="10515600" cy="502920"/>
           </a:xfrm>
           <a:prstGeom prst="rect">
             <a:avLst/>
@@ -8378,13 +9249,13 @@
           <a:p>
             <a:pPr algn="ctr"/>
             <a:r>
-              <a:rPr sz="1000" b="0">
-                <a:solidFill>
-                  <a:srgbClr val="5D6B79"/>
-                </a:solidFill>
-                <a:latin typeface="Microsoft JhengHei"/>
-              </a:rPr>
-              <a:t>原圖取自 docs/images，作為目前規格與實作的對照版本</a:t>
+              <a:rPr sz="2500" b="1">
+                <a:solidFill>
+                  <a:srgbClr val="208985"/>
+                </a:solidFill>
+                <a:latin typeface="Microsoft JhengHei"/>
+              </a:rPr>
+              <a:t>謝謝老師，請協助我們先把主線定下來。</a:t>
             </a:r>
           </a:p>
         </p:txBody>
@@ -8579,8 +9450,8 @@
         </p:blipFill>
         <p:spPr>
           <a:xfrm>
-            <a:off x="2140384" y="1143000"/>
-            <a:ext cx="7926470" cy="5166360"/>
+            <a:off x="3348227" y="1143000"/>
+            <a:ext cx="5510784" cy="5166360"/>
           </a:xfrm>
           <a:prstGeom prst="rect">
             <a:avLst/>
@@ -9187,7 +10058,7 @@
                 </a:solidFill>
                 <a:latin typeface="Microsoft JhengHei"/>
               </a:rPr>
-              <a:t>附錄｜管理員使用案例圖</a:t>
+              <a:t>附錄｜科辦／科助使用案例圖</a:t>
             </a:r>
           </a:p>
         </p:txBody>
@@ -9264,7 +10135,7 @@
       </p:sp>
       <p:pic>
         <p:nvPicPr>
-          <p:cNvPr id="6" name="Picture 5" descr="D-01-use-case-admin.png"/>
+          <p:cNvPr id="6" name="Picture 5" descr="D-01-use-case-staff.png"/>
           <p:cNvPicPr>
             <a:picLocks noChangeAspect="1"/>
           </p:cNvPicPr>
@@ -9420,7 +10291,7 @@
                 </a:solidFill>
                 <a:latin typeface="Microsoft JhengHei"/>
               </a:rPr>
-              <a:t>附錄｜登入與角色導向流程</a:t>
+              <a:t>附錄｜管理員使用案例圖</a:t>
             </a:r>
           </a:p>
         </p:txBody>
@@ -9497,7 +10368,7 @@
       </p:sp>
       <p:pic>
         <p:nvPicPr>
-          <p:cNvPr id="6" name="Picture 5" descr="D-02-login-role-routing.png"/>
+          <p:cNvPr id="6" name="Picture 5" descr="D-01-use-case-admin.png"/>
           <p:cNvPicPr>
             <a:picLocks noChangeAspect="1"/>
           </p:cNvPicPr>
@@ -9511,8 +10382,8 @@
         </p:blipFill>
         <p:spPr>
           <a:xfrm>
-            <a:off x="3740477" y="1143000"/>
-            <a:ext cx="4726284" cy="5166360"/>
+            <a:off x="2020529" y="1143000"/>
+            <a:ext cx="8166181" cy="5166360"/>
           </a:xfrm>
           <a:prstGeom prst="rect">
             <a:avLst/>
@@ -9653,7 +10524,7 @@
                 </a:solidFill>
                 <a:latin typeface="Microsoft JhengHei"/>
               </a:rPr>
-              <a:t>附錄｜學生流程</a:t>
+              <a:t>附錄｜登入與角色導向流程</a:t>
             </a:r>
           </a:p>
         </p:txBody>
@@ -9730,7 +10601,7 @@
       </p:sp>
       <p:pic>
         <p:nvPicPr>
-          <p:cNvPr id="6" name="Picture 5" descr="D-02-student-flow.png"/>
+          <p:cNvPr id="6" name="Picture 5" descr="D-02-login-role-routing.png"/>
           <p:cNvPicPr>
             <a:picLocks noChangeAspect="1"/>
           </p:cNvPicPr>
@@ -9744,8 +10615,8 @@
         </p:blipFill>
         <p:spPr>
           <a:xfrm>
-            <a:off x="5670805" y="1142999"/>
-            <a:ext cx="865629" cy="5166360"/>
+            <a:off x="3870749" y="1143000"/>
+            <a:ext cx="4465740" cy="5166360"/>
           </a:xfrm>
           <a:prstGeom prst="rect">
             <a:avLst/>
@@ -9886,7 +10757,7 @@
                 </a:solidFill>
                 <a:latin typeface="Microsoft JhengHei"/>
               </a:rPr>
-              <a:t>附錄｜專題審核流程</a:t>
+              <a:t>附錄｜系統架構圖</a:t>
             </a:r>
           </a:p>
         </p:txBody>
@@ -9963,7 +10834,7 @@
       </p:sp>
       <p:pic>
         <p:nvPicPr>
-          <p:cNvPr id="6" name="Picture 5" descr="D-03-group-project-review-flow.png"/>
+          <p:cNvPr id="6" name="Picture 5" descr="D-05-system-architecture.png"/>
           <p:cNvPicPr>
             <a:picLocks noChangeAspect="1"/>
           </p:cNvPicPr>
@@ -9977,8 +10848,8 @@
         </p:blipFill>
         <p:spPr>
           <a:xfrm>
-            <a:off x="4225192" y="1143000"/>
-            <a:ext cx="3756854" cy="5166360"/>
+            <a:off x="502920" y="2083117"/>
+            <a:ext cx="11201400" cy="3286125"/>
           </a:xfrm>
           <a:prstGeom prst="rect">
             <a:avLst/>
@@ -10119,7 +10990,7 @@
                 </a:solidFill>
                 <a:latin typeface="Microsoft JhengHei"/>
               </a:rPr>
-              <a:t>附錄｜管理維護流程</a:t>
+              <a:t>附錄｜資料流程圖</a:t>
             </a:r>
           </a:p>
         </p:txBody>
@@ -10196,7 +11067,7 @@
       </p:sp>
       <p:pic>
         <p:nvPicPr>
-          <p:cNvPr id="6" name="Picture 5" descr="D-04-admin-maintenance-flow.png"/>
+          <p:cNvPr id="6" name="Picture 5" descr="D-06-dfd.png"/>
           <p:cNvPicPr>
             <a:picLocks noChangeAspect="1"/>
           </p:cNvPicPr>
@@ -10210,8 +11081,8 @@
         </p:blipFill>
         <p:spPr>
           <a:xfrm>
-            <a:off x="5272605" y="1143000"/>
-            <a:ext cx="1662029" cy="5166359"/>
+            <a:off x="2519172" y="1143000"/>
+            <a:ext cx="7168896" cy="5166360"/>
           </a:xfrm>
           <a:prstGeom prst="rect">
             <a:avLst/>
@@ -10352,7 +11223,7 @@
                 </a:solidFill>
                 <a:latin typeface="Microsoft JhengHei"/>
               </a:rPr>
-              <a:t>附錄｜系統架構圖</a:t>
+              <a:t>附錄｜ERD 資料表關聯</a:t>
             </a:r>
           </a:p>
         </p:txBody>
@@ -10429,7 +11300,7 @@
       </p:sp>
       <p:pic>
         <p:nvPicPr>
-          <p:cNvPr id="6" name="Picture 5" descr="D-05-system-architecture.png"/>
+          <p:cNvPr id="6" name="Picture 5" descr="D-09-erd-v2.png"/>
           <p:cNvPicPr>
             <a:picLocks noChangeAspect="1"/>
           </p:cNvPicPr>
@@ -10443,8 +11314,8 @@
         </p:blipFill>
         <p:spPr>
           <a:xfrm>
-            <a:off x="502920" y="2083117"/>
-            <a:ext cx="11201400" cy="3286125"/>
+            <a:off x="509108" y="1143000"/>
+            <a:ext cx="11189022" cy="5166360"/>
           </a:xfrm>
           <a:prstGeom prst="rect">
             <a:avLst/>
@@ -11180,7 +12051,7 @@
                 </a:solidFill>
                 <a:latin typeface="Microsoft JhengHei"/>
               </a:rPr>
-              <a:t>附錄｜資料流程圖</a:t>
+              <a:t>附錄｜主線流程</a:t>
             </a:r>
           </a:p>
         </p:txBody>
@@ -11257,7 +12128,7 @@
       </p:sp>
       <p:pic>
         <p:nvPicPr>
-          <p:cNvPr id="6" name="Picture 5" descr="D-06-dfd.png"/>
+          <p:cNvPr id="6" name="Picture 5" descr="D-10-main-line-flow.png"/>
           <p:cNvPicPr>
             <a:picLocks noChangeAspect="1"/>
           </p:cNvPicPr>
@@ -11271,8 +12142,8 @@
         </p:blipFill>
         <p:spPr>
           <a:xfrm>
-            <a:off x="2500037" y="1143000"/>
-            <a:ext cx="7207164" cy="5166360"/>
+            <a:off x="5464751" y="1143000"/>
+            <a:ext cx="1277736" cy="5166360"/>
           </a:xfrm>
           <a:prstGeom prst="rect">
             <a:avLst/>
@@ -11413,7 +12284,7 @@
                 </a:solidFill>
                 <a:latin typeface="Microsoft JhengHei"/>
               </a:rPr>
-              <a:t>附錄｜AI Agent 流程</a:t>
+              <a:t>附錄｜招生規則更新流程</a:t>
             </a:r>
           </a:p>
         </p:txBody>
@@ -11490,7 +12361,7 @@
       </p:sp>
       <p:pic>
         <p:nvPicPr>
-          <p:cNvPr id="6" name="Picture 5" descr="D-08-ai-agent-flow.png"/>
+          <p:cNvPr id="6" name="Picture 5" descr="D-13-admission-rule-update-flow.png"/>
           <p:cNvPicPr>
             <a:picLocks noChangeAspect="1"/>
           </p:cNvPicPr>
@@ -11504,8 +12375,8 @@
         </p:blipFill>
         <p:spPr>
           <a:xfrm>
-            <a:off x="5084311" y="1143000"/>
-            <a:ext cx="2038617" cy="5166360"/>
+            <a:off x="5283254" y="1143000"/>
+            <a:ext cx="1640730" cy="5166360"/>
           </a:xfrm>
           <a:prstGeom prst="rect">
             <a:avLst/>
@@ -11646,7 +12517,7 @@
                 </a:solidFill>
                 <a:latin typeface="Microsoft JhengHei"/>
               </a:rPr>
-              <a:t>附錄｜舊版 ERD 資料表關聯</a:t>
+              <a:t>附錄｜角色責任圖</a:t>
             </a:r>
           </a:p>
         </p:txBody>
@@ -11723,7 +12594,7 @@
       </p:sp>
       <p:pic>
         <p:nvPicPr>
-          <p:cNvPr id="6" name="Picture 5" descr="D-09-erd.png"/>
+          <p:cNvPr id="6" name="Picture 5" descr="D-14-role-responsibility.png"/>
           <p:cNvPicPr>
             <a:picLocks noChangeAspect="1"/>
           </p:cNvPicPr>
@@ -11737,8 +12608,8 @@
         </p:blipFill>
         <p:spPr>
           <a:xfrm>
-            <a:off x="1428064" y="1143000"/>
-            <a:ext cx="9351111" cy="5166360"/>
+            <a:off x="502920" y="2790348"/>
+            <a:ext cx="11201400" cy="1871662"/>
           </a:xfrm>
           <a:prstGeom prst="rect">
             <a:avLst/>
@@ -11879,7 +12750,7 @@
                 </a:solidFill>
                 <a:latin typeface="Microsoft JhengHei"/>
               </a:rPr>
-              <a:t>附錄｜ERD 資料表關聯</a:t>
+              <a:t>附錄｜報表總覽（第二版）</a:t>
             </a:r>
           </a:p>
         </p:txBody>
@@ -11956,7 +12827,7 @@
       </p:sp>
       <p:pic>
         <p:nvPicPr>
-          <p:cNvPr id="6" name="Picture 5" descr="D-09-erd-v2.png"/>
+          <p:cNvPr id="6" name="Picture 5" descr="D-15-report-overview.png"/>
           <p:cNvPicPr>
             <a:picLocks noChangeAspect="1"/>
           </p:cNvPicPr>
@@ -11970,8 +12841,8 @@
         </p:blipFill>
         <p:spPr>
           <a:xfrm>
-            <a:off x="509108" y="1143000"/>
-            <a:ext cx="11189022" cy="5166360"/>
+            <a:off x="502920" y="3390423"/>
+            <a:ext cx="11201400" cy="671512"/>
           </a:xfrm>
           <a:prstGeom prst="rect">
             <a:avLst/>
@@ -12112,7 +12983,7 @@
                 </a:solidFill>
                 <a:latin typeface="Microsoft JhengHei"/>
               </a:rPr>
-              <a:t>附錄｜主線流程</a:t>
+              <a:t>附錄｜導師確認流程</a:t>
             </a:r>
           </a:p>
         </p:txBody>
@@ -12189,7 +13060,7 @@
       </p:sp>
       <p:pic>
         <p:nvPicPr>
-          <p:cNvPr id="6" name="Picture 5" descr="D-10-main-line-flow.png"/>
+          <p:cNvPr id="6" name="Picture 5" descr="D-16-teacher-confirm-flow.png"/>
           <p:cNvPicPr>
             <a:picLocks noChangeAspect="1"/>
           </p:cNvPicPr>
@@ -12203,8 +13074,8 @@
         </p:blipFill>
         <p:spPr>
           <a:xfrm>
-            <a:off x="5202724" y="1143000"/>
-            <a:ext cx="1801791" cy="5166360"/>
+            <a:off x="4194313" y="1143000"/>
+            <a:ext cx="3818613" cy="5166360"/>
           </a:xfrm>
           <a:prstGeom prst="rect">
             <a:avLst/>
@@ -12345,7 +13216,7 @@
                 </a:solidFill>
                 <a:latin typeface="Microsoft JhengHei"/>
               </a:rPr>
-              <a:t>附錄｜期中核心流程</a:t>
+              <a:t>附錄｜管理員維護招生要求流程</a:t>
             </a:r>
           </a:p>
         </p:txBody>
@@ -12422,7 +13293,7 @@
       </p:sp>
       <p:pic>
         <p:nvPicPr>
-          <p:cNvPr id="6" name="Picture 5" descr="D-10-midterm-core-flow.png"/>
+          <p:cNvPr id="6" name="Picture 5" descr="D-17-admin-maintain-requirements.png"/>
           <p:cNvPicPr>
             <a:picLocks noChangeAspect="1"/>
           </p:cNvPicPr>
@@ -12436,8 +13307,8 @@
         </p:blipFill>
         <p:spPr>
           <a:xfrm>
-            <a:off x="1611133" y="1143000"/>
-            <a:ext cx="8984973" cy="5166360"/>
+            <a:off x="4978051" y="1143000"/>
+            <a:ext cx="2251137" cy="5166360"/>
           </a:xfrm>
           <a:prstGeom prst="rect">
             <a:avLst/>
@@ -12578,7 +13449,7 @@
                 </a:solidFill>
                 <a:latin typeface="Microsoft JhengHei"/>
               </a:rPr>
-              <a:t>附錄｜報表總覽</a:t>
+              <a:t>附錄｜科辦服務電子獎狀流程</a:t>
             </a:r>
           </a:p>
         </p:txBody>
@@ -12655,7 +13526,7 @@
       </p:sp>
       <p:pic>
         <p:nvPicPr>
-          <p:cNvPr id="6" name="Picture 5" descr="D-10-report-overview.png"/>
+          <p:cNvPr id="6" name="Picture 5" descr="D-18-staff-service-record-flow.png"/>
           <p:cNvPicPr>
             <a:picLocks noChangeAspect="1"/>
           </p:cNvPicPr>
@@ -12669,707 +13540,8 @@
         </p:blipFill>
         <p:spPr>
           <a:xfrm>
-            <a:off x="502920" y="2912877"/>
-            <a:ext cx="11201399" cy="1626605"/>
-          </a:xfrm>
-          <a:prstGeom prst="rect">
-            <a:avLst/>
-          </a:prstGeom>
-        </p:spPr>
-      </p:pic>
-      <p:sp>
-        <p:nvSpPr>
-          <p:cNvPr id="7" name="TextBox 6"/>
-          <p:cNvSpPr txBox="1"/>
-          <p:nvPr/>
-        </p:nvSpPr>
-        <p:spPr>
-          <a:xfrm>
-            <a:off x="658368" y="6272784"/>
-            <a:ext cx="10881360" cy="228600"/>
-          </a:xfrm>
-          <a:prstGeom prst="rect">
-            <a:avLst/>
-          </a:prstGeom>
-          <a:noFill/>
-        </p:spPr>
-        <p:txBody>
-          <a:bodyPr wrap="square" lIns="54864" rIns="54864" tIns="27432" bIns="27432" anchor="t">
-            <a:spAutoFit/>
-          </a:bodyPr>
-          <a:lstStyle/>
-          <a:p>
-            <a:pPr algn="ctr"/>
-            <a:r>
-              <a:rPr sz="1000" b="0">
-                <a:solidFill>
-                  <a:srgbClr val="5D6B79"/>
-                </a:solidFill>
-                <a:latin typeface="Microsoft JhengHei"/>
-              </a:rPr>
-              <a:t>原圖取自 docs/images，作為目前規格與實作的對照版本</a:t>
-            </a:r>
-          </a:p>
-        </p:txBody>
-      </p:sp>
-    </p:spTree>
-  </p:cSld>
-  <p:clrMapOvr>
-    <a:masterClrMapping/>
-  </p:clrMapOvr>
-</p:sld>
-</file>
-
-<file path=ppt/slides/slide37.xml><?xml version="1.0" encoding="utf-8"?>
-<p:sld xmlns:a="http://schemas.openxmlformats.org/drawingml/2006/main" xmlns:p="http://schemas.openxmlformats.org/presentationml/2006/main" xmlns:r="http://schemas.openxmlformats.org/officeDocument/2006/relationships">
-  <p:cSld>
-    <p:bg>
-      <p:bgPr>
-        <a:solidFill>
-          <a:srgbClr val="FFFFFF"/>
-        </a:solidFill>
-        <a:effectLst/>
-      </p:bgPr>
-    </p:bg>
-    <p:spTree>
-      <p:nvGrpSpPr>
-        <p:cNvPr id="1" name=""/>
-        <p:cNvGrpSpPr/>
-        <p:nvPr/>
-      </p:nvGrpSpPr>
-      <p:grpSpPr/>
-      <p:sp>
-        <p:nvSpPr>
-          <p:cNvPr id="2" name="Rectangle 1"/>
-          <p:cNvSpPr/>
-          <p:nvPr/>
-        </p:nvSpPr>
-        <p:spPr>
-          <a:xfrm>
-            <a:off x="0" y="0"/>
-            <a:ext cx="12191695" cy="164592"/>
-          </a:xfrm>
-          <a:prstGeom prst="rect">
-            <a:avLst/>
-          </a:prstGeom>
-          <a:solidFill>
-            <a:srgbClr val="208985"/>
-          </a:solidFill>
-          <a:ln>
-            <a:noFill/>
-          </a:ln>
-        </p:spPr>
-        <p:style>
-          <a:lnRef idx="1">
-            <a:schemeClr val="accent1"/>
-          </a:lnRef>
-          <a:fillRef idx="3">
-            <a:schemeClr val="accent1"/>
-          </a:fillRef>
-          <a:effectRef idx="2">
-            <a:schemeClr val="accent1"/>
-          </a:effectRef>
-          <a:fontRef idx="minor">
-            <a:schemeClr val="lt1"/>
-          </a:fontRef>
-        </p:style>
-        <p:txBody>
-          <a:bodyPr rtlCol="0" anchor="ctr"/>
-          <a:lstStyle/>
-          <a:p>
-            <a:pPr algn="ctr"/>
-          </a:p>
-        </p:txBody>
-      </p:sp>
-      <p:sp>
-        <p:nvSpPr>
-          <p:cNvPr id="3" name="TextBox 2"/>
-          <p:cNvSpPr txBox="1"/>
-          <p:nvPr/>
-        </p:nvSpPr>
-        <p:spPr>
-          <a:xfrm>
-            <a:off x="566928" y="438912"/>
-            <a:ext cx="10881360" cy="502920"/>
-          </a:xfrm>
-          <a:prstGeom prst="rect">
-            <a:avLst/>
-          </a:prstGeom>
-          <a:noFill/>
-        </p:spPr>
-        <p:txBody>
-          <a:bodyPr wrap="square" lIns="54864" rIns="54864" tIns="27432" bIns="27432" anchor="t">
-            <a:spAutoFit/>
-          </a:bodyPr>
-          <a:lstStyle/>
-          <a:p>
-            <a:pPr algn="l"/>
-            <a:r>
-              <a:rPr sz="2700" b="1">
-                <a:solidFill>
-                  <a:srgbClr val="142E4E"/>
-                </a:solidFill>
-                <a:latin typeface="Microsoft JhengHei"/>
-              </a:rPr>
-              <a:t>附錄｜行政表單流程</a:t>
-            </a:r>
-          </a:p>
-        </p:txBody>
-      </p:sp>
-      <p:sp>
-        <p:nvSpPr>
-          <p:cNvPr id="4" name="TextBox 3"/>
-          <p:cNvSpPr txBox="1"/>
-          <p:nvPr/>
-        </p:nvSpPr>
-        <p:spPr>
-          <a:xfrm>
-            <a:off x="10378440" y="512064"/>
-            <a:ext cx="1234440" cy="228600"/>
-          </a:xfrm>
-          <a:prstGeom prst="rect">
-            <a:avLst/>
-          </a:prstGeom>
-          <a:noFill/>
-        </p:spPr>
-        <p:txBody>
-          <a:bodyPr wrap="square" lIns="54864" rIns="54864" tIns="27432" bIns="27432" anchor="t">
-            <a:spAutoFit/>
-          </a:bodyPr>
-          <a:lstStyle/>
-          <a:p>
-            <a:pPr algn="r"/>
-            <a:r>
-              <a:rPr sz="900" b="1">
-                <a:solidFill>
-                  <a:srgbClr val="208985"/>
-                </a:solidFill>
-                <a:latin typeface="Microsoft JhengHei"/>
-              </a:rPr>
-              <a:t>流程圖附錄</a:t>
-            </a:r>
-          </a:p>
-        </p:txBody>
-      </p:sp>
-      <p:sp>
-        <p:nvSpPr>
-          <p:cNvPr id="5" name="TextBox 4"/>
-          <p:cNvSpPr txBox="1"/>
-          <p:nvPr/>
-        </p:nvSpPr>
-        <p:spPr>
-          <a:xfrm>
-            <a:off x="566928" y="6565392"/>
-            <a:ext cx="7772400" cy="182880"/>
-          </a:xfrm>
-          <a:prstGeom prst="rect">
-            <a:avLst/>
-          </a:prstGeom>
-          <a:noFill/>
-        </p:spPr>
-        <p:txBody>
-          <a:bodyPr wrap="square" lIns="54864" rIns="54864" tIns="27432" bIns="27432" anchor="t">
-            <a:spAutoFit/>
-          </a:bodyPr>
-          <a:lstStyle/>
-          <a:p>
-            <a:pPr algn="l"/>
-            <a:r>
-              <a:rPr sz="800" b="0">
-                <a:solidFill>
-                  <a:srgbClr val="5D6B79"/>
-                </a:solidFill>
-                <a:latin typeface="Microsoft JhengHei"/>
-              </a:rPr>
-              <a:t>資管科智慧學習歷程系統｜指導老師討論版</a:t>
-            </a:r>
-          </a:p>
-        </p:txBody>
-      </p:sp>
-      <p:pic>
-        <p:nvPicPr>
-          <p:cNvPr id="6" name="Picture 5" descr="D-11-admin-forms-flow.png"/>
-          <p:cNvPicPr>
-            <a:picLocks noChangeAspect="1"/>
-          </p:cNvPicPr>
-          <p:nvPr/>
-        </p:nvPicPr>
-        <p:blipFill>
-          <a:blip r:embed="rId2"/>
-          <a:stretch>
-            <a:fillRect/>
-          </a:stretch>
-        </p:blipFill>
-        <p:spPr>
-          <a:xfrm>
-            <a:off x="5101327" y="1143000"/>
-            <a:ext cx="2004584" cy="5166360"/>
-          </a:xfrm>
-          <a:prstGeom prst="rect">
-            <a:avLst/>
-          </a:prstGeom>
-        </p:spPr>
-      </p:pic>
-      <p:sp>
-        <p:nvSpPr>
-          <p:cNvPr id="7" name="TextBox 6"/>
-          <p:cNvSpPr txBox="1"/>
-          <p:nvPr/>
-        </p:nvSpPr>
-        <p:spPr>
-          <a:xfrm>
-            <a:off x="658368" y="6272784"/>
-            <a:ext cx="10881360" cy="228600"/>
-          </a:xfrm>
-          <a:prstGeom prst="rect">
-            <a:avLst/>
-          </a:prstGeom>
-          <a:noFill/>
-        </p:spPr>
-        <p:txBody>
-          <a:bodyPr wrap="square" lIns="54864" rIns="54864" tIns="27432" bIns="27432" anchor="t">
-            <a:spAutoFit/>
-          </a:bodyPr>
-          <a:lstStyle/>
-          <a:p>
-            <a:pPr algn="ctr"/>
-            <a:r>
-              <a:rPr sz="1000" b="0">
-                <a:solidFill>
-                  <a:srgbClr val="5D6B79"/>
-                </a:solidFill>
-                <a:latin typeface="Microsoft JhengHei"/>
-              </a:rPr>
-              <a:t>原圖取自 docs/images，作為目前規格與實作的對照版本</a:t>
-            </a:r>
-          </a:p>
-        </p:txBody>
-      </p:sp>
-    </p:spTree>
-  </p:cSld>
-  <p:clrMapOvr>
-    <a:masterClrMapping/>
-  </p:clrMapOvr>
-</p:sld>
-</file>
-
-<file path=ppt/slides/slide38.xml><?xml version="1.0" encoding="utf-8"?>
-<p:sld xmlns:a="http://schemas.openxmlformats.org/drawingml/2006/main" xmlns:p="http://schemas.openxmlformats.org/presentationml/2006/main" xmlns:r="http://schemas.openxmlformats.org/officeDocument/2006/relationships">
-  <p:cSld>
-    <p:bg>
-      <p:bgPr>
-        <a:solidFill>
-          <a:srgbClr val="FFFFFF"/>
-        </a:solidFill>
-        <a:effectLst/>
-      </p:bgPr>
-    </p:bg>
-    <p:spTree>
-      <p:nvGrpSpPr>
-        <p:cNvPr id="1" name=""/>
-        <p:cNvGrpSpPr/>
-        <p:nvPr/>
-      </p:nvGrpSpPr>
-      <p:grpSpPr/>
-      <p:sp>
-        <p:nvSpPr>
-          <p:cNvPr id="2" name="Rectangle 1"/>
-          <p:cNvSpPr/>
-          <p:nvPr/>
-        </p:nvSpPr>
-        <p:spPr>
-          <a:xfrm>
-            <a:off x="0" y="0"/>
-            <a:ext cx="12191695" cy="164592"/>
-          </a:xfrm>
-          <a:prstGeom prst="rect">
-            <a:avLst/>
-          </a:prstGeom>
-          <a:solidFill>
-            <a:srgbClr val="208985"/>
-          </a:solidFill>
-          <a:ln>
-            <a:noFill/>
-          </a:ln>
-        </p:spPr>
-        <p:style>
-          <a:lnRef idx="1">
-            <a:schemeClr val="accent1"/>
-          </a:lnRef>
-          <a:fillRef idx="3">
-            <a:schemeClr val="accent1"/>
-          </a:fillRef>
-          <a:effectRef idx="2">
-            <a:schemeClr val="accent1"/>
-          </a:effectRef>
-          <a:fontRef idx="minor">
-            <a:schemeClr val="lt1"/>
-          </a:fontRef>
-        </p:style>
-        <p:txBody>
-          <a:bodyPr rtlCol="0" anchor="ctr"/>
-          <a:lstStyle/>
-          <a:p>
-            <a:pPr algn="ctr"/>
-          </a:p>
-        </p:txBody>
-      </p:sp>
-      <p:sp>
-        <p:nvSpPr>
-          <p:cNvPr id="3" name="TextBox 2"/>
-          <p:cNvSpPr txBox="1"/>
-          <p:nvPr/>
-        </p:nvSpPr>
-        <p:spPr>
-          <a:xfrm>
-            <a:off x="566928" y="438912"/>
-            <a:ext cx="10881360" cy="502920"/>
-          </a:xfrm>
-          <a:prstGeom prst="rect">
-            <a:avLst/>
-          </a:prstGeom>
-          <a:noFill/>
-        </p:spPr>
-        <p:txBody>
-          <a:bodyPr wrap="square" lIns="54864" rIns="54864" tIns="27432" bIns="27432" anchor="t">
-            <a:spAutoFit/>
-          </a:bodyPr>
-          <a:lstStyle/>
-          <a:p>
-            <a:pPr algn="l"/>
-            <a:r>
-              <a:rPr sz="2700" b="1">
-                <a:solidFill>
-                  <a:srgbClr val="142E4E"/>
-                </a:solidFill>
-                <a:latin typeface="Microsoft JhengHei"/>
-              </a:rPr>
-              <a:t>附錄｜招生規則更新流程</a:t>
-            </a:r>
-          </a:p>
-        </p:txBody>
-      </p:sp>
-      <p:sp>
-        <p:nvSpPr>
-          <p:cNvPr id="4" name="TextBox 3"/>
-          <p:cNvSpPr txBox="1"/>
-          <p:nvPr/>
-        </p:nvSpPr>
-        <p:spPr>
-          <a:xfrm>
-            <a:off x="10378440" y="512064"/>
-            <a:ext cx="1234440" cy="228600"/>
-          </a:xfrm>
-          <a:prstGeom prst="rect">
-            <a:avLst/>
-          </a:prstGeom>
-          <a:noFill/>
-        </p:spPr>
-        <p:txBody>
-          <a:bodyPr wrap="square" lIns="54864" rIns="54864" tIns="27432" bIns="27432" anchor="t">
-            <a:spAutoFit/>
-          </a:bodyPr>
-          <a:lstStyle/>
-          <a:p>
-            <a:pPr algn="r"/>
-            <a:r>
-              <a:rPr sz="900" b="1">
-                <a:solidFill>
-                  <a:srgbClr val="208985"/>
-                </a:solidFill>
-                <a:latin typeface="Microsoft JhengHei"/>
-              </a:rPr>
-              <a:t>流程圖附錄</a:t>
-            </a:r>
-          </a:p>
-        </p:txBody>
-      </p:sp>
-      <p:sp>
-        <p:nvSpPr>
-          <p:cNvPr id="5" name="TextBox 4"/>
-          <p:cNvSpPr txBox="1"/>
-          <p:nvPr/>
-        </p:nvSpPr>
-        <p:spPr>
-          <a:xfrm>
-            <a:off x="566928" y="6565392"/>
-            <a:ext cx="7772400" cy="182880"/>
-          </a:xfrm>
-          <a:prstGeom prst="rect">
-            <a:avLst/>
-          </a:prstGeom>
-          <a:noFill/>
-        </p:spPr>
-        <p:txBody>
-          <a:bodyPr wrap="square" lIns="54864" rIns="54864" tIns="27432" bIns="27432" anchor="t">
-            <a:spAutoFit/>
-          </a:bodyPr>
-          <a:lstStyle/>
-          <a:p>
-            <a:pPr algn="l"/>
-            <a:r>
-              <a:rPr sz="800" b="0">
-                <a:solidFill>
-                  <a:srgbClr val="5D6B79"/>
-                </a:solidFill>
-                <a:latin typeface="Microsoft JhengHei"/>
-              </a:rPr>
-              <a:t>資管科智慧學習歷程系統｜指導老師討論版</a:t>
-            </a:r>
-          </a:p>
-        </p:txBody>
-      </p:sp>
-      <p:pic>
-        <p:nvPicPr>
-          <p:cNvPr id="6" name="Picture 5" descr="D-13-admission-rule-update-flow.png"/>
-          <p:cNvPicPr>
-            <a:picLocks noChangeAspect="1"/>
-          </p:cNvPicPr>
-          <p:nvPr/>
-        </p:nvPicPr>
-        <p:blipFill>
-          <a:blip r:embed="rId2"/>
-          <a:stretch>
-            <a:fillRect/>
-          </a:stretch>
-        </p:blipFill>
-        <p:spPr>
-          <a:xfrm>
-            <a:off x="5283254" y="1143000"/>
-            <a:ext cx="1640730" cy="5166360"/>
-          </a:xfrm>
-          <a:prstGeom prst="rect">
-            <a:avLst/>
-          </a:prstGeom>
-        </p:spPr>
-      </p:pic>
-      <p:sp>
-        <p:nvSpPr>
-          <p:cNvPr id="7" name="TextBox 6"/>
-          <p:cNvSpPr txBox="1"/>
-          <p:nvPr/>
-        </p:nvSpPr>
-        <p:spPr>
-          <a:xfrm>
-            <a:off x="658368" y="6272784"/>
-            <a:ext cx="10881360" cy="228600"/>
-          </a:xfrm>
-          <a:prstGeom prst="rect">
-            <a:avLst/>
-          </a:prstGeom>
-          <a:noFill/>
-        </p:spPr>
-        <p:txBody>
-          <a:bodyPr wrap="square" lIns="54864" rIns="54864" tIns="27432" bIns="27432" anchor="t">
-            <a:spAutoFit/>
-          </a:bodyPr>
-          <a:lstStyle/>
-          <a:p>
-            <a:pPr algn="ctr"/>
-            <a:r>
-              <a:rPr sz="1000" b="0">
-                <a:solidFill>
-                  <a:srgbClr val="5D6B79"/>
-                </a:solidFill>
-                <a:latin typeface="Microsoft JhengHei"/>
-              </a:rPr>
-              <a:t>原圖取自 docs/images，作為目前規格與實作的對照版本</a:t>
-            </a:r>
-          </a:p>
-        </p:txBody>
-      </p:sp>
-    </p:spTree>
-  </p:cSld>
-  <p:clrMapOvr>
-    <a:masterClrMapping/>
-  </p:clrMapOvr>
-</p:sld>
-</file>
-
-<file path=ppt/slides/slide39.xml><?xml version="1.0" encoding="utf-8"?>
-<p:sld xmlns:a="http://schemas.openxmlformats.org/drawingml/2006/main" xmlns:p="http://schemas.openxmlformats.org/presentationml/2006/main" xmlns:r="http://schemas.openxmlformats.org/officeDocument/2006/relationships">
-  <p:cSld>
-    <p:bg>
-      <p:bgPr>
-        <a:solidFill>
-          <a:srgbClr val="FFFFFF"/>
-        </a:solidFill>
-        <a:effectLst/>
-      </p:bgPr>
-    </p:bg>
-    <p:spTree>
-      <p:nvGrpSpPr>
-        <p:cNvPr id="1" name=""/>
-        <p:cNvGrpSpPr/>
-        <p:nvPr/>
-      </p:nvGrpSpPr>
-      <p:grpSpPr/>
-      <p:sp>
-        <p:nvSpPr>
-          <p:cNvPr id="2" name="Rectangle 1"/>
-          <p:cNvSpPr/>
-          <p:nvPr/>
-        </p:nvSpPr>
-        <p:spPr>
-          <a:xfrm>
-            <a:off x="0" y="0"/>
-            <a:ext cx="12191695" cy="164592"/>
-          </a:xfrm>
-          <a:prstGeom prst="rect">
-            <a:avLst/>
-          </a:prstGeom>
-          <a:solidFill>
-            <a:srgbClr val="208985"/>
-          </a:solidFill>
-          <a:ln>
-            <a:noFill/>
-          </a:ln>
-        </p:spPr>
-        <p:style>
-          <a:lnRef idx="1">
-            <a:schemeClr val="accent1"/>
-          </a:lnRef>
-          <a:fillRef idx="3">
-            <a:schemeClr val="accent1"/>
-          </a:fillRef>
-          <a:effectRef idx="2">
-            <a:schemeClr val="accent1"/>
-          </a:effectRef>
-          <a:fontRef idx="minor">
-            <a:schemeClr val="lt1"/>
-          </a:fontRef>
-        </p:style>
-        <p:txBody>
-          <a:bodyPr rtlCol="0" anchor="ctr"/>
-          <a:lstStyle/>
-          <a:p>
-            <a:pPr algn="ctr"/>
-          </a:p>
-        </p:txBody>
-      </p:sp>
-      <p:sp>
-        <p:nvSpPr>
-          <p:cNvPr id="3" name="TextBox 2"/>
-          <p:cNvSpPr txBox="1"/>
-          <p:nvPr/>
-        </p:nvSpPr>
-        <p:spPr>
-          <a:xfrm>
-            <a:off x="566928" y="438912"/>
-            <a:ext cx="10881360" cy="502920"/>
-          </a:xfrm>
-          <a:prstGeom prst="rect">
-            <a:avLst/>
-          </a:prstGeom>
-          <a:noFill/>
-        </p:spPr>
-        <p:txBody>
-          <a:bodyPr wrap="square" lIns="54864" rIns="54864" tIns="27432" bIns="27432" anchor="t">
-            <a:spAutoFit/>
-          </a:bodyPr>
-          <a:lstStyle/>
-          <a:p>
-            <a:pPr algn="l"/>
-            <a:r>
-              <a:rPr sz="2700" b="1">
-                <a:solidFill>
-                  <a:srgbClr val="142E4E"/>
-                </a:solidFill>
-                <a:latin typeface="Microsoft JhengHei"/>
-              </a:rPr>
-              <a:t>附錄｜角色責任圖</a:t>
-            </a:r>
-          </a:p>
-        </p:txBody>
-      </p:sp>
-      <p:sp>
-        <p:nvSpPr>
-          <p:cNvPr id="4" name="TextBox 3"/>
-          <p:cNvSpPr txBox="1"/>
-          <p:nvPr/>
-        </p:nvSpPr>
-        <p:spPr>
-          <a:xfrm>
-            <a:off x="10378440" y="512064"/>
-            <a:ext cx="1234440" cy="228600"/>
-          </a:xfrm>
-          <a:prstGeom prst="rect">
-            <a:avLst/>
-          </a:prstGeom>
-          <a:noFill/>
-        </p:spPr>
-        <p:txBody>
-          <a:bodyPr wrap="square" lIns="54864" rIns="54864" tIns="27432" bIns="27432" anchor="t">
-            <a:spAutoFit/>
-          </a:bodyPr>
-          <a:lstStyle/>
-          <a:p>
-            <a:pPr algn="r"/>
-            <a:r>
-              <a:rPr sz="900" b="1">
-                <a:solidFill>
-                  <a:srgbClr val="208985"/>
-                </a:solidFill>
-                <a:latin typeface="Microsoft JhengHei"/>
-              </a:rPr>
-              <a:t>流程圖附錄</a:t>
-            </a:r>
-          </a:p>
-        </p:txBody>
-      </p:sp>
-      <p:sp>
-        <p:nvSpPr>
-          <p:cNvPr id="5" name="TextBox 4"/>
-          <p:cNvSpPr txBox="1"/>
-          <p:nvPr/>
-        </p:nvSpPr>
-        <p:spPr>
-          <a:xfrm>
-            <a:off x="566928" y="6565392"/>
-            <a:ext cx="7772400" cy="182880"/>
-          </a:xfrm>
-          <a:prstGeom prst="rect">
-            <a:avLst/>
-          </a:prstGeom>
-          <a:noFill/>
-        </p:spPr>
-        <p:txBody>
-          <a:bodyPr wrap="square" lIns="54864" rIns="54864" tIns="27432" bIns="27432" anchor="t">
-            <a:spAutoFit/>
-          </a:bodyPr>
-          <a:lstStyle/>
-          <a:p>
-            <a:pPr algn="l"/>
-            <a:r>
-              <a:rPr sz="800" b="0">
-                <a:solidFill>
-                  <a:srgbClr val="5D6B79"/>
-                </a:solidFill>
-                <a:latin typeface="Microsoft JhengHei"/>
-              </a:rPr>
-              <a:t>資管科智慧學習歷程系統｜指導老師討論版</a:t>
-            </a:r>
-          </a:p>
-        </p:txBody>
-      </p:sp>
-      <p:pic>
-        <p:nvPicPr>
-          <p:cNvPr id="6" name="Picture 5" descr="D-14-role-responsibility.png"/>
-          <p:cNvPicPr>
-            <a:picLocks noChangeAspect="1"/>
-          </p:cNvPicPr>
-          <p:nvPr/>
-        </p:nvPicPr>
-        <p:blipFill>
-          <a:blip r:embed="rId2"/>
-          <a:stretch>
-            <a:fillRect/>
-          </a:stretch>
-        </p:blipFill>
-        <p:spPr>
-          <a:xfrm>
-            <a:off x="502920" y="2797492"/>
-            <a:ext cx="11201400" cy="1857375"/>
+            <a:off x="4455765" y="1143000"/>
+            <a:ext cx="3295708" cy="5166360"/>
           </a:xfrm>
           <a:prstGeom prst="rect">
             <a:avLst/>
@@ -13601,8 +13773,8 @@
         </p:blipFill>
         <p:spPr>
           <a:xfrm>
-            <a:off x="5178806" y="1051560"/>
-            <a:ext cx="1849626" cy="5303520"/>
+            <a:off x="5447790" y="1051560"/>
+            <a:ext cx="1311659" cy="5303520"/>
           </a:xfrm>
           <a:prstGeom prst="rect">
             <a:avLst/>
@@ -13640,938 +13812,6 @@
                 <a:latin typeface="Microsoft JhengHei"/>
               </a:rPr>
               <a:t>學生選校系 → 上傳六類資料 → 缺件比對 → 自傳草稿 → 導師確認 → 下載備審資料</a:t>
-            </a:r>
-          </a:p>
-        </p:txBody>
-      </p:sp>
-    </p:spTree>
-  </p:cSld>
-  <p:clrMapOvr>
-    <a:masterClrMapping/>
-  </p:clrMapOvr>
-</p:sld>
-</file>
-
-<file path=ppt/slides/slide40.xml><?xml version="1.0" encoding="utf-8"?>
-<p:sld xmlns:a="http://schemas.openxmlformats.org/drawingml/2006/main" xmlns:p="http://schemas.openxmlformats.org/presentationml/2006/main" xmlns:r="http://schemas.openxmlformats.org/officeDocument/2006/relationships">
-  <p:cSld>
-    <p:bg>
-      <p:bgPr>
-        <a:solidFill>
-          <a:srgbClr val="FFFFFF"/>
-        </a:solidFill>
-        <a:effectLst/>
-      </p:bgPr>
-    </p:bg>
-    <p:spTree>
-      <p:nvGrpSpPr>
-        <p:cNvPr id="1" name=""/>
-        <p:cNvGrpSpPr/>
-        <p:nvPr/>
-      </p:nvGrpSpPr>
-      <p:grpSpPr/>
-      <p:sp>
-        <p:nvSpPr>
-          <p:cNvPr id="2" name="Rectangle 1"/>
-          <p:cNvSpPr/>
-          <p:nvPr/>
-        </p:nvSpPr>
-        <p:spPr>
-          <a:xfrm>
-            <a:off x="0" y="0"/>
-            <a:ext cx="12191695" cy="164592"/>
-          </a:xfrm>
-          <a:prstGeom prst="rect">
-            <a:avLst/>
-          </a:prstGeom>
-          <a:solidFill>
-            <a:srgbClr val="208985"/>
-          </a:solidFill>
-          <a:ln>
-            <a:noFill/>
-          </a:ln>
-        </p:spPr>
-        <p:style>
-          <a:lnRef idx="1">
-            <a:schemeClr val="accent1"/>
-          </a:lnRef>
-          <a:fillRef idx="3">
-            <a:schemeClr val="accent1"/>
-          </a:fillRef>
-          <a:effectRef idx="2">
-            <a:schemeClr val="accent1"/>
-          </a:effectRef>
-          <a:fontRef idx="minor">
-            <a:schemeClr val="lt1"/>
-          </a:fontRef>
-        </p:style>
-        <p:txBody>
-          <a:bodyPr rtlCol="0" anchor="ctr"/>
-          <a:lstStyle/>
-          <a:p>
-            <a:pPr algn="ctr"/>
-          </a:p>
-        </p:txBody>
-      </p:sp>
-      <p:sp>
-        <p:nvSpPr>
-          <p:cNvPr id="3" name="TextBox 2"/>
-          <p:cNvSpPr txBox="1"/>
-          <p:nvPr/>
-        </p:nvSpPr>
-        <p:spPr>
-          <a:xfrm>
-            <a:off x="566928" y="438912"/>
-            <a:ext cx="10881360" cy="502920"/>
-          </a:xfrm>
-          <a:prstGeom prst="rect">
-            <a:avLst/>
-          </a:prstGeom>
-          <a:noFill/>
-        </p:spPr>
-        <p:txBody>
-          <a:bodyPr wrap="square" lIns="54864" rIns="54864" tIns="27432" bIns="27432" anchor="t">
-            <a:spAutoFit/>
-          </a:bodyPr>
-          <a:lstStyle/>
-          <a:p>
-            <a:pPr algn="l"/>
-            <a:r>
-              <a:rPr sz="2700" b="1">
-                <a:solidFill>
-                  <a:srgbClr val="142E4E"/>
-                </a:solidFill>
-                <a:latin typeface="Microsoft JhengHei"/>
-              </a:rPr>
-              <a:t>附錄｜報表總覽（第二版）</a:t>
-            </a:r>
-          </a:p>
-        </p:txBody>
-      </p:sp>
-      <p:sp>
-        <p:nvSpPr>
-          <p:cNvPr id="4" name="TextBox 3"/>
-          <p:cNvSpPr txBox="1"/>
-          <p:nvPr/>
-        </p:nvSpPr>
-        <p:spPr>
-          <a:xfrm>
-            <a:off x="10378440" y="512064"/>
-            <a:ext cx="1234440" cy="228600"/>
-          </a:xfrm>
-          <a:prstGeom prst="rect">
-            <a:avLst/>
-          </a:prstGeom>
-          <a:noFill/>
-        </p:spPr>
-        <p:txBody>
-          <a:bodyPr wrap="square" lIns="54864" rIns="54864" tIns="27432" bIns="27432" anchor="t">
-            <a:spAutoFit/>
-          </a:bodyPr>
-          <a:lstStyle/>
-          <a:p>
-            <a:pPr algn="r"/>
-            <a:r>
-              <a:rPr sz="900" b="1">
-                <a:solidFill>
-                  <a:srgbClr val="208985"/>
-                </a:solidFill>
-                <a:latin typeface="Microsoft JhengHei"/>
-              </a:rPr>
-              <a:t>流程圖附錄</a:t>
-            </a:r>
-          </a:p>
-        </p:txBody>
-      </p:sp>
-      <p:sp>
-        <p:nvSpPr>
-          <p:cNvPr id="5" name="TextBox 4"/>
-          <p:cNvSpPr txBox="1"/>
-          <p:nvPr/>
-        </p:nvSpPr>
-        <p:spPr>
-          <a:xfrm>
-            <a:off x="566928" y="6565392"/>
-            <a:ext cx="7772400" cy="182880"/>
-          </a:xfrm>
-          <a:prstGeom prst="rect">
-            <a:avLst/>
-          </a:prstGeom>
-          <a:noFill/>
-        </p:spPr>
-        <p:txBody>
-          <a:bodyPr wrap="square" lIns="54864" rIns="54864" tIns="27432" bIns="27432" anchor="t">
-            <a:spAutoFit/>
-          </a:bodyPr>
-          <a:lstStyle/>
-          <a:p>
-            <a:pPr algn="l"/>
-            <a:r>
-              <a:rPr sz="800" b="0">
-                <a:solidFill>
-                  <a:srgbClr val="5D6B79"/>
-                </a:solidFill>
-                <a:latin typeface="Microsoft JhengHei"/>
-              </a:rPr>
-              <a:t>資管科智慧學習歷程系統｜指導老師討論版</a:t>
-            </a:r>
-          </a:p>
-        </p:txBody>
-      </p:sp>
-      <p:pic>
-        <p:nvPicPr>
-          <p:cNvPr id="6" name="Picture 5" descr="D-15-report-overview.png"/>
-          <p:cNvPicPr>
-            <a:picLocks noChangeAspect="1"/>
-          </p:cNvPicPr>
-          <p:nvPr/>
-        </p:nvPicPr>
-        <p:blipFill>
-          <a:blip r:embed="rId2"/>
-          <a:stretch>
-            <a:fillRect/>
-          </a:stretch>
-        </p:blipFill>
-        <p:spPr>
-          <a:xfrm>
-            <a:off x="502920" y="3054667"/>
-            <a:ext cx="11201400" cy="1343025"/>
-          </a:xfrm>
-          <a:prstGeom prst="rect">
-            <a:avLst/>
-          </a:prstGeom>
-        </p:spPr>
-      </p:pic>
-      <p:sp>
-        <p:nvSpPr>
-          <p:cNvPr id="7" name="TextBox 6"/>
-          <p:cNvSpPr txBox="1"/>
-          <p:nvPr/>
-        </p:nvSpPr>
-        <p:spPr>
-          <a:xfrm>
-            <a:off x="658368" y="6272784"/>
-            <a:ext cx="10881360" cy="228600"/>
-          </a:xfrm>
-          <a:prstGeom prst="rect">
-            <a:avLst/>
-          </a:prstGeom>
-          <a:noFill/>
-        </p:spPr>
-        <p:txBody>
-          <a:bodyPr wrap="square" lIns="54864" rIns="54864" tIns="27432" bIns="27432" anchor="t">
-            <a:spAutoFit/>
-          </a:bodyPr>
-          <a:lstStyle/>
-          <a:p>
-            <a:pPr algn="ctr"/>
-            <a:r>
-              <a:rPr sz="1000" b="0">
-                <a:solidFill>
-                  <a:srgbClr val="5D6B79"/>
-                </a:solidFill>
-                <a:latin typeface="Microsoft JhengHei"/>
-              </a:rPr>
-              <a:t>原圖取自 docs/images，作為目前規格與實作的對照版本</a:t>
-            </a:r>
-          </a:p>
-        </p:txBody>
-      </p:sp>
-    </p:spTree>
-  </p:cSld>
-  <p:clrMapOvr>
-    <a:masterClrMapping/>
-  </p:clrMapOvr>
-</p:sld>
-</file>
-
-<file path=ppt/slides/slide41.xml><?xml version="1.0" encoding="utf-8"?>
-<p:sld xmlns:a="http://schemas.openxmlformats.org/drawingml/2006/main" xmlns:p="http://schemas.openxmlformats.org/presentationml/2006/main" xmlns:r="http://schemas.openxmlformats.org/officeDocument/2006/relationships">
-  <p:cSld>
-    <p:bg>
-      <p:bgPr>
-        <a:solidFill>
-          <a:srgbClr val="FFFFFF"/>
-        </a:solidFill>
-        <a:effectLst/>
-      </p:bgPr>
-    </p:bg>
-    <p:spTree>
-      <p:nvGrpSpPr>
-        <p:cNvPr id="1" name=""/>
-        <p:cNvGrpSpPr/>
-        <p:nvPr/>
-      </p:nvGrpSpPr>
-      <p:grpSpPr/>
-      <p:sp>
-        <p:nvSpPr>
-          <p:cNvPr id="2" name="Rectangle 1"/>
-          <p:cNvSpPr/>
-          <p:nvPr/>
-        </p:nvSpPr>
-        <p:spPr>
-          <a:xfrm>
-            <a:off x="0" y="0"/>
-            <a:ext cx="12191695" cy="164592"/>
-          </a:xfrm>
-          <a:prstGeom prst="rect">
-            <a:avLst/>
-          </a:prstGeom>
-          <a:solidFill>
-            <a:srgbClr val="208985"/>
-          </a:solidFill>
-          <a:ln>
-            <a:noFill/>
-          </a:ln>
-        </p:spPr>
-        <p:style>
-          <a:lnRef idx="1">
-            <a:schemeClr val="accent1"/>
-          </a:lnRef>
-          <a:fillRef idx="3">
-            <a:schemeClr val="accent1"/>
-          </a:fillRef>
-          <a:effectRef idx="2">
-            <a:schemeClr val="accent1"/>
-          </a:effectRef>
-          <a:fontRef idx="minor">
-            <a:schemeClr val="lt1"/>
-          </a:fontRef>
-        </p:style>
-        <p:txBody>
-          <a:bodyPr rtlCol="0" anchor="ctr"/>
-          <a:lstStyle/>
-          <a:p>
-            <a:pPr algn="ctr"/>
-          </a:p>
-        </p:txBody>
-      </p:sp>
-      <p:sp>
-        <p:nvSpPr>
-          <p:cNvPr id="3" name="TextBox 2"/>
-          <p:cNvSpPr txBox="1"/>
-          <p:nvPr/>
-        </p:nvSpPr>
-        <p:spPr>
-          <a:xfrm>
-            <a:off x="566928" y="438912"/>
-            <a:ext cx="10881360" cy="502920"/>
-          </a:xfrm>
-          <a:prstGeom prst="rect">
-            <a:avLst/>
-          </a:prstGeom>
-          <a:noFill/>
-        </p:spPr>
-        <p:txBody>
-          <a:bodyPr wrap="square" lIns="54864" rIns="54864" tIns="27432" bIns="27432" anchor="t">
-            <a:spAutoFit/>
-          </a:bodyPr>
-          <a:lstStyle/>
-          <a:p>
-            <a:pPr algn="l"/>
-            <a:r>
-              <a:rPr sz="2700" b="1">
-                <a:solidFill>
-                  <a:srgbClr val="142E4E"/>
-                </a:solidFill>
-                <a:latin typeface="Microsoft JhengHei"/>
-              </a:rPr>
-              <a:t>附錄｜導師確認流程</a:t>
-            </a:r>
-          </a:p>
-        </p:txBody>
-      </p:sp>
-      <p:sp>
-        <p:nvSpPr>
-          <p:cNvPr id="4" name="TextBox 3"/>
-          <p:cNvSpPr txBox="1"/>
-          <p:nvPr/>
-        </p:nvSpPr>
-        <p:spPr>
-          <a:xfrm>
-            <a:off x="10378440" y="512064"/>
-            <a:ext cx="1234440" cy="228600"/>
-          </a:xfrm>
-          <a:prstGeom prst="rect">
-            <a:avLst/>
-          </a:prstGeom>
-          <a:noFill/>
-        </p:spPr>
-        <p:txBody>
-          <a:bodyPr wrap="square" lIns="54864" rIns="54864" tIns="27432" bIns="27432" anchor="t">
-            <a:spAutoFit/>
-          </a:bodyPr>
-          <a:lstStyle/>
-          <a:p>
-            <a:pPr algn="r"/>
-            <a:r>
-              <a:rPr sz="900" b="1">
-                <a:solidFill>
-                  <a:srgbClr val="208985"/>
-                </a:solidFill>
-                <a:latin typeface="Microsoft JhengHei"/>
-              </a:rPr>
-              <a:t>流程圖附錄</a:t>
-            </a:r>
-          </a:p>
-        </p:txBody>
-      </p:sp>
-      <p:sp>
-        <p:nvSpPr>
-          <p:cNvPr id="5" name="TextBox 4"/>
-          <p:cNvSpPr txBox="1"/>
-          <p:nvPr/>
-        </p:nvSpPr>
-        <p:spPr>
-          <a:xfrm>
-            <a:off x="566928" y="6565392"/>
-            <a:ext cx="7772400" cy="182880"/>
-          </a:xfrm>
-          <a:prstGeom prst="rect">
-            <a:avLst/>
-          </a:prstGeom>
-          <a:noFill/>
-        </p:spPr>
-        <p:txBody>
-          <a:bodyPr wrap="square" lIns="54864" rIns="54864" tIns="27432" bIns="27432" anchor="t">
-            <a:spAutoFit/>
-          </a:bodyPr>
-          <a:lstStyle/>
-          <a:p>
-            <a:pPr algn="l"/>
-            <a:r>
-              <a:rPr sz="800" b="0">
-                <a:solidFill>
-                  <a:srgbClr val="5D6B79"/>
-                </a:solidFill>
-                <a:latin typeface="Microsoft JhengHei"/>
-              </a:rPr>
-              <a:t>資管科智慧學習歷程系統｜指導老師討論版</a:t>
-            </a:r>
-          </a:p>
-        </p:txBody>
-      </p:sp>
-      <p:pic>
-        <p:nvPicPr>
-          <p:cNvPr id="6" name="Picture 5" descr="D-16-teacher-confirm-flow.png"/>
-          <p:cNvPicPr>
-            <a:picLocks noChangeAspect="1"/>
-          </p:cNvPicPr>
-          <p:nvPr/>
-        </p:nvPicPr>
-        <p:blipFill>
-          <a:blip r:embed="rId2"/>
-          <a:stretch>
-            <a:fillRect/>
-          </a:stretch>
-        </p:blipFill>
-        <p:spPr>
-          <a:xfrm>
-            <a:off x="4057916" y="1143000"/>
-            <a:ext cx="4091406" cy="5166360"/>
-          </a:xfrm>
-          <a:prstGeom prst="rect">
-            <a:avLst/>
-          </a:prstGeom>
-        </p:spPr>
-      </p:pic>
-      <p:sp>
-        <p:nvSpPr>
-          <p:cNvPr id="7" name="TextBox 6"/>
-          <p:cNvSpPr txBox="1"/>
-          <p:nvPr/>
-        </p:nvSpPr>
-        <p:spPr>
-          <a:xfrm>
-            <a:off x="658368" y="6272784"/>
-            <a:ext cx="10881360" cy="228600"/>
-          </a:xfrm>
-          <a:prstGeom prst="rect">
-            <a:avLst/>
-          </a:prstGeom>
-          <a:noFill/>
-        </p:spPr>
-        <p:txBody>
-          <a:bodyPr wrap="square" lIns="54864" rIns="54864" tIns="27432" bIns="27432" anchor="t">
-            <a:spAutoFit/>
-          </a:bodyPr>
-          <a:lstStyle/>
-          <a:p>
-            <a:pPr algn="ctr"/>
-            <a:r>
-              <a:rPr sz="1000" b="0">
-                <a:solidFill>
-                  <a:srgbClr val="5D6B79"/>
-                </a:solidFill>
-                <a:latin typeface="Microsoft JhengHei"/>
-              </a:rPr>
-              <a:t>原圖取自 docs/images，作為目前規格與實作的對照版本</a:t>
-            </a:r>
-          </a:p>
-        </p:txBody>
-      </p:sp>
-    </p:spTree>
-  </p:cSld>
-  <p:clrMapOvr>
-    <a:masterClrMapping/>
-  </p:clrMapOvr>
-</p:sld>
-</file>
-
-<file path=ppt/slides/slide42.xml><?xml version="1.0" encoding="utf-8"?>
-<p:sld xmlns:a="http://schemas.openxmlformats.org/drawingml/2006/main" xmlns:p="http://schemas.openxmlformats.org/presentationml/2006/main" xmlns:r="http://schemas.openxmlformats.org/officeDocument/2006/relationships">
-  <p:cSld>
-    <p:bg>
-      <p:bgPr>
-        <a:solidFill>
-          <a:srgbClr val="FFFFFF"/>
-        </a:solidFill>
-        <a:effectLst/>
-      </p:bgPr>
-    </p:bg>
-    <p:spTree>
-      <p:nvGrpSpPr>
-        <p:cNvPr id="1" name=""/>
-        <p:cNvGrpSpPr/>
-        <p:nvPr/>
-      </p:nvGrpSpPr>
-      <p:grpSpPr/>
-      <p:sp>
-        <p:nvSpPr>
-          <p:cNvPr id="2" name="Rectangle 1"/>
-          <p:cNvSpPr/>
-          <p:nvPr/>
-        </p:nvSpPr>
-        <p:spPr>
-          <a:xfrm>
-            <a:off x="0" y="0"/>
-            <a:ext cx="12191695" cy="164592"/>
-          </a:xfrm>
-          <a:prstGeom prst="rect">
-            <a:avLst/>
-          </a:prstGeom>
-          <a:solidFill>
-            <a:srgbClr val="208985"/>
-          </a:solidFill>
-          <a:ln>
-            <a:noFill/>
-          </a:ln>
-        </p:spPr>
-        <p:style>
-          <a:lnRef idx="1">
-            <a:schemeClr val="accent1"/>
-          </a:lnRef>
-          <a:fillRef idx="3">
-            <a:schemeClr val="accent1"/>
-          </a:fillRef>
-          <a:effectRef idx="2">
-            <a:schemeClr val="accent1"/>
-          </a:effectRef>
-          <a:fontRef idx="minor">
-            <a:schemeClr val="lt1"/>
-          </a:fontRef>
-        </p:style>
-        <p:txBody>
-          <a:bodyPr rtlCol="0" anchor="ctr"/>
-          <a:lstStyle/>
-          <a:p>
-            <a:pPr algn="ctr"/>
-          </a:p>
-        </p:txBody>
-      </p:sp>
-      <p:sp>
-        <p:nvSpPr>
-          <p:cNvPr id="3" name="TextBox 2"/>
-          <p:cNvSpPr txBox="1"/>
-          <p:nvPr/>
-        </p:nvSpPr>
-        <p:spPr>
-          <a:xfrm>
-            <a:off x="566928" y="438912"/>
-            <a:ext cx="10881360" cy="502920"/>
-          </a:xfrm>
-          <a:prstGeom prst="rect">
-            <a:avLst/>
-          </a:prstGeom>
-          <a:noFill/>
-        </p:spPr>
-        <p:txBody>
-          <a:bodyPr wrap="square" lIns="54864" rIns="54864" tIns="27432" bIns="27432" anchor="t">
-            <a:spAutoFit/>
-          </a:bodyPr>
-          <a:lstStyle/>
-          <a:p>
-            <a:pPr algn="l"/>
-            <a:r>
-              <a:rPr sz="2700" b="1">
-                <a:solidFill>
-                  <a:srgbClr val="142E4E"/>
-                </a:solidFill>
-                <a:latin typeface="Microsoft JhengHei"/>
-              </a:rPr>
-              <a:t>附錄｜管理員維護招生要求流程</a:t>
-            </a:r>
-          </a:p>
-        </p:txBody>
-      </p:sp>
-      <p:sp>
-        <p:nvSpPr>
-          <p:cNvPr id="4" name="TextBox 3"/>
-          <p:cNvSpPr txBox="1"/>
-          <p:nvPr/>
-        </p:nvSpPr>
-        <p:spPr>
-          <a:xfrm>
-            <a:off x="10378440" y="512064"/>
-            <a:ext cx="1234440" cy="228600"/>
-          </a:xfrm>
-          <a:prstGeom prst="rect">
-            <a:avLst/>
-          </a:prstGeom>
-          <a:noFill/>
-        </p:spPr>
-        <p:txBody>
-          <a:bodyPr wrap="square" lIns="54864" rIns="54864" tIns="27432" bIns="27432" anchor="t">
-            <a:spAutoFit/>
-          </a:bodyPr>
-          <a:lstStyle/>
-          <a:p>
-            <a:pPr algn="r"/>
-            <a:r>
-              <a:rPr sz="900" b="1">
-                <a:solidFill>
-                  <a:srgbClr val="208985"/>
-                </a:solidFill>
-                <a:latin typeface="Microsoft JhengHei"/>
-              </a:rPr>
-              <a:t>流程圖附錄</a:t>
-            </a:r>
-          </a:p>
-        </p:txBody>
-      </p:sp>
-      <p:sp>
-        <p:nvSpPr>
-          <p:cNvPr id="5" name="TextBox 4"/>
-          <p:cNvSpPr txBox="1"/>
-          <p:nvPr/>
-        </p:nvSpPr>
-        <p:spPr>
-          <a:xfrm>
-            <a:off x="566928" y="6565392"/>
-            <a:ext cx="7772400" cy="182880"/>
-          </a:xfrm>
-          <a:prstGeom prst="rect">
-            <a:avLst/>
-          </a:prstGeom>
-          <a:noFill/>
-        </p:spPr>
-        <p:txBody>
-          <a:bodyPr wrap="square" lIns="54864" rIns="54864" tIns="27432" bIns="27432" anchor="t">
-            <a:spAutoFit/>
-          </a:bodyPr>
-          <a:lstStyle/>
-          <a:p>
-            <a:pPr algn="l"/>
-            <a:r>
-              <a:rPr sz="800" b="0">
-                <a:solidFill>
-                  <a:srgbClr val="5D6B79"/>
-                </a:solidFill>
-                <a:latin typeface="Microsoft JhengHei"/>
-              </a:rPr>
-              <a:t>資管科智慧學習歷程系統｜指導老師討論版</a:t>
-            </a:r>
-          </a:p>
-        </p:txBody>
-      </p:sp>
-      <p:pic>
-        <p:nvPicPr>
-          <p:cNvPr id="6" name="Picture 5" descr="D-17-admin-maintain-requirements.png"/>
-          <p:cNvPicPr>
-            <a:picLocks noChangeAspect="1"/>
-          </p:cNvPicPr>
-          <p:nvPr/>
-        </p:nvPicPr>
-        <p:blipFill>
-          <a:blip r:embed="rId2"/>
-          <a:stretch>
-            <a:fillRect/>
-          </a:stretch>
-        </p:blipFill>
-        <p:spPr>
-          <a:xfrm>
-            <a:off x="4978051" y="1143000"/>
-            <a:ext cx="2251137" cy="5166360"/>
-          </a:xfrm>
-          <a:prstGeom prst="rect">
-            <a:avLst/>
-          </a:prstGeom>
-        </p:spPr>
-      </p:pic>
-      <p:sp>
-        <p:nvSpPr>
-          <p:cNvPr id="7" name="TextBox 6"/>
-          <p:cNvSpPr txBox="1"/>
-          <p:nvPr/>
-        </p:nvSpPr>
-        <p:spPr>
-          <a:xfrm>
-            <a:off x="658368" y="6272784"/>
-            <a:ext cx="10881360" cy="228600"/>
-          </a:xfrm>
-          <a:prstGeom prst="rect">
-            <a:avLst/>
-          </a:prstGeom>
-          <a:noFill/>
-        </p:spPr>
-        <p:txBody>
-          <a:bodyPr wrap="square" lIns="54864" rIns="54864" tIns="27432" bIns="27432" anchor="t">
-            <a:spAutoFit/>
-          </a:bodyPr>
-          <a:lstStyle/>
-          <a:p>
-            <a:pPr algn="ctr"/>
-            <a:r>
-              <a:rPr sz="1000" b="0">
-                <a:solidFill>
-                  <a:srgbClr val="5D6B79"/>
-                </a:solidFill>
-                <a:latin typeface="Microsoft JhengHei"/>
-              </a:rPr>
-              <a:t>原圖取自 docs/images，作為目前規格與實作的對照版本</a:t>
-            </a:r>
-          </a:p>
-        </p:txBody>
-      </p:sp>
-    </p:spTree>
-  </p:cSld>
-  <p:clrMapOvr>
-    <a:masterClrMapping/>
-  </p:clrMapOvr>
-</p:sld>
-</file>
-
-<file path=ppt/slides/slide43.xml><?xml version="1.0" encoding="utf-8"?>
-<p:sld xmlns:a="http://schemas.openxmlformats.org/drawingml/2006/main" xmlns:p="http://schemas.openxmlformats.org/presentationml/2006/main" xmlns:r="http://schemas.openxmlformats.org/officeDocument/2006/relationships">
-  <p:cSld>
-    <p:bg>
-      <p:bgPr>
-        <a:solidFill>
-          <a:srgbClr val="FFFFFF"/>
-        </a:solidFill>
-        <a:effectLst/>
-      </p:bgPr>
-    </p:bg>
-    <p:spTree>
-      <p:nvGrpSpPr>
-        <p:cNvPr id="1" name=""/>
-        <p:cNvGrpSpPr/>
-        <p:nvPr/>
-      </p:nvGrpSpPr>
-      <p:grpSpPr/>
-      <p:sp>
-        <p:nvSpPr>
-          <p:cNvPr id="2" name="Rectangle 1"/>
-          <p:cNvSpPr/>
-          <p:nvPr/>
-        </p:nvSpPr>
-        <p:spPr>
-          <a:xfrm>
-            <a:off x="0" y="0"/>
-            <a:ext cx="12191695" cy="164592"/>
-          </a:xfrm>
-          <a:prstGeom prst="rect">
-            <a:avLst/>
-          </a:prstGeom>
-          <a:solidFill>
-            <a:srgbClr val="208985"/>
-          </a:solidFill>
-          <a:ln>
-            <a:noFill/>
-          </a:ln>
-        </p:spPr>
-        <p:style>
-          <a:lnRef idx="1">
-            <a:schemeClr val="accent1"/>
-          </a:lnRef>
-          <a:fillRef idx="3">
-            <a:schemeClr val="accent1"/>
-          </a:fillRef>
-          <a:effectRef idx="2">
-            <a:schemeClr val="accent1"/>
-          </a:effectRef>
-          <a:fontRef idx="minor">
-            <a:schemeClr val="lt1"/>
-          </a:fontRef>
-        </p:style>
-        <p:txBody>
-          <a:bodyPr rtlCol="0" anchor="ctr"/>
-          <a:lstStyle/>
-          <a:p>
-            <a:pPr algn="ctr"/>
-          </a:p>
-        </p:txBody>
-      </p:sp>
-      <p:sp>
-        <p:nvSpPr>
-          <p:cNvPr id="3" name="TextBox 2"/>
-          <p:cNvSpPr txBox="1"/>
-          <p:nvPr/>
-        </p:nvSpPr>
-        <p:spPr>
-          <a:xfrm>
-            <a:off x="566928" y="438912"/>
-            <a:ext cx="10881360" cy="502920"/>
-          </a:xfrm>
-          <a:prstGeom prst="rect">
-            <a:avLst/>
-          </a:prstGeom>
-          <a:noFill/>
-        </p:spPr>
-        <p:txBody>
-          <a:bodyPr wrap="square" lIns="54864" rIns="54864" tIns="27432" bIns="27432" anchor="t">
-            <a:spAutoFit/>
-          </a:bodyPr>
-          <a:lstStyle/>
-          <a:p>
-            <a:pPr algn="l"/>
-            <a:r>
-              <a:rPr sz="2700" b="1">
-                <a:solidFill>
-                  <a:srgbClr val="142E4E"/>
-                </a:solidFill>
-                <a:latin typeface="Microsoft JhengHei"/>
-              </a:rPr>
-              <a:t>附錄｜科辦上傳紀錄流程（服務、公假、嘉獎）</a:t>
-            </a:r>
-          </a:p>
-        </p:txBody>
-      </p:sp>
-      <p:sp>
-        <p:nvSpPr>
-          <p:cNvPr id="4" name="TextBox 3"/>
-          <p:cNvSpPr txBox="1"/>
-          <p:nvPr/>
-        </p:nvSpPr>
-        <p:spPr>
-          <a:xfrm>
-            <a:off x="10378440" y="512064"/>
-            <a:ext cx="1234440" cy="228600"/>
-          </a:xfrm>
-          <a:prstGeom prst="rect">
-            <a:avLst/>
-          </a:prstGeom>
-          <a:noFill/>
-        </p:spPr>
-        <p:txBody>
-          <a:bodyPr wrap="square" lIns="54864" rIns="54864" tIns="27432" bIns="27432" anchor="t">
-            <a:spAutoFit/>
-          </a:bodyPr>
-          <a:lstStyle/>
-          <a:p>
-            <a:pPr algn="r"/>
-            <a:r>
-              <a:rPr sz="900" b="1">
-                <a:solidFill>
-                  <a:srgbClr val="208985"/>
-                </a:solidFill>
-                <a:latin typeface="Microsoft JhengHei"/>
-              </a:rPr>
-              <a:t>流程圖附錄</a:t>
-            </a:r>
-          </a:p>
-        </p:txBody>
-      </p:sp>
-      <p:sp>
-        <p:nvSpPr>
-          <p:cNvPr id="5" name="TextBox 4"/>
-          <p:cNvSpPr txBox="1"/>
-          <p:nvPr/>
-        </p:nvSpPr>
-        <p:spPr>
-          <a:xfrm>
-            <a:off x="566928" y="6565392"/>
-            <a:ext cx="7772400" cy="182880"/>
-          </a:xfrm>
-          <a:prstGeom prst="rect">
-            <a:avLst/>
-          </a:prstGeom>
-          <a:noFill/>
-        </p:spPr>
-        <p:txBody>
-          <a:bodyPr wrap="square" lIns="54864" rIns="54864" tIns="27432" bIns="27432" anchor="t">
-            <a:spAutoFit/>
-          </a:bodyPr>
-          <a:lstStyle/>
-          <a:p>
-            <a:pPr algn="l"/>
-            <a:r>
-              <a:rPr sz="800" b="0">
-                <a:solidFill>
-                  <a:srgbClr val="5D6B79"/>
-                </a:solidFill>
-                <a:latin typeface="Microsoft JhengHei"/>
-              </a:rPr>
-              <a:t>資管科智慧學習歷程系統｜指導老師討論版</a:t>
-            </a:r>
-          </a:p>
-        </p:txBody>
-      </p:sp>
-      <p:pic>
-        <p:nvPicPr>
-          <p:cNvPr id="6" name="Picture 5" descr="D-18-staff-service-record-flow.png"/>
-          <p:cNvPicPr>
-            <a:picLocks noChangeAspect="1"/>
-          </p:cNvPicPr>
-          <p:nvPr/>
-        </p:nvPicPr>
-        <p:blipFill>
-          <a:blip r:embed="rId2"/>
-          <a:stretch>
-            <a:fillRect/>
-          </a:stretch>
-        </p:blipFill>
-        <p:spPr>
-          <a:xfrm>
-            <a:off x="3129738" y="1143000"/>
-            <a:ext cx="5947762" cy="5166360"/>
-          </a:xfrm>
-          <a:prstGeom prst="rect">
-            <a:avLst/>
-          </a:prstGeom>
-        </p:spPr>
-      </p:pic>
-      <p:sp>
-        <p:nvSpPr>
-          <p:cNvPr id="7" name="TextBox 6"/>
-          <p:cNvSpPr txBox="1"/>
-          <p:nvPr/>
-        </p:nvSpPr>
-        <p:spPr>
-          <a:xfrm>
-            <a:off x="658368" y="6272784"/>
-            <a:ext cx="10881360" cy="228600"/>
-          </a:xfrm>
-          <a:prstGeom prst="rect">
-            <a:avLst/>
-          </a:prstGeom>
-          <a:noFill/>
-        </p:spPr>
-        <p:txBody>
-          <a:bodyPr wrap="square" lIns="54864" rIns="54864" tIns="27432" bIns="27432" anchor="t">
-            <a:spAutoFit/>
-          </a:bodyPr>
-          <a:lstStyle/>
-          <a:p>
-            <a:pPr algn="ctr"/>
-            <a:r>
-              <a:rPr sz="1000" b="0">
-                <a:solidFill>
-                  <a:srgbClr val="5D6B79"/>
-                </a:solidFill>
-                <a:latin typeface="Microsoft JhengHei"/>
-              </a:rPr>
-              <a:t>原圖取自 docs/images，作為目前規格與實作的對照版本</a:t>
             </a:r>
           </a:p>
         </p:txBody>
@@ -14766,8 +14006,8 @@
         </p:blipFill>
         <p:spPr>
           <a:xfrm>
-            <a:off x="594360" y="3301403"/>
-            <a:ext cx="4572000" cy="758112"/>
+            <a:off x="594360" y="3298488"/>
+            <a:ext cx="4572000" cy="763943"/>
           </a:xfrm>
           <a:prstGeom prst="rect">
             <a:avLst/>
@@ -15574,8 +14814,8 @@
         </p:blipFill>
         <p:spPr>
           <a:xfrm>
-            <a:off x="2336382" y="1024128"/>
-            <a:ext cx="7488754" cy="5394960"/>
+            <a:off x="1817001" y="1024127"/>
+            <a:ext cx="8527517" cy="5394960"/>
           </a:xfrm>
           <a:prstGeom prst="rect">
             <a:avLst/>
